--- a/downloads/presentations/modules/lesson-63-ai-project-management-and-implementation-planning.pptx
+++ b/downloads/presentations/modules/lesson-63-ai-project-management-and-implementation-planning.pptx
@@ -25,9 +25,11 @@
     <p:sldId id="273" r:id="rId19"/>
     <p:sldId id="274" r:id="rId20"/>
     <p:sldId id="275" r:id="rId21"/>
+    <p:sldId id="276" r:id="rId22"/>
+    <p:sldId id="277" r:id="rId23"/>
   </p:sldIdLst>
   <p:notesMasterIdLst>
-    <p:notesMasterId r:id="rId22"/>
+    <p:notesMasterId r:id="rId24"/>
   </p:notesMasterIdLst>
   <p:sldSz cx="12192000" cy="6858000"/>
   <p:notesSz cx="6858000" cy="12192000"/>
@@ -611,9 +613,9 @@
             <a:r>
               <a:rPr lang="en-US" dirty="0"/>
               <a:t>Risks, Failure Modes, and Guardrails
-Recommended guardrails include the following:
-Use an AI-specific project charter and risk log.
-Define governance gates before implementation begins.</a:t>
+Risks and failure modes include the following:
+Pilots launching without governance approval or operational ownership.
+Project plans overlooking data, privacy, security, workflow, or training dependencies.</a:t>
             </a:r>
             <a:endParaRPr lang="en-US" dirty="0"/>
           </a:p>
@@ -702,9 +704,9 @@
             <a:r>
               <a:rPr lang="en-US" dirty="0"/>
               <a:t>Risks, Failure Modes, and Guardrails
-Create separate workstreams for data, technology, governance, workflow, training, validation, and evaluation.
-Require launch readiness review before deployment.
-Document transition to operations and sustainability responsibilities.</a:t>
+Vendors controlling implementation timelines without agency readiness gates.
+No transition plan from pilot to routine operations.
+Success measured only by deployment rather than public health value and safe use.</a:t>
             </a:r>
             <a:endParaRPr lang="en-US" dirty="0"/>
           </a:p>
@@ -792,10 +794,10 @@
           <a:p>
             <a:r>
               <a:rPr lang="en-US" dirty="0"/>
-              <a:t>Reflection Questions
-Where does this topic appear in your agency, program, or workflow?
-Which staff roles would need to understand or apply this concept before AI use is approved?
-What could go wrong if this topic is not addressed before implementation?</a:t>
+              <a:t>Risks, Failure Modes, and Guardrails
+Recommended guardrails include the following:
+Use an AI-specific project charter and risk log.
+Define governance gates before implementation begins.</a:t>
             </a:r>
             <a:endParaRPr lang="en-US" dirty="0"/>
           </a:p>
@@ -883,9 +885,10 @@
           <a:p>
             <a:r>
               <a:rPr lang="en-US" dirty="0"/>
-              <a:t>Reflection Questions
-What evidence would governance, leadership, or operations staff need before moving forward?
-Which policy, data, equity, privacy, security, or workflow questions remain unresolved?</a:t>
+              <a:t>Risks, Failure Modes, and Guardrails
+Create separate workstreams for data, technology, governance, workflow, training, validation, and evaluation.
+Require launch readiness review before deployment.
+Document transition to operations and sustainability responsibilities.</a:t>
             </a:r>
             <a:endParaRPr lang="en-US" dirty="0"/>
           </a:p>
@@ -973,8 +976,10 @@
           <a:p>
             <a:r>
               <a:rPr lang="en-US" dirty="0"/>
-              <a:t>Practical Exercise
-Create an AI project charter and implementation plan for one proposed AI-supported public health workflow. Include project purpose, scope, objectives, roles, governance gates, milestones, workstreams, dependencies, risks, launch readiness criteria, and transition-to-operations plan.</a:t>
+              <a:t>Reflection Questions
+Where does this topic appear in your agency, program, or workflow?
+Which staff roles would need to understand or apply this concept before AI use is approved?
+What could go wrong if this topic is not addressed before implementation?</a:t>
             </a:r>
             <a:endParaRPr lang="en-US" dirty="0"/>
           </a:p>
@@ -1062,10 +1067,9 @@
           <a:p>
             <a:r>
               <a:rPr lang="en-US" dirty="0"/>
-              <a:t>Expected Artifact or Evidence
-AI project charter
-Implementation workplan
-AI-specific risk log</a:t>
+              <a:t>Reflection Questions
+What evidence would governance, leadership, or operations staff need before moving forward?
+Which policy, data, equity, privacy, security, or workflow questions remain unresolved?</a:t>
             </a:r>
             <a:endParaRPr lang="en-US" dirty="0"/>
           </a:p>
@@ -1153,9 +1157,8 @@
           <a:p>
             <a:r>
               <a:rPr lang="en-US" dirty="0"/>
-              <a:t>Expected Artifact or Evidence
-Launch readiness checklist
-Transition-to-operations plan</a:t>
+              <a:t>Practical Exercise
+Create an AI project charter and implementation plan for one proposed AI-supported public health workflow. Include project purpose, scope, objectives, roles, governance gates, milestones, workstreams, dependencies, risks, launch readiness criteria, and transition-to-operations plan.</a:t>
             </a:r>
             <a:endParaRPr lang="en-US" dirty="0"/>
           </a:p>
@@ -1243,12 +1246,10 @@
           <a:p>
             <a:r>
               <a:rPr lang="en-US" dirty="0"/>
-              <a:t>Expected Assignment
+              <a:t>Expected Artifact or Evidence
 AI project charter
 Implementation workplan
-AI-specific risk log
-Launch readiness checklist
-Transition-to-operations plan</a:t>
+AI-specific risk log</a:t>
             </a:r>
             <a:endParaRPr lang="en-US" dirty="0"/>
           </a:p>
@@ -1336,12 +1337,9 @@
           <a:p>
             <a:r>
               <a:rPr lang="en-US" dirty="0"/>
-              <a:t>Knowledge Check
-1. What distinguishes AI project management from ordinary software implementation?
-2. What is a governance gate?
-3. Which item belongs in an AI project charter?
-4. Why is transition to operations important?
-5. What is strong completion evidence?</a:t>
+              <a:t>Expected Artifact or Evidence
+Launch readiness checklist
+Transition-to-operations plan</a:t>
             </a:r>
             <a:endParaRPr lang="en-US" dirty="0"/>
           </a:p>
@@ -1429,12 +1427,12 @@
           <a:p>
             <a:r>
               <a:rPr lang="en-US" dirty="0"/>
-              <a:t>References and Resources
-NIST Artificial Intelligence Risk Management Framework: https://www.nist.gov/itl/ai-risk-management-framework
-NIST Generative AI Profile: https://www.nist.gov/publications/artificial-intelligence-risk-management-framework-generative-artificial-intelligence
-CDC Public Health Data Strategy and Data Modernization resources: https://www.cdc.gov/public-health-data-strategy/php/about/index.html
-OWASP guidance for LLM application security
-Agency policies for privacy, cybersecurity, records, procurement, accessibility, and public communications</a:t>
+              <a:t>Expected Assignment
+AI project charter
+Implementation workplan
+AI-specific risk log
+Launch readiness checklist
+Transition-to-operations plan</a:t>
             </a:r>
             <a:endParaRPr lang="en-US" dirty="0"/>
           </a:p>
@@ -1614,8 +1612,12 @@
           <a:p>
             <a:r>
               <a:rPr lang="en-US" dirty="0"/>
-              <a:t>References and Resources
-Relevant public health program SOPs, data governance documentation, and implementation plans</a:t>
+              <a:t>Knowledge Check
+1. What distinguishes AI project management from ordinary software implementation?
+2. What is a governance gate?
+3. Which item belongs in an AI project charter?
+4. Why is transition to operations important?
+5. What is strong completion evidence?</a:t>
             </a:r>
             <a:endParaRPr lang="en-US" dirty="0"/>
           </a:p>
@@ -1639,6 +1641,188 @@
             <a:fld id="{F7021451-1387-4CA6-816F-3879F97B5CBC}" type="slidenum">
               <a:rPr lang="en-US"/>
               <a:t>20</a:t>
+            </a:fld>
+            <a:endParaRPr lang="en-US"/>
+          </a:p>
+        </p:txBody>
+      </p:sp>
+    </p:spTree>
+    <p:extLst>
+      <p:ext uri="{BB962C8B-B14F-4D97-AF65-F5344CB8AC3E}">
+        <p14:creationId xmlns:p14="http://schemas.microsoft.com/office/powerpoint/2010/main" val="1024086991"/>
+      </p:ext>
+    </p:extLst>
+  </p:cSld>
+  <p:clrMapOvr>
+    <a:masterClrMapping/>
+  </p:clrMapOvr>
+</p:notes>
+</file>
+
+<file path=ppt/notesSlides/notesSlide21.xml><?xml version="1.0" encoding="utf-8"?>
+<p:notes xmlns:a="http://schemas.openxmlformats.org/drawingml/2006/main" xmlns:r="http://schemas.openxmlformats.org/officeDocument/2006/relationships" xmlns:p="http://schemas.openxmlformats.org/presentationml/2006/main">
+  <p:cSld>
+    <p:spTree>
+      <p:nvGrpSpPr>
+        <p:cNvPr id="1" name=""/>
+        <p:cNvGrpSpPr/>
+        <p:nvPr/>
+      </p:nvGrpSpPr>
+      <p:grpSpPr>
+        <a:xfrm>
+          <a:off x="0" y="0"/>
+          <a:ext cx="0" cy="0"/>
+          <a:chOff x="0" y="0"/>
+          <a:chExt cx="0" cy="0"/>
+        </a:xfrm>
+      </p:grpSpPr>
+      <p:sp>
+        <p:nvSpPr>
+          <p:cNvPr id="2" name="Slide Image Placeholder 1"/>
+          <p:cNvSpPr>
+            <a:spLocks noGrp="1" noRot="1" noChangeAspect="1"/>
+          </p:cNvSpPr>
+          <p:nvPr>
+            <p:ph type="sldImg"/>
+          </p:nvPr>
+        </p:nvSpPr>
+        <p:spPr/>
+      </p:sp>
+      <p:sp>
+        <p:nvSpPr>
+          <p:cNvPr id="3" name="Notes Placeholder 2"/>
+          <p:cNvSpPr>
+            <a:spLocks noGrp="1"/>
+          </p:cNvSpPr>
+          <p:nvPr>
+            <p:ph type="body" idx="1"/>
+          </p:nvPr>
+        </p:nvSpPr>
+        <p:spPr/>
+        <p:txBody>
+          <a:bodyPr/>
+          <a:lstStyle/>
+          <a:p>
+            <a:r>
+              <a:rPr lang="en-US" dirty="0"/>
+              <a:t>References and Resources
+NIST Artificial Intelligence Risk Management Framework: https://www.nist.gov/itl/ai-risk-management-framework
+NIST Generative AI Profile: https://www.nist.gov/publications/artificial-intelligence-risk-management-framework-generative-artificial-intelligence
+CDC Public Health Data Strategy and Data Modernization resources: https://www.cdc.gov/public-health-data-strategy/php/about/index.html
+OWASP guidance for LLM application security
+Agency policies for privacy, cybersecurity, records, procurement, accessibility, and public communications</a:t>
+            </a:r>
+            <a:endParaRPr lang="en-US" dirty="0"/>
+          </a:p>
+        </p:txBody>
+      </p:sp>
+      <p:sp>
+        <p:nvSpPr>
+          <p:cNvPr id="4" name="Slide Number Placeholder 3"/>
+          <p:cNvSpPr>
+            <a:spLocks noGrp="1"/>
+          </p:cNvSpPr>
+          <p:nvPr>
+            <p:ph type="sldNum" sz="quarter" idx="10"/>
+          </p:nvPr>
+        </p:nvSpPr>
+        <p:spPr/>
+        <p:txBody>
+          <a:bodyPr/>
+          <a:lstStyle/>
+          <a:p>
+            <a:fld id="{F7021451-1387-4CA6-816F-3879F97B5CBC}" type="slidenum">
+              <a:rPr lang="en-US"/>
+              <a:t>21</a:t>
+            </a:fld>
+            <a:endParaRPr lang="en-US"/>
+          </a:p>
+        </p:txBody>
+      </p:sp>
+    </p:spTree>
+    <p:extLst>
+      <p:ext uri="{BB962C8B-B14F-4D97-AF65-F5344CB8AC3E}">
+        <p14:creationId xmlns:p14="http://schemas.microsoft.com/office/powerpoint/2010/main" val="1024086991"/>
+      </p:ext>
+    </p:extLst>
+  </p:cSld>
+  <p:clrMapOvr>
+    <a:masterClrMapping/>
+  </p:clrMapOvr>
+</p:notes>
+</file>
+
+<file path=ppt/notesSlides/notesSlide22.xml><?xml version="1.0" encoding="utf-8"?>
+<p:notes xmlns:a="http://schemas.openxmlformats.org/drawingml/2006/main" xmlns:r="http://schemas.openxmlformats.org/officeDocument/2006/relationships" xmlns:p="http://schemas.openxmlformats.org/presentationml/2006/main">
+  <p:cSld>
+    <p:spTree>
+      <p:nvGrpSpPr>
+        <p:cNvPr id="1" name=""/>
+        <p:cNvGrpSpPr/>
+        <p:nvPr/>
+      </p:nvGrpSpPr>
+      <p:grpSpPr>
+        <a:xfrm>
+          <a:off x="0" y="0"/>
+          <a:ext cx="0" cy="0"/>
+          <a:chOff x="0" y="0"/>
+          <a:chExt cx="0" cy="0"/>
+        </a:xfrm>
+      </p:grpSpPr>
+      <p:sp>
+        <p:nvSpPr>
+          <p:cNvPr id="2" name="Slide Image Placeholder 1"/>
+          <p:cNvSpPr>
+            <a:spLocks noGrp="1" noRot="1" noChangeAspect="1"/>
+          </p:cNvSpPr>
+          <p:nvPr>
+            <p:ph type="sldImg"/>
+          </p:nvPr>
+        </p:nvSpPr>
+        <p:spPr/>
+      </p:sp>
+      <p:sp>
+        <p:nvSpPr>
+          <p:cNvPr id="3" name="Notes Placeholder 2"/>
+          <p:cNvSpPr>
+            <a:spLocks noGrp="1"/>
+          </p:cNvSpPr>
+          <p:nvPr>
+            <p:ph type="body" idx="1"/>
+          </p:nvPr>
+        </p:nvSpPr>
+        <p:spPr/>
+        <p:txBody>
+          <a:bodyPr/>
+          <a:lstStyle/>
+          <a:p>
+            <a:r>
+              <a:rPr lang="en-US" dirty="0"/>
+              <a:t>References and Resources
+Relevant public health program SOPs, data governance documentation, and implementation plans</a:t>
+            </a:r>
+            <a:endParaRPr lang="en-US" dirty="0"/>
+          </a:p>
+        </p:txBody>
+      </p:sp>
+      <p:sp>
+        <p:nvSpPr>
+          <p:cNvPr id="4" name="Slide Number Placeholder 3"/>
+          <p:cNvSpPr>
+            <a:spLocks noGrp="1"/>
+          </p:cNvSpPr>
+          <p:nvPr>
+            <p:ph type="sldNum" sz="quarter" idx="10"/>
+          </p:nvPr>
+        </p:nvSpPr>
+        <p:spPr/>
+        <p:txBody>
+          <a:bodyPr/>
+          <a:lstStyle/>
+          <a:p>
+            <a:fld id="{F7021451-1387-4CA6-816F-3879F97B5CBC}" type="slidenum">
+              <a:rPr lang="en-US"/>
+              <a:t>22</a:t>
             </a:fld>
             <a:endParaRPr lang="en-US"/>
           </a:p>
@@ -1703,12 +1887,11 @@
           <a:p>
             <a:r>
               <a:rPr lang="en-US" dirty="0"/>
-              <a:t>Learning Objectives
-Define the major phases of an AI implementation project.
-Develop an AI project charter that includes scope, objectives, roles, risks, dependencies, and governance gates.
-Identify implementation dependencies across data, systems, privacy, security, procurement, workflow, training, and evaluation.
-Create a launch readiness checklist for an AI-supported workflow.
-Plan transition from pilot to operations, including ownership, monitoring, maintenance, and sustainability.</a:t>
+              <a:t>Related Playbook Plays
+Play 11: Build and Deploy AI Solutions - This lesson informs Play 11 by helping learners connect the lesson topic to build and deploy ai solutions work in the AI Playbook.
+Play 2: Readiness Assessment - This lesson informs Play 2 by helping learners connect the lesson topic to readiness assessment work in the AI Playbook sequence.
+Play 1: Vision &amp; Guardrails - This lesson informs Play 1 by helping learners connect the lesson topic to vision &amp; guardrails work in the AI Playbook sequence.
+Play 7: Prioritize Use Cases - This lesson informs Play 7 by helping learners connect the lesson topic to prioritize use cases work in the AI Playbook sequence.</a:t>
             </a:r>
             <a:endParaRPr lang="en-US" dirty="0"/>
           </a:p>
@@ -1796,10 +1979,13 @@
           <a:p>
             <a:r>
               <a:rPr lang="en-US" dirty="0"/>
-              <a:t>Module Overview
-AI projects require disciplined implementation planning because they combine technology, data, governance, workflow change, training, validation, procurement, security, and evaluation. A project that appears small, such as adding an AI summarization tool, may still require data access decisions, system integration, human review design, communications planning, and post-launch monitoring. Public health agencies need project management methods that account for these dependencies before implementation begins.
-This module teaches program managers, product owners, implementation leads, and technical staff how to structure AI initiatives from concept through deployment and operations. The focus is on practical project controls: charters, milestones, governance gates, risk logs, stakeholder engagement, testing, training, launch readiness, and transition to operations.
-Strong AI project management helps agencies avoid pilots that never scale, tools that are deployed without ownership, and vendor-led projects that outpace governance or public health readiness. It also helps leadership understand what resources are needed for safe and sustainable implementation.</a:t>
+              <a:t>Related Toolkit Resources
+Tool 4: AI Policy Landscape Scan (Worksheet) - Use AI Policy Landscape Scan to translate this lesson into a documented public health AI planning, governance, implementation,.
+Tool 5: AI Environmental and Resource Impact Review (Checklist) - Use this tool to complete or strengthen the practical exercise for the module using fictional, de-identified, or generalized.
+Tool 6: Human-Centered AI Decision Rule Checklist (Checklist) - Use Human-Centered AI Decision Rule Checklist to translate this lesson into a documented public health AI planning, governance,.
+Tool 8: AI Project Charter (Planning) - Use this tool to complete or strengthen the practical exercise for the module using fictional, de-identified, or generalized.
+Tool 9: Data Quality Assessment Checklist (Checklist) - Use this tool to complete or strengthen the practical exercise for the module using fictional, de-identified, or generalized.
+Tool 10: Tiered Data Classification for AI Use (Worksheet) - Use this tool to complete or strengthen the practical exercise for the module using fictional, de-identified, or generalized.</a:t>
             </a:r>
             <a:endParaRPr lang="en-US" dirty="0"/>
           </a:p>
@@ -1887,8 +2073,12 @@
           <a:p>
             <a:r>
               <a:rPr lang="en-US" dirty="0"/>
-              <a:t>Public Health Example
-A public health agency plans to pilot an AI tool that drafts summaries of incoming case reports. The project plan identifies governance approval, data access, system integration, validation, user training, SOP development, incident response, and monitoring as required workstreams. The project cannot launch simply because the tool works in a demonstration. It must pass readiness checks showing that staff know how to review the output, errors can be reported, and the tool is monitored after launch.</a:t>
+              <a:t>Learning Objectives
+Define the major phases of an AI implementation project.
+Develop an AI project charter that includes scope, objectives, roles, risks, dependencies, and governance gates.
+Identify implementation dependencies across data, systems, privacy, security, procurement, workflow, training, and evaluation.
+Create a launch readiness checklist for an AI-supported workflow.
+Plan transition from pilot to operations, including ownership, monitoring, maintenance, and sustainability.</a:t>
             </a:r>
             <a:endParaRPr lang="en-US" dirty="0"/>
           </a:p>
@@ -1976,10 +2166,10 @@
           <a:p>
             <a:r>
               <a:rPr lang="en-US" dirty="0"/>
-              <a:t>Topic Deep Dive
-AI project planning should begin with a charter that defines the use case and sets boundaries. The charter should explain the public health problem, intended users, expected benefits, data involved, systems affected, approved use, prohibited use, and success measures. It should also identify the sponsor, product owner, implementation lead, technical lead, privacy or legal contacts, security contact, evaluation lead, and operational owner.
-Implementation should be organized into phases. Early phases usually include discovery, intake, feasibility review, governance approval, and business analysis. Middle phases include design, procurement or configuration, data access setup, integration, validation, workflow design, SOP development, and training. Later phases include user acceptance testing, launch readiness review, deployment, monitoring, and transition to operations. Governance gates should be placed between phases to prevent premature launch.
-AI project risk management should be more detailed than a general project risk log. Risks may include poor data quality, unavailable interfaces, unclear authority, model performance problems, vendor delays, privacy concerns, security vulnerabilities, staff resistance, workflow burden, community trust concerns, and sustainability gaps. Each risk should have an owner, mitigation plan, status, and escalation threshold.</a:t>
+              <a:t>Module Overview
+AI projects require disciplined implementation planning because they combine technology, data, governance, workflow change, training, validation, procurement, security, and evaluation. A project that appears small, such as adding an AI summarization tool, may still require data access decisions, system integration, human review design, communications planning, and post-launch monitoring. Public health agencies need project management methods that account for these dependencies before implementation begins.
+This module teaches program managers, product owners, implementation leads, and technical staff how to structure AI initiatives from concept through deployment and operations. The focus is on practical project controls: charters, milestones, governance gates, risk logs, stakeholder engagement, testing, training, launch readiness, and transition to operations.
+Strong AI project management helps agencies avoid pilots that never scale, tools that are deployed without ownership, and vendor-led projects that outpace governance or public health readiness. It also helps leadership understand what resources are needed for safe and sustainable implementation.</a:t>
             </a:r>
             <a:endParaRPr lang="en-US" dirty="0"/>
           </a:p>
@@ -2067,8 +2257,8 @@
           <a:p>
             <a:r>
               <a:rPr lang="en-US" dirty="0"/>
-              <a:t>Topic Deep Dive
-Transition to operations is often neglected. A pilot may show promise, but routine use requires support, monitoring, maintenance, budget, staff training, user feedback, incident response, and periodic review. The project plan should define when the implementation team ends and who becomes responsible for ongoing operations.</a:t>
+              <a:t>Public Health Example
+A public health agency plans to pilot an AI tool that drafts summaries of incoming case reports. The project plan identifies governance approval, data access, system integration, validation, user training, SOP development, incident response, and monitoring as required workstreams. The project cannot launch simply because the tool works in a demonstration. It must pass readiness checks showing that staff know how to review the output, errors can be reported, and the tool is monitored after launch.</a:t>
             </a:r>
             <a:endParaRPr lang="en-US" dirty="0"/>
           </a:p>
@@ -2156,10 +2346,10 @@
           <a:p>
             <a:r>
               <a:rPr lang="en-US" dirty="0"/>
-              <a:t>Risks, Failure Modes, and Guardrails
-Risks and failure modes include the following:
-Pilots launching without governance approval or operational ownership.
-Project plans overlooking data, privacy, security, workflow, or training dependencies.</a:t>
+              <a:t>Topic Deep Dive
+AI project planning should begin with a charter that defines the use case and sets boundaries. The charter should explain the public health problem, intended users, expected benefits, data involved, systems affected, approved use, prohibited use, and success measures. It should also identify the sponsor, product owner, implementation lead, technical lead, privacy or legal contacts, security contact, evaluation lead, and operational owner.
+Implementation should be organized into phases. Early phases usually include discovery, intake, feasibility review, governance approval, and business analysis. Middle phases include design, procurement or configuration, data access setup, integration, validation, workflow design, SOP development, and training. Later phases include user acceptance testing, launch readiness review, deployment, monitoring, and transition to operations. Governance gates should be placed between phases to prevent premature launch.
+AI project risk management should be more detailed than a general project risk log. Risks may include poor data quality, unavailable interfaces, unclear authority, model performance problems, vendor delays, privacy concerns, security vulnerabilities, staff resistance, workflow burden, community trust concerns, and sustainability gaps. Each risk should have an owner, mitigation plan, status, and escalation threshold.</a:t>
             </a:r>
             <a:endParaRPr lang="en-US" dirty="0"/>
           </a:p>
@@ -2247,10 +2437,8 @@
           <a:p>
             <a:r>
               <a:rPr lang="en-US" dirty="0"/>
-              <a:t>Risks, Failure Modes, and Guardrails
-Vendors controlling implementation timelines without agency readiness gates.
-No transition plan from pilot to routine operations.
-Success measured only by deployment rather than public health value and safe use.</a:t>
+              <a:t>Topic Deep Dive
+Transition to operations is often neglected. A pilot may show promise, but routine use requires support, monitoring, maintenance, budget, staff training, user feedback, incident response, and periodic review. The project plan should define when the implementation team ends and who becomes responsible for ongoing operations.</a:t>
             </a:r>
             <a:endParaRPr lang="en-US" dirty="0"/>
           </a:p>
@@ -2873,7 +3061,32 @@
       </p:sp>
       <p:sp>
         <p:nvSpPr>
-          <p:cNvPr id="3" name="Text 1"/>
+          <p:cNvPr id="3" name="Shape 1"/>
+          <p:cNvSpPr/>
+          <p:nvPr/>
+        </p:nvSpPr>
+        <p:spPr>
+          <a:xfrm>
+            <a:off x="0" y="164592"/>
+            <a:ext cx="146304" cy="6693408"/>
+          </a:xfrm>
+          <a:prstGeom prst="rect">
+            <a:avLst/>
+          </a:prstGeom>
+          <a:solidFill>
+            <a:srgbClr val="2F8A28"/>
+          </a:solidFill>
+          <a:ln w="12700">
+            <a:solidFill>
+              <a:srgbClr val="2F8A28"/>
+            </a:solidFill>
+            <a:prstDash val="solid"/>
+          </a:ln>
+        </p:spPr>
+      </p:sp>
+      <p:sp>
+        <p:nvSpPr>
+          <p:cNvPr id="4" name="Text 2"/>
           <p:cNvSpPr/>
           <p:nvPr/>
         </p:nvSpPr>
@@ -2912,7 +3125,7 @@
       </p:sp>
       <p:sp>
         <p:nvSpPr>
-          <p:cNvPr id="4" name="Text 2"/>
+          <p:cNvPr id="5" name="Text 3"/>
           <p:cNvSpPr/>
           <p:nvPr/>
         </p:nvSpPr>
@@ -2951,7 +3164,7 @@
       </p:sp>
       <p:sp>
         <p:nvSpPr>
-          <p:cNvPr id="5" name="Text 3"/>
+          <p:cNvPr id="6" name="Text 4"/>
           <p:cNvSpPr/>
           <p:nvPr/>
         </p:nvSpPr>
@@ -2990,13 +3203,77 @@
       </p:sp>
       <p:sp>
         <p:nvSpPr>
-          <p:cNvPr id="6" name="Text 4"/>
+          <p:cNvPr id="7" name="Shape 5"/>
           <p:cNvSpPr/>
           <p:nvPr/>
         </p:nvSpPr>
         <p:spPr>
           <a:xfrm>
             <a:off x="640080" y="658368"/>
+            <a:ext cx="420624" cy="420624"/>
+          </a:xfrm>
+          <a:prstGeom prst="ellipse">
+            <a:avLst/>
+          </a:prstGeom>
+          <a:solidFill>
+            <a:srgbClr val="0068B7"/>
+          </a:solidFill>
+          <a:ln w="12700">
+            <a:solidFill>
+              <a:srgbClr val="0068B7"/>
+            </a:solidFill>
+            <a:prstDash val="solid"/>
+          </a:ln>
+        </p:spPr>
+      </p:sp>
+      <p:sp>
+        <p:nvSpPr>
+          <p:cNvPr id="8" name="Text 6"/>
+          <p:cNvSpPr/>
+          <p:nvPr/>
+        </p:nvSpPr>
+        <p:spPr>
+          <a:xfrm>
+            <a:off x="640080" y="731520"/>
+            <a:ext cx="420624" cy="164592"/>
+          </a:xfrm>
+          <a:prstGeom prst="rect">
+            <a:avLst/>
+          </a:prstGeom>
+          <a:noFill/>
+          <a:ln/>
+        </p:spPr>
+        <p:txBody>
+          <a:bodyPr wrap="square" lIns="0" tIns="0" rIns="0" bIns="0" rtlCol="0" anchor="ctr"/>
+          <a:lstStyle/>
+          <a:p>
+            <a:pPr algn="ctr" indent="0" marL="0">
+              <a:buNone/>
+            </a:pPr>
+            <a:r>
+              <a:rPr lang="en-US" sz="1100" b="1" dirty="0">
+                <a:solidFill>
+                  <a:srgbClr val="FFFFFF"/>
+                </a:solidFill>
+                <a:latin typeface="Aptos" pitchFamily="34" charset="0"/>
+                <a:ea typeface="Aptos" pitchFamily="34" charset="-122"/>
+                <a:cs typeface="Aptos" pitchFamily="34" charset="-120"/>
+              </a:rPr>
+              <a:t>5</a:t>
+            </a:r>
+            <a:endParaRPr lang="en-US" sz="1100" dirty="0"/>
+          </a:p>
+        </p:txBody>
+      </p:sp>
+      <p:sp>
+        <p:nvSpPr>
+          <p:cNvPr id="9" name="Text 7"/>
+          <p:cNvSpPr/>
+          <p:nvPr/>
+        </p:nvSpPr>
+        <p:spPr>
+          <a:xfrm>
+            <a:off x="640080" y="621792"/>
             <a:ext cx="10881360" cy="566928"/>
           </a:xfrm>
           <a:prstGeom prst="rect">
@@ -3023,7 +3300,7 @@
                 <a:ea typeface="Aptos Display" pitchFamily="34" charset="-122"/>
                 <a:cs typeface="Aptos Display" pitchFamily="34" charset="-120"/>
               </a:rPr>
-              <a:t>Risks, Failure Modes, and Guardrails Continued</a:t>
+              <a:t>Risks, Failure Modes, and Guardrails</a:t>
             </a:r>
             <a:endParaRPr lang="en-US" sz="2700" dirty="0"/>
           </a:p>
@@ -3031,32 +3308,29 @@
       </p:sp>
       <p:sp>
         <p:nvSpPr>
-          <p:cNvPr id="7" name="Text 5"/>
-          <p:cNvSpPr/>
-          <p:nvPr/>
-        </p:nvSpPr>
-        <p:spPr>
-          <a:xfrm>
-            <a:off x="822960" y="1325880"/>
-            <a:ext cx="10378440" cy="4800600"/>
-          </a:xfrm>
-          <a:prstGeom prst="rect">
-            <a:avLst/>
-          </a:prstGeom>
-          <a:noFill/>
-          <a:ln/>
-        </p:spPr>
-        <p:txBody>
-          <a:bodyPr wrap="square" lIns="1016" tIns="1016" rIns="1016" bIns="1016" rtlCol="0" anchor="t">
+          <p:cNvPr id="10" name="Text 8"/>
+          <p:cNvSpPr/>
+          <p:nvPr/>
+        </p:nvSpPr>
+        <p:spPr>
+          <a:xfrm>
+            <a:off x="868680" y="1417320"/>
+            <a:ext cx="6675120" cy="4434840"/>
+          </a:xfrm>
+          <a:prstGeom prst="rect">
+            <a:avLst/>
+          </a:prstGeom>
+          <a:noFill/>
+          <a:ln/>
+        </p:spPr>
+        <p:txBody>
+          <a:bodyPr wrap="square" lIns="635" tIns="635" rIns="635" bIns="635" rtlCol="0" anchor="t">
             <a:normAutofit/>
           </a:bodyPr>
           <a:lstStyle/>
           <a:p>
-            <a:pPr indent="0" marL="0">
-              <a:buNone/>
-            </a:pPr>
-            <a:r>
-              <a:rPr lang="en-US" sz="1420" dirty="0">
+            <a:r>
+              <a:rPr lang="en-US" sz="1700" dirty="0">
                 <a:solidFill>
                   <a:srgbClr val="17364A"/>
                 </a:solidFill>
@@ -3064,9 +3338,251 @@
                 <a:ea typeface="Aptos" pitchFamily="34" charset="-122"/>
                 <a:cs typeface="Aptos" pitchFamily="34" charset="-120"/>
               </a:rPr>
-              <a:t>Recommended guardrails include the following: Use an AI-specific project charter and risk log. Define governance gates before implementation begins.</a:t>
-            </a:r>
-            <a:endParaRPr lang="en-US" sz="1420" dirty="0"/>
+              <a:t>Risks and failure modes include the following:</a:t>
+            </a:r>
+            <a:endParaRPr lang="en-US" sz="1700" dirty="0"/>
+          </a:p>
+          <a:p>
+            <a:r>
+              <a:rPr lang="en-US" sz="1700" dirty="0">
+                <a:solidFill>
+                  <a:srgbClr val="17364A"/>
+                </a:solidFill>
+                <a:latin typeface="Aptos" pitchFamily="34" charset="0"/>
+                <a:ea typeface="Aptos" pitchFamily="34" charset="-122"/>
+                <a:cs typeface="Aptos" pitchFamily="34" charset="-120"/>
+              </a:rPr>
+              <a:t>Pilots launching without governance approval or operational ownership.</a:t>
+            </a:r>
+            <a:endParaRPr lang="en-US" sz="1700" dirty="0"/>
+          </a:p>
+          <a:p>
+            <a:r>
+              <a:rPr lang="en-US" sz="1700" dirty="0">
+                <a:solidFill>
+                  <a:srgbClr val="17364A"/>
+                </a:solidFill>
+                <a:latin typeface="Aptos" pitchFamily="34" charset="0"/>
+                <a:ea typeface="Aptos" pitchFamily="34" charset="-122"/>
+                <a:cs typeface="Aptos" pitchFamily="34" charset="-120"/>
+              </a:rPr>
+              <a:t>Project plans overlooking data, privacy, security, workflow, or training dependencies.</a:t>
+            </a:r>
+            <a:endParaRPr lang="en-US" sz="1700" dirty="0"/>
+          </a:p>
+        </p:txBody>
+      </p:sp>
+      <p:sp>
+        <p:nvSpPr>
+          <p:cNvPr id="11" name="Shape 9"/>
+          <p:cNvSpPr/>
+          <p:nvPr/>
+        </p:nvSpPr>
+        <p:spPr>
+          <a:xfrm>
+            <a:off x="7909560" y="1417320"/>
+            <a:ext cx="3154680" cy="1828800"/>
+          </a:xfrm>
+          <a:prstGeom prst="roundRect">
+            <a:avLst>
+              <a:gd name="adj" fmla="val 6000"/>
+            </a:avLst>
+          </a:prstGeom>
+          <a:solidFill>
+            <a:srgbClr val="EEF8ED"/>
+          </a:solidFill>
+          <a:ln w="12700">
+            <a:solidFill>
+              <a:srgbClr val="B9D7E6"/>
+            </a:solidFill>
+            <a:prstDash val="solid"/>
+          </a:ln>
+        </p:spPr>
+      </p:sp>
+      <p:sp>
+        <p:nvSpPr>
+          <p:cNvPr id="12" name="Text 10"/>
+          <p:cNvSpPr/>
+          <p:nvPr/>
+        </p:nvSpPr>
+        <p:spPr>
+          <a:xfrm>
+            <a:off x="8074152" y="1563624"/>
+            <a:ext cx="2825496" cy="201168"/>
+          </a:xfrm>
+          <a:prstGeom prst="rect">
+            <a:avLst/>
+          </a:prstGeom>
+          <a:noFill/>
+          <a:ln/>
+        </p:spPr>
+        <p:txBody>
+          <a:bodyPr wrap="square" lIns="0" tIns="0" rIns="0" bIns="0" rtlCol="0" anchor="ctr"/>
+          <a:lstStyle/>
+          <a:p>
+            <a:pPr indent="0" marL="0">
+              <a:buNone/>
+            </a:pPr>
+            <a:r>
+              <a:rPr lang="en-US" sz="950" b="1" dirty="0">
+                <a:solidFill>
+                  <a:srgbClr val="0068B7"/>
+                </a:solidFill>
+                <a:latin typeface="Aptos" pitchFamily="34" charset="0"/>
+                <a:ea typeface="Aptos" pitchFamily="34" charset="-122"/>
+                <a:cs typeface="Aptos" pitchFamily="34" charset="-120"/>
+              </a:rPr>
+              <a:t>Key idea</a:t>
+            </a:r>
+            <a:endParaRPr lang="en-US" sz="950" dirty="0"/>
+          </a:p>
+        </p:txBody>
+      </p:sp>
+      <p:sp>
+        <p:nvSpPr>
+          <p:cNvPr id="13" name="Text 11"/>
+          <p:cNvSpPr/>
+          <p:nvPr/>
+        </p:nvSpPr>
+        <p:spPr>
+          <a:xfrm>
+            <a:off x="8074152" y="1856232"/>
+            <a:ext cx="2825496" cy="1261872"/>
+          </a:xfrm>
+          <a:prstGeom prst="rect">
+            <a:avLst/>
+          </a:prstGeom>
+          <a:noFill/>
+          <a:ln/>
+        </p:spPr>
+        <p:txBody>
+          <a:bodyPr wrap="square" lIns="0" tIns="0" rIns="0" bIns="0" rtlCol="0" anchor="t">
+            <a:normAutofit/>
+          </a:bodyPr>
+          <a:lstStyle/>
+          <a:p>
+            <a:pPr indent="0" marL="0">
+              <a:buNone/>
+            </a:pPr>
+            <a:r>
+              <a:rPr lang="en-US" sz="1250" dirty="0">
+                <a:solidFill>
+                  <a:srgbClr val="17364A"/>
+                </a:solidFill>
+                <a:latin typeface="Aptos" pitchFamily="34" charset="0"/>
+                <a:ea typeface="Aptos" pitchFamily="34" charset="-122"/>
+                <a:cs typeface="Aptos" pitchFamily="34" charset="-120"/>
+              </a:rPr>
+              <a:t>Risks and failure modes include the following:</a:t>
+            </a:r>
+            <a:endParaRPr lang="en-US" sz="1250" dirty="0"/>
+          </a:p>
+        </p:txBody>
+      </p:sp>
+      <p:sp>
+        <p:nvSpPr>
+          <p:cNvPr id="14" name="Shape 12"/>
+          <p:cNvSpPr/>
+          <p:nvPr/>
+        </p:nvSpPr>
+        <p:spPr>
+          <a:xfrm>
+            <a:off x="7909560" y="3520440"/>
+            <a:ext cx="3154680" cy="1737360"/>
+          </a:xfrm>
+          <a:prstGeom prst="roundRect">
+            <a:avLst>
+              <a:gd name="adj" fmla="val 6316"/>
+            </a:avLst>
+          </a:prstGeom>
+          <a:solidFill>
+            <a:srgbClr val="EAF6F8"/>
+          </a:solidFill>
+          <a:ln w="12700">
+            <a:solidFill>
+              <a:srgbClr val="B9D7E6"/>
+            </a:solidFill>
+            <a:prstDash val="solid"/>
+          </a:ln>
+        </p:spPr>
+      </p:sp>
+      <p:sp>
+        <p:nvSpPr>
+          <p:cNvPr id="15" name="Text 13"/>
+          <p:cNvSpPr/>
+          <p:nvPr/>
+        </p:nvSpPr>
+        <p:spPr>
+          <a:xfrm>
+            <a:off x="8074152" y="3666744"/>
+            <a:ext cx="2825496" cy="201168"/>
+          </a:xfrm>
+          <a:prstGeom prst="rect">
+            <a:avLst/>
+          </a:prstGeom>
+          <a:noFill/>
+          <a:ln/>
+        </p:spPr>
+        <p:txBody>
+          <a:bodyPr wrap="square" lIns="0" tIns="0" rIns="0" bIns="0" rtlCol="0" anchor="ctr"/>
+          <a:lstStyle/>
+          <a:p>
+            <a:pPr indent="0" marL="0">
+              <a:buNone/>
+            </a:pPr>
+            <a:r>
+              <a:rPr lang="en-US" sz="950" b="1" dirty="0">
+                <a:solidFill>
+                  <a:srgbClr val="0068B7"/>
+                </a:solidFill>
+                <a:latin typeface="Aptos" pitchFamily="34" charset="0"/>
+                <a:ea typeface="Aptos" pitchFamily="34" charset="-122"/>
+                <a:cs typeface="Aptos" pitchFamily="34" charset="-120"/>
+              </a:rPr>
+              <a:t>Use this for</a:t>
+            </a:r>
+            <a:endParaRPr lang="en-US" sz="950" dirty="0"/>
+          </a:p>
+        </p:txBody>
+      </p:sp>
+      <p:sp>
+        <p:nvSpPr>
+          <p:cNvPr id="16" name="Text 14"/>
+          <p:cNvSpPr/>
+          <p:nvPr/>
+        </p:nvSpPr>
+        <p:spPr>
+          <a:xfrm>
+            <a:off x="8074152" y="3959352"/>
+            <a:ext cx="2825496" cy="1170432"/>
+          </a:xfrm>
+          <a:prstGeom prst="rect">
+            <a:avLst/>
+          </a:prstGeom>
+          <a:noFill/>
+          <a:ln/>
+        </p:spPr>
+        <p:txBody>
+          <a:bodyPr wrap="square" lIns="0" tIns="0" rIns="0" bIns="0" rtlCol="0" anchor="t">
+            <a:normAutofit/>
+          </a:bodyPr>
+          <a:lstStyle/>
+          <a:p>
+            <a:pPr indent="0" marL="0">
+              <a:buNone/>
+            </a:pPr>
+            <a:r>
+              <a:rPr lang="en-US" sz="1250" dirty="0">
+                <a:solidFill>
+                  <a:srgbClr val="17364A"/>
+                </a:solidFill>
+                <a:latin typeface="Aptos" pitchFamily="34" charset="0"/>
+                <a:ea typeface="Aptos" pitchFamily="34" charset="-122"/>
+                <a:cs typeface="Aptos" pitchFamily="34" charset="-120"/>
+              </a:rPr>
+              <a:t>Connect the concept to public health decisions, safeguards, documentation, or implementation work.</a:t>
+            </a:r>
+            <a:endParaRPr lang="en-US" sz="1250" dirty="0"/>
           </a:p>
         </p:txBody>
       </p:sp>
@@ -3129,7 +3645,32 @@
       </p:sp>
       <p:sp>
         <p:nvSpPr>
-          <p:cNvPr id="3" name="Text 1"/>
+          <p:cNvPr id="3" name="Shape 1"/>
+          <p:cNvSpPr/>
+          <p:nvPr/>
+        </p:nvSpPr>
+        <p:spPr>
+          <a:xfrm>
+            <a:off x="0" y="164592"/>
+            <a:ext cx="146304" cy="6693408"/>
+          </a:xfrm>
+          <a:prstGeom prst="rect">
+            <a:avLst/>
+          </a:prstGeom>
+          <a:solidFill>
+            <a:srgbClr val="2F8A28"/>
+          </a:solidFill>
+          <a:ln w="12700">
+            <a:solidFill>
+              <a:srgbClr val="2F8A28"/>
+            </a:solidFill>
+            <a:prstDash val="solid"/>
+          </a:ln>
+        </p:spPr>
+      </p:sp>
+      <p:sp>
+        <p:nvSpPr>
+          <p:cNvPr id="4" name="Text 2"/>
           <p:cNvSpPr/>
           <p:nvPr/>
         </p:nvSpPr>
@@ -3168,7 +3709,7 @@
       </p:sp>
       <p:sp>
         <p:nvSpPr>
-          <p:cNvPr id="4" name="Text 2"/>
+          <p:cNvPr id="5" name="Text 3"/>
           <p:cNvSpPr/>
           <p:nvPr/>
         </p:nvSpPr>
@@ -3207,7 +3748,7 @@
       </p:sp>
       <p:sp>
         <p:nvSpPr>
-          <p:cNvPr id="5" name="Text 3"/>
+          <p:cNvPr id="6" name="Text 4"/>
           <p:cNvSpPr/>
           <p:nvPr/>
         </p:nvSpPr>
@@ -3246,7 +3787,7 @@
       </p:sp>
       <p:sp>
         <p:nvSpPr>
-          <p:cNvPr id="6" name="Text 4"/>
+          <p:cNvPr id="7" name="Text 5"/>
           <p:cNvSpPr/>
           <p:nvPr/>
         </p:nvSpPr>
@@ -3287,32 +3828,29 @@
       </p:sp>
       <p:sp>
         <p:nvSpPr>
-          <p:cNvPr id="7" name="Text 5"/>
-          <p:cNvSpPr/>
-          <p:nvPr/>
-        </p:nvSpPr>
-        <p:spPr>
-          <a:xfrm>
-            <a:off x="822960" y="1325880"/>
-            <a:ext cx="10378440" cy="4800600"/>
-          </a:xfrm>
-          <a:prstGeom prst="rect">
-            <a:avLst/>
-          </a:prstGeom>
-          <a:noFill/>
-          <a:ln/>
-        </p:spPr>
-        <p:txBody>
-          <a:bodyPr wrap="square" lIns="1016" tIns="1016" rIns="1016" bIns="1016" rtlCol="0" anchor="t">
+          <p:cNvPr id="8" name="Text 6"/>
+          <p:cNvSpPr/>
+          <p:nvPr/>
+        </p:nvSpPr>
+        <p:spPr>
+          <a:xfrm>
+            <a:off x="868680" y="1417320"/>
+            <a:ext cx="6675120" cy="4434840"/>
+          </a:xfrm>
+          <a:prstGeom prst="rect">
+            <a:avLst/>
+          </a:prstGeom>
+          <a:noFill/>
+          <a:ln/>
+        </p:spPr>
+        <p:txBody>
+          <a:bodyPr wrap="square" lIns="635" tIns="635" rIns="635" bIns="635" rtlCol="0" anchor="t">
             <a:normAutofit/>
           </a:bodyPr>
           <a:lstStyle/>
           <a:p>
-            <a:pPr indent="0" marL="0">
-              <a:buNone/>
-            </a:pPr>
-            <a:r>
-              <a:rPr lang="en-US" sz="1420" dirty="0">
+            <a:r>
+              <a:rPr lang="en-US" sz="1700" dirty="0">
                 <a:solidFill>
                   <a:srgbClr val="17364A"/>
                 </a:solidFill>
@@ -3320,9 +3858,251 @@
                 <a:ea typeface="Aptos" pitchFamily="34" charset="-122"/>
                 <a:cs typeface="Aptos" pitchFamily="34" charset="-120"/>
               </a:rPr>
-              <a:t>Create separate workstreams for data, technology, governance, workflow, training, validation, and evaluation. Require launch readiness review before deployment. Document transition to operations and sustainability responsibilities.</a:t>
-            </a:r>
-            <a:endParaRPr lang="en-US" sz="1420" dirty="0"/>
+              <a:t>Vendors controlling implementation timelines without agency readiness gates.</a:t>
+            </a:r>
+            <a:endParaRPr lang="en-US" sz="1700" dirty="0"/>
+          </a:p>
+          <a:p>
+            <a:r>
+              <a:rPr lang="en-US" sz="1700" dirty="0">
+                <a:solidFill>
+                  <a:srgbClr val="17364A"/>
+                </a:solidFill>
+                <a:latin typeface="Aptos" pitchFamily="34" charset="0"/>
+                <a:ea typeface="Aptos" pitchFamily="34" charset="-122"/>
+                <a:cs typeface="Aptos" pitchFamily="34" charset="-120"/>
+              </a:rPr>
+              <a:t>No transition plan from pilot to routine operations.</a:t>
+            </a:r>
+            <a:endParaRPr lang="en-US" sz="1700" dirty="0"/>
+          </a:p>
+          <a:p>
+            <a:r>
+              <a:rPr lang="en-US" sz="1700" dirty="0">
+                <a:solidFill>
+                  <a:srgbClr val="17364A"/>
+                </a:solidFill>
+                <a:latin typeface="Aptos" pitchFamily="34" charset="0"/>
+                <a:ea typeface="Aptos" pitchFamily="34" charset="-122"/>
+                <a:cs typeface="Aptos" pitchFamily="34" charset="-120"/>
+              </a:rPr>
+              <a:t>Success measured only by deployment rather than public health value and safe use.</a:t>
+            </a:r>
+            <a:endParaRPr lang="en-US" sz="1700" dirty="0"/>
+          </a:p>
+        </p:txBody>
+      </p:sp>
+      <p:sp>
+        <p:nvSpPr>
+          <p:cNvPr id="9" name="Shape 7"/>
+          <p:cNvSpPr/>
+          <p:nvPr/>
+        </p:nvSpPr>
+        <p:spPr>
+          <a:xfrm>
+            <a:off x="7909560" y="1417320"/>
+            <a:ext cx="3154680" cy="1828800"/>
+          </a:xfrm>
+          <a:prstGeom prst="roundRect">
+            <a:avLst>
+              <a:gd name="adj" fmla="val 6000"/>
+            </a:avLst>
+          </a:prstGeom>
+          <a:solidFill>
+            <a:srgbClr val="EEF8ED"/>
+          </a:solidFill>
+          <a:ln w="12700">
+            <a:solidFill>
+              <a:srgbClr val="B9D7E6"/>
+            </a:solidFill>
+            <a:prstDash val="solid"/>
+          </a:ln>
+        </p:spPr>
+      </p:sp>
+      <p:sp>
+        <p:nvSpPr>
+          <p:cNvPr id="10" name="Text 8"/>
+          <p:cNvSpPr/>
+          <p:nvPr/>
+        </p:nvSpPr>
+        <p:spPr>
+          <a:xfrm>
+            <a:off x="8074152" y="1563624"/>
+            <a:ext cx="2825496" cy="201168"/>
+          </a:xfrm>
+          <a:prstGeom prst="rect">
+            <a:avLst/>
+          </a:prstGeom>
+          <a:noFill/>
+          <a:ln/>
+        </p:spPr>
+        <p:txBody>
+          <a:bodyPr wrap="square" lIns="0" tIns="0" rIns="0" bIns="0" rtlCol="0" anchor="ctr"/>
+          <a:lstStyle/>
+          <a:p>
+            <a:pPr indent="0" marL="0">
+              <a:buNone/>
+            </a:pPr>
+            <a:r>
+              <a:rPr lang="en-US" sz="950" b="1" dirty="0">
+                <a:solidFill>
+                  <a:srgbClr val="0068B7"/>
+                </a:solidFill>
+                <a:latin typeface="Aptos" pitchFamily="34" charset="0"/>
+                <a:ea typeface="Aptos" pitchFamily="34" charset="-122"/>
+                <a:cs typeface="Aptos" pitchFamily="34" charset="-120"/>
+              </a:rPr>
+              <a:t>Key idea</a:t>
+            </a:r>
+            <a:endParaRPr lang="en-US" sz="950" dirty="0"/>
+          </a:p>
+        </p:txBody>
+      </p:sp>
+      <p:sp>
+        <p:nvSpPr>
+          <p:cNvPr id="11" name="Text 9"/>
+          <p:cNvSpPr/>
+          <p:nvPr/>
+        </p:nvSpPr>
+        <p:spPr>
+          <a:xfrm>
+            <a:off x="8074152" y="1856232"/>
+            <a:ext cx="2825496" cy="1261872"/>
+          </a:xfrm>
+          <a:prstGeom prst="rect">
+            <a:avLst/>
+          </a:prstGeom>
+          <a:noFill/>
+          <a:ln/>
+        </p:spPr>
+        <p:txBody>
+          <a:bodyPr wrap="square" lIns="0" tIns="0" rIns="0" bIns="0" rtlCol="0" anchor="t">
+            <a:normAutofit/>
+          </a:bodyPr>
+          <a:lstStyle/>
+          <a:p>
+            <a:pPr indent="0" marL="0">
+              <a:buNone/>
+            </a:pPr>
+            <a:r>
+              <a:rPr lang="en-US" sz="1250" dirty="0">
+                <a:solidFill>
+                  <a:srgbClr val="17364A"/>
+                </a:solidFill>
+                <a:latin typeface="Aptos" pitchFamily="34" charset="0"/>
+                <a:ea typeface="Aptos" pitchFamily="34" charset="-122"/>
+                <a:cs typeface="Aptos" pitchFamily="34" charset="-120"/>
+              </a:rPr>
+              <a:t>Vendors controlling implementation timelines without agency readiness gates.</a:t>
+            </a:r>
+            <a:endParaRPr lang="en-US" sz="1250" dirty="0"/>
+          </a:p>
+        </p:txBody>
+      </p:sp>
+      <p:sp>
+        <p:nvSpPr>
+          <p:cNvPr id="12" name="Shape 10"/>
+          <p:cNvSpPr/>
+          <p:nvPr/>
+        </p:nvSpPr>
+        <p:spPr>
+          <a:xfrm>
+            <a:off x="7909560" y="3520440"/>
+            <a:ext cx="3154680" cy="1737360"/>
+          </a:xfrm>
+          <a:prstGeom prst="roundRect">
+            <a:avLst>
+              <a:gd name="adj" fmla="val 6316"/>
+            </a:avLst>
+          </a:prstGeom>
+          <a:solidFill>
+            <a:srgbClr val="EAF6F8"/>
+          </a:solidFill>
+          <a:ln w="12700">
+            <a:solidFill>
+              <a:srgbClr val="B9D7E6"/>
+            </a:solidFill>
+            <a:prstDash val="solid"/>
+          </a:ln>
+        </p:spPr>
+      </p:sp>
+      <p:sp>
+        <p:nvSpPr>
+          <p:cNvPr id="13" name="Text 11"/>
+          <p:cNvSpPr/>
+          <p:nvPr/>
+        </p:nvSpPr>
+        <p:spPr>
+          <a:xfrm>
+            <a:off x="8074152" y="3666744"/>
+            <a:ext cx="2825496" cy="201168"/>
+          </a:xfrm>
+          <a:prstGeom prst="rect">
+            <a:avLst/>
+          </a:prstGeom>
+          <a:noFill/>
+          <a:ln/>
+        </p:spPr>
+        <p:txBody>
+          <a:bodyPr wrap="square" lIns="0" tIns="0" rIns="0" bIns="0" rtlCol="0" anchor="ctr"/>
+          <a:lstStyle/>
+          <a:p>
+            <a:pPr indent="0" marL="0">
+              <a:buNone/>
+            </a:pPr>
+            <a:r>
+              <a:rPr lang="en-US" sz="950" b="1" dirty="0">
+                <a:solidFill>
+                  <a:srgbClr val="0068B7"/>
+                </a:solidFill>
+                <a:latin typeface="Aptos" pitchFamily="34" charset="0"/>
+                <a:ea typeface="Aptos" pitchFamily="34" charset="-122"/>
+                <a:cs typeface="Aptos" pitchFamily="34" charset="-120"/>
+              </a:rPr>
+              <a:t>Use this for</a:t>
+            </a:r>
+            <a:endParaRPr lang="en-US" sz="950" dirty="0"/>
+          </a:p>
+        </p:txBody>
+      </p:sp>
+      <p:sp>
+        <p:nvSpPr>
+          <p:cNvPr id="14" name="Text 12"/>
+          <p:cNvSpPr/>
+          <p:nvPr/>
+        </p:nvSpPr>
+        <p:spPr>
+          <a:xfrm>
+            <a:off x="8074152" y="3959352"/>
+            <a:ext cx="2825496" cy="1170432"/>
+          </a:xfrm>
+          <a:prstGeom prst="rect">
+            <a:avLst/>
+          </a:prstGeom>
+          <a:noFill/>
+          <a:ln/>
+        </p:spPr>
+        <p:txBody>
+          <a:bodyPr wrap="square" lIns="0" tIns="0" rIns="0" bIns="0" rtlCol="0" anchor="t">
+            <a:normAutofit/>
+          </a:bodyPr>
+          <a:lstStyle/>
+          <a:p>
+            <a:pPr indent="0" marL="0">
+              <a:buNone/>
+            </a:pPr>
+            <a:r>
+              <a:rPr lang="en-US" sz="1250" dirty="0">
+                <a:solidFill>
+                  <a:srgbClr val="17364A"/>
+                </a:solidFill>
+                <a:latin typeface="Aptos" pitchFamily="34" charset="0"/>
+                <a:ea typeface="Aptos" pitchFamily="34" charset="-122"/>
+                <a:cs typeface="Aptos" pitchFamily="34" charset="-120"/>
+              </a:rPr>
+              <a:t>Connect the concept to public health decisions, safeguards, documentation, or implementation work.</a:t>
+            </a:r>
+            <a:endParaRPr lang="en-US" sz="1250" dirty="0"/>
           </a:p>
         </p:txBody>
       </p:sp>
@@ -3385,7 +4165,32 @@
       </p:sp>
       <p:sp>
         <p:nvSpPr>
-          <p:cNvPr id="3" name="Text 1"/>
+          <p:cNvPr id="3" name="Shape 1"/>
+          <p:cNvSpPr/>
+          <p:nvPr/>
+        </p:nvSpPr>
+        <p:spPr>
+          <a:xfrm>
+            <a:off x="0" y="164592"/>
+            <a:ext cx="146304" cy="6693408"/>
+          </a:xfrm>
+          <a:prstGeom prst="rect">
+            <a:avLst/>
+          </a:prstGeom>
+          <a:solidFill>
+            <a:srgbClr val="2F8A28"/>
+          </a:solidFill>
+          <a:ln w="12700">
+            <a:solidFill>
+              <a:srgbClr val="2F8A28"/>
+            </a:solidFill>
+            <a:prstDash val="solid"/>
+          </a:ln>
+        </p:spPr>
+      </p:sp>
+      <p:sp>
+        <p:nvSpPr>
+          <p:cNvPr id="4" name="Text 2"/>
           <p:cNvSpPr/>
           <p:nvPr/>
         </p:nvSpPr>
@@ -3424,7 +4229,7 @@
       </p:sp>
       <p:sp>
         <p:nvSpPr>
-          <p:cNvPr id="4" name="Text 2"/>
+          <p:cNvPr id="5" name="Text 3"/>
           <p:cNvSpPr/>
           <p:nvPr/>
         </p:nvSpPr>
@@ -3463,7 +4268,7 @@
       </p:sp>
       <p:sp>
         <p:nvSpPr>
-          <p:cNvPr id="5" name="Text 3"/>
+          <p:cNvPr id="6" name="Text 4"/>
           <p:cNvSpPr/>
           <p:nvPr/>
         </p:nvSpPr>
@@ -3502,7 +4307,7 @@
       </p:sp>
       <p:sp>
         <p:nvSpPr>
-          <p:cNvPr id="6" name="Text 4"/>
+          <p:cNvPr id="7" name="Text 5"/>
           <p:cNvSpPr/>
           <p:nvPr/>
         </p:nvSpPr>
@@ -3535,7 +4340,7 @@
                 <a:ea typeface="Aptos Display" pitchFamily="34" charset="-122"/>
                 <a:cs typeface="Aptos Display" pitchFamily="34" charset="-120"/>
               </a:rPr>
-              <a:t>Reflection Questions</a:t>
+              <a:t>Risks, Failure Modes, and Guardrails Continued</a:t>
             </a:r>
             <a:endParaRPr lang="en-US" sz="2700" dirty="0"/>
           </a:p>
@@ -3543,32 +4348,29 @@
       </p:sp>
       <p:sp>
         <p:nvSpPr>
-          <p:cNvPr id="7" name="Text 5"/>
-          <p:cNvSpPr/>
-          <p:nvPr/>
-        </p:nvSpPr>
-        <p:spPr>
-          <a:xfrm>
-            <a:off x="822960" y="1325880"/>
-            <a:ext cx="10378440" cy="4800600"/>
-          </a:xfrm>
-          <a:prstGeom prst="rect">
-            <a:avLst/>
-          </a:prstGeom>
-          <a:noFill/>
-          <a:ln/>
-        </p:spPr>
-        <p:txBody>
-          <a:bodyPr wrap="square" lIns="1016" tIns="1016" rIns="1016" bIns="1016" rtlCol="0" anchor="t">
+          <p:cNvPr id="8" name="Text 6"/>
+          <p:cNvSpPr/>
+          <p:nvPr/>
+        </p:nvSpPr>
+        <p:spPr>
+          <a:xfrm>
+            <a:off x="868680" y="1417320"/>
+            <a:ext cx="6675120" cy="4434840"/>
+          </a:xfrm>
+          <a:prstGeom prst="rect">
+            <a:avLst/>
+          </a:prstGeom>
+          <a:noFill/>
+          <a:ln/>
+        </p:spPr>
+        <p:txBody>
+          <a:bodyPr wrap="square" lIns="635" tIns="635" rIns="635" bIns="635" rtlCol="0" anchor="t">
             <a:normAutofit/>
           </a:bodyPr>
           <a:lstStyle/>
           <a:p>
-            <a:pPr indent="0" marL="0">
-              <a:buNone/>
-            </a:pPr>
-            <a:r>
-              <a:rPr lang="en-US" sz="1420" dirty="0">
+            <a:r>
+              <a:rPr lang="en-US" sz="1700" dirty="0">
                 <a:solidFill>
                   <a:srgbClr val="17364A"/>
                 </a:solidFill>
@@ -3576,9 +4378,251 @@
                 <a:ea typeface="Aptos" pitchFamily="34" charset="-122"/>
                 <a:cs typeface="Aptos" pitchFamily="34" charset="-120"/>
               </a:rPr>
-              <a:t>Where does this topic appear in your agency, program, or workflow? Which staff roles would need to understand or apply this concept before AI use is approved? What could go wrong if this topic is not addressed before implementation?</a:t>
-            </a:r>
-            <a:endParaRPr lang="en-US" sz="1420" dirty="0"/>
+              <a:t>Recommended guardrails include the following:</a:t>
+            </a:r>
+            <a:endParaRPr lang="en-US" sz="1700" dirty="0"/>
+          </a:p>
+          <a:p>
+            <a:r>
+              <a:rPr lang="en-US" sz="1700" dirty="0">
+                <a:solidFill>
+                  <a:srgbClr val="17364A"/>
+                </a:solidFill>
+                <a:latin typeface="Aptos" pitchFamily="34" charset="0"/>
+                <a:ea typeface="Aptos" pitchFamily="34" charset="-122"/>
+                <a:cs typeface="Aptos" pitchFamily="34" charset="-120"/>
+              </a:rPr>
+              <a:t>Use an AI-specific project charter and risk log.</a:t>
+            </a:r>
+            <a:endParaRPr lang="en-US" sz="1700" dirty="0"/>
+          </a:p>
+          <a:p>
+            <a:r>
+              <a:rPr lang="en-US" sz="1700" dirty="0">
+                <a:solidFill>
+                  <a:srgbClr val="17364A"/>
+                </a:solidFill>
+                <a:latin typeface="Aptos" pitchFamily="34" charset="0"/>
+                <a:ea typeface="Aptos" pitchFamily="34" charset="-122"/>
+                <a:cs typeface="Aptos" pitchFamily="34" charset="-120"/>
+              </a:rPr>
+              <a:t>Define governance gates before implementation begins.</a:t>
+            </a:r>
+            <a:endParaRPr lang="en-US" sz="1700" dirty="0"/>
+          </a:p>
+        </p:txBody>
+      </p:sp>
+      <p:sp>
+        <p:nvSpPr>
+          <p:cNvPr id="9" name="Shape 7"/>
+          <p:cNvSpPr/>
+          <p:nvPr/>
+        </p:nvSpPr>
+        <p:spPr>
+          <a:xfrm>
+            <a:off x="7909560" y="1417320"/>
+            <a:ext cx="3154680" cy="1828800"/>
+          </a:xfrm>
+          <a:prstGeom prst="roundRect">
+            <a:avLst>
+              <a:gd name="adj" fmla="val 6000"/>
+            </a:avLst>
+          </a:prstGeom>
+          <a:solidFill>
+            <a:srgbClr val="EEF8ED"/>
+          </a:solidFill>
+          <a:ln w="12700">
+            <a:solidFill>
+              <a:srgbClr val="B9D7E6"/>
+            </a:solidFill>
+            <a:prstDash val="solid"/>
+          </a:ln>
+        </p:spPr>
+      </p:sp>
+      <p:sp>
+        <p:nvSpPr>
+          <p:cNvPr id="10" name="Text 8"/>
+          <p:cNvSpPr/>
+          <p:nvPr/>
+        </p:nvSpPr>
+        <p:spPr>
+          <a:xfrm>
+            <a:off x="8074152" y="1563624"/>
+            <a:ext cx="2825496" cy="201168"/>
+          </a:xfrm>
+          <a:prstGeom prst="rect">
+            <a:avLst/>
+          </a:prstGeom>
+          <a:noFill/>
+          <a:ln/>
+        </p:spPr>
+        <p:txBody>
+          <a:bodyPr wrap="square" lIns="0" tIns="0" rIns="0" bIns="0" rtlCol="0" anchor="ctr"/>
+          <a:lstStyle/>
+          <a:p>
+            <a:pPr indent="0" marL="0">
+              <a:buNone/>
+            </a:pPr>
+            <a:r>
+              <a:rPr lang="en-US" sz="950" b="1" dirty="0">
+                <a:solidFill>
+                  <a:srgbClr val="0068B7"/>
+                </a:solidFill>
+                <a:latin typeface="Aptos" pitchFamily="34" charset="0"/>
+                <a:ea typeface="Aptos" pitchFamily="34" charset="-122"/>
+                <a:cs typeface="Aptos" pitchFamily="34" charset="-120"/>
+              </a:rPr>
+              <a:t>Key idea</a:t>
+            </a:r>
+            <a:endParaRPr lang="en-US" sz="950" dirty="0"/>
+          </a:p>
+        </p:txBody>
+      </p:sp>
+      <p:sp>
+        <p:nvSpPr>
+          <p:cNvPr id="11" name="Text 9"/>
+          <p:cNvSpPr/>
+          <p:nvPr/>
+        </p:nvSpPr>
+        <p:spPr>
+          <a:xfrm>
+            <a:off x="8074152" y="1856232"/>
+            <a:ext cx="2825496" cy="1261872"/>
+          </a:xfrm>
+          <a:prstGeom prst="rect">
+            <a:avLst/>
+          </a:prstGeom>
+          <a:noFill/>
+          <a:ln/>
+        </p:spPr>
+        <p:txBody>
+          <a:bodyPr wrap="square" lIns="0" tIns="0" rIns="0" bIns="0" rtlCol="0" anchor="t">
+            <a:normAutofit/>
+          </a:bodyPr>
+          <a:lstStyle/>
+          <a:p>
+            <a:pPr indent="0" marL="0">
+              <a:buNone/>
+            </a:pPr>
+            <a:r>
+              <a:rPr lang="en-US" sz="1250" dirty="0">
+                <a:solidFill>
+                  <a:srgbClr val="17364A"/>
+                </a:solidFill>
+                <a:latin typeface="Aptos" pitchFamily="34" charset="0"/>
+                <a:ea typeface="Aptos" pitchFamily="34" charset="-122"/>
+                <a:cs typeface="Aptos" pitchFamily="34" charset="-120"/>
+              </a:rPr>
+              <a:t>Recommended guardrails include the following:</a:t>
+            </a:r>
+            <a:endParaRPr lang="en-US" sz="1250" dirty="0"/>
+          </a:p>
+        </p:txBody>
+      </p:sp>
+      <p:sp>
+        <p:nvSpPr>
+          <p:cNvPr id="12" name="Shape 10"/>
+          <p:cNvSpPr/>
+          <p:nvPr/>
+        </p:nvSpPr>
+        <p:spPr>
+          <a:xfrm>
+            <a:off x="7909560" y="3520440"/>
+            <a:ext cx="3154680" cy="1737360"/>
+          </a:xfrm>
+          <a:prstGeom prst="roundRect">
+            <a:avLst>
+              <a:gd name="adj" fmla="val 6316"/>
+            </a:avLst>
+          </a:prstGeom>
+          <a:solidFill>
+            <a:srgbClr val="EAF6F8"/>
+          </a:solidFill>
+          <a:ln w="12700">
+            <a:solidFill>
+              <a:srgbClr val="B9D7E6"/>
+            </a:solidFill>
+            <a:prstDash val="solid"/>
+          </a:ln>
+        </p:spPr>
+      </p:sp>
+      <p:sp>
+        <p:nvSpPr>
+          <p:cNvPr id="13" name="Text 11"/>
+          <p:cNvSpPr/>
+          <p:nvPr/>
+        </p:nvSpPr>
+        <p:spPr>
+          <a:xfrm>
+            <a:off x="8074152" y="3666744"/>
+            <a:ext cx="2825496" cy="201168"/>
+          </a:xfrm>
+          <a:prstGeom prst="rect">
+            <a:avLst/>
+          </a:prstGeom>
+          <a:noFill/>
+          <a:ln/>
+        </p:spPr>
+        <p:txBody>
+          <a:bodyPr wrap="square" lIns="0" tIns="0" rIns="0" bIns="0" rtlCol="0" anchor="ctr"/>
+          <a:lstStyle/>
+          <a:p>
+            <a:pPr indent="0" marL="0">
+              <a:buNone/>
+            </a:pPr>
+            <a:r>
+              <a:rPr lang="en-US" sz="950" b="1" dirty="0">
+                <a:solidFill>
+                  <a:srgbClr val="0068B7"/>
+                </a:solidFill>
+                <a:latin typeface="Aptos" pitchFamily="34" charset="0"/>
+                <a:ea typeface="Aptos" pitchFamily="34" charset="-122"/>
+                <a:cs typeface="Aptos" pitchFamily="34" charset="-120"/>
+              </a:rPr>
+              <a:t>Use this for</a:t>
+            </a:r>
+            <a:endParaRPr lang="en-US" sz="950" dirty="0"/>
+          </a:p>
+        </p:txBody>
+      </p:sp>
+      <p:sp>
+        <p:nvSpPr>
+          <p:cNvPr id="14" name="Text 12"/>
+          <p:cNvSpPr/>
+          <p:nvPr/>
+        </p:nvSpPr>
+        <p:spPr>
+          <a:xfrm>
+            <a:off x="8074152" y="3959352"/>
+            <a:ext cx="2825496" cy="1170432"/>
+          </a:xfrm>
+          <a:prstGeom prst="rect">
+            <a:avLst/>
+          </a:prstGeom>
+          <a:noFill/>
+          <a:ln/>
+        </p:spPr>
+        <p:txBody>
+          <a:bodyPr wrap="square" lIns="0" tIns="0" rIns="0" bIns="0" rtlCol="0" anchor="t">
+            <a:normAutofit/>
+          </a:bodyPr>
+          <a:lstStyle/>
+          <a:p>
+            <a:pPr indent="0" marL="0">
+              <a:buNone/>
+            </a:pPr>
+            <a:r>
+              <a:rPr lang="en-US" sz="1250" dirty="0">
+                <a:solidFill>
+                  <a:srgbClr val="17364A"/>
+                </a:solidFill>
+                <a:latin typeface="Aptos" pitchFamily="34" charset="0"/>
+                <a:ea typeface="Aptos" pitchFamily="34" charset="-122"/>
+                <a:cs typeface="Aptos" pitchFamily="34" charset="-120"/>
+              </a:rPr>
+              <a:t>Connect the concept to public health decisions, safeguards, documentation, or implementation work.</a:t>
+            </a:r>
+            <a:endParaRPr lang="en-US" sz="1250" dirty="0"/>
           </a:p>
         </p:txBody>
       </p:sp>
@@ -3641,7 +4685,32 @@
       </p:sp>
       <p:sp>
         <p:nvSpPr>
-          <p:cNvPr id="3" name="Text 1"/>
+          <p:cNvPr id="3" name="Shape 1"/>
+          <p:cNvSpPr/>
+          <p:nvPr/>
+        </p:nvSpPr>
+        <p:spPr>
+          <a:xfrm>
+            <a:off x="0" y="164592"/>
+            <a:ext cx="146304" cy="6693408"/>
+          </a:xfrm>
+          <a:prstGeom prst="rect">
+            <a:avLst/>
+          </a:prstGeom>
+          <a:solidFill>
+            <a:srgbClr val="2F8A28"/>
+          </a:solidFill>
+          <a:ln w="12700">
+            <a:solidFill>
+              <a:srgbClr val="2F8A28"/>
+            </a:solidFill>
+            <a:prstDash val="solid"/>
+          </a:ln>
+        </p:spPr>
+      </p:sp>
+      <p:sp>
+        <p:nvSpPr>
+          <p:cNvPr id="4" name="Text 2"/>
           <p:cNvSpPr/>
           <p:nvPr/>
         </p:nvSpPr>
@@ -3680,7 +4749,7 @@
       </p:sp>
       <p:sp>
         <p:nvSpPr>
-          <p:cNvPr id="4" name="Text 2"/>
+          <p:cNvPr id="5" name="Text 3"/>
           <p:cNvSpPr/>
           <p:nvPr/>
         </p:nvSpPr>
@@ -3719,7 +4788,7 @@
       </p:sp>
       <p:sp>
         <p:nvSpPr>
-          <p:cNvPr id="5" name="Text 3"/>
+          <p:cNvPr id="6" name="Text 4"/>
           <p:cNvSpPr/>
           <p:nvPr/>
         </p:nvSpPr>
@@ -3758,7 +4827,7 @@
       </p:sp>
       <p:sp>
         <p:nvSpPr>
-          <p:cNvPr id="6" name="Text 4"/>
+          <p:cNvPr id="7" name="Text 5"/>
           <p:cNvSpPr/>
           <p:nvPr/>
         </p:nvSpPr>
@@ -3791,7 +4860,7 @@
                 <a:ea typeface="Aptos Display" pitchFamily="34" charset="-122"/>
                 <a:cs typeface="Aptos Display" pitchFamily="34" charset="-120"/>
               </a:rPr>
-              <a:t>Reflection Questions Continued</a:t>
+              <a:t>Risks, Failure Modes, and Guardrails Continued</a:t>
             </a:r>
             <a:endParaRPr lang="en-US" sz="2700" dirty="0"/>
           </a:p>
@@ -3799,32 +4868,29 @@
       </p:sp>
       <p:sp>
         <p:nvSpPr>
-          <p:cNvPr id="7" name="Text 5"/>
-          <p:cNvSpPr/>
-          <p:nvPr/>
-        </p:nvSpPr>
-        <p:spPr>
-          <a:xfrm>
-            <a:off x="822960" y="1325880"/>
-            <a:ext cx="10378440" cy="4800600"/>
-          </a:xfrm>
-          <a:prstGeom prst="rect">
-            <a:avLst/>
-          </a:prstGeom>
-          <a:noFill/>
-          <a:ln/>
-        </p:spPr>
-        <p:txBody>
-          <a:bodyPr wrap="square" lIns="1016" tIns="1016" rIns="1016" bIns="1016" rtlCol="0" anchor="t">
+          <p:cNvPr id="8" name="Text 6"/>
+          <p:cNvSpPr/>
+          <p:nvPr/>
+        </p:nvSpPr>
+        <p:spPr>
+          <a:xfrm>
+            <a:off x="868680" y="1417320"/>
+            <a:ext cx="6675120" cy="4434840"/>
+          </a:xfrm>
+          <a:prstGeom prst="rect">
+            <a:avLst/>
+          </a:prstGeom>
+          <a:noFill/>
+          <a:ln/>
+        </p:spPr>
+        <p:txBody>
+          <a:bodyPr wrap="square" lIns="635" tIns="635" rIns="635" bIns="635" rtlCol="0" anchor="t">
             <a:normAutofit/>
           </a:bodyPr>
           <a:lstStyle/>
           <a:p>
-            <a:pPr indent="0" marL="0">
-              <a:buNone/>
-            </a:pPr>
-            <a:r>
-              <a:rPr lang="en-US" sz="1420" dirty="0">
+            <a:r>
+              <a:rPr lang="en-US" sz="1700" dirty="0">
                 <a:solidFill>
                   <a:srgbClr val="17364A"/>
                 </a:solidFill>
@@ -3832,9 +4898,251 @@
                 <a:ea typeface="Aptos" pitchFamily="34" charset="-122"/>
                 <a:cs typeface="Aptos" pitchFamily="34" charset="-120"/>
               </a:rPr>
-              <a:t>What evidence would governance, leadership, or operations staff need before moving forward? Which policy, data, equity, privacy, security, or workflow questions remain unresolved?</a:t>
-            </a:r>
-            <a:endParaRPr lang="en-US" sz="1420" dirty="0"/>
+              <a:t>Create separate workstreams for data, technology, governance, workflow, training, validation, and evaluation.</a:t>
+            </a:r>
+            <a:endParaRPr lang="en-US" sz="1700" dirty="0"/>
+          </a:p>
+          <a:p>
+            <a:r>
+              <a:rPr lang="en-US" sz="1700" dirty="0">
+                <a:solidFill>
+                  <a:srgbClr val="17364A"/>
+                </a:solidFill>
+                <a:latin typeface="Aptos" pitchFamily="34" charset="0"/>
+                <a:ea typeface="Aptos" pitchFamily="34" charset="-122"/>
+                <a:cs typeface="Aptos" pitchFamily="34" charset="-120"/>
+              </a:rPr>
+              <a:t>Require launch readiness review before deployment.</a:t>
+            </a:r>
+            <a:endParaRPr lang="en-US" sz="1700" dirty="0"/>
+          </a:p>
+          <a:p>
+            <a:r>
+              <a:rPr lang="en-US" sz="1700" dirty="0">
+                <a:solidFill>
+                  <a:srgbClr val="17364A"/>
+                </a:solidFill>
+                <a:latin typeface="Aptos" pitchFamily="34" charset="0"/>
+                <a:ea typeface="Aptos" pitchFamily="34" charset="-122"/>
+                <a:cs typeface="Aptos" pitchFamily="34" charset="-120"/>
+              </a:rPr>
+              <a:t>Document transition to operations and sustainability responsibilities.</a:t>
+            </a:r>
+            <a:endParaRPr lang="en-US" sz="1700" dirty="0"/>
+          </a:p>
+        </p:txBody>
+      </p:sp>
+      <p:sp>
+        <p:nvSpPr>
+          <p:cNvPr id="9" name="Shape 7"/>
+          <p:cNvSpPr/>
+          <p:nvPr/>
+        </p:nvSpPr>
+        <p:spPr>
+          <a:xfrm>
+            <a:off x="7909560" y="1417320"/>
+            <a:ext cx="3154680" cy="1828800"/>
+          </a:xfrm>
+          <a:prstGeom prst="roundRect">
+            <a:avLst>
+              <a:gd name="adj" fmla="val 6000"/>
+            </a:avLst>
+          </a:prstGeom>
+          <a:solidFill>
+            <a:srgbClr val="EEF8ED"/>
+          </a:solidFill>
+          <a:ln w="12700">
+            <a:solidFill>
+              <a:srgbClr val="B9D7E6"/>
+            </a:solidFill>
+            <a:prstDash val="solid"/>
+          </a:ln>
+        </p:spPr>
+      </p:sp>
+      <p:sp>
+        <p:nvSpPr>
+          <p:cNvPr id="10" name="Text 8"/>
+          <p:cNvSpPr/>
+          <p:nvPr/>
+        </p:nvSpPr>
+        <p:spPr>
+          <a:xfrm>
+            <a:off x="8074152" y="1563624"/>
+            <a:ext cx="2825496" cy="201168"/>
+          </a:xfrm>
+          <a:prstGeom prst="rect">
+            <a:avLst/>
+          </a:prstGeom>
+          <a:noFill/>
+          <a:ln/>
+        </p:spPr>
+        <p:txBody>
+          <a:bodyPr wrap="square" lIns="0" tIns="0" rIns="0" bIns="0" rtlCol="0" anchor="ctr"/>
+          <a:lstStyle/>
+          <a:p>
+            <a:pPr indent="0" marL="0">
+              <a:buNone/>
+            </a:pPr>
+            <a:r>
+              <a:rPr lang="en-US" sz="950" b="1" dirty="0">
+                <a:solidFill>
+                  <a:srgbClr val="0068B7"/>
+                </a:solidFill>
+                <a:latin typeface="Aptos" pitchFamily="34" charset="0"/>
+                <a:ea typeface="Aptos" pitchFamily="34" charset="-122"/>
+                <a:cs typeface="Aptos" pitchFamily="34" charset="-120"/>
+              </a:rPr>
+              <a:t>Key idea</a:t>
+            </a:r>
+            <a:endParaRPr lang="en-US" sz="950" dirty="0"/>
+          </a:p>
+        </p:txBody>
+      </p:sp>
+      <p:sp>
+        <p:nvSpPr>
+          <p:cNvPr id="11" name="Text 9"/>
+          <p:cNvSpPr/>
+          <p:nvPr/>
+        </p:nvSpPr>
+        <p:spPr>
+          <a:xfrm>
+            <a:off x="8074152" y="1856232"/>
+            <a:ext cx="2825496" cy="1261872"/>
+          </a:xfrm>
+          <a:prstGeom prst="rect">
+            <a:avLst/>
+          </a:prstGeom>
+          <a:noFill/>
+          <a:ln/>
+        </p:spPr>
+        <p:txBody>
+          <a:bodyPr wrap="square" lIns="0" tIns="0" rIns="0" bIns="0" rtlCol="0" anchor="t">
+            <a:normAutofit/>
+          </a:bodyPr>
+          <a:lstStyle/>
+          <a:p>
+            <a:pPr indent="0" marL="0">
+              <a:buNone/>
+            </a:pPr>
+            <a:r>
+              <a:rPr lang="en-US" sz="1250" dirty="0">
+                <a:solidFill>
+                  <a:srgbClr val="17364A"/>
+                </a:solidFill>
+                <a:latin typeface="Aptos" pitchFamily="34" charset="0"/>
+                <a:ea typeface="Aptos" pitchFamily="34" charset="-122"/>
+                <a:cs typeface="Aptos" pitchFamily="34" charset="-120"/>
+              </a:rPr>
+              <a:t>Create separate workstreams for data, technology, governance, workflow, training, validation, and evaluation.</a:t>
+            </a:r>
+            <a:endParaRPr lang="en-US" sz="1250" dirty="0"/>
+          </a:p>
+        </p:txBody>
+      </p:sp>
+      <p:sp>
+        <p:nvSpPr>
+          <p:cNvPr id="12" name="Shape 10"/>
+          <p:cNvSpPr/>
+          <p:nvPr/>
+        </p:nvSpPr>
+        <p:spPr>
+          <a:xfrm>
+            <a:off x="7909560" y="3520440"/>
+            <a:ext cx="3154680" cy="1737360"/>
+          </a:xfrm>
+          <a:prstGeom prst="roundRect">
+            <a:avLst>
+              <a:gd name="adj" fmla="val 6316"/>
+            </a:avLst>
+          </a:prstGeom>
+          <a:solidFill>
+            <a:srgbClr val="EAF6F8"/>
+          </a:solidFill>
+          <a:ln w="12700">
+            <a:solidFill>
+              <a:srgbClr val="B9D7E6"/>
+            </a:solidFill>
+            <a:prstDash val="solid"/>
+          </a:ln>
+        </p:spPr>
+      </p:sp>
+      <p:sp>
+        <p:nvSpPr>
+          <p:cNvPr id="13" name="Text 11"/>
+          <p:cNvSpPr/>
+          <p:nvPr/>
+        </p:nvSpPr>
+        <p:spPr>
+          <a:xfrm>
+            <a:off x="8074152" y="3666744"/>
+            <a:ext cx="2825496" cy="201168"/>
+          </a:xfrm>
+          <a:prstGeom prst="rect">
+            <a:avLst/>
+          </a:prstGeom>
+          <a:noFill/>
+          <a:ln/>
+        </p:spPr>
+        <p:txBody>
+          <a:bodyPr wrap="square" lIns="0" tIns="0" rIns="0" bIns="0" rtlCol="0" anchor="ctr"/>
+          <a:lstStyle/>
+          <a:p>
+            <a:pPr indent="0" marL="0">
+              <a:buNone/>
+            </a:pPr>
+            <a:r>
+              <a:rPr lang="en-US" sz="950" b="1" dirty="0">
+                <a:solidFill>
+                  <a:srgbClr val="0068B7"/>
+                </a:solidFill>
+                <a:latin typeface="Aptos" pitchFamily="34" charset="0"/>
+                <a:ea typeface="Aptos" pitchFamily="34" charset="-122"/>
+                <a:cs typeface="Aptos" pitchFamily="34" charset="-120"/>
+              </a:rPr>
+              <a:t>Use this for</a:t>
+            </a:r>
+            <a:endParaRPr lang="en-US" sz="950" dirty="0"/>
+          </a:p>
+        </p:txBody>
+      </p:sp>
+      <p:sp>
+        <p:nvSpPr>
+          <p:cNvPr id="14" name="Text 12"/>
+          <p:cNvSpPr/>
+          <p:nvPr/>
+        </p:nvSpPr>
+        <p:spPr>
+          <a:xfrm>
+            <a:off x="8074152" y="3959352"/>
+            <a:ext cx="2825496" cy="1170432"/>
+          </a:xfrm>
+          <a:prstGeom prst="rect">
+            <a:avLst/>
+          </a:prstGeom>
+          <a:noFill/>
+          <a:ln/>
+        </p:spPr>
+        <p:txBody>
+          <a:bodyPr wrap="square" lIns="0" tIns="0" rIns="0" bIns="0" rtlCol="0" anchor="t">
+            <a:normAutofit/>
+          </a:bodyPr>
+          <a:lstStyle/>
+          <a:p>
+            <a:pPr indent="0" marL="0">
+              <a:buNone/>
+            </a:pPr>
+            <a:r>
+              <a:rPr lang="en-US" sz="1250" dirty="0">
+                <a:solidFill>
+                  <a:srgbClr val="17364A"/>
+                </a:solidFill>
+                <a:latin typeface="Aptos" pitchFamily="34" charset="0"/>
+                <a:ea typeface="Aptos" pitchFamily="34" charset="-122"/>
+                <a:cs typeface="Aptos" pitchFamily="34" charset="-120"/>
+              </a:rPr>
+              <a:t>Connect the concept to public health decisions, safeguards, documentation, or implementation work.</a:t>
+            </a:r>
+            <a:endParaRPr lang="en-US" sz="1250" dirty="0"/>
           </a:p>
         </p:txBody>
       </p:sp>
@@ -3897,7 +5205,32 @@
       </p:sp>
       <p:sp>
         <p:nvSpPr>
-          <p:cNvPr id="3" name="Text 1"/>
+          <p:cNvPr id="3" name="Shape 1"/>
+          <p:cNvSpPr/>
+          <p:nvPr/>
+        </p:nvSpPr>
+        <p:spPr>
+          <a:xfrm>
+            <a:off x="0" y="164592"/>
+            <a:ext cx="146304" cy="6693408"/>
+          </a:xfrm>
+          <a:prstGeom prst="rect">
+            <a:avLst/>
+          </a:prstGeom>
+          <a:solidFill>
+            <a:srgbClr val="2F8A28"/>
+          </a:solidFill>
+          <a:ln w="12700">
+            <a:solidFill>
+              <a:srgbClr val="2F8A28"/>
+            </a:solidFill>
+            <a:prstDash val="solid"/>
+          </a:ln>
+        </p:spPr>
+      </p:sp>
+      <p:sp>
+        <p:nvSpPr>
+          <p:cNvPr id="4" name="Text 2"/>
           <p:cNvSpPr/>
           <p:nvPr/>
         </p:nvSpPr>
@@ -3936,7 +5269,7 @@
       </p:sp>
       <p:sp>
         <p:nvSpPr>
-          <p:cNvPr id="4" name="Text 2"/>
+          <p:cNvPr id="5" name="Text 3"/>
           <p:cNvSpPr/>
           <p:nvPr/>
         </p:nvSpPr>
@@ -3975,7 +5308,7 @@
       </p:sp>
       <p:sp>
         <p:nvSpPr>
-          <p:cNvPr id="5" name="Text 3"/>
+          <p:cNvPr id="6" name="Text 4"/>
           <p:cNvSpPr/>
           <p:nvPr/>
         </p:nvSpPr>
@@ -4014,13 +5347,77 @@
       </p:sp>
       <p:sp>
         <p:nvSpPr>
-          <p:cNvPr id="6" name="Text 4"/>
+          <p:cNvPr id="7" name="Shape 5"/>
           <p:cNvSpPr/>
           <p:nvPr/>
         </p:nvSpPr>
         <p:spPr>
           <a:xfrm>
             <a:off x="640080" y="658368"/>
+            <a:ext cx="420624" cy="420624"/>
+          </a:xfrm>
+          <a:prstGeom prst="ellipse">
+            <a:avLst/>
+          </a:prstGeom>
+          <a:solidFill>
+            <a:srgbClr val="0068B7"/>
+          </a:solidFill>
+          <a:ln w="12700">
+            <a:solidFill>
+              <a:srgbClr val="0068B7"/>
+            </a:solidFill>
+            <a:prstDash val="solid"/>
+          </a:ln>
+        </p:spPr>
+      </p:sp>
+      <p:sp>
+        <p:nvSpPr>
+          <p:cNvPr id="8" name="Text 6"/>
+          <p:cNvSpPr/>
+          <p:nvPr/>
+        </p:nvSpPr>
+        <p:spPr>
+          <a:xfrm>
+            <a:off x="640080" y="731520"/>
+            <a:ext cx="420624" cy="164592"/>
+          </a:xfrm>
+          <a:prstGeom prst="rect">
+            <a:avLst/>
+          </a:prstGeom>
+          <a:noFill/>
+          <a:ln/>
+        </p:spPr>
+        <p:txBody>
+          <a:bodyPr wrap="square" lIns="0" tIns="0" rIns="0" bIns="0" rtlCol="0" anchor="ctr"/>
+          <a:lstStyle/>
+          <a:p>
+            <a:pPr algn="ctr" indent="0" marL="0">
+              <a:buNone/>
+            </a:pPr>
+            <a:r>
+              <a:rPr lang="en-US" sz="1100" b="1" dirty="0">
+                <a:solidFill>
+                  <a:srgbClr val="FFFFFF"/>
+                </a:solidFill>
+                <a:latin typeface="Aptos" pitchFamily="34" charset="0"/>
+                <a:ea typeface="Aptos" pitchFamily="34" charset="-122"/>
+                <a:cs typeface="Aptos" pitchFamily="34" charset="-120"/>
+              </a:rPr>
+              <a:t>6</a:t>
+            </a:r>
+            <a:endParaRPr lang="en-US" sz="1100" dirty="0"/>
+          </a:p>
+        </p:txBody>
+      </p:sp>
+      <p:sp>
+        <p:nvSpPr>
+          <p:cNvPr id="9" name="Text 7"/>
+          <p:cNvSpPr/>
+          <p:nvPr/>
+        </p:nvSpPr>
+        <p:spPr>
+          <a:xfrm>
+            <a:off x="640080" y="621792"/>
             <a:ext cx="10881360" cy="566928"/>
           </a:xfrm>
           <a:prstGeom prst="rect">
@@ -4047,7 +5444,7 @@
                 <a:ea typeface="Aptos Display" pitchFamily="34" charset="-122"/>
                 <a:cs typeface="Aptos Display" pitchFamily="34" charset="-120"/>
               </a:rPr>
-              <a:t>Practical Exercise</a:t>
+              <a:t>Reflection Questions</a:t>
             </a:r>
             <a:endParaRPr lang="en-US" sz="2700" dirty="0"/>
           </a:p>
@@ -4055,32 +5452,29 @@
       </p:sp>
       <p:sp>
         <p:nvSpPr>
-          <p:cNvPr id="7" name="Text 5"/>
-          <p:cNvSpPr/>
-          <p:nvPr/>
-        </p:nvSpPr>
-        <p:spPr>
-          <a:xfrm>
-            <a:off x="822960" y="1325880"/>
-            <a:ext cx="10378440" cy="4800600"/>
-          </a:xfrm>
-          <a:prstGeom prst="rect">
-            <a:avLst/>
-          </a:prstGeom>
-          <a:noFill/>
-          <a:ln/>
-        </p:spPr>
-        <p:txBody>
-          <a:bodyPr wrap="square" lIns="1016" tIns="1016" rIns="1016" bIns="1016" rtlCol="0" anchor="t">
+          <p:cNvPr id="10" name="Text 8"/>
+          <p:cNvSpPr/>
+          <p:nvPr/>
+        </p:nvSpPr>
+        <p:spPr>
+          <a:xfrm>
+            <a:off x="868680" y="1417320"/>
+            <a:ext cx="6675120" cy="4434840"/>
+          </a:xfrm>
+          <a:prstGeom prst="rect">
+            <a:avLst/>
+          </a:prstGeom>
+          <a:noFill/>
+          <a:ln/>
+        </p:spPr>
+        <p:txBody>
+          <a:bodyPr wrap="square" lIns="635" tIns="635" rIns="635" bIns="635" rtlCol="0" anchor="t">
             <a:normAutofit/>
           </a:bodyPr>
           <a:lstStyle/>
           <a:p>
-            <a:pPr indent="0" marL="0">
-              <a:buNone/>
-            </a:pPr>
-            <a:r>
-              <a:rPr lang="en-US" sz="1420" dirty="0">
+            <a:r>
+              <a:rPr lang="en-US" sz="1700" dirty="0">
                 <a:solidFill>
                   <a:srgbClr val="17364A"/>
                 </a:solidFill>
@@ -4088,9 +5482,251 @@
                 <a:ea typeface="Aptos" pitchFamily="34" charset="-122"/>
                 <a:cs typeface="Aptos" pitchFamily="34" charset="-120"/>
               </a:rPr>
-              <a:t>Create an AI project charter and implementation plan for one proposed AI-supported public health workflow. Include project purpose, scope, objectives, roles, governance gates, milestones, workstreams, dependencies, risks, launch readiness criteria, and transition-to-operations plan.</a:t>
-            </a:r>
-            <a:endParaRPr lang="en-US" sz="1420" dirty="0"/>
+              <a:t>Where does this topic appear in your agency, program, or workflow?</a:t>
+            </a:r>
+            <a:endParaRPr lang="en-US" sz="1700" dirty="0"/>
+          </a:p>
+          <a:p>
+            <a:r>
+              <a:rPr lang="en-US" sz="1700" dirty="0">
+                <a:solidFill>
+                  <a:srgbClr val="17364A"/>
+                </a:solidFill>
+                <a:latin typeface="Aptos" pitchFamily="34" charset="0"/>
+                <a:ea typeface="Aptos" pitchFamily="34" charset="-122"/>
+                <a:cs typeface="Aptos" pitchFamily="34" charset="-120"/>
+              </a:rPr>
+              <a:t>Which staff roles would need to understand or apply this concept before AI use is approved?</a:t>
+            </a:r>
+            <a:endParaRPr lang="en-US" sz="1700" dirty="0"/>
+          </a:p>
+          <a:p>
+            <a:r>
+              <a:rPr lang="en-US" sz="1700" dirty="0">
+                <a:solidFill>
+                  <a:srgbClr val="17364A"/>
+                </a:solidFill>
+                <a:latin typeface="Aptos" pitchFamily="34" charset="0"/>
+                <a:ea typeface="Aptos" pitchFamily="34" charset="-122"/>
+                <a:cs typeface="Aptos" pitchFamily="34" charset="-120"/>
+              </a:rPr>
+              <a:t>What could go wrong if this topic is not addressed before implementation?</a:t>
+            </a:r>
+            <a:endParaRPr lang="en-US" sz="1700" dirty="0"/>
+          </a:p>
+        </p:txBody>
+      </p:sp>
+      <p:sp>
+        <p:nvSpPr>
+          <p:cNvPr id="11" name="Shape 9"/>
+          <p:cNvSpPr/>
+          <p:nvPr/>
+        </p:nvSpPr>
+        <p:spPr>
+          <a:xfrm>
+            <a:off x="7909560" y="1417320"/>
+            <a:ext cx="3154680" cy="1828800"/>
+          </a:xfrm>
+          <a:prstGeom prst="roundRect">
+            <a:avLst>
+              <a:gd name="adj" fmla="val 6000"/>
+            </a:avLst>
+          </a:prstGeom>
+          <a:solidFill>
+            <a:srgbClr val="EEF8ED"/>
+          </a:solidFill>
+          <a:ln w="12700">
+            <a:solidFill>
+              <a:srgbClr val="B9D7E6"/>
+            </a:solidFill>
+            <a:prstDash val="solid"/>
+          </a:ln>
+        </p:spPr>
+      </p:sp>
+      <p:sp>
+        <p:nvSpPr>
+          <p:cNvPr id="12" name="Text 10"/>
+          <p:cNvSpPr/>
+          <p:nvPr/>
+        </p:nvSpPr>
+        <p:spPr>
+          <a:xfrm>
+            <a:off x="8074152" y="1563624"/>
+            <a:ext cx="2825496" cy="201168"/>
+          </a:xfrm>
+          <a:prstGeom prst="rect">
+            <a:avLst/>
+          </a:prstGeom>
+          <a:noFill/>
+          <a:ln/>
+        </p:spPr>
+        <p:txBody>
+          <a:bodyPr wrap="square" lIns="0" tIns="0" rIns="0" bIns="0" rtlCol="0" anchor="ctr"/>
+          <a:lstStyle/>
+          <a:p>
+            <a:pPr indent="0" marL="0">
+              <a:buNone/>
+            </a:pPr>
+            <a:r>
+              <a:rPr lang="en-US" sz="950" b="1" dirty="0">
+                <a:solidFill>
+                  <a:srgbClr val="0068B7"/>
+                </a:solidFill>
+                <a:latin typeface="Aptos" pitchFamily="34" charset="0"/>
+                <a:ea typeface="Aptos" pitchFamily="34" charset="-122"/>
+                <a:cs typeface="Aptos" pitchFamily="34" charset="-120"/>
+              </a:rPr>
+              <a:t>Key idea</a:t>
+            </a:r>
+            <a:endParaRPr lang="en-US" sz="950" dirty="0"/>
+          </a:p>
+        </p:txBody>
+      </p:sp>
+      <p:sp>
+        <p:nvSpPr>
+          <p:cNvPr id="13" name="Text 11"/>
+          <p:cNvSpPr/>
+          <p:nvPr/>
+        </p:nvSpPr>
+        <p:spPr>
+          <a:xfrm>
+            <a:off x="8074152" y="1856232"/>
+            <a:ext cx="2825496" cy="1261872"/>
+          </a:xfrm>
+          <a:prstGeom prst="rect">
+            <a:avLst/>
+          </a:prstGeom>
+          <a:noFill/>
+          <a:ln/>
+        </p:spPr>
+        <p:txBody>
+          <a:bodyPr wrap="square" lIns="0" tIns="0" rIns="0" bIns="0" rtlCol="0" anchor="t">
+            <a:normAutofit/>
+          </a:bodyPr>
+          <a:lstStyle/>
+          <a:p>
+            <a:pPr indent="0" marL="0">
+              <a:buNone/>
+            </a:pPr>
+            <a:r>
+              <a:rPr lang="en-US" sz="1250" dirty="0">
+                <a:solidFill>
+                  <a:srgbClr val="17364A"/>
+                </a:solidFill>
+                <a:latin typeface="Aptos" pitchFamily="34" charset="0"/>
+                <a:ea typeface="Aptos" pitchFamily="34" charset="-122"/>
+                <a:cs typeface="Aptos" pitchFamily="34" charset="-120"/>
+              </a:rPr>
+              <a:t>Where does this topic appear in your agency, program, or workflow?</a:t>
+            </a:r>
+            <a:endParaRPr lang="en-US" sz="1250" dirty="0"/>
+          </a:p>
+        </p:txBody>
+      </p:sp>
+      <p:sp>
+        <p:nvSpPr>
+          <p:cNvPr id="14" name="Shape 12"/>
+          <p:cNvSpPr/>
+          <p:nvPr/>
+        </p:nvSpPr>
+        <p:spPr>
+          <a:xfrm>
+            <a:off x="7909560" y="3520440"/>
+            <a:ext cx="3154680" cy="1737360"/>
+          </a:xfrm>
+          <a:prstGeom prst="roundRect">
+            <a:avLst>
+              <a:gd name="adj" fmla="val 6316"/>
+            </a:avLst>
+          </a:prstGeom>
+          <a:solidFill>
+            <a:srgbClr val="EAF6F8"/>
+          </a:solidFill>
+          <a:ln w="12700">
+            <a:solidFill>
+              <a:srgbClr val="B9D7E6"/>
+            </a:solidFill>
+            <a:prstDash val="solid"/>
+          </a:ln>
+        </p:spPr>
+      </p:sp>
+      <p:sp>
+        <p:nvSpPr>
+          <p:cNvPr id="15" name="Text 13"/>
+          <p:cNvSpPr/>
+          <p:nvPr/>
+        </p:nvSpPr>
+        <p:spPr>
+          <a:xfrm>
+            <a:off x="8074152" y="3666744"/>
+            <a:ext cx="2825496" cy="201168"/>
+          </a:xfrm>
+          <a:prstGeom prst="rect">
+            <a:avLst/>
+          </a:prstGeom>
+          <a:noFill/>
+          <a:ln/>
+        </p:spPr>
+        <p:txBody>
+          <a:bodyPr wrap="square" lIns="0" tIns="0" rIns="0" bIns="0" rtlCol="0" anchor="ctr"/>
+          <a:lstStyle/>
+          <a:p>
+            <a:pPr indent="0" marL="0">
+              <a:buNone/>
+            </a:pPr>
+            <a:r>
+              <a:rPr lang="en-US" sz="950" b="1" dirty="0">
+                <a:solidFill>
+                  <a:srgbClr val="0068B7"/>
+                </a:solidFill>
+                <a:latin typeface="Aptos" pitchFamily="34" charset="0"/>
+                <a:ea typeface="Aptos" pitchFamily="34" charset="-122"/>
+                <a:cs typeface="Aptos" pitchFamily="34" charset="-120"/>
+              </a:rPr>
+              <a:t>Use this for</a:t>
+            </a:r>
+            <a:endParaRPr lang="en-US" sz="950" dirty="0"/>
+          </a:p>
+        </p:txBody>
+      </p:sp>
+      <p:sp>
+        <p:nvSpPr>
+          <p:cNvPr id="16" name="Text 14"/>
+          <p:cNvSpPr/>
+          <p:nvPr/>
+        </p:nvSpPr>
+        <p:spPr>
+          <a:xfrm>
+            <a:off x="8074152" y="3959352"/>
+            <a:ext cx="2825496" cy="1170432"/>
+          </a:xfrm>
+          <a:prstGeom prst="rect">
+            <a:avLst/>
+          </a:prstGeom>
+          <a:noFill/>
+          <a:ln/>
+        </p:spPr>
+        <p:txBody>
+          <a:bodyPr wrap="square" lIns="0" tIns="0" rIns="0" bIns="0" rtlCol="0" anchor="t">
+            <a:normAutofit/>
+          </a:bodyPr>
+          <a:lstStyle/>
+          <a:p>
+            <a:pPr indent="0" marL="0">
+              <a:buNone/>
+            </a:pPr>
+            <a:r>
+              <a:rPr lang="en-US" sz="1250" dirty="0">
+                <a:solidFill>
+                  <a:srgbClr val="17364A"/>
+                </a:solidFill>
+                <a:latin typeface="Aptos" pitchFamily="34" charset="0"/>
+                <a:ea typeface="Aptos" pitchFamily="34" charset="-122"/>
+                <a:cs typeface="Aptos" pitchFamily="34" charset="-120"/>
+              </a:rPr>
+              <a:t>Connect the concept to public health decisions, safeguards, documentation, or implementation work.</a:t>
+            </a:r>
+            <a:endParaRPr lang="en-US" sz="1250" dirty="0"/>
           </a:p>
         </p:txBody>
       </p:sp>
@@ -4153,7 +5789,32 @@
       </p:sp>
       <p:sp>
         <p:nvSpPr>
-          <p:cNvPr id="3" name="Text 1"/>
+          <p:cNvPr id="3" name="Shape 1"/>
+          <p:cNvSpPr/>
+          <p:nvPr/>
+        </p:nvSpPr>
+        <p:spPr>
+          <a:xfrm>
+            <a:off x="0" y="164592"/>
+            <a:ext cx="146304" cy="6693408"/>
+          </a:xfrm>
+          <a:prstGeom prst="rect">
+            <a:avLst/>
+          </a:prstGeom>
+          <a:solidFill>
+            <a:srgbClr val="2F8A28"/>
+          </a:solidFill>
+          <a:ln w="12700">
+            <a:solidFill>
+              <a:srgbClr val="2F8A28"/>
+            </a:solidFill>
+            <a:prstDash val="solid"/>
+          </a:ln>
+        </p:spPr>
+      </p:sp>
+      <p:sp>
+        <p:nvSpPr>
+          <p:cNvPr id="4" name="Text 2"/>
           <p:cNvSpPr/>
           <p:nvPr/>
         </p:nvSpPr>
@@ -4192,7 +5853,7 @@
       </p:sp>
       <p:sp>
         <p:nvSpPr>
-          <p:cNvPr id="4" name="Text 2"/>
+          <p:cNvPr id="5" name="Text 3"/>
           <p:cNvSpPr/>
           <p:nvPr/>
         </p:nvSpPr>
@@ -4231,7 +5892,7 @@
       </p:sp>
       <p:sp>
         <p:nvSpPr>
-          <p:cNvPr id="5" name="Text 3"/>
+          <p:cNvPr id="6" name="Text 4"/>
           <p:cNvSpPr/>
           <p:nvPr/>
         </p:nvSpPr>
@@ -4270,7 +5931,7 @@
       </p:sp>
       <p:sp>
         <p:nvSpPr>
-          <p:cNvPr id="6" name="Text 4"/>
+          <p:cNvPr id="7" name="Text 5"/>
           <p:cNvSpPr/>
           <p:nvPr/>
         </p:nvSpPr>
@@ -4303,7 +5964,7 @@
                 <a:ea typeface="Aptos Display" pitchFamily="34" charset="-122"/>
                 <a:cs typeface="Aptos Display" pitchFamily="34" charset="-120"/>
               </a:rPr>
-              <a:t>Expected Artifact or Evidence</a:t>
+              <a:t>Reflection Questions Continued</a:t>
             </a:r>
             <a:endParaRPr lang="en-US" sz="2700" dirty="0"/>
           </a:p>
@@ -4311,32 +5972,29 @@
       </p:sp>
       <p:sp>
         <p:nvSpPr>
-          <p:cNvPr id="7" name="Text 5"/>
-          <p:cNvSpPr/>
-          <p:nvPr/>
-        </p:nvSpPr>
-        <p:spPr>
-          <a:xfrm>
-            <a:off x="822960" y="1325880"/>
-            <a:ext cx="10378440" cy="4800600"/>
-          </a:xfrm>
-          <a:prstGeom prst="rect">
-            <a:avLst/>
-          </a:prstGeom>
-          <a:noFill/>
-          <a:ln/>
-        </p:spPr>
-        <p:txBody>
-          <a:bodyPr wrap="square" lIns="1016" tIns="1016" rIns="1016" bIns="1016" rtlCol="0" anchor="t">
+          <p:cNvPr id="8" name="Text 6"/>
+          <p:cNvSpPr/>
+          <p:nvPr/>
+        </p:nvSpPr>
+        <p:spPr>
+          <a:xfrm>
+            <a:off x="868680" y="1417320"/>
+            <a:ext cx="6675120" cy="4434840"/>
+          </a:xfrm>
+          <a:prstGeom prst="rect">
+            <a:avLst/>
+          </a:prstGeom>
+          <a:noFill/>
+          <a:ln/>
+        </p:spPr>
+        <p:txBody>
+          <a:bodyPr wrap="square" lIns="635" tIns="635" rIns="635" bIns="635" rtlCol="0" anchor="t">
             <a:normAutofit/>
           </a:bodyPr>
           <a:lstStyle/>
           <a:p>
-            <a:pPr indent="0" marL="0">
-              <a:buNone/>
-            </a:pPr>
-            <a:r>
-              <a:rPr lang="en-US" sz="1420" dirty="0">
+            <a:r>
+              <a:rPr lang="en-US" sz="1700" dirty="0">
                 <a:solidFill>
                   <a:srgbClr val="17364A"/>
                 </a:solidFill>
@@ -4344,9 +6002,237 @@
                 <a:ea typeface="Aptos" pitchFamily="34" charset="-122"/>
                 <a:cs typeface="Aptos" pitchFamily="34" charset="-120"/>
               </a:rPr>
-              <a:t>AI project charter Implementation workplan AI-specific risk log</a:t>
-            </a:r>
-            <a:endParaRPr lang="en-US" sz="1420" dirty="0"/>
+              <a:t>What evidence would governance, leadership, or operations staff need before moving forward?</a:t>
+            </a:r>
+            <a:endParaRPr lang="en-US" sz="1700" dirty="0"/>
+          </a:p>
+          <a:p>
+            <a:r>
+              <a:rPr lang="en-US" sz="1700" dirty="0">
+                <a:solidFill>
+                  <a:srgbClr val="17364A"/>
+                </a:solidFill>
+                <a:latin typeface="Aptos" pitchFamily="34" charset="0"/>
+                <a:ea typeface="Aptos" pitchFamily="34" charset="-122"/>
+                <a:cs typeface="Aptos" pitchFamily="34" charset="-120"/>
+              </a:rPr>
+              <a:t>Which policy, data, equity, privacy, security, or workflow questions remain unresolved?</a:t>
+            </a:r>
+            <a:endParaRPr lang="en-US" sz="1700" dirty="0"/>
+          </a:p>
+        </p:txBody>
+      </p:sp>
+      <p:sp>
+        <p:nvSpPr>
+          <p:cNvPr id="9" name="Shape 7"/>
+          <p:cNvSpPr/>
+          <p:nvPr/>
+        </p:nvSpPr>
+        <p:spPr>
+          <a:xfrm>
+            <a:off x="7909560" y="1417320"/>
+            <a:ext cx="3154680" cy="1828800"/>
+          </a:xfrm>
+          <a:prstGeom prst="roundRect">
+            <a:avLst>
+              <a:gd name="adj" fmla="val 6000"/>
+            </a:avLst>
+          </a:prstGeom>
+          <a:solidFill>
+            <a:srgbClr val="EEF8ED"/>
+          </a:solidFill>
+          <a:ln w="12700">
+            <a:solidFill>
+              <a:srgbClr val="B9D7E6"/>
+            </a:solidFill>
+            <a:prstDash val="solid"/>
+          </a:ln>
+        </p:spPr>
+      </p:sp>
+      <p:sp>
+        <p:nvSpPr>
+          <p:cNvPr id="10" name="Text 8"/>
+          <p:cNvSpPr/>
+          <p:nvPr/>
+        </p:nvSpPr>
+        <p:spPr>
+          <a:xfrm>
+            <a:off x="8074152" y="1563624"/>
+            <a:ext cx="2825496" cy="201168"/>
+          </a:xfrm>
+          <a:prstGeom prst="rect">
+            <a:avLst/>
+          </a:prstGeom>
+          <a:noFill/>
+          <a:ln/>
+        </p:spPr>
+        <p:txBody>
+          <a:bodyPr wrap="square" lIns="0" tIns="0" rIns="0" bIns="0" rtlCol="0" anchor="ctr"/>
+          <a:lstStyle/>
+          <a:p>
+            <a:pPr indent="0" marL="0">
+              <a:buNone/>
+            </a:pPr>
+            <a:r>
+              <a:rPr lang="en-US" sz="950" b="1" dirty="0">
+                <a:solidFill>
+                  <a:srgbClr val="0068B7"/>
+                </a:solidFill>
+                <a:latin typeface="Aptos" pitchFamily="34" charset="0"/>
+                <a:ea typeface="Aptos" pitchFamily="34" charset="-122"/>
+                <a:cs typeface="Aptos" pitchFamily="34" charset="-120"/>
+              </a:rPr>
+              <a:t>Key idea</a:t>
+            </a:r>
+            <a:endParaRPr lang="en-US" sz="950" dirty="0"/>
+          </a:p>
+        </p:txBody>
+      </p:sp>
+      <p:sp>
+        <p:nvSpPr>
+          <p:cNvPr id="11" name="Text 9"/>
+          <p:cNvSpPr/>
+          <p:nvPr/>
+        </p:nvSpPr>
+        <p:spPr>
+          <a:xfrm>
+            <a:off x="8074152" y="1856232"/>
+            <a:ext cx="2825496" cy="1261872"/>
+          </a:xfrm>
+          <a:prstGeom prst="rect">
+            <a:avLst/>
+          </a:prstGeom>
+          <a:noFill/>
+          <a:ln/>
+        </p:spPr>
+        <p:txBody>
+          <a:bodyPr wrap="square" lIns="0" tIns="0" rIns="0" bIns="0" rtlCol="0" anchor="t">
+            <a:normAutofit/>
+          </a:bodyPr>
+          <a:lstStyle/>
+          <a:p>
+            <a:pPr indent="0" marL="0">
+              <a:buNone/>
+            </a:pPr>
+            <a:r>
+              <a:rPr lang="en-US" sz="1250" dirty="0">
+                <a:solidFill>
+                  <a:srgbClr val="17364A"/>
+                </a:solidFill>
+                <a:latin typeface="Aptos" pitchFamily="34" charset="0"/>
+                <a:ea typeface="Aptos" pitchFamily="34" charset="-122"/>
+                <a:cs typeface="Aptos" pitchFamily="34" charset="-120"/>
+              </a:rPr>
+              <a:t>What evidence would governance, leadership, or operations staff need before moving forward?</a:t>
+            </a:r>
+            <a:endParaRPr lang="en-US" sz="1250" dirty="0"/>
+          </a:p>
+        </p:txBody>
+      </p:sp>
+      <p:sp>
+        <p:nvSpPr>
+          <p:cNvPr id="12" name="Shape 10"/>
+          <p:cNvSpPr/>
+          <p:nvPr/>
+        </p:nvSpPr>
+        <p:spPr>
+          <a:xfrm>
+            <a:off x="7909560" y="3520440"/>
+            <a:ext cx="3154680" cy="1737360"/>
+          </a:xfrm>
+          <a:prstGeom prst="roundRect">
+            <a:avLst>
+              <a:gd name="adj" fmla="val 6316"/>
+            </a:avLst>
+          </a:prstGeom>
+          <a:solidFill>
+            <a:srgbClr val="EAF6F8"/>
+          </a:solidFill>
+          <a:ln w="12700">
+            <a:solidFill>
+              <a:srgbClr val="B9D7E6"/>
+            </a:solidFill>
+            <a:prstDash val="solid"/>
+          </a:ln>
+        </p:spPr>
+      </p:sp>
+      <p:sp>
+        <p:nvSpPr>
+          <p:cNvPr id="13" name="Text 11"/>
+          <p:cNvSpPr/>
+          <p:nvPr/>
+        </p:nvSpPr>
+        <p:spPr>
+          <a:xfrm>
+            <a:off x="8074152" y="3666744"/>
+            <a:ext cx="2825496" cy="201168"/>
+          </a:xfrm>
+          <a:prstGeom prst="rect">
+            <a:avLst/>
+          </a:prstGeom>
+          <a:noFill/>
+          <a:ln/>
+        </p:spPr>
+        <p:txBody>
+          <a:bodyPr wrap="square" lIns="0" tIns="0" rIns="0" bIns="0" rtlCol="0" anchor="ctr"/>
+          <a:lstStyle/>
+          <a:p>
+            <a:pPr indent="0" marL="0">
+              <a:buNone/>
+            </a:pPr>
+            <a:r>
+              <a:rPr lang="en-US" sz="950" b="1" dirty="0">
+                <a:solidFill>
+                  <a:srgbClr val="0068B7"/>
+                </a:solidFill>
+                <a:latin typeface="Aptos" pitchFamily="34" charset="0"/>
+                <a:ea typeface="Aptos" pitchFamily="34" charset="-122"/>
+                <a:cs typeface="Aptos" pitchFamily="34" charset="-120"/>
+              </a:rPr>
+              <a:t>Use this for</a:t>
+            </a:r>
+            <a:endParaRPr lang="en-US" sz="950" dirty="0"/>
+          </a:p>
+        </p:txBody>
+      </p:sp>
+      <p:sp>
+        <p:nvSpPr>
+          <p:cNvPr id="14" name="Text 12"/>
+          <p:cNvSpPr/>
+          <p:nvPr/>
+        </p:nvSpPr>
+        <p:spPr>
+          <a:xfrm>
+            <a:off x="8074152" y="3959352"/>
+            <a:ext cx="2825496" cy="1170432"/>
+          </a:xfrm>
+          <a:prstGeom prst="rect">
+            <a:avLst/>
+          </a:prstGeom>
+          <a:noFill/>
+          <a:ln/>
+        </p:spPr>
+        <p:txBody>
+          <a:bodyPr wrap="square" lIns="0" tIns="0" rIns="0" bIns="0" rtlCol="0" anchor="t">
+            <a:normAutofit/>
+          </a:bodyPr>
+          <a:lstStyle/>
+          <a:p>
+            <a:pPr indent="0" marL="0">
+              <a:buNone/>
+            </a:pPr>
+            <a:r>
+              <a:rPr lang="en-US" sz="1250" dirty="0">
+                <a:solidFill>
+                  <a:srgbClr val="17364A"/>
+                </a:solidFill>
+                <a:latin typeface="Aptos" pitchFamily="34" charset="0"/>
+                <a:ea typeface="Aptos" pitchFamily="34" charset="-122"/>
+                <a:cs typeface="Aptos" pitchFamily="34" charset="-120"/>
+              </a:rPr>
+              <a:t>Connect the concept to public health decisions, safeguards, documentation, or implementation work.</a:t>
+            </a:r>
+            <a:endParaRPr lang="en-US" sz="1250" dirty="0"/>
           </a:p>
         </p:txBody>
       </p:sp>
@@ -4409,7 +6295,32 @@
       </p:sp>
       <p:sp>
         <p:nvSpPr>
-          <p:cNvPr id="3" name="Text 1"/>
+          <p:cNvPr id="3" name="Shape 1"/>
+          <p:cNvSpPr/>
+          <p:nvPr/>
+        </p:nvSpPr>
+        <p:spPr>
+          <a:xfrm>
+            <a:off x="0" y="164592"/>
+            <a:ext cx="146304" cy="6693408"/>
+          </a:xfrm>
+          <a:prstGeom prst="rect">
+            <a:avLst/>
+          </a:prstGeom>
+          <a:solidFill>
+            <a:srgbClr val="2F8A28"/>
+          </a:solidFill>
+          <a:ln w="12700">
+            <a:solidFill>
+              <a:srgbClr val="2F8A28"/>
+            </a:solidFill>
+            <a:prstDash val="solid"/>
+          </a:ln>
+        </p:spPr>
+      </p:sp>
+      <p:sp>
+        <p:nvSpPr>
+          <p:cNvPr id="4" name="Text 2"/>
           <p:cNvSpPr/>
           <p:nvPr/>
         </p:nvSpPr>
@@ -4448,7 +6359,7 @@
       </p:sp>
       <p:sp>
         <p:nvSpPr>
-          <p:cNvPr id="4" name="Text 2"/>
+          <p:cNvPr id="5" name="Text 3"/>
           <p:cNvSpPr/>
           <p:nvPr/>
         </p:nvSpPr>
@@ -4487,7 +6398,7 @@
       </p:sp>
       <p:sp>
         <p:nvSpPr>
-          <p:cNvPr id="5" name="Text 3"/>
+          <p:cNvPr id="6" name="Text 4"/>
           <p:cNvSpPr/>
           <p:nvPr/>
         </p:nvSpPr>
@@ -4526,13 +6437,77 @@
       </p:sp>
       <p:sp>
         <p:nvSpPr>
-          <p:cNvPr id="6" name="Text 4"/>
+          <p:cNvPr id="7" name="Shape 5"/>
           <p:cNvSpPr/>
           <p:nvPr/>
         </p:nvSpPr>
         <p:spPr>
           <a:xfrm>
             <a:off x="640080" y="658368"/>
+            <a:ext cx="420624" cy="420624"/>
+          </a:xfrm>
+          <a:prstGeom prst="ellipse">
+            <a:avLst/>
+          </a:prstGeom>
+          <a:solidFill>
+            <a:srgbClr val="0068B7"/>
+          </a:solidFill>
+          <a:ln w="12700">
+            <a:solidFill>
+              <a:srgbClr val="0068B7"/>
+            </a:solidFill>
+            <a:prstDash val="solid"/>
+          </a:ln>
+        </p:spPr>
+      </p:sp>
+      <p:sp>
+        <p:nvSpPr>
+          <p:cNvPr id="8" name="Text 6"/>
+          <p:cNvSpPr/>
+          <p:nvPr/>
+        </p:nvSpPr>
+        <p:spPr>
+          <a:xfrm>
+            <a:off x="640080" y="731520"/>
+            <a:ext cx="420624" cy="164592"/>
+          </a:xfrm>
+          <a:prstGeom prst="rect">
+            <a:avLst/>
+          </a:prstGeom>
+          <a:noFill/>
+          <a:ln/>
+        </p:spPr>
+        <p:txBody>
+          <a:bodyPr wrap="square" lIns="0" tIns="0" rIns="0" bIns="0" rtlCol="0" anchor="ctr"/>
+          <a:lstStyle/>
+          <a:p>
+            <a:pPr algn="ctr" indent="0" marL="0">
+              <a:buNone/>
+            </a:pPr>
+            <a:r>
+              <a:rPr lang="en-US" sz="1100" b="1" dirty="0">
+                <a:solidFill>
+                  <a:srgbClr val="FFFFFF"/>
+                </a:solidFill>
+                <a:latin typeface="Aptos" pitchFamily="34" charset="0"/>
+                <a:ea typeface="Aptos" pitchFamily="34" charset="-122"/>
+                <a:cs typeface="Aptos" pitchFamily="34" charset="-120"/>
+              </a:rPr>
+              <a:t>7</a:t>
+            </a:r>
+            <a:endParaRPr lang="en-US" sz="1100" dirty="0"/>
+          </a:p>
+        </p:txBody>
+      </p:sp>
+      <p:sp>
+        <p:nvSpPr>
+          <p:cNvPr id="9" name="Text 7"/>
+          <p:cNvSpPr/>
+          <p:nvPr/>
+        </p:nvSpPr>
+        <p:spPr>
+          <a:xfrm>
+            <a:off x="640080" y="621792"/>
             <a:ext cx="10881360" cy="566928"/>
           </a:xfrm>
           <a:prstGeom prst="rect">
@@ -4559,7 +6534,7 @@
                 <a:ea typeface="Aptos Display" pitchFamily="34" charset="-122"/>
                 <a:cs typeface="Aptos Display" pitchFamily="34" charset="-120"/>
               </a:rPr>
-              <a:t>Expected Artifact or Evidence Continued</a:t>
+              <a:t>Practical Exercise</a:t>
             </a:r>
             <a:endParaRPr lang="en-US" sz="2700" dirty="0"/>
           </a:p>
@@ -4567,32 +6542,29 @@
       </p:sp>
       <p:sp>
         <p:nvSpPr>
-          <p:cNvPr id="7" name="Text 5"/>
-          <p:cNvSpPr/>
-          <p:nvPr/>
-        </p:nvSpPr>
-        <p:spPr>
-          <a:xfrm>
-            <a:off x="822960" y="1325880"/>
-            <a:ext cx="10378440" cy="4800600"/>
-          </a:xfrm>
-          <a:prstGeom prst="rect">
-            <a:avLst/>
-          </a:prstGeom>
-          <a:noFill/>
-          <a:ln/>
-        </p:spPr>
-        <p:txBody>
-          <a:bodyPr wrap="square" lIns="1016" tIns="1016" rIns="1016" bIns="1016" rtlCol="0" anchor="t">
+          <p:cNvPr id="10" name="Text 8"/>
+          <p:cNvSpPr/>
+          <p:nvPr/>
+        </p:nvSpPr>
+        <p:spPr>
+          <a:xfrm>
+            <a:off x="868680" y="1417320"/>
+            <a:ext cx="6675120" cy="4434840"/>
+          </a:xfrm>
+          <a:prstGeom prst="rect">
+            <a:avLst/>
+          </a:prstGeom>
+          <a:noFill/>
+          <a:ln/>
+        </p:spPr>
+        <p:txBody>
+          <a:bodyPr wrap="square" lIns="635" tIns="635" rIns="635" bIns="635" rtlCol="0" anchor="t">
             <a:normAutofit/>
           </a:bodyPr>
           <a:lstStyle/>
           <a:p>
-            <a:pPr indent="0" marL="0">
-              <a:buNone/>
-            </a:pPr>
-            <a:r>
-              <a:rPr lang="en-US" sz="1420" dirty="0">
+            <a:r>
+              <a:rPr lang="en-US" sz="1700" dirty="0">
                 <a:solidFill>
                   <a:srgbClr val="17364A"/>
                 </a:solidFill>
@@ -4600,9 +6572,237 @@
                 <a:ea typeface="Aptos" pitchFamily="34" charset="-122"/>
                 <a:cs typeface="Aptos" pitchFamily="34" charset="-120"/>
               </a:rPr>
-              <a:t>Launch readiness checklist Transition-to-operations plan</a:t>
-            </a:r>
-            <a:endParaRPr lang="en-US" sz="1420" dirty="0"/>
+              <a:t>Create an AI project charter and implementation plan for one proposed AI-supported public health workflow.</a:t>
+            </a:r>
+            <a:endParaRPr lang="en-US" sz="1700" dirty="0"/>
+          </a:p>
+          <a:p>
+            <a:r>
+              <a:rPr lang="en-US" sz="1700" dirty="0">
+                <a:solidFill>
+                  <a:srgbClr val="17364A"/>
+                </a:solidFill>
+                <a:latin typeface="Aptos" pitchFamily="34" charset="0"/>
+                <a:ea typeface="Aptos" pitchFamily="34" charset="-122"/>
+                <a:cs typeface="Aptos" pitchFamily="34" charset="-120"/>
+              </a:rPr>
+              <a:t>Include project purpose, scope, objectives, roles, governance gates, milestones, workstreams, dependencies, risks, launch.</a:t>
+            </a:r>
+            <a:endParaRPr lang="en-US" sz="1700" dirty="0"/>
+          </a:p>
+        </p:txBody>
+      </p:sp>
+      <p:sp>
+        <p:nvSpPr>
+          <p:cNvPr id="11" name="Shape 9"/>
+          <p:cNvSpPr/>
+          <p:nvPr/>
+        </p:nvSpPr>
+        <p:spPr>
+          <a:xfrm>
+            <a:off x="7909560" y="1417320"/>
+            <a:ext cx="3154680" cy="1828800"/>
+          </a:xfrm>
+          <a:prstGeom prst="roundRect">
+            <a:avLst>
+              <a:gd name="adj" fmla="val 6000"/>
+            </a:avLst>
+          </a:prstGeom>
+          <a:solidFill>
+            <a:srgbClr val="EEF8ED"/>
+          </a:solidFill>
+          <a:ln w="12700">
+            <a:solidFill>
+              <a:srgbClr val="B9D7E6"/>
+            </a:solidFill>
+            <a:prstDash val="solid"/>
+          </a:ln>
+        </p:spPr>
+      </p:sp>
+      <p:sp>
+        <p:nvSpPr>
+          <p:cNvPr id="12" name="Text 10"/>
+          <p:cNvSpPr/>
+          <p:nvPr/>
+        </p:nvSpPr>
+        <p:spPr>
+          <a:xfrm>
+            <a:off x="8074152" y="1563624"/>
+            <a:ext cx="2825496" cy="201168"/>
+          </a:xfrm>
+          <a:prstGeom prst="rect">
+            <a:avLst/>
+          </a:prstGeom>
+          <a:noFill/>
+          <a:ln/>
+        </p:spPr>
+        <p:txBody>
+          <a:bodyPr wrap="square" lIns="0" tIns="0" rIns="0" bIns="0" rtlCol="0" anchor="ctr"/>
+          <a:lstStyle/>
+          <a:p>
+            <a:pPr indent="0" marL="0">
+              <a:buNone/>
+            </a:pPr>
+            <a:r>
+              <a:rPr lang="en-US" sz="950" b="1" dirty="0">
+                <a:solidFill>
+                  <a:srgbClr val="0068B7"/>
+                </a:solidFill>
+                <a:latin typeface="Aptos" pitchFamily="34" charset="0"/>
+                <a:ea typeface="Aptos" pitchFamily="34" charset="-122"/>
+                <a:cs typeface="Aptos" pitchFamily="34" charset="-120"/>
+              </a:rPr>
+              <a:t>Key idea</a:t>
+            </a:r>
+            <a:endParaRPr lang="en-US" sz="950" dirty="0"/>
+          </a:p>
+        </p:txBody>
+      </p:sp>
+      <p:sp>
+        <p:nvSpPr>
+          <p:cNvPr id="13" name="Text 11"/>
+          <p:cNvSpPr/>
+          <p:nvPr/>
+        </p:nvSpPr>
+        <p:spPr>
+          <a:xfrm>
+            <a:off x="8074152" y="1856232"/>
+            <a:ext cx="2825496" cy="1261872"/>
+          </a:xfrm>
+          <a:prstGeom prst="rect">
+            <a:avLst/>
+          </a:prstGeom>
+          <a:noFill/>
+          <a:ln/>
+        </p:spPr>
+        <p:txBody>
+          <a:bodyPr wrap="square" lIns="0" tIns="0" rIns="0" bIns="0" rtlCol="0" anchor="t">
+            <a:normAutofit/>
+          </a:bodyPr>
+          <a:lstStyle/>
+          <a:p>
+            <a:pPr indent="0" marL="0">
+              <a:buNone/>
+            </a:pPr>
+            <a:r>
+              <a:rPr lang="en-US" sz="1250" dirty="0">
+                <a:solidFill>
+                  <a:srgbClr val="17364A"/>
+                </a:solidFill>
+                <a:latin typeface="Aptos" pitchFamily="34" charset="0"/>
+                <a:ea typeface="Aptos" pitchFamily="34" charset="-122"/>
+                <a:cs typeface="Aptos" pitchFamily="34" charset="-120"/>
+              </a:rPr>
+              <a:t>Create an AI project charter and implementation plan for one proposed AI-supported public health workflow.</a:t>
+            </a:r>
+            <a:endParaRPr lang="en-US" sz="1250" dirty="0"/>
+          </a:p>
+        </p:txBody>
+      </p:sp>
+      <p:sp>
+        <p:nvSpPr>
+          <p:cNvPr id="14" name="Shape 12"/>
+          <p:cNvSpPr/>
+          <p:nvPr/>
+        </p:nvSpPr>
+        <p:spPr>
+          <a:xfrm>
+            <a:off x="7909560" y="3520440"/>
+            <a:ext cx="3154680" cy="1737360"/>
+          </a:xfrm>
+          <a:prstGeom prst="roundRect">
+            <a:avLst>
+              <a:gd name="adj" fmla="val 6316"/>
+            </a:avLst>
+          </a:prstGeom>
+          <a:solidFill>
+            <a:srgbClr val="EAF6F8"/>
+          </a:solidFill>
+          <a:ln w="12700">
+            <a:solidFill>
+              <a:srgbClr val="B9D7E6"/>
+            </a:solidFill>
+            <a:prstDash val="solid"/>
+          </a:ln>
+        </p:spPr>
+      </p:sp>
+      <p:sp>
+        <p:nvSpPr>
+          <p:cNvPr id="15" name="Text 13"/>
+          <p:cNvSpPr/>
+          <p:nvPr/>
+        </p:nvSpPr>
+        <p:spPr>
+          <a:xfrm>
+            <a:off x="8074152" y="3666744"/>
+            <a:ext cx="2825496" cy="201168"/>
+          </a:xfrm>
+          <a:prstGeom prst="rect">
+            <a:avLst/>
+          </a:prstGeom>
+          <a:noFill/>
+          <a:ln/>
+        </p:spPr>
+        <p:txBody>
+          <a:bodyPr wrap="square" lIns="0" tIns="0" rIns="0" bIns="0" rtlCol="0" anchor="ctr"/>
+          <a:lstStyle/>
+          <a:p>
+            <a:pPr indent="0" marL="0">
+              <a:buNone/>
+            </a:pPr>
+            <a:r>
+              <a:rPr lang="en-US" sz="950" b="1" dirty="0">
+                <a:solidFill>
+                  <a:srgbClr val="0068B7"/>
+                </a:solidFill>
+                <a:latin typeface="Aptos" pitchFamily="34" charset="0"/>
+                <a:ea typeface="Aptos" pitchFamily="34" charset="-122"/>
+                <a:cs typeface="Aptos" pitchFamily="34" charset="-120"/>
+              </a:rPr>
+              <a:t>Use this for</a:t>
+            </a:r>
+            <a:endParaRPr lang="en-US" sz="950" dirty="0"/>
+          </a:p>
+        </p:txBody>
+      </p:sp>
+      <p:sp>
+        <p:nvSpPr>
+          <p:cNvPr id="16" name="Text 14"/>
+          <p:cNvSpPr/>
+          <p:nvPr/>
+        </p:nvSpPr>
+        <p:spPr>
+          <a:xfrm>
+            <a:off x="8074152" y="3959352"/>
+            <a:ext cx="2825496" cy="1170432"/>
+          </a:xfrm>
+          <a:prstGeom prst="rect">
+            <a:avLst/>
+          </a:prstGeom>
+          <a:noFill/>
+          <a:ln/>
+        </p:spPr>
+        <p:txBody>
+          <a:bodyPr wrap="square" lIns="0" tIns="0" rIns="0" bIns="0" rtlCol="0" anchor="t">
+            <a:normAutofit/>
+          </a:bodyPr>
+          <a:lstStyle/>
+          <a:p>
+            <a:pPr indent="0" marL="0">
+              <a:buNone/>
+            </a:pPr>
+            <a:r>
+              <a:rPr lang="en-US" sz="1250" dirty="0">
+                <a:solidFill>
+                  <a:srgbClr val="17364A"/>
+                </a:solidFill>
+                <a:latin typeface="Aptos" pitchFamily="34" charset="0"/>
+                <a:ea typeface="Aptos" pitchFamily="34" charset="-122"/>
+                <a:cs typeface="Aptos" pitchFamily="34" charset="-120"/>
+              </a:rPr>
+              <a:t>Connect the concept to public health decisions, safeguards, documentation, or implementation work.</a:t>
+            </a:r>
+            <a:endParaRPr lang="en-US" sz="1250" dirty="0"/>
           </a:p>
         </p:txBody>
       </p:sp>
@@ -4665,7 +6865,32 @@
       </p:sp>
       <p:sp>
         <p:nvSpPr>
-          <p:cNvPr id="3" name="Text 1"/>
+          <p:cNvPr id="3" name="Shape 1"/>
+          <p:cNvSpPr/>
+          <p:nvPr/>
+        </p:nvSpPr>
+        <p:spPr>
+          <a:xfrm>
+            <a:off x="0" y="164592"/>
+            <a:ext cx="146304" cy="6693408"/>
+          </a:xfrm>
+          <a:prstGeom prst="rect">
+            <a:avLst/>
+          </a:prstGeom>
+          <a:solidFill>
+            <a:srgbClr val="2F8A28"/>
+          </a:solidFill>
+          <a:ln w="12700">
+            <a:solidFill>
+              <a:srgbClr val="2F8A28"/>
+            </a:solidFill>
+            <a:prstDash val="solid"/>
+          </a:ln>
+        </p:spPr>
+      </p:sp>
+      <p:sp>
+        <p:nvSpPr>
+          <p:cNvPr id="4" name="Text 2"/>
           <p:cNvSpPr/>
           <p:nvPr/>
         </p:nvSpPr>
@@ -4704,7 +6929,7 @@
       </p:sp>
       <p:sp>
         <p:nvSpPr>
-          <p:cNvPr id="4" name="Text 2"/>
+          <p:cNvPr id="5" name="Text 3"/>
           <p:cNvSpPr/>
           <p:nvPr/>
         </p:nvSpPr>
@@ -4743,7 +6968,7 @@
       </p:sp>
       <p:sp>
         <p:nvSpPr>
-          <p:cNvPr id="5" name="Text 3"/>
+          <p:cNvPr id="6" name="Text 4"/>
           <p:cNvSpPr/>
           <p:nvPr/>
         </p:nvSpPr>
@@ -4782,13 +7007,77 @@
       </p:sp>
       <p:sp>
         <p:nvSpPr>
-          <p:cNvPr id="6" name="Text 4"/>
+          <p:cNvPr id="7" name="Shape 5"/>
           <p:cNvSpPr/>
           <p:nvPr/>
         </p:nvSpPr>
         <p:spPr>
           <a:xfrm>
             <a:off x="640080" y="658368"/>
+            <a:ext cx="420624" cy="420624"/>
+          </a:xfrm>
+          <a:prstGeom prst="ellipse">
+            <a:avLst/>
+          </a:prstGeom>
+          <a:solidFill>
+            <a:srgbClr val="0068B7"/>
+          </a:solidFill>
+          <a:ln w="12700">
+            <a:solidFill>
+              <a:srgbClr val="0068B7"/>
+            </a:solidFill>
+            <a:prstDash val="solid"/>
+          </a:ln>
+        </p:spPr>
+      </p:sp>
+      <p:sp>
+        <p:nvSpPr>
+          <p:cNvPr id="8" name="Text 6"/>
+          <p:cNvSpPr/>
+          <p:nvPr/>
+        </p:nvSpPr>
+        <p:spPr>
+          <a:xfrm>
+            <a:off x="640080" y="731520"/>
+            <a:ext cx="420624" cy="164592"/>
+          </a:xfrm>
+          <a:prstGeom prst="rect">
+            <a:avLst/>
+          </a:prstGeom>
+          <a:noFill/>
+          <a:ln/>
+        </p:spPr>
+        <p:txBody>
+          <a:bodyPr wrap="square" lIns="0" tIns="0" rIns="0" bIns="0" rtlCol="0" anchor="ctr"/>
+          <a:lstStyle/>
+          <a:p>
+            <a:pPr algn="ctr" indent="0" marL="0">
+              <a:buNone/>
+            </a:pPr>
+            <a:r>
+              <a:rPr lang="en-US" sz="1100" b="1" dirty="0">
+                <a:solidFill>
+                  <a:srgbClr val="FFFFFF"/>
+                </a:solidFill>
+                <a:latin typeface="Aptos" pitchFamily="34" charset="0"/>
+                <a:ea typeface="Aptos" pitchFamily="34" charset="-122"/>
+                <a:cs typeface="Aptos" pitchFamily="34" charset="-120"/>
+              </a:rPr>
+              <a:t>8</a:t>
+            </a:r>
+            <a:endParaRPr lang="en-US" sz="1100" dirty="0"/>
+          </a:p>
+        </p:txBody>
+      </p:sp>
+      <p:sp>
+        <p:nvSpPr>
+          <p:cNvPr id="9" name="Text 7"/>
+          <p:cNvSpPr/>
+          <p:nvPr/>
+        </p:nvSpPr>
+        <p:spPr>
+          <a:xfrm>
+            <a:off x="640080" y="621792"/>
             <a:ext cx="10881360" cy="566928"/>
           </a:xfrm>
           <a:prstGeom prst="rect">
@@ -4815,7 +7104,7 @@
                 <a:ea typeface="Aptos Display" pitchFamily="34" charset="-122"/>
                 <a:cs typeface="Aptos Display" pitchFamily="34" charset="-120"/>
               </a:rPr>
-              <a:t>Expected Assignment</a:t>
+              <a:t>Expected Artifact or Evidence</a:t>
             </a:r>
             <a:endParaRPr lang="en-US" sz="2700" dirty="0"/>
           </a:p>
@@ -4823,14 +7112,14 @@
       </p:sp>
       <p:sp>
         <p:nvSpPr>
-          <p:cNvPr id="7" name="Text 5"/>
-          <p:cNvSpPr/>
-          <p:nvPr/>
-        </p:nvSpPr>
-        <p:spPr>
-          <a:xfrm>
-            <a:off x="822960" y="1325880"/>
-            <a:ext cx="10378440" cy="4800600"/>
+          <p:cNvPr id="10" name="Text 8"/>
+          <p:cNvSpPr/>
+          <p:nvPr/>
+        </p:nvSpPr>
+        <p:spPr>
+          <a:xfrm>
+            <a:off x="868680" y="1417320"/>
+            <a:ext cx="6675120" cy="4434840"/>
           </a:xfrm>
           <a:prstGeom prst="rect">
             <a:avLst/>
@@ -4845,7 +7134,7 @@
           <a:lstStyle/>
           <a:p>
             <a:r>
-              <a:rPr lang="en-US" sz="1450" dirty="0">
+              <a:rPr lang="en-US" sz="1700" dirty="0">
                 <a:solidFill>
                   <a:srgbClr val="17364A"/>
                 </a:solidFill>
@@ -4855,11 +7144,11 @@
               </a:rPr>
               <a:t>AI project charter</a:t>
             </a:r>
-            <a:endParaRPr lang="en-US" sz="1450" dirty="0"/>
-          </a:p>
-          <a:p>
-            <a:r>
-              <a:rPr lang="en-US" sz="1450" dirty="0">
+            <a:endParaRPr lang="en-US" sz="1700" dirty="0"/>
+          </a:p>
+          <a:p>
+            <a:r>
+              <a:rPr lang="en-US" sz="1700" dirty="0">
                 <a:solidFill>
                   <a:srgbClr val="17364A"/>
                 </a:solidFill>
@@ -4869,11 +7158,11 @@
               </a:rPr>
               <a:t>Implementation workplan</a:t>
             </a:r>
-            <a:endParaRPr lang="en-US" sz="1450" dirty="0"/>
-          </a:p>
-          <a:p>
-            <a:r>
-              <a:rPr lang="en-US" sz="1450" dirty="0">
+            <a:endParaRPr lang="en-US" sz="1700" dirty="0"/>
+          </a:p>
+          <a:p>
+            <a:r>
+              <a:rPr lang="en-US" sz="1700" dirty="0">
                 <a:solidFill>
                   <a:srgbClr val="17364A"/>
                 </a:solidFill>
@@ -4883,11 +7172,104 @@
               </a:rPr>
               <a:t>AI-specific risk log</a:t>
             </a:r>
-            <a:endParaRPr lang="en-US" sz="1450" dirty="0"/>
-          </a:p>
-          <a:p>
-            <a:r>
-              <a:rPr lang="en-US" sz="1450" dirty="0">
+            <a:endParaRPr lang="en-US" sz="1700" dirty="0"/>
+          </a:p>
+        </p:txBody>
+      </p:sp>
+      <p:sp>
+        <p:nvSpPr>
+          <p:cNvPr id="11" name="Shape 9"/>
+          <p:cNvSpPr/>
+          <p:nvPr/>
+        </p:nvSpPr>
+        <p:spPr>
+          <a:xfrm>
+            <a:off x="7909560" y="1417320"/>
+            <a:ext cx="3154680" cy="1828800"/>
+          </a:xfrm>
+          <a:prstGeom prst="roundRect">
+            <a:avLst>
+              <a:gd name="adj" fmla="val 6000"/>
+            </a:avLst>
+          </a:prstGeom>
+          <a:solidFill>
+            <a:srgbClr val="EEF8ED"/>
+          </a:solidFill>
+          <a:ln w="12700">
+            <a:solidFill>
+              <a:srgbClr val="B9D7E6"/>
+            </a:solidFill>
+            <a:prstDash val="solid"/>
+          </a:ln>
+        </p:spPr>
+      </p:sp>
+      <p:sp>
+        <p:nvSpPr>
+          <p:cNvPr id="12" name="Text 10"/>
+          <p:cNvSpPr/>
+          <p:nvPr/>
+        </p:nvSpPr>
+        <p:spPr>
+          <a:xfrm>
+            <a:off x="8074152" y="1563624"/>
+            <a:ext cx="2825496" cy="201168"/>
+          </a:xfrm>
+          <a:prstGeom prst="rect">
+            <a:avLst/>
+          </a:prstGeom>
+          <a:noFill/>
+          <a:ln/>
+        </p:spPr>
+        <p:txBody>
+          <a:bodyPr wrap="square" lIns="0" tIns="0" rIns="0" bIns="0" rtlCol="0" anchor="ctr"/>
+          <a:lstStyle/>
+          <a:p>
+            <a:pPr indent="0" marL="0">
+              <a:buNone/>
+            </a:pPr>
+            <a:r>
+              <a:rPr lang="en-US" sz="950" b="1" dirty="0">
+                <a:solidFill>
+                  <a:srgbClr val="0068B7"/>
+                </a:solidFill>
+                <a:latin typeface="Aptos" pitchFamily="34" charset="0"/>
+                <a:ea typeface="Aptos" pitchFamily="34" charset="-122"/>
+                <a:cs typeface="Aptos" pitchFamily="34" charset="-120"/>
+              </a:rPr>
+              <a:t>Key idea</a:t>
+            </a:r>
+            <a:endParaRPr lang="en-US" sz="950" dirty="0"/>
+          </a:p>
+        </p:txBody>
+      </p:sp>
+      <p:sp>
+        <p:nvSpPr>
+          <p:cNvPr id="13" name="Text 11"/>
+          <p:cNvSpPr/>
+          <p:nvPr/>
+        </p:nvSpPr>
+        <p:spPr>
+          <a:xfrm>
+            <a:off x="8074152" y="1856232"/>
+            <a:ext cx="2825496" cy="1261872"/>
+          </a:xfrm>
+          <a:prstGeom prst="rect">
+            <a:avLst/>
+          </a:prstGeom>
+          <a:noFill/>
+          <a:ln/>
+        </p:spPr>
+        <p:txBody>
+          <a:bodyPr wrap="square" lIns="0" tIns="0" rIns="0" bIns="0" rtlCol="0" anchor="t">
+            <a:normAutofit/>
+          </a:bodyPr>
+          <a:lstStyle/>
+          <a:p>
+            <a:pPr indent="0" marL="0">
+              <a:buNone/>
+            </a:pPr>
+            <a:r>
+              <a:rPr lang="en-US" sz="1250" dirty="0">
                 <a:solidFill>
                   <a:srgbClr val="17364A"/>
                 </a:solidFill>
@@ -4895,13 +7277,106 @@
                 <a:ea typeface="Aptos" pitchFamily="34" charset="-122"/>
                 <a:cs typeface="Aptos" pitchFamily="34" charset="-120"/>
               </a:rPr>
-              <a:t>Launch readiness checklist</a:t>
-            </a:r>
-            <a:endParaRPr lang="en-US" sz="1450" dirty="0"/>
-          </a:p>
-          <a:p>
-            <a:r>
-              <a:rPr lang="en-US" sz="1450" dirty="0">
+              <a:t>AI project charter</a:t>
+            </a:r>
+            <a:endParaRPr lang="en-US" sz="1250" dirty="0"/>
+          </a:p>
+        </p:txBody>
+      </p:sp>
+      <p:sp>
+        <p:nvSpPr>
+          <p:cNvPr id="14" name="Shape 12"/>
+          <p:cNvSpPr/>
+          <p:nvPr/>
+        </p:nvSpPr>
+        <p:spPr>
+          <a:xfrm>
+            <a:off x="7909560" y="3520440"/>
+            <a:ext cx="3154680" cy="1737360"/>
+          </a:xfrm>
+          <a:prstGeom prst="roundRect">
+            <a:avLst>
+              <a:gd name="adj" fmla="val 6316"/>
+            </a:avLst>
+          </a:prstGeom>
+          <a:solidFill>
+            <a:srgbClr val="EAF6F8"/>
+          </a:solidFill>
+          <a:ln w="12700">
+            <a:solidFill>
+              <a:srgbClr val="B9D7E6"/>
+            </a:solidFill>
+            <a:prstDash val="solid"/>
+          </a:ln>
+        </p:spPr>
+      </p:sp>
+      <p:sp>
+        <p:nvSpPr>
+          <p:cNvPr id="15" name="Text 13"/>
+          <p:cNvSpPr/>
+          <p:nvPr/>
+        </p:nvSpPr>
+        <p:spPr>
+          <a:xfrm>
+            <a:off x="8074152" y="3666744"/>
+            <a:ext cx="2825496" cy="201168"/>
+          </a:xfrm>
+          <a:prstGeom prst="rect">
+            <a:avLst/>
+          </a:prstGeom>
+          <a:noFill/>
+          <a:ln/>
+        </p:spPr>
+        <p:txBody>
+          <a:bodyPr wrap="square" lIns="0" tIns="0" rIns="0" bIns="0" rtlCol="0" anchor="ctr"/>
+          <a:lstStyle/>
+          <a:p>
+            <a:pPr indent="0" marL="0">
+              <a:buNone/>
+            </a:pPr>
+            <a:r>
+              <a:rPr lang="en-US" sz="950" b="1" dirty="0">
+                <a:solidFill>
+                  <a:srgbClr val="0068B7"/>
+                </a:solidFill>
+                <a:latin typeface="Aptos" pitchFamily="34" charset="0"/>
+                <a:ea typeface="Aptos" pitchFamily="34" charset="-122"/>
+                <a:cs typeface="Aptos" pitchFamily="34" charset="-120"/>
+              </a:rPr>
+              <a:t>Use this for</a:t>
+            </a:r>
+            <a:endParaRPr lang="en-US" sz="950" dirty="0"/>
+          </a:p>
+        </p:txBody>
+      </p:sp>
+      <p:sp>
+        <p:nvSpPr>
+          <p:cNvPr id="16" name="Text 14"/>
+          <p:cNvSpPr/>
+          <p:nvPr/>
+        </p:nvSpPr>
+        <p:spPr>
+          <a:xfrm>
+            <a:off x="8074152" y="3959352"/>
+            <a:ext cx="2825496" cy="1170432"/>
+          </a:xfrm>
+          <a:prstGeom prst="rect">
+            <a:avLst/>
+          </a:prstGeom>
+          <a:noFill/>
+          <a:ln/>
+        </p:spPr>
+        <p:txBody>
+          <a:bodyPr wrap="square" lIns="0" tIns="0" rIns="0" bIns="0" rtlCol="0" anchor="t">
+            <a:normAutofit/>
+          </a:bodyPr>
+          <a:lstStyle/>
+          <a:p>
+            <a:pPr indent="0" marL="0">
+              <a:buNone/>
+            </a:pPr>
+            <a:r>
+              <a:rPr lang="en-US" sz="1250" dirty="0">
                 <a:solidFill>
                   <a:srgbClr val="17364A"/>
                 </a:solidFill>
@@ -4909,9 +7384,9 @@
                 <a:ea typeface="Aptos" pitchFamily="34" charset="-122"/>
                 <a:cs typeface="Aptos" pitchFamily="34" charset="-120"/>
               </a:rPr>
-              <a:t>Transition-to-operations plan</a:t>
-            </a:r>
-            <a:endParaRPr lang="en-US" sz="1450" dirty="0"/>
+              <a:t>Connect the concept to public health decisions, safeguards, documentation, or implementation work.</a:t>
+            </a:r>
+            <a:endParaRPr lang="en-US" sz="1250" dirty="0"/>
           </a:p>
         </p:txBody>
       </p:sp>
@@ -4974,7 +7449,32 @@
       </p:sp>
       <p:sp>
         <p:nvSpPr>
-          <p:cNvPr id="3" name="Text 1"/>
+          <p:cNvPr id="3" name="Shape 1"/>
+          <p:cNvSpPr/>
+          <p:nvPr/>
+        </p:nvSpPr>
+        <p:spPr>
+          <a:xfrm>
+            <a:off x="0" y="164592"/>
+            <a:ext cx="146304" cy="6693408"/>
+          </a:xfrm>
+          <a:prstGeom prst="rect">
+            <a:avLst/>
+          </a:prstGeom>
+          <a:solidFill>
+            <a:srgbClr val="2F8A28"/>
+          </a:solidFill>
+          <a:ln w="12700">
+            <a:solidFill>
+              <a:srgbClr val="2F8A28"/>
+            </a:solidFill>
+            <a:prstDash val="solid"/>
+          </a:ln>
+        </p:spPr>
+      </p:sp>
+      <p:sp>
+        <p:nvSpPr>
+          <p:cNvPr id="4" name="Text 2"/>
           <p:cNvSpPr/>
           <p:nvPr/>
         </p:nvSpPr>
@@ -5013,7 +7513,7 @@
       </p:sp>
       <p:sp>
         <p:nvSpPr>
-          <p:cNvPr id="4" name="Text 2"/>
+          <p:cNvPr id="5" name="Text 3"/>
           <p:cNvSpPr/>
           <p:nvPr/>
         </p:nvSpPr>
@@ -5052,7 +7552,7 @@
       </p:sp>
       <p:sp>
         <p:nvSpPr>
-          <p:cNvPr id="5" name="Text 3"/>
+          <p:cNvPr id="6" name="Text 4"/>
           <p:cNvSpPr/>
           <p:nvPr/>
         </p:nvSpPr>
@@ -5091,7 +7591,7 @@
       </p:sp>
       <p:sp>
         <p:nvSpPr>
-          <p:cNvPr id="6" name="Text 4"/>
+          <p:cNvPr id="7" name="Text 5"/>
           <p:cNvSpPr/>
           <p:nvPr/>
         </p:nvSpPr>
@@ -5124,7 +7624,7 @@
                 <a:ea typeface="Aptos Display" pitchFamily="34" charset="-122"/>
                 <a:cs typeface="Aptos Display" pitchFamily="34" charset="-120"/>
               </a:rPr>
-              <a:t>Knowledge Check</a:t>
+              <a:t>Expected Artifact or Evidence Continued</a:t>
             </a:r>
             <a:endParaRPr lang="en-US" sz="2700" dirty="0"/>
           </a:p>
@@ -5132,14 +7632,14 @@
       </p:sp>
       <p:sp>
         <p:nvSpPr>
-          <p:cNvPr id="7" name="Text 5"/>
-          <p:cNvSpPr/>
-          <p:nvPr/>
-        </p:nvSpPr>
-        <p:spPr>
-          <a:xfrm>
-            <a:off x="822960" y="1325880"/>
-            <a:ext cx="10378440" cy="4800600"/>
+          <p:cNvPr id="8" name="Text 6"/>
+          <p:cNvSpPr/>
+          <p:nvPr/>
+        </p:nvSpPr>
+        <p:spPr>
+          <a:xfrm>
+            <a:off x="868680" y="1417320"/>
+            <a:ext cx="6675120" cy="4434840"/>
           </a:xfrm>
           <a:prstGeom prst="rect">
             <a:avLst/>
@@ -5154,7 +7654,7 @@
           <a:lstStyle/>
           <a:p>
             <a:r>
-              <a:rPr lang="en-US" sz="1450" dirty="0">
+              <a:rPr lang="en-US" sz="1700" dirty="0">
                 <a:solidFill>
                   <a:srgbClr val="17364A"/>
                 </a:solidFill>
@@ -5162,13 +7662,13 @@
                 <a:ea typeface="Aptos" pitchFamily="34" charset="-122"/>
                 <a:cs typeface="Aptos" pitchFamily="34" charset="-120"/>
               </a:rPr>
-              <a:t>1. What distinguishes AI project management from ordinary software implementation?</a:t>
-            </a:r>
-            <a:endParaRPr lang="en-US" sz="1450" dirty="0"/>
-          </a:p>
-          <a:p>
-            <a:r>
-              <a:rPr lang="en-US" sz="1450" dirty="0">
+              <a:t>Launch readiness checklist</a:t>
+            </a:r>
+            <a:endParaRPr lang="en-US" sz="1700" dirty="0"/>
+          </a:p>
+          <a:p>
+            <a:r>
+              <a:rPr lang="en-US" sz="1700" dirty="0">
                 <a:solidFill>
                   <a:srgbClr val="17364A"/>
                 </a:solidFill>
@@ -5176,13 +7676,106 @@
                 <a:ea typeface="Aptos" pitchFamily="34" charset="-122"/>
                 <a:cs typeface="Aptos" pitchFamily="34" charset="-120"/>
               </a:rPr>
-              <a:t>2. What is a governance gate?</a:t>
-            </a:r>
-            <a:endParaRPr lang="en-US" sz="1450" dirty="0"/>
-          </a:p>
-          <a:p>
-            <a:r>
-              <a:rPr lang="en-US" sz="1450" dirty="0">
+              <a:t>Transition-to-operations plan</a:t>
+            </a:r>
+            <a:endParaRPr lang="en-US" sz="1700" dirty="0"/>
+          </a:p>
+        </p:txBody>
+      </p:sp>
+      <p:sp>
+        <p:nvSpPr>
+          <p:cNvPr id="9" name="Shape 7"/>
+          <p:cNvSpPr/>
+          <p:nvPr/>
+        </p:nvSpPr>
+        <p:spPr>
+          <a:xfrm>
+            <a:off x="7909560" y="1417320"/>
+            <a:ext cx="3154680" cy="1828800"/>
+          </a:xfrm>
+          <a:prstGeom prst="roundRect">
+            <a:avLst>
+              <a:gd name="adj" fmla="val 6000"/>
+            </a:avLst>
+          </a:prstGeom>
+          <a:solidFill>
+            <a:srgbClr val="EEF8ED"/>
+          </a:solidFill>
+          <a:ln w="12700">
+            <a:solidFill>
+              <a:srgbClr val="B9D7E6"/>
+            </a:solidFill>
+            <a:prstDash val="solid"/>
+          </a:ln>
+        </p:spPr>
+      </p:sp>
+      <p:sp>
+        <p:nvSpPr>
+          <p:cNvPr id="10" name="Text 8"/>
+          <p:cNvSpPr/>
+          <p:nvPr/>
+        </p:nvSpPr>
+        <p:spPr>
+          <a:xfrm>
+            <a:off x="8074152" y="1563624"/>
+            <a:ext cx="2825496" cy="201168"/>
+          </a:xfrm>
+          <a:prstGeom prst="rect">
+            <a:avLst/>
+          </a:prstGeom>
+          <a:noFill/>
+          <a:ln/>
+        </p:spPr>
+        <p:txBody>
+          <a:bodyPr wrap="square" lIns="0" tIns="0" rIns="0" bIns="0" rtlCol="0" anchor="ctr"/>
+          <a:lstStyle/>
+          <a:p>
+            <a:pPr indent="0" marL="0">
+              <a:buNone/>
+            </a:pPr>
+            <a:r>
+              <a:rPr lang="en-US" sz="950" b="1" dirty="0">
+                <a:solidFill>
+                  <a:srgbClr val="0068B7"/>
+                </a:solidFill>
+                <a:latin typeface="Aptos" pitchFamily="34" charset="0"/>
+                <a:ea typeface="Aptos" pitchFamily="34" charset="-122"/>
+                <a:cs typeface="Aptos" pitchFamily="34" charset="-120"/>
+              </a:rPr>
+              <a:t>Key idea</a:t>
+            </a:r>
+            <a:endParaRPr lang="en-US" sz="950" dirty="0"/>
+          </a:p>
+        </p:txBody>
+      </p:sp>
+      <p:sp>
+        <p:nvSpPr>
+          <p:cNvPr id="11" name="Text 9"/>
+          <p:cNvSpPr/>
+          <p:nvPr/>
+        </p:nvSpPr>
+        <p:spPr>
+          <a:xfrm>
+            <a:off x="8074152" y="1856232"/>
+            <a:ext cx="2825496" cy="1261872"/>
+          </a:xfrm>
+          <a:prstGeom prst="rect">
+            <a:avLst/>
+          </a:prstGeom>
+          <a:noFill/>
+          <a:ln/>
+        </p:spPr>
+        <p:txBody>
+          <a:bodyPr wrap="square" lIns="0" tIns="0" rIns="0" bIns="0" rtlCol="0" anchor="t">
+            <a:normAutofit/>
+          </a:bodyPr>
+          <a:lstStyle/>
+          <a:p>
+            <a:pPr indent="0" marL="0">
+              <a:buNone/>
+            </a:pPr>
+            <a:r>
+              <a:rPr lang="en-US" sz="1250" dirty="0">
                 <a:solidFill>
                   <a:srgbClr val="17364A"/>
                 </a:solidFill>
@@ -5190,13 +7783,106 @@
                 <a:ea typeface="Aptos" pitchFamily="34" charset="-122"/>
                 <a:cs typeface="Aptos" pitchFamily="34" charset="-120"/>
               </a:rPr>
-              <a:t>3. Which item belongs in an AI project charter?</a:t>
-            </a:r>
-            <a:endParaRPr lang="en-US" sz="1450" dirty="0"/>
-          </a:p>
-          <a:p>
-            <a:r>
-              <a:rPr lang="en-US" sz="1450" dirty="0">
+              <a:t>Launch readiness checklist</a:t>
+            </a:r>
+            <a:endParaRPr lang="en-US" sz="1250" dirty="0"/>
+          </a:p>
+        </p:txBody>
+      </p:sp>
+      <p:sp>
+        <p:nvSpPr>
+          <p:cNvPr id="12" name="Shape 10"/>
+          <p:cNvSpPr/>
+          <p:nvPr/>
+        </p:nvSpPr>
+        <p:spPr>
+          <a:xfrm>
+            <a:off x="7909560" y="3520440"/>
+            <a:ext cx="3154680" cy="1737360"/>
+          </a:xfrm>
+          <a:prstGeom prst="roundRect">
+            <a:avLst>
+              <a:gd name="adj" fmla="val 6316"/>
+            </a:avLst>
+          </a:prstGeom>
+          <a:solidFill>
+            <a:srgbClr val="EAF6F8"/>
+          </a:solidFill>
+          <a:ln w="12700">
+            <a:solidFill>
+              <a:srgbClr val="B9D7E6"/>
+            </a:solidFill>
+            <a:prstDash val="solid"/>
+          </a:ln>
+        </p:spPr>
+      </p:sp>
+      <p:sp>
+        <p:nvSpPr>
+          <p:cNvPr id="13" name="Text 11"/>
+          <p:cNvSpPr/>
+          <p:nvPr/>
+        </p:nvSpPr>
+        <p:spPr>
+          <a:xfrm>
+            <a:off x="8074152" y="3666744"/>
+            <a:ext cx="2825496" cy="201168"/>
+          </a:xfrm>
+          <a:prstGeom prst="rect">
+            <a:avLst/>
+          </a:prstGeom>
+          <a:noFill/>
+          <a:ln/>
+        </p:spPr>
+        <p:txBody>
+          <a:bodyPr wrap="square" lIns="0" tIns="0" rIns="0" bIns="0" rtlCol="0" anchor="ctr"/>
+          <a:lstStyle/>
+          <a:p>
+            <a:pPr indent="0" marL="0">
+              <a:buNone/>
+            </a:pPr>
+            <a:r>
+              <a:rPr lang="en-US" sz="950" b="1" dirty="0">
+                <a:solidFill>
+                  <a:srgbClr val="0068B7"/>
+                </a:solidFill>
+                <a:latin typeface="Aptos" pitchFamily="34" charset="0"/>
+                <a:ea typeface="Aptos" pitchFamily="34" charset="-122"/>
+                <a:cs typeface="Aptos" pitchFamily="34" charset="-120"/>
+              </a:rPr>
+              <a:t>Use this for</a:t>
+            </a:r>
+            <a:endParaRPr lang="en-US" sz="950" dirty="0"/>
+          </a:p>
+        </p:txBody>
+      </p:sp>
+      <p:sp>
+        <p:nvSpPr>
+          <p:cNvPr id="14" name="Text 12"/>
+          <p:cNvSpPr/>
+          <p:nvPr/>
+        </p:nvSpPr>
+        <p:spPr>
+          <a:xfrm>
+            <a:off x="8074152" y="3959352"/>
+            <a:ext cx="2825496" cy="1170432"/>
+          </a:xfrm>
+          <a:prstGeom prst="rect">
+            <a:avLst/>
+          </a:prstGeom>
+          <a:noFill/>
+          <a:ln/>
+        </p:spPr>
+        <p:txBody>
+          <a:bodyPr wrap="square" lIns="0" tIns="0" rIns="0" bIns="0" rtlCol="0" anchor="t">
+            <a:normAutofit/>
+          </a:bodyPr>
+          <a:lstStyle/>
+          <a:p>
+            <a:pPr indent="0" marL="0">
+              <a:buNone/>
+            </a:pPr>
+            <a:r>
+              <a:rPr lang="en-US" sz="1250" dirty="0">
                 <a:solidFill>
                   <a:srgbClr val="17364A"/>
                 </a:solidFill>
@@ -5204,23 +7890,9 @@
                 <a:ea typeface="Aptos" pitchFamily="34" charset="-122"/>
                 <a:cs typeface="Aptos" pitchFamily="34" charset="-120"/>
               </a:rPr>
-              <a:t>4. Why is transition to operations important?</a:t>
-            </a:r>
-            <a:endParaRPr lang="en-US" sz="1450" dirty="0"/>
-          </a:p>
-          <a:p>
-            <a:r>
-              <a:rPr lang="en-US" sz="1450" dirty="0">
-                <a:solidFill>
-                  <a:srgbClr val="17364A"/>
-                </a:solidFill>
-                <a:latin typeface="Aptos" pitchFamily="34" charset="0"/>
-                <a:ea typeface="Aptos" pitchFamily="34" charset="-122"/>
-                <a:cs typeface="Aptos" pitchFamily="34" charset="-120"/>
-              </a:rPr>
-              <a:t>5. What is strong completion evidence?</a:t>
-            </a:r>
-            <a:endParaRPr lang="en-US" sz="1450" dirty="0"/>
+              <a:t>Connect the concept to public health decisions, safeguards, documentation, or implementation work.</a:t>
+            </a:r>
+            <a:endParaRPr lang="en-US" sz="1250" dirty="0"/>
           </a:p>
         </p:txBody>
       </p:sp>
@@ -5283,7 +7955,32 @@
       </p:sp>
       <p:sp>
         <p:nvSpPr>
-          <p:cNvPr id="3" name="Text 1"/>
+          <p:cNvPr id="3" name="Shape 1"/>
+          <p:cNvSpPr/>
+          <p:nvPr/>
+        </p:nvSpPr>
+        <p:spPr>
+          <a:xfrm>
+            <a:off x="0" y="164592"/>
+            <a:ext cx="146304" cy="6693408"/>
+          </a:xfrm>
+          <a:prstGeom prst="rect">
+            <a:avLst/>
+          </a:prstGeom>
+          <a:solidFill>
+            <a:srgbClr val="2F8A28"/>
+          </a:solidFill>
+          <a:ln w="12700">
+            <a:solidFill>
+              <a:srgbClr val="2F8A28"/>
+            </a:solidFill>
+            <a:prstDash val="solid"/>
+          </a:ln>
+        </p:spPr>
+      </p:sp>
+      <p:sp>
+        <p:nvSpPr>
+          <p:cNvPr id="4" name="Text 2"/>
           <p:cNvSpPr/>
           <p:nvPr/>
         </p:nvSpPr>
@@ -5322,7 +8019,7 @@
       </p:sp>
       <p:sp>
         <p:nvSpPr>
-          <p:cNvPr id="4" name="Text 2"/>
+          <p:cNvPr id="5" name="Text 3"/>
           <p:cNvSpPr/>
           <p:nvPr/>
         </p:nvSpPr>
@@ -5361,7 +8058,7 @@
       </p:sp>
       <p:sp>
         <p:nvSpPr>
-          <p:cNvPr id="5" name="Text 3"/>
+          <p:cNvPr id="6" name="Text 4"/>
           <p:cNvSpPr/>
           <p:nvPr/>
         </p:nvSpPr>
@@ -5400,13 +8097,77 @@
       </p:sp>
       <p:sp>
         <p:nvSpPr>
-          <p:cNvPr id="6" name="Text 4"/>
+          <p:cNvPr id="7" name="Shape 5"/>
           <p:cNvSpPr/>
           <p:nvPr/>
         </p:nvSpPr>
         <p:spPr>
           <a:xfrm>
             <a:off x="640080" y="658368"/>
+            <a:ext cx="420624" cy="420624"/>
+          </a:xfrm>
+          <a:prstGeom prst="ellipse">
+            <a:avLst/>
+          </a:prstGeom>
+          <a:solidFill>
+            <a:srgbClr val="0068B7"/>
+          </a:solidFill>
+          <a:ln w="12700">
+            <a:solidFill>
+              <a:srgbClr val="0068B7"/>
+            </a:solidFill>
+            <a:prstDash val="solid"/>
+          </a:ln>
+        </p:spPr>
+      </p:sp>
+      <p:sp>
+        <p:nvSpPr>
+          <p:cNvPr id="8" name="Text 6"/>
+          <p:cNvSpPr/>
+          <p:nvPr/>
+        </p:nvSpPr>
+        <p:spPr>
+          <a:xfrm>
+            <a:off x="640080" y="731520"/>
+            <a:ext cx="420624" cy="164592"/>
+          </a:xfrm>
+          <a:prstGeom prst="rect">
+            <a:avLst/>
+          </a:prstGeom>
+          <a:noFill/>
+          <a:ln/>
+        </p:spPr>
+        <p:txBody>
+          <a:bodyPr wrap="square" lIns="0" tIns="0" rIns="0" bIns="0" rtlCol="0" anchor="ctr"/>
+          <a:lstStyle/>
+          <a:p>
+            <a:pPr algn="ctr" indent="0" marL="0">
+              <a:buNone/>
+            </a:pPr>
+            <a:r>
+              <a:rPr lang="en-US" sz="1100" b="1" dirty="0">
+                <a:solidFill>
+                  <a:srgbClr val="FFFFFF"/>
+                </a:solidFill>
+                <a:latin typeface="Aptos" pitchFamily="34" charset="0"/>
+                <a:ea typeface="Aptos" pitchFamily="34" charset="-122"/>
+                <a:cs typeface="Aptos" pitchFamily="34" charset="-120"/>
+              </a:rPr>
+              <a:t>9</a:t>
+            </a:r>
+            <a:endParaRPr lang="en-US" sz="1100" dirty="0"/>
+          </a:p>
+        </p:txBody>
+      </p:sp>
+      <p:sp>
+        <p:nvSpPr>
+          <p:cNvPr id="9" name="Text 7"/>
+          <p:cNvSpPr/>
+          <p:nvPr/>
+        </p:nvSpPr>
+        <p:spPr>
+          <a:xfrm>
+            <a:off x="640080" y="621792"/>
             <a:ext cx="10881360" cy="566928"/>
           </a:xfrm>
           <a:prstGeom prst="rect">
@@ -5433,7 +8194,7 @@
                 <a:ea typeface="Aptos Display" pitchFamily="34" charset="-122"/>
                 <a:cs typeface="Aptos Display" pitchFamily="34" charset="-120"/>
               </a:rPr>
-              <a:t>References and Resources</a:t>
+              <a:t>Expected Assignment</a:t>
             </a:r>
             <a:endParaRPr lang="en-US" sz="2700" dirty="0"/>
           </a:p>
@@ -5441,14 +8202,14 @@
       </p:sp>
       <p:sp>
         <p:nvSpPr>
-          <p:cNvPr id="7" name="Text 5"/>
-          <p:cNvSpPr/>
-          <p:nvPr/>
-        </p:nvSpPr>
-        <p:spPr>
-          <a:xfrm>
-            <a:off x="822960" y="1325880"/>
-            <a:ext cx="10378440" cy="4800600"/>
+          <p:cNvPr id="10" name="Text 8"/>
+          <p:cNvSpPr/>
+          <p:nvPr/>
+        </p:nvSpPr>
+        <p:spPr>
+          <a:xfrm>
+            <a:off x="868680" y="1417320"/>
+            <a:ext cx="6675120" cy="4434840"/>
           </a:xfrm>
           <a:prstGeom prst="rect">
             <a:avLst/>
@@ -5463,7 +8224,7 @@
           <a:lstStyle/>
           <a:p>
             <a:r>
-              <a:rPr lang="en-US" sz="1450" dirty="0">
+              <a:rPr lang="en-US" sz="1700" dirty="0">
                 <a:solidFill>
                   <a:srgbClr val="17364A"/>
                 </a:solidFill>
@@ -5471,13 +8232,13 @@
                 <a:ea typeface="Aptos" pitchFamily="34" charset="-122"/>
                 <a:cs typeface="Aptos" pitchFamily="34" charset="-120"/>
               </a:rPr>
-              <a:t>NIST Artificial Intelligence Risk Management Framework: https://www.nist.gov/itl/ai-risk-management-framework</a:t>
-            </a:r>
-            <a:endParaRPr lang="en-US" sz="1450" dirty="0"/>
-          </a:p>
-          <a:p>
-            <a:r>
-              <a:rPr lang="en-US" sz="1450" dirty="0">
+              <a:t>AI project charter</a:t>
+            </a:r>
+            <a:endParaRPr lang="en-US" sz="1700" dirty="0"/>
+          </a:p>
+          <a:p>
+            <a:r>
+              <a:rPr lang="en-US" sz="1700" dirty="0">
                 <a:solidFill>
                   <a:srgbClr val="17364A"/>
                 </a:solidFill>
@@ -5485,13 +8246,13 @@
                 <a:ea typeface="Aptos" pitchFamily="34" charset="-122"/>
                 <a:cs typeface="Aptos" pitchFamily="34" charset="-120"/>
               </a:rPr>
-              <a:t>NIST Generative AI Profile: https://www.nist.gov/publications/artificial-intelligence-risk-management-framework-generative-artificial-intelligence</a:t>
-            </a:r>
-            <a:endParaRPr lang="en-US" sz="1450" dirty="0"/>
-          </a:p>
-          <a:p>
-            <a:r>
-              <a:rPr lang="en-US" sz="1450" dirty="0">
+              <a:t>Implementation workplan</a:t>
+            </a:r>
+            <a:endParaRPr lang="en-US" sz="1700" dirty="0"/>
+          </a:p>
+          <a:p>
+            <a:r>
+              <a:rPr lang="en-US" sz="1700" dirty="0">
                 <a:solidFill>
                   <a:srgbClr val="17364A"/>
                 </a:solidFill>
@@ -5499,13 +8260,13 @@
                 <a:ea typeface="Aptos" pitchFamily="34" charset="-122"/>
                 <a:cs typeface="Aptos" pitchFamily="34" charset="-120"/>
               </a:rPr>
-              <a:t>CDC Public Health Data Strategy and Data Modernization resources: https://www.cdc.gov/public-health-data-strategy/php/about/index.html</a:t>
-            </a:r>
-            <a:endParaRPr lang="en-US" sz="1450" dirty="0"/>
-          </a:p>
-          <a:p>
-            <a:r>
-              <a:rPr lang="en-US" sz="1450" dirty="0">
+              <a:t>AI-specific risk log</a:t>
+            </a:r>
+            <a:endParaRPr lang="en-US" sz="1700" dirty="0"/>
+          </a:p>
+          <a:p>
+            <a:r>
+              <a:rPr lang="en-US" sz="1700" dirty="0">
                 <a:solidFill>
                   <a:srgbClr val="17364A"/>
                 </a:solidFill>
@@ -5513,13 +8274,106 @@
                 <a:ea typeface="Aptos" pitchFamily="34" charset="-122"/>
                 <a:cs typeface="Aptos" pitchFamily="34" charset="-120"/>
               </a:rPr>
-              <a:t>OWASP guidance for LLM application security</a:t>
-            </a:r>
-            <a:endParaRPr lang="en-US" sz="1450" dirty="0"/>
-          </a:p>
-          <a:p>
-            <a:r>
-              <a:rPr lang="en-US" sz="1450" dirty="0">
+              <a:t>Launch readiness checklist</a:t>
+            </a:r>
+            <a:endParaRPr lang="en-US" sz="1700" dirty="0"/>
+          </a:p>
+        </p:txBody>
+      </p:sp>
+      <p:sp>
+        <p:nvSpPr>
+          <p:cNvPr id="11" name="Shape 9"/>
+          <p:cNvSpPr/>
+          <p:nvPr/>
+        </p:nvSpPr>
+        <p:spPr>
+          <a:xfrm>
+            <a:off x="7909560" y="1417320"/>
+            <a:ext cx="3154680" cy="1828800"/>
+          </a:xfrm>
+          <a:prstGeom prst="roundRect">
+            <a:avLst>
+              <a:gd name="adj" fmla="val 6000"/>
+            </a:avLst>
+          </a:prstGeom>
+          <a:solidFill>
+            <a:srgbClr val="EEF8ED"/>
+          </a:solidFill>
+          <a:ln w="12700">
+            <a:solidFill>
+              <a:srgbClr val="B9D7E6"/>
+            </a:solidFill>
+            <a:prstDash val="solid"/>
+          </a:ln>
+        </p:spPr>
+      </p:sp>
+      <p:sp>
+        <p:nvSpPr>
+          <p:cNvPr id="12" name="Text 10"/>
+          <p:cNvSpPr/>
+          <p:nvPr/>
+        </p:nvSpPr>
+        <p:spPr>
+          <a:xfrm>
+            <a:off x="8074152" y="1563624"/>
+            <a:ext cx="2825496" cy="201168"/>
+          </a:xfrm>
+          <a:prstGeom prst="rect">
+            <a:avLst/>
+          </a:prstGeom>
+          <a:noFill/>
+          <a:ln/>
+        </p:spPr>
+        <p:txBody>
+          <a:bodyPr wrap="square" lIns="0" tIns="0" rIns="0" bIns="0" rtlCol="0" anchor="ctr"/>
+          <a:lstStyle/>
+          <a:p>
+            <a:pPr indent="0" marL="0">
+              <a:buNone/>
+            </a:pPr>
+            <a:r>
+              <a:rPr lang="en-US" sz="950" b="1" dirty="0">
+                <a:solidFill>
+                  <a:srgbClr val="0068B7"/>
+                </a:solidFill>
+                <a:latin typeface="Aptos" pitchFamily="34" charset="0"/>
+                <a:ea typeface="Aptos" pitchFamily="34" charset="-122"/>
+                <a:cs typeface="Aptos" pitchFamily="34" charset="-120"/>
+              </a:rPr>
+              <a:t>Key idea</a:t>
+            </a:r>
+            <a:endParaRPr lang="en-US" sz="950" dirty="0"/>
+          </a:p>
+        </p:txBody>
+      </p:sp>
+      <p:sp>
+        <p:nvSpPr>
+          <p:cNvPr id="13" name="Text 11"/>
+          <p:cNvSpPr/>
+          <p:nvPr/>
+        </p:nvSpPr>
+        <p:spPr>
+          <a:xfrm>
+            <a:off x="8074152" y="1856232"/>
+            <a:ext cx="2825496" cy="1261872"/>
+          </a:xfrm>
+          <a:prstGeom prst="rect">
+            <a:avLst/>
+          </a:prstGeom>
+          <a:noFill/>
+          <a:ln/>
+        </p:spPr>
+        <p:txBody>
+          <a:bodyPr wrap="square" lIns="0" tIns="0" rIns="0" bIns="0" rtlCol="0" anchor="t">
+            <a:normAutofit/>
+          </a:bodyPr>
+          <a:lstStyle/>
+          <a:p>
+            <a:pPr indent="0" marL="0">
+              <a:buNone/>
+            </a:pPr>
+            <a:r>
+              <a:rPr lang="en-US" sz="1250" dirty="0">
                 <a:solidFill>
                   <a:srgbClr val="17364A"/>
                 </a:solidFill>
@@ -5527,9 +8381,116 @@
                 <a:ea typeface="Aptos" pitchFamily="34" charset="-122"/>
                 <a:cs typeface="Aptos" pitchFamily="34" charset="-120"/>
               </a:rPr>
-              <a:t>Agency policies for privacy, cybersecurity, records, procurement, accessibility, and public communications</a:t>
-            </a:r>
-            <a:endParaRPr lang="en-US" sz="1450" dirty="0"/>
+              <a:t>AI project charter</a:t>
+            </a:r>
+            <a:endParaRPr lang="en-US" sz="1250" dirty="0"/>
+          </a:p>
+        </p:txBody>
+      </p:sp>
+      <p:sp>
+        <p:nvSpPr>
+          <p:cNvPr id="14" name="Shape 12"/>
+          <p:cNvSpPr/>
+          <p:nvPr/>
+        </p:nvSpPr>
+        <p:spPr>
+          <a:xfrm>
+            <a:off x="7909560" y="3520440"/>
+            <a:ext cx="3154680" cy="1737360"/>
+          </a:xfrm>
+          <a:prstGeom prst="roundRect">
+            <a:avLst>
+              <a:gd name="adj" fmla="val 6316"/>
+            </a:avLst>
+          </a:prstGeom>
+          <a:solidFill>
+            <a:srgbClr val="EAF6F8"/>
+          </a:solidFill>
+          <a:ln w="12700">
+            <a:solidFill>
+              <a:srgbClr val="B9D7E6"/>
+            </a:solidFill>
+            <a:prstDash val="solid"/>
+          </a:ln>
+        </p:spPr>
+      </p:sp>
+      <p:sp>
+        <p:nvSpPr>
+          <p:cNvPr id="15" name="Text 13"/>
+          <p:cNvSpPr/>
+          <p:nvPr/>
+        </p:nvSpPr>
+        <p:spPr>
+          <a:xfrm>
+            <a:off x="8074152" y="3666744"/>
+            <a:ext cx="2825496" cy="201168"/>
+          </a:xfrm>
+          <a:prstGeom prst="rect">
+            <a:avLst/>
+          </a:prstGeom>
+          <a:noFill/>
+          <a:ln/>
+        </p:spPr>
+        <p:txBody>
+          <a:bodyPr wrap="square" lIns="0" tIns="0" rIns="0" bIns="0" rtlCol="0" anchor="ctr"/>
+          <a:lstStyle/>
+          <a:p>
+            <a:pPr indent="0" marL="0">
+              <a:buNone/>
+            </a:pPr>
+            <a:r>
+              <a:rPr lang="en-US" sz="950" b="1" dirty="0">
+                <a:solidFill>
+                  <a:srgbClr val="0068B7"/>
+                </a:solidFill>
+                <a:latin typeface="Aptos" pitchFamily="34" charset="0"/>
+                <a:ea typeface="Aptos" pitchFamily="34" charset="-122"/>
+                <a:cs typeface="Aptos" pitchFamily="34" charset="-120"/>
+              </a:rPr>
+              <a:t>Use this for</a:t>
+            </a:r>
+            <a:endParaRPr lang="en-US" sz="950" dirty="0"/>
+          </a:p>
+        </p:txBody>
+      </p:sp>
+      <p:sp>
+        <p:nvSpPr>
+          <p:cNvPr id="16" name="Text 14"/>
+          <p:cNvSpPr/>
+          <p:nvPr/>
+        </p:nvSpPr>
+        <p:spPr>
+          <a:xfrm>
+            <a:off x="8074152" y="3959352"/>
+            <a:ext cx="2825496" cy="1170432"/>
+          </a:xfrm>
+          <a:prstGeom prst="rect">
+            <a:avLst/>
+          </a:prstGeom>
+          <a:noFill/>
+          <a:ln/>
+        </p:spPr>
+        <p:txBody>
+          <a:bodyPr wrap="square" lIns="0" tIns="0" rIns="0" bIns="0" rtlCol="0" anchor="t">
+            <a:normAutofit/>
+          </a:bodyPr>
+          <a:lstStyle/>
+          <a:p>
+            <a:pPr indent="0" marL="0">
+              <a:buNone/>
+            </a:pPr>
+            <a:r>
+              <a:rPr lang="en-US" sz="1250" dirty="0">
+                <a:solidFill>
+                  <a:srgbClr val="17364A"/>
+                </a:solidFill>
+                <a:latin typeface="Aptos" pitchFamily="34" charset="0"/>
+                <a:ea typeface="Aptos" pitchFamily="34" charset="-122"/>
+                <a:cs typeface="Aptos" pitchFamily="34" charset="-120"/>
+              </a:rPr>
+              <a:t>Connect the concept to public health decisions, safeguards, documentation, or implementation work.</a:t>
+            </a:r>
+            <a:endParaRPr lang="en-US" sz="1250" dirty="0"/>
           </a:p>
         </p:txBody>
       </p:sp>
@@ -5592,7 +8553,32 @@
       </p:sp>
       <p:sp>
         <p:nvSpPr>
-          <p:cNvPr id="3" name="Text 1"/>
+          <p:cNvPr id="3" name="Shape 1"/>
+          <p:cNvSpPr/>
+          <p:nvPr/>
+        </p:nvSpPr>
+        <p:spPr>
+          <a:xfrm>
+            <a:off x="0" y="164592"/>
+            <a:ext cx="146304" cy="6693408"/>
+          </a:xfrm>
+          <a:prstGeom prst="rect">
+            <a:avLst/>
+          </a:prstGeom>
+          <a:solidFill>
+            <a:srgbClr val="2F8A28"/>
+          </a:solidFill>
+          <a:ln w="12700">
+            <a:solidFill>
+              <a:srgbClr val="2F8A28"/>
+            </a:solidFill>
+            <a:prstDash val="solid"/>
+          </a:ln>
+        </p:spPr>
+      </p:sp>
+      <p:sp>
+        <p:nvSpPr>
+          <p:cNvPr id="4" name="Text 2"/>
           <p:cNvSpPr/>
           <p:nvPr/>
         </p:nvSpPr>
@@ -5631,7 +8617,7 @@
       </p:sp>
       <p:sp>
         <p:nvSpPr>
-          <p:cNvPr id="4" name="Text 2"/>
+          <p:cNvPr id="5" name="Text 3"/>
           <p:cNvSpPr/>
           <p:nvPr/>
         </p:nvSpPr>
@@ -5670,7 +8656,7 @@
       </p:sp>
       <p:sp>
         <p:nvSpPr>
-          <p:cNvPr id="5" name="Text 3"/>
+          <p:cNvPr id="6" name="Text 4"/>
           <p:cNvSpPr/>
           <p:nvPr/>
         </p:nvSpPr>
@@ -5709,7 +8695,7 @@
       </p:sp>
       <p:sp>
         <p:nvSpPr>
-          <p:cNvPr id="6" name="Text 4"/>
+          <p:cNvPr id="7" name="Text 5"/>
           <p:cNvSpPr/>
           <p:nvPr/>
         </p:nvSpPr>
@@ -5742,7 +8728,7 @@
                 <a:ea typeface="Aptos Display" pitchFamily="34" charset="-122"/>
                 <a:cs typeface="Aptos Display" pitchFamily="34" charset="-120"/>
               </a:rPr>
-              <a:t>Module Context</a:t>
+              <a:t>What this module helps you do</a:t>
             </a:r>
             <a:endParaRPr lang="en-US" sz="2700" dirty="0"/>
           </a:p>
@@ -5750,14 +8736,14 @@
       </p:sp>
       <p:sp>
         <p:nvSpPr>
-          <p:cNvPr id="7" name="Text 5"/>
-          <p:cNvSpPr/>
-          <p:nvPr/>
-        </p:nvSpPr>
-        <p:spPr>
-          <a:xfrm>
-            <a:off x="822960" y="1325880"/>
-            <a:ext cx="10378440" cy="1371600"/>
+          <p:cNvPr id="8" name="Text 6"/>
+          <p:cNvSpPr/>
+          <p:nvPr/>
+        </p:nvSpPr>
+        <p:spPr>
+          <a:xfrm>
+            <a:off x="868680" y="1417320"/>
+            <a:ext cx="6675120" cy="3291840"/>
           </a:xfrm>
           <a:prstGeom prst="rect">
             <a:avLst/>
@@ -5772,7 +8758,7 @@
           <a:lstStyle/>
           <a:p>
             <a:r>
-              <a:rPr lang="en-US" sz="1600" dirty="0">
+              <a:rPr lang="en-US" sz="1700" dirty="0">
                 <a:solidFill>
                   <a:srgbClr val="17364A"/>
                 </a:solidFill>
@@ -5780,13 +8766,13 @@
                 <a:ea typeface="Aptos" pitchFamily="34" charset="-122"/>
                 <a:cs typeface="Aptos" pitchFamily="34" charset="-120"/>
               </a:rPr>
-              <a:t>Level: applied/foundational</a:t>
-            </a:r>
-            <a:endParaRPr lang="en-US" sz="1600" dirty="0"/>
-          </a:p>
-          <a:p>
-            <a:r>
-              <a:rPr lang="en-US" sz="1600" dirty="0">
+              <a:t>AI projects require disciplined implementation planning because they combine technology, data, governance, workflow change, training, validation,.</a:t>
+            </a:r>
+            <a:endParaRPr lang="en-US" sz="1700" dirty="0"/>
+          </a:p>
+          <a:p>
+            <a:r>
+              <a:rPr lang="en-US" sz="1700" dirty="0">
                 <a:solidFill>
                   <a:srgbClr val="17364A"/>
                 </a:solidFill>
@@ -5794,13 +8780,13 @@
                 <a:ea typeface="Aptos" pitchFamily="34" charset="-122"/>
                 <a:cs typeface="Aptos" pitchFamily="34" charset="-120"/>
               </a:rPr>
-              <a:t>Primary track: Program Management Role-Based Track</a:t>
-            </a:r>
-            <a:endParaRPr lang="en-US" sz="1600" dirty="0"/>
-          </a:p>
-          <a:p>
-            <a:r>
-              <a:rPr lang="en-US" sz="1600" dirty="0">
+              <a:t>A project that appears small, such as adding an AI summarization tool, may still require data access decisions, system integration, human review.</a:t>
+            </a:r>
+            <a:endParaRPr lang="en-US" sz="1700" dirty="0"/>
+          </a:p>
+          <a:p>
+            <a:r>
+              <a:rPr lang="en-US" sz="1700" dirty="0">
                 <a:solidFill>
                   <a:srgbClr val="17364A"/>
                 </a:solidFill>
@@ -5808,31 +8794,111 @@
                 <a:ea typeface="Aptos" pitchFamily="34" charset="-122"/>
                 <a:cs typeface="Aptos" pitchFamily="34" charset="-120"/>
               </a:rPr>
-              <a:t>Appears in tracks: program-management, operations-and-data-quality, technical-architecture, public-health-executive-leadership</a:t>
-            </a:r>
-            <a:endParaRPr lang="en-US" sz="1600" dirty="0"/>
-          </a:p>
-        </p:txBody>
-      </p:sp>
-      <p:sp>
-        <p:nvSpPr>
-          <p:cNvPr id="8" name="Text 6"/>
-          <p:cNvSpPr/>
-          <p:nvPr/>
-        </p:nvSpPr>
-        <p:spPr>
-          <a:xfrm>
-            <a:off x="822960" y="2743200"/>
-            <a:ext cx="10378440" cy="2834640"/>
-          </a:xfrm>
-          <a:prstGeom prst="rect">
-            <a:avLst/>
-          </a:prstGeom>
-          <a:noFill/>
-          <a:ln/>
-        </p:spPr>
-        <p:txBody>
-          <a:bodyPr wrap="square" lIns="1016" tIns="1016" rIns="1016" bIns="1016" rtlCol="0" anchor="t">
+              <a:t>Public health agencies need project management methods that account for these dependencies before implementation begins.</a:t>
+            </a:r>
+            <a:endParaRPr lang="en-US" sz="1700" dirty="0"/>
+          </a:p>
+          <a:p>
+            <a:r>
+              <a:rPr lang="en-US" sz="1700" dirty="0">
+                <a:solidFill>
+                  <a:srgbClr val="17364A"/>
+                </a:solidFill>
+                <a:latin typeface="Aptos" pitchFamily="34" charset="0"/>
+                <a:ea typeface="Aptos" pitchFamily="34" charset="-122"/>
+                <a:cs typeface="Aptos" pitchFamily="34" charset="-120"/>
+              </a:rPr>
+              <a:t>This module teaches program managers, product owners, implementation leads, and technical staff how to structure AI initiatives from concept through.</a:t>
+            </a:r>
+            <a:endParaRPr lang="en-US" sz="1700" dirty="0"/>
+          </a:p>
+        </p:txBody>
+      </p:sp>
+      <p:sp>
+        <p:nvSpPr>
+          <p:cNvPr id="9" name="Shape 7"/>
+          <p:cNvSpPr/>
+          <p:nvPr/>
+        </p:nvSpPr>
+        <p:spPr>
+          <a:xfrm>
+            <a:off x="7909560" y="1417320"/>
+            <a:ext cx="3154680" cy="1920240"/>
+          </a:xfrm>
+          <a:prstGeom prst="roundRect">
+            <a:avLst>
+              <a:gd name="adj" fmla="val 5714"/>
+            </a:avLst>
+          </a:prstGeom>
+          <a:solidFill>
+            <a:srgbClr val="EAF6F8"/>
+          </a:solidFill>
+          <a:ln w="12700">
+            <a:solidFill>
+              <a:srgbClr val="B9D7E6"/>
+            </a:solidFill>
+            <a:prstDash val="solid"/>
+          </a:ln>
+        </p:spPr>
+      </p:sp>
+      <p:sp>
+        <p:nvSpPr>
+          <p:cNvPr id="10" name="Text 8"/>
+          <p:cNvSpPr/>
+          <p:nvPr/>
+        </p:nvSpPr>
+        <p:spPr>
+          <a:xfrm>
+            <a:off x="8074152" y="1563624"/>
+            <a:ext cx="2825496" cy="201168"/>
+          </a:xfrm>
+          <a:prstGeom prst="rect">
+            <a:avLst/>
+          </a:prstGeom>
+          <a:noFill/>
+          <a:ln/>
+        </p:spPr>
+        <p:txBody>
+          <a:bodyPr wrap="square" lIns="0" tIns="0" rIns="0" bIns="0" rtlCol="0" anchor="ctr"/>
+          <a:lstStyle/>
+          <a:p>
+            <a:pPr indent="0" marL="0">
+              <a:buNone/>
+            </a:pPr>
+            <a:r>
+              <a:rPr lang="en-US" sz="950" b="1" dirty="0">
+                <a:solidFill>
+                  <a:srgbClr val="0068B7"/>
+                </a:solidFill>
+                <a:latin typeface="Aptos" pitchFamily="34" charset="0"/>
+                <a:ea typeface="Aptos" pitchFamily="34" charset="-122"/>
+                <a:cs typeface="Aptos" pitchFamily="34" charset="-120"/>
+              </a:rPr>
+              <a:t>Module details</a:t>
+            </a:r>
+            <a:endParaRPr lang="en-US" sz="950" dirty="0"/>
+          </a:p>
+        </p:txBody>
+      </p:sp>
+      <p:sp>
+        <p:nvSpPr>
+          <p:cNvPr id="11" name="Text 9"/>
+          <p:cNvSpPr/>
+          <p:nvPr/>
+        </p:nvSpPr>
+        <p:spPr>
+          <a:xfrm>
+            <a:off x="8074152" y="1856232"/>
+            <a:ext cx="2825496" cy="1353312"/>
+          </a:xfrm>
+          <a:prstGeom prst="rect">
+            <a:avLst/>
+          </a:prstGeom>
+          <a:noFill/>
+          <a:ln/>
+        </p:spPr>
+        <p:txBody>
+          <a:bodyPr wrap="square" lIns="0" tIns="0" rIns="0" bIns="0" rtlCol="0" anchor="t">
             <a:normAutofit/>
           </a:bodyPr>
           <a:lstStyle/>
@@ -5841,7 +8907,7 @@
               <a:buNone/>
             </a:pPr>
             <a:r>
-              <a:rPr lang="en-US" sz="1400" dirty="0">
+              <a:rPr lang="en-US" sz="1250" dirty="0">
                 <a:solidFill>
                   <a:srgbClr val="17364A"/>
                 </a:solidFill>
@@ -5849,9 +8915,150 @@
                 <a:ea typeface="Aptos" pitchFamily="34" charset="-122"/>
                 <a:cs typeface="Aptos" pitchFamily="34" charset="-120"/>
               </a:rPr>
-              <a:t>AI projects require disciplined implementation planning because they combine technology, data, governance, workflow change, training, validation, procurement, security, and evaluation. A project that appears small, such as adding an AI summarization tool, may still require data access decisions, system integration, human review design, communications planning, and post-launch monitoring. Public health agencies need project management methods that account for these dependencies before implementation begins. This module teaches program managers, product owners, implementation leads, and technical staff how to structure AI initiatives from concept through deployment and operations. The focus is on practical project controls: charters, milestones, governance gates, risk logs, stakeholder engagement, testing, training, launch readiness, and transition to operations. Strong AI project management helps agencies avoid pilots that never scale, tools that are deployed without ownership, and vendor-led projects that outpace governance or public health readiness. It also helps leadership understand what resources are needed for safe and sustainable implementation.</a:t>
-            </a:r>
-            <a:endParaRPr lang="en-US" sz="1400" dirty="0"/>
+              <a:t>Level: applied/foundational</a:t>
+            </a:r>
+            <a:endParaRPr lang="en-US" sz="1250" dirty="0"/>
+          </a:p>
+          <a:p>
+            <a:pPr indent="0" marL="0">
+              <a:buNone/>
+            </a:pPr>
+            <a:r>
+              <a:rPr lang="en-US" sz="1250" dirty="0">
+                <a:solidFill>
+                  <a:srgbClr val="17364A"/>
+                </a:solidFill>
+                <a:latin typeface="Aptos" pitchFamily="34" charset="0"/>
+                <a:ea typeface="Aptos" pitchFamily="34" charset="-122"/>
+                <a:cs typeface="Aptos" pitchFamily="34" charset="-120"/>
+              </a:rPr>
+              <a:t>Primary track: Program Management Role-Based Track</a:t>
+            </a:r>
+            <a:endParaRPr lang="en-US" sz="1250" dirty="0"/>
+          </a:p>
+          <a:p>
+            <a:pPr indent="0" marL="0">
+              <a:buNone/>
+            </a:pPr>
+            <a:r>
+              <a:rPr lang="en-US" sz="1250" dirty="0">
+                <a:solidFill>
+                  <a:srgbClr val="17364A"/>
+                </a:solidFill>
+                <a:latin typeface="Aptos" pitchFamily="34" charset="0"/>
+                <a:ea typeface="Aptos" pitchFamily="34" charset="-122"/>
+                <a:cs typeface="Aptos" pitchFamily="34" charset="-120"/>
+              </a:rPr>
+              <a:t>Appears in tracks: program-management, operations-and-data-quality, technical-architecture, public-health-executive-leadership</a:t>
+            </a:r>
+            <a:endParaRPr lang="en-US" sz="1250" dirty="0"/>
+          </a:p>
+        </p:txBody>
+      </p:sp>
+      <p:sp>
+        <p:nvSpPr>
+          <p:cNvPr id="12" name="Shape 10"/>
+          <p:cNvSpPr/>
+          <p:nvPr/>
+        </p:nvSpPr>
+        <p:spPr>
+          <a:xfrm>
+            <a:off x="7909560" y="3611880"/>
+            <a:ext cx="3154680" cy="1783080"/>
+          </a:xfrm>
+          <a:prstGeom prst="roundRect">
+            <a:avLst>
+              <a:gd name="adj" fmla="val 6154"/>
+            </a:avLst>
+          </a:prstGeom>
+          <a:solidFill>
+            <a:srgbClr val="EEF8ED"/>
+          </a:solidFill>
+          <a:ln w="12700">
+            <a:solidFill>
+              <a:srgbClr val="B9D7E6"/>
+            </a:solidFill>
+            <a:prstDash val="solid"/>
+          </a:ln>
+        </p:spPr>
+      </p:sp>
+      <p:sp>
+        <p:nvSpPr>
+          <p:cNvPr id="13" name="Text 11"/>
+          <p:cNvSpPr/>
+          <p:nvPr/>
+        </p:nvSpPr>
+        <p:spPr>
+          <a:xfrm>
+            <a:off x="8074152" y="3758184"/>
+            <a:ext cx="2825496" cy="201168"/>
+          </a:xfrm>
+          <a:prstGeom prst="rect">
+            <a:avLst/>
+          </a:prstGeom>
+          <a:noFill/>
+          <a:ln/>
+        </p:spPr>
+        <p:txBody>
+          <a:bodyPr wrap="square" lIns="0" tIns="0" rIns="0" bIns="0" rtlCol="0" anchor="ctr"/>
+          <a:lstStyle/>
+          <a:p>
+            <a:pPr indent="0" marL="0">
+              <a:buNone/>
+            </a:pPr>
+            <a:r>
+              <a:rPr lang="en-US" sz="950" b="1" dirty="0">
+                <a:solidFill>
+                  <a:srgbClr val="0068B7"/>
+                </a:solidFill>
+                <a:latin typeface="Aptos" pitchFamily="34" charset="0"/>
+                <a:ea typeface="Aptos" pitchFamily="34" charset="-122"/>
+                <a:cs typeface="Aptos" pitchFamily="34" charset="-120"/>
+              </a:rPr>
+              <a:t>Learning approach</a:t>
+            </a:r>
+            <a:endParaRPr lang="en-US" sz="950" dirty="0"/>
+          </a:p>
+        </p:txBody>
+      </p:sp>
+      <p:sp>
+        <p:nvSpPr>
+          <p:cNvPr id="14" name="Text 12"/>
+          <p:cNvSpPr/>
+          <p:nvPr/>
+        </p:nvSpPr>
+        <p:spPr>
+          <a:xfrm>
+            <a:off x="8074152" y="4050792"/>
+            <a:ext cx="2825496" cy="1216152"/>
+          </a:xfrm>
+          <a:prstGeom prst="rect">
+            <a:avLst/>
+          </a:prstGeom>
+          <a:noFill/>
+          <a:ln/>
+        </p:spPr>
+        <p:txBody>
+          <a:bodyPr wrap="square" lIns="0" tIns="0" rIns="0" bIns="0" rtlCol="0" anchor="t">
+            <a:normAutofit/>
+          </a:bodyPr>
+          <a:lstStyle/>
+          <a:p>
+            <a:pPr indent="0" marL="0">
+              <a:buNone/>
+            </a:pPr>
+            <a:r>
+              <a:rPr lang="en-US" sz="1250" dirty="0">
+                <a:solidFill>
+                  <a:srgbClr val="17364A"/>
+                </a:solidFill>
+                <a:latin typeface="Aptos" pitchFamily="34" charset="0"/>
+                <a:ea typeface="Aptos" pitchFamily="34" charset="-122"/>
+                <a:cs typeface="Aptos" pitchFamily="34" charset="-120"/>
+              </a:rPr>
+              <a:t>Review the core ideas, complete the practical exercise, check your understanding, and use the related plays and tools to apply the lesson.</a:t>
+            </a:r>
+            <a:endParaRPr lang="en-US" sz="1250" dirty="0"/>
           </a:p>
         </p:txBody>
       </p:sp>
@@ -5914,7 +9121,32 @@
       </p:sp>
       <p:sp>
         <p:nvSpPr>
-          <p:cNvPr id="3" name="Text 1"/>
+          <p:cNvPr id="3" name="Shape 1"/>
+          <p:cNvSpPr/>
+          <p:nvPr/>
+        </p:nvSpPr>
+        <p:spPr>
+          <a:xfrm>
+            <a:off x="0" y="164592"/>
+            <a:ext cx="146304" cy="6693408"/>
+          </a:xfrm>
+          <a:prstGeom prst="rect">
+            <a:avLst/>
+          </a:prstGeom>
+          <a:solidFill>
+            <a:srgbClr val="2F8A28"/>
+          </a:solidFill>
+          <a:ln w="12700">
+            <a:solidFill>
+              <a:srgbClr val="2F8A28"/>
+            </a:solidFill>
+            <a:prstDash val="solid"/>
+          </a:ln>
+        </p:spPr>
+      </p:sp>
+      <p:sp>
+        <p:nvSpPr>
+          <p:cNvPr id="4" name="Text 2"/>
           <p:cNvSpPr/>
           <p:nvPr/>
         </p:nvSpPr>
@@ -5953,7 +9185,7 @@
       </p:sp>
       <p:sp>
         <p:nvSpPr>
-          <p:cNvPr id="4" name="Text 2"/>
+          <p:cNvPr id="5" name="Text 3"/>
           <p:cNvSpPr/>
           <p:nvPr/>
         </p:nvSpPr>
@@ -5992,7 +9224,7 @@
       </p:sp>
       <p:sp>
         <p:nvSpPr>
-          <p:cNvPr id="5" name="Text 3"/>
+          <p:cNvPr id="6" name="Text 4"/>
           <p:cNvSpPr/>
           <p:nvPr/>
         </p:nvSpPr>
@@ -6031,13 +9263,77 @@
       </p:sp>
       <p:sp>
         <p:nvSpPr>
-          <p:cNvPr id="6" name="Text 4"/>
+          <p:cNvPr id="7" name="Shape 5"/>
           <p:cNvSpPr/>
           <p:nvPr/>
         </p:nvSpPr>
         <p:spPr>
           <a:xfrm>
             <a:off x="640080" y="658368"/>
+            <a:ext cx="420624" cy="420624"/>
+          </a:xfrm>
+          <a:prstGeom prst="ellipse">
+            <a:avLst/>
+          </a:prstGeom>
+          <a:solidFill>
+            <a:srgbClr val="0068B7"/>
+          </a:solidFill>
+          <a:ln w="12700">
+            <a:solidFill>
+              <a:srgbClr val="0068B7"/>
+            </a:solidFill>
+            <a:prstDash val="solid"/>
+          </a:ln>
+        </p:spPr>
+      </p:sp>
+      <p:sp>
+        <p:nvSpPr>
+          <p:cNvPr id="8" name="Text 6"/>
+          <p:cNvSpPr/>
+          <p:nvPr/>
+        </p:nvSpPr>
+        <p:spPr>
+          <a:xfrm>
+            <a:off x="640080" y="731520"/>
+            <a:ext cx="420624" cy="164592"/>
+          </a:xfrm>
+          <a:prstGeom prst="rect">
+            <a:avLst/>
+          </a:prstGeom>
+          <a:noFill/>
+          <a:ln/>
+        </p:spPr>
+        <p:txBody>
+          <a:bodyPr wrap="square" lIns="0" tIns="0" rIns="0" bIns="0" rtlCol="0" anchor="ctr"/>
+          <a:lstStyle/>
+          <a:p>
+            <a:pPr algn="ctr" indent="0" marL="0">
+              <a:buNone/>
+            </a:pPr>
+            <a:r>
+              <a:rPr lang="en-US" sz="1100" b="1" dirty="0">
+                <a:solidFill>
+                  <a:srgbClr val="FFFFFF"/>
+                </a:solidFill>
+                <a:latin typeface="Aptos" pitchFamily="34" charset="0"/>
+                <a:ea typeface="Aptos" pitchFamily="34" charset="-122"/>
+                <a:cs typeface="Aptos" pitchFamily="34" charset="-120"/>
+              </a:rPr>
+              <a:t>10</a:t>
+            </a:r>
+            <a:endParaRPr lang="en-US" sz="1100" dirty="0"/>
+          </a:p>
+        </p:txBody>
+      </p:sp>
+      <p:sp>
+        <p:nvSpPr>
+          <p:cNvPr id="9" name="Text 7"/>
+          <p:cNvSpPr/>
+          <p:nvPr/>
+        </p:nvSpPr>
+        <p:spPr>
+          <a:xfrm>
+            <a:off x="640080" y="621792"/>
             <a:ext cx="10881360" cy="566928"/>
           </a:xfrm>
           <a:prstGeom prst="rect">
@@ -6064,7 +9360,7 @@
                 <a:ea typeface="Aptos Display" pitchFamily="34" charset="-122"/>
                 <a:cs typeface="Aptos Display" pitchFamily="34" charset="-120"/>
               </a:rPr>
-              <a:t>References and Resources Continued</a:t>
+              <a:t>Knowledge Check</a:t>
             </a:r>
             <a:endParaRPr lang="en-US" sz="2700" dirty="0"/>
           </a:p>
@@ -6072,14 +9368,14 @@
       </p:sp>
       <p:sp>
         <p:nvSpPr>
-          <p:cNvPr id="7" name="Text 5"/>
-          <p:cNvSpPr/>
-          <p:nvPr/>
-        </p:nvSpPr>
-        <p:spPr>
-          <a:xfrm>
-            <a:off x="822960" y="1325880"/>
-            <a:ext cx="10378440" cy="4800600"/>
+          <p:cNvPr id="10" name="Text 8"/>
+          <p:cNvSpPr/>
+          <p:nvPr/>
+        </p:nvSpPr>
+        <p:spPr>
+          <a:xfrm>
+            <a:off x="868680" y="1417320"/>
+            <a:ext cx="6675120" cy="4434840"/>
           </a:xfrm>
           <a:prstGeom prst="rect">
             <a:avLst/>
@@ -6094,7 +9390,7 @@
           <a:lstStyle/>
           <a:p>
             <a:r>
-              <a:rPr lang="en-US" sz="1450" dirty="0">
+              <a:rPr lang="en-US" sz="1700" dirty="0">
                 <a:solidFill>
                   <a:srgbClr val="17364A"/>
                 </a:solidFill>
@@ -6102,9 +9398,1355 @@
                 <a:ea typeface="Aptos" pitchFamily="34" charset="-122"/>
                 <a:cs typeface="Aptos" pitchFamily="34" charset="-120"/>
               </a:rPr>
+              <a:t>1. What distinguishes AI project management from ordinary software implementation?</a:t>
+            </a:r>
+            <a:endParaRPr lang="en-US" sz="1700" dirty="0"/>
+          </a:p>
+          <a:p>
+            <a:r>
+              <a:rPr lang="en-US" sz="1700" dirty="0">
+                <a:solidFill>
+                  <a:srgbClr val="17364A"/>
+                </a:solidFill>
+                <a:latin typeface="Aptos" pitchFamily="34" charset="0"/>
+                <a:ea typeface="Aptos" pitchFamily="34" charset="-122"/>
+                <a:cs typeface="Aptos" pitchFamily="34" charset="-120"/>
+              </a:rPr>
+              <a:t>2. What is a governance gate?</a:t>
+            </a:r>
+            <a:endParaRPr lang="en-US" sz="1700" dirty="0"/>
+          </a:p>
+          <a:p>
+            <a:r>
+              <a:rPr lang="en-US" sz="1700" dirty="0">
+                <a:solidFill>
+                  <a:srgbClr val="17364A"/>
+                </a:solidFill>
+                <a:latin typeface="Aptos" pitchFamily="34" charset="0"/>
+                <a:ea typeface="Aptos" pitchFamily="34" charset="-122"/>
+                <a:cs typeface="Aptos" pitchFamily="34" charset="-120"/>
+              </a:rPr>
+              <a:t>3. Which item belongs in an AI project charter?</a:t>
+            </a:r>
+            <a:endParaRPr lang="en-US" sz="1700" dirty="0"/>
+          </a:p>
+          <a:p>
+            <a:r>
+              <a:rPr lang="en-US" sz="1700" dirty="0">
+                <a:solidFill>
+                  <a:srgbClr val="17364A"/>
+                </a:solidFill>
+                <a:latin typeface="Aptos" pitchFamily="34" charset="0"/>
+                <a:ea typeface="Aptos" pitchFamily="34" charset="-122"/>
+                <a:cs typeface="Aptos" pitchFamily="34" charset="-120"/>
+              </a:rPr>
+              <a:t>4. Why is transition to operations important?</a:t>
+            </a:r>
+            <a:endParaRPr lang="en-US" sz="1700" dirty="0"/>
+          </a:p>
+        </p:txBody>
+      </p:sp>
+      <p:sp>
+        <p:nvSpPr>
+          <p:cNvPr id="11" name="Shape 9"/>
+          <p:cNvSpPr/>
+          <p:nvPr/>
+        </p:nvSpPr>
+        <p:spPr>
+          <a:xfrm>
+            <a:off x="7909560" y="1417320"/>
+            <a:ext cx="3154680" cy="1828800"/>
+          </a:xfrm>
+          <a:prstGeom prst="roundRect">
+            <a:avLst>
+              <a:gd name="adj" fmla="val 6000"/>
+            </a:avLst>
+          </a:prstGeom>
+          <a:solidFill>
+            <a:srgbClr val="EEF8ED"/>
+          </a:solidFill>
+          <a:ln w="12700">
+            <a:solidFill>
+              <a:srgbClr val="B9D7E6"/>
+            </a:solidFill>
+            <a:prstDash val="solid"/>
+          </a:ln>
+        </p:spPr>
+      </p:sp>
+      <p:sp>
+        <p:nvSpPr>
+          <p:cNvPr id="12" name="Text 10"/>
+          <p:cNvSpPr/>
+          <p:nvPr/>
+        </p:nvSpPr>
+        <p:spPr>
+          <a:xfrm>
+            <a:off x="8074152" y="1563624"/>
+            <a:ext cx="2825496" cy="201168"/>
+          </a:xfrm>
+          <a:prstGeom prst="rect">
+            <a:avLst/>
+          </a:prstGeom>
+          <a:noFill/>
+          <a:ln/>
+        </p:spPr>
+        <p:txBody>
+          <a:bodyPr wrap="square" lIns="0" tIns="0" rIns="0" bIns="0" rtlCol="0" anchor="ctr"/>
+          <a:lstStyle/>
+          <a:p>
+            <a:pPr indent="0" marL="0">
+              <a:buNone/>
+            </a:pPr>
+            <a:r>
+              <a:rPr lang="en-US" sz="950" b="1" dirty="0">
+                <a:solidFill>
+                  <a:srgbClr val="0068B7"/>
+                </a:solidFill>
+                <a:latin typeface="Aptos" pitchFamily="34" charset="0"/>
+                <a:ea typeface="Aptos" pitchFamily="34" charset="-122"/>
+                <a:cs typeface="Aptos" pitchFamily="34" charset="-120"/>
+              </a:rPr>
+              <a:t>Key idea</a:t>
+            </a:r>
+            <a:endParaRPr lang="en-US" sz="950" dirty="0"/>
+          </a:p>
+        </p:txBody>
+      </p:sp>
+      <p:sp>
+        <p:nvSpPr>
+          <p:cNvPr id="13" name="Text 11"/>
+          <p:cNvSpPr/>
+          <p:nvPr/>
+        </p:nvSpPr>
+        <p:spPr>
+          <a:xfrm>
+            <a:off x="8074152" y="1856232"/>
+            <a:ext cx="2825496" cy="1261872"/>
+          </a:xfrm>
+          <a:prstGeom prst="rect">
+            <a:avLst/>
+          </a:prstGeom>
+          <a:noFill/>
+          <a:ln/>
+        </p:spPr>
+        <p:txBody>
+          <a:bodyPr wrap="square" lIns="0" tIns="0" rIns="0" bIns="0" rtlCol="0" anchor="t">
+            <a:normAutofit/>
+          </a:bodyPr>
+          <a:lstStyle/>
+          <a:p>
+            <a:pPr indent="0" marL="0">
+              <a:buNone/>
+            </a:pPr>
+            <a:r>
+              <a:rPr lang="en-US" sz="1250" dirty="0">
+                <a:solidFill>
+                  <a:srgbClr val="17364A"/>
+                </a:solidFill>
+                <a:latin typeface="Aptos" pitchFamily="34" charset="0"/>
+                <a:ea typeface="Aptos" pitchFamily="34" charset="-122"/>
+                <a:cs typeface="Aptos" pitchFamily="34" charset="-120"/>
+              </a:rPr>
+              <a:t>1. What distinguishes AI project management from ordinary software implementation?</a:t>
+            </a:r>
+            <a:endParaRPr lang="en-US" sz="1250" dirty="0"/>
+          </a:p>
+        </p:txBody>
+      </p:sp>
+      <p:sp>
+        <p:nvSpPr>
+          <p:cNvPr id="14" name="Shape 12"/>
+          <p:cNvSpPr/>
+          <p:nvPr/>
+        </p:nvSpPr>
+        <p:spPr>
+          <a:xfrm>
+            <a:off x="7909560" y="3520440"/>
+            <a:ext cx="3154680" cy="1737360"/>
+          </a:xfrm>
+          <a:prstGeom prst="roundRect">
+            <a:avLst>
+              <a:gd name="adj" fmla="val 6316"/>
+            </a:avLst>
+          </a:prstGeom>
+          <a:solidFill>
+            <a:srgbClr val="EAF6F8"/>
+          </a:solidFill>
+          <a:ln w="12700">
+            <a:solidFill>
+              <a:srgbClr val="B9D7E6"/>
+            </a:solidFill>
+            <a:prstDash val="solid"/>
+          </a:ln>
+        </p:spPr>
+      </p:sp>
+      <p:sp>
+        <p:nvSpPr>
+          <p:cNvPr id="15" name="Text 13"/>
+          <p:cNvSpPr/>
+          <p:nvPr/>
+        </p:nvSpPr>
+        <p:spPr>
+          <a:xfrm>
+            <a:off x="8074152" y="3666744"/>
+            <a:ext cx="2825496" cy="201168"/>
+          </a:xfrm>
+          <a:prstGeom prst="rect">
+            <a:avLst/>
+          </a:prstGeom>
+          <a:noFill/>
+          <a:ln/>
+        </p:spPr>
+        <p:txBody>
+          <a:bodyPr wrap="square" lIns="0" tIns="0" rIns="0" bIns="0" rtlCol="0" anchor="ctr"/>
+          <a:lstStyle/>
+          <a:p>
+            <a:pPr indent="0" marL="0">
+              <a:buNone/>
+            </a:pPr>
+            <a:r>
+              <a:rPr lang="en-US" sz="950" b="1" dirty="0">
+                <a:solidFill>
+                  <a:srgbClr val="0068B7"/>
+                </a:solidFill>
+                <a:latin typeface="Aptos" pitchFamily="34" charset="0"/>
+                <a:ea typeface="Aptos" pitchFamily="34" charset="-122"/>
+                <a:cs typeface="Aptos" pitchFamily="34" charset="-120"/>
+              </a:rPr>
+              <a:t>Use this for</a:t>
+            </a:r>
+            <a:endParaRPr lang="en-US" sz="950" dirty="0"/>
+          </a:p>
+        </p:txBody>
+      </p:sp>
+      <p:sp>
+        <p:nvSpPr>
+          <p:cNvPr id="16" name="Text 14"/>
+          <p:cNvSpPr/>
+          <p:nvPr/>
+        </p:nvSpPr>
+        <p:spPr>
+          <a:xfrm>
+            <a:off x="8074152" y="3959352"/>
+            <a:ext cx="2825496" cy="1170432"/>
+          </a:xfrm>
+          <a:prstGeom prst="rect">
+            <a:avLst/>
+          </a:prstGeom>
+          <a:noFill/>
+          <a:ln/>
+        </p:spPr>
+        <p:txBody>
+          <a:bodyPr wrap="square" lIns="0" tIns="0" rIns="0" bIns="0" rtlCol="0" anchor="t">
+            <a:normAutofit/>
+          </a:bodyPr>
+          <a:lstStyle/>
+          <a:p>
+            <a:pPr indent="0" marL="0">
+              <a:buNone/>
+            </a:pPr>
+            <a:r>
+              <a:rPr lang="en-US" sz="1250" dirty="0">
+                <a:solidFill>
+                  <a:srgbClr val="17364A"/>
+                </a:solidFill>
+                <a:latin typeface="Aptos" pitchFamily="34" charset="0"/>
+                <a:ea typeface="Aptos" pitchFamily="34" charset="-122"/>
+                <a:cs typeface="Aptos" pitchFamily="34" charset="-120"/>
+              </a:rPr>
+              <a:t>Connect the concept to public health decisions, safeguards, documentation, or implementation work.</a:t>
+            </a:r>
+            <a:endParaRPr lang="en-US" sz="1250" dirty="0"/>
+          </a:p>
+        </p:txBody>
+      </p:sp>
+    </p:spTree>
+  </p:cSld>
+  <p:clrMapOvr>
+    <a:masterClrMapping/>
+  </p:clrMapOvr>
+</p:sld>
+</file>
+
+<file path=ppt/slides/slide21.xml><?xml version="1.0" encoding="utf-8"?>
+<p:sld xmlns:a="http://schemas.openxmlformats.org/drawingml/2006/main" xmlns:r="http://schemas.openxmlformats.org/officeDocument/2006/relationships" xmlns:p="http://schemas.openxmlformats.org/presentationml/2006/main">
+  <p:cSld name="Slide 21">
+    <p:bg>
+      <p:bgPr>
+        <a:solidFill>
+          <a:srgbClr val="F7FBFD"/>
+        </a:solidFill>
+      </p:bgPr>
+    </p:bg>
+    <p:spTree>
+      <p:nvGrpSpPr>
+        <p:cNvPr id="1" name=""/>
+        <p:cNvGrpSpPr/>
+        <p:nvPr/>
+      </p:nvGrpSpPr>
+      <p:grpSpPr>
+        <a:xfrm>
+          <a:off x="0" y="0"/>
+          <a:ext cx="0" cy="0"/>
+          <a:chOff x="0" y="0"/>
+          <a:chExt cx="0" cy="0"/>
+        </a:xfrm>
+      </p:grpSpPr>
+      <p:sp>
+        <p:nvSpPr>
+          <p:cNvPr id="2" name="Shape 0"/>
+          <p:cNvSpPr/>
+          <p:nvPr/>
+        </p:nvSpPr>
+        <p:spPr>
+          <a:xfrm>
+            <a:off x="0" y="0"/>
+            <a:ext cx="12191695" cy="164592"/>
+          </a:xfrm>
+          <a:prstGeom prst="rect">
+            <a:avLst/>
+          </a:prstGeom>
+          <a:solidFill>
+            <a:srgbClr val="0068B7"/>
+          </a:solidFill>
+          <a:ln w="12700">
+            <a:solidFill>
+              <a:srgbClr val="0068B7"/>
+            </a:solidFill>
+            <a:prstDash val="solid"/>
+          </a:ln>
+        </p:spPr>
+      </p:sp>
+      <p:sp>
+        <p:nvSpPr>
+          <p:cNvPr id="3" name="Shape 1"/>
+          <p:cNvSpPr/>
+          <p:nvPr/>
+        </p:nvSpPr>
+        <p:spPr>
+          <a:xfrm>
+            <a:off x="0" y="164592"/>
+            <a:ext cx="146304" cy="6693408"/>
+          </a:xfrm>
+          <a:prstGeom prst="rect">
+            <a:avLst/>
+          </a:prstGeom>
+          <a:solidFill>
+            <a:srgbClr val="2F8A28"/>
+          </a:solidFill>
+          <a:ln w="12700">
+            <a:solidFill>
+              <a:srgbClr val="2F8A28"/>
+            </a:solidFill>
+            <a:prstDash val="solid"/>
+          </a:ln>
+        </p:spPr>
+      </p:sp>
+      <p:sp>
+        <p:nvSpPr>
+          <p:cNvPr id="4" name="Text 2"/>
+          <p:cNvSpPr/>
+          <p:nvPr/>
+        </p:nvSpPr>
+        <p:spPr>
+          <a:xfrm>
+            <a:off x="502920" y="292608"/>
+            <a:ext cx="10149840" cy="256032"/>
+          </a:xfrm>
+          <a:prstGeom prst="rect">
+            <a:avLst/>
+          </a:prstGeom>
+          <a:noFill/>
+          <a:ln/>
+        </p:spPr>
+        <p:txBody>
+          <a:bodyPr wrap="square" lIns="0" tIns="0" rIns="0" bIns="0" rtlCol="0" anchor="ctr"/>
+          <a:lstStyle/>
+          <a:p>
+            <a:pPr indent="0" marL="0">
+              <a:buNone/>
+            </a:pPr>
+            <a:r>
+              <a:rPr lang="en-US" sz="900" b="1" dirty="0">
+                <a:solidFill>
+                  <a:srgbClr val="5F7181"/>
+                </a:solidFill>
+                <a:latin typeface="Aptos" pitchFamily="34" charset="0"/>
+                <a:ea typeface="Aptos" pitchFamily="34" charset="-122"/>
+                <a:cs typeface="Aptos" pitchFamily="34" charset="-120"/>
+              </a:rPr>
+              <a:t>AI Project Management and Implementation Planning</a:t>
+            </a:r>
+            <a:endParaRPr lang="en-US" sz="900" dirty="0"/>
+          </a:p>
+        </p:txBody>
+      </p:sp>
+      <p:sp>
+        <p:nvSpPr>
+          <p:cNvPr id="5" name="Text 3"/>
+          <p:cNvSpPr/>
+          <p:nvPr/>
+        </p:nvSpPr>
+        <p:spPr>
+          <a:xfrm>
+            <a:off x="502920" y="6537960"/>
+            <a:ext cx="7772400" cy="201168"/>
+          </a:xfrm>
+          <a:prstGeom prst="rect">
+            <a:avLst/>
+          </a:prstGeom>
+          <a:noFill/>
+          <a:ln/>
+        </p:spPr>
+        <p:txBody>
+          <a:bodyPr wrap="square" lIns="0" tIns="0" rIns="0" bIns="0" rtlCol="0" anchor="ctr"/>
+          <a:lstStyle/>
+          <a:p>
+            <a:pPr indent="0" marL="0">
+              <a:buNone/>
+            </a:pPr>
+            <a:r>
+              <a:rPr lang="en-US" sz="800" dirty="0">
+                <a:solidFill>
+                  <a:srgbClr val="5F7181"/>
+                </a:solidFill>
+                <a:latin typeface="Aptos" pitchFamily="34" charset="0"/>
+                <a:ea typeface="Aptos" pitchFamily="34" charset="-122"/>
+                <a:cs typeface="Aptos" pitchFamily="34" charset="-120"/>
+              </a:rPr>
+              <a:t>AI Playbook and Toolkit for Public Health Departments</a:t>
+            </a:r>
+            <a:endParaRPr lang="en-US" sz="800" dirty="0"/>
+          </a:p>
+        </p:txBody>
+      </p:sp>
+      <p:sp>
+        <p:nvSpPr>
+          <p:cNvPr id="6" name="Text 4"/>
+          <p:cNvSpPr/>
+          <p:nvPr/>
+        </p:nvSpPr>
+        <p:spPr>
+          <a:xfrm>
+            <a:off x="9966960" y="6537960"/>
+            <a:ext cx="1645920" cy="201168"/>
+          </a:xfrm>
+          <a:prstGeom prst="rect">
+            <a:avLst/>
+          </a:prstGeom>
+          <a:noFill/>
+          <a:ln/>
+        </p:spPr>
+        <p:txBody>
+          <a:bodyPr wrap="square" lIns="0" tIns="0" rIns="0" bIns="0" rtlCol="0" anchor="ctr"/>
+          <a:lstStyle/>
+          <a:p>
+            <a:pPr algn="r" indent="0" marL="0">
+              <a:buNone/>
+            </a:pPr>
+            <a:r>
+              <a:rPr lang="en-US" sz="800" dirty="0">
+                <a:solidFill>
+                  <a:srgbClr val="5F7181"/>
+                </a:solidFill>
+                <a:latin typeface="Aptos" pitchFamily="34" charset="0"/>
+                <a:ea typeface="Aptos" pitchFamily="34" charset="-122"/>
+                <a:cs typeface="Aptos" pitchFamily="34" charset="-120"/>
+              </a:rPr>
+              <a:t>© Paula Soper</a:t>
+            </a:r>
+            <a:endParaRPr lang="en-US" sz="800" dirty="0"/>
+          </a:p>
+        </p:txBody>
+      </p:sp>
+      <p:sp>
+        <p:nvSpPr>
+          <p:cNvPr id="7" name="Shape 5"/>
+          <p:cNvSpPr/>
+          <p:nvPr/>
+        </p:nvSpPr>
+        <p:spPr>
+          <a:xfrm>
+            <a:off x="640080" y="658368"/>
+            <a:ext cx="420624" cy="420624"/>
+          </a:xfrm>
+          <a:prstGeom prst="ellipse">
+            <a:avLst/>
+          </a:prstGeom>
+          <a:solidFill>
+            <a:srgbClr val="0068B7"/>
+          </a:solidFill>
+          <a:ln w="12700">
+            <a:solidFill>
+              <a:srgbClr val="0068B7"/>
+            </a:solidFill>
+            <a:prstDash val="solid"/>
+          </a:ln>
+        </p:spPr>
+      </p:sp>
+      <p:sp>
+        <p:nvSpPr>
+          <p:cNvPr id="8" name="Text 6"/>
+          <p:cNvSpPr/>
+          <p:nvPr/>
+        </p:nvSpPr>
+        <p:spPr>
+          <a:xfrm>
+            <a:off x="640080" y="731520"/>
+            <a:ext cx="420624" cy="164592"/>
+          </a:xfrm>
+          <a:prstGeom prst="rect">
+            <a:avLst/>
+          </a:prstGeom>
+          <a:noFill/>
+          <a:ln/>
+        </p:spPr>
+        <p:txBody>
+          <a:bodyPr wrap="square" lIns="0" tIns="0" rIns="0" bIns="0" rtlCol="0" anchor="ctr"/>
+          <a:lstStyle/>
+          <a:p>
+            <a:pPr algn="ctr" indent="0" marL="0">
+              <a:buNone/>
+            </a:pPr>
+            <a:r>
+              <a:rPr lang="en-US" sz="1100" b="1" dirty="0">
+                <a:solidFill>
+                  <a:srgbClr val="FFFFFF"/>
+                </a:solidFill>
+                <a:latin typeface="Aptos" pitchFamily="34" charset="0"/>
+                <a:ea typeface="Aptos" pitchFamily="34" charset="-122"/>
+                <a:cs typeface="Aptos" pitchFamily="34" charset="-120"/>
+              </a:rPr>
+              <a:t>11</a:t>
+            </a:r>
+            <a:endParaRPr lang="en-US" sz="1100" dirty="0"/>
+          </a:p>
+        </p:txBody>
+      </p:sp>
+      <p:sp>
+        <p:nvSpPr>
+          <p:cNvPr id="9" name="Text 7"/>
+          <p:cNvSpPr/>
+          <p:nvPr/>
+        </p:nvSpPr>
+        <p:spPr>
+          <a:xfrm>
+            <a:off x="640080" y="621792"/>
+            <a:ext cx="10881360" cy="566928"/>
+          </a:xfrm>
+          <a:prstGeom prst="rect">
+            <a:avLst/>
+          </a:prstGeom>
+          <a:noFill/>
+          <a:ln/>
+        </p:spPr>
+        <p:txBody>
+          <a:bodyPr wrap="square" lIns="0" tIns="0" rIns="0" bIns="0" rtlCol="0" anchor="ctr">
+            <a:normAutofit/>
+          </a:bodyPr>
+          <a:lstStyle/>
+          <a:p>
+            <a:pPr indent="0" marL="0">
+              <a:buNone/>
+            </a:pPr>
+            <a:r>
+              <a:rPr lang="en-US" sz="2700" b="1" dirty="0">
+                <a:solidFill>
+                  <a:srgbClr val="003A63"/>
+                </a:solidFill>
+                <a:latin typeface="Aptos Display" pitchFamily="34" charset="0"/>
+                <a:ea typeface="Aptos Display" pitchFamily="34" charset="-122"/>
+                <a:cs typeface="Aptos Display" pitchFamily="34" charset="-120"/>
+              </a:rPr>
+              <a:t>References and Resources</a:t>
+            </a:r>
+            <a:endParaRPr lang="en-US" sz="2700" dirty="0"/>
+          </a:p>
+        </p:txBody>
+      </p:sp>
+      <p:sp>
+        <p:nvSpPr>
+          <p:cNvPr id="10" name="Text 8"/>
+          <p:cNvSpPr/>
+          <p:nvPr/>
+        </p:nvSpPr>
+        <p:spPr>
+          <a:xfrm>
+            <a:off x="868680" y="1417320"/>
+            <a:ext cx="6675120" cy="4434840"/>
+          </a:xfrm>
+          <a:prstGeom prst="rect">
+            <a:avLst/>
+          </a:prstGeom>
+          <a:noFill/>
+          <a:ln/>
+        </p:spPr>
+        <p:txBody>
+          <a:bodyPr wrap="square" lIns="635" tIns="635" rIns="635" bIns="635" rtlCol="0" anchor="t">
+            <a:normAutofit/>
+          </a:bodyPr>
+          <a:lstStyle/>
+          <a:p>
+            <a:r>
+              <a:rPr lang="en-US" sz="1700" dirty="0">
+                <a:solidFill>
+                  <a:srgbClr val="17364A"/>
+                </a:solidFill>
+                <a:latin typeface="Aptos" pitchFamily="34" charset="0"/>
+                <a:ea typeface="Aptos" pitchFamily="34" charset="-122"/>
+                <a:cs typeface="Aptos" pitchFamily="34" charset="-120"/>
+              </a:rPr>
+              <a:t>NIST Artificial Intelligence Risk Management Framework: https://www.nist.gov/itl/ai-risk-management-framework</a:t>
+            </a:r>
+            <a:endParaRPr lang="en-US" sz="1700" dirty="0"/>
+          </a:p>
+          <a:p>
+            <a:r>
+              <a:rPr lang="en-US" sz="1700" dirty="0">
+                <a:solidFill>
+                  <a:srgbClr val="17364A"/>
+                </a:solidFill>
+                <a:latin typeface="Aptos" pitchFamily="34" charset="0"/>
+                <a:ea typeface="Aptos" pitchFamily="34" charset="-122"/>
+                <a:cs typeface="Aptos" pitchFamily="34" charset="-120"/>
+              </a:rPr>
+              <a:t>NIST Generative AI Profile:.</a:t>
+            </a:r>
+            <a:endParaRPr lang="en-US" sz="1700" dirty="0"/>
+          </a:p>
+          <a:p>
+            <a:r>
+              <a:rPr lang="en-US" sz="1700" dirty="0">
+                <a:solidFill>
+                  <a:srgbClr val="17364A"/>
+                </a:solidFill>
+                <a:latin typeface="Aptos" pitchFamily="34" charset="0"/>
+                <a:ea typeface="Aptos" pitchFamily="34" charset="-122"/>
+                <a:cs typeface="Aptos" pitchFamily="34" charset="-120"/>
+              </a:rPr>
+              <a:t>CDC Public Health Data Strategy and Data Modernization resources:.</a:t>
+            </a:r>
+            <a:endParaRPr lang="en-US" sz="1700" dirty="0"/>
+          </a:p>
+          <a:p>
+            <a:r>
+              <a:rPr lang="en-US" sz="1700" dirty="0">
+                <a:solidFill>
+                  <a:srgbClr val="17364A"/>
+                </a:solidFill>
+                <a:latin typeface="Aptos" pitchFamily="34" charset="0"/>
+                <a:ea typeface="Aptos" pitchFamily="34" charset="-122"/>
+                <a:cs typeface="Aptos" pitchFamily="34" charset="-120"/>
+              </a:rPr>
+              <a:t>OWASP guidance for LLM application security</a:t>
+            </a:r>
+            <a:endParaRPr lang="en-US" sz="1700" dirty="0"/>
+          </a:p>
+        </p:txBody>
+      </p:sp>
+      <p:sp>
+        <p:nvSpPr>
+          <p:cNvPr id="11" name="Shape 9"/>
+          <p:cNvSpPr/>
+          <p:nvPr/>
+        </p:nvSpPr>
+        <p:spPr>
+          <a:xfrm>
+            <a:off x="7909560" y="1417320"/>
+            <a:ext cx="3154680" cy="1828800"/>
+          </a:xfrm>
+          <a:prstGeom prst="roundRect">
+            <a:avLst>
+              <a:gd name="adj" fmla="val 6000"/>
+            </a:avLst>
+          </a:prstGeom>
+          <a:solidFill>
+            <a:srgbClr val="EEF8ED"/>
+          </a:solidFill>
+          <a:ln w="12700">
+            <a:solidFill>
+              <a:srgbClr val="B9D7E6"/>
+            </a:solidFill>
+            <a:prstDash val="solid"/>
+          </a:ln>
+        </p:spPr>
+      </p:sp>
+      <p:sp>
+        <p:nvSpPr>
+          <p:cNvPr id="12" name="Text 10"/>
+          <p:cNvSpPr/>
+          <p:nvPr/>
+        </p:nvSpPr>
+        <p:spPr>
+          <a:xfrm>
+            <a:off x="8074152" y="1563624"/>
+            <a:ext cx="2825496" cy="201168"/>
+          </a:xfrm>
+          <a:prstGeom prst="rect">
+            <a:avLst/>
+          </a:prstGeom>
+          <a:noFill/>
+          <a:ln/>
+        </p:spPr>
+        <p:txBody>
+          <a:bodyPr wrap="square" lIns="0" tIns="0" rIns="0" bIns="0" rtlCol="0" anchor="ctr"/>
+          <a:lstStyle/>
+          <a:p>
+            <a:pPr indent="0" marL="0">
+              <a:buNone/>
+            </a:pPr>
+            <a:r>
+              <a:rPr lang="en-US" sz="950" b="1" dirty="0">
+                <a:solidFill>
+                  <a:srgbClr val="0068B7"/>
+                </a:solidFill>
+                <a:latin typeface="Aptos" pitchFamily="34" charset="0"/>
+                <a:ea typeface="Aptos" pitchFamily="34" charset="-122"/>
+                <a:cs typeface="Aptos" pitchFamily="34" charset="-120"/>
+              </a:rPr>
+              <a:t>Key idea</a:t>
+            </a:r>
+            <a:endParaRPr lang="en-US" sz="950" dirty="0"/>
+          </a:p>
+        </p:txBody>
+      </p:sp>
+      <p:sp>
+        <p:nvSpPr>
+          <p:cNvPr id="13" name="Text 11"/>
+          <p:cNvSpPr/>
+          <p:nvPr/>
+        </p:nvSpPr>
+        <p:spPr>
+          <a:xfrm>
+            <a:off x="8074152" y="1856232"/>
+            <a:ext cx="2825496" cy="1261872"/>
+          </a:xfrm>
+          <a:prstGeom prst="rect">
+            <a:avLst/>
+          </a:prstGeom>
+          <a:noFill/>
+          <a:ln/>
+        </p:spPr>
+        <p:txBody>
+          <a:bodyPr wrap="square" lIns="0" tIns="0" rIns="0" bIns="0" rtlCol="0" anchor="t">
+            <a:normAutofit/>
+          </a:bodyPr>
+          <a:lstStyle/>
+          <a:p>
+            <a:pPr indent="0" marL="0">
+              <a:buNone/>
+            </a:pPr>
+            <a:r>
+              <a:rPr lang="en-US" sz="1250" dirty="0">
+                <a:solidFill>
+                  <a:srgbClr val="17364A"/>
+                </a:solidFill>
+                <a:latin typeface="Aptos" pitchFamily="34" charset="0"/>
+                <a:ea typeface="Aptos" pitchFamily="34" charset="-122"/>
+                <a:cs typeface="Aptos" pitchFamily="34" charset="-120"/>
+              </a:rPr>
+              <a:t>NIST Artificial Intelligence Risk Management Framework: https://www.nist.gov/itl/ai-risk-management-framework</a:t>
+            </a:r>
+            <a:endParaRPr lang="en-US" sz="1250" dirty="0"/>
+          </a:p>
+        </p:txBody>
+      </p:sp>
+      <p:sp>
+        <p:nvSpPr>
+          <p:cNvPr id="14" name="Shape 12"/>
+          <p:cNvSpPr/>
+          <p:nvPr/>
+        </p:nvSpPr>
+        <p:spPr>
+          <a:xfrm>
+            <a:off x="7909560" y="3520440"/>
+            <a:ext cx="3154680" cy="1737360"/>
+          </a:xfrm>
+          <a:prstGeom prst="roundRect">
+            <a:avLst>
+              <a:gd name="adj" fmla="val 6316"/>
+            </a:avLst>
+          </a:prstGeom>
+          <a:solidFill>
+            <a:srgbClr val="EAF6F8"/>
+          </a:solidFill>
+          <a:ln w="12700">
+            <a:solidFill>
+              <a:srgbClr val="B9D7E6"/>
+            </a:solidFill>
+            <a:prstDash val="solid"/>
+          </a:ln>
+        </p:spPr>
+      </p:sp>
+      <p:sp>
+        <p:nvSpPr>
+          <p:cNvPr id="15" name="Text 13"/>
+          <p:cNvSpPr/>
+          <p:nvPr/>
+        </p:nvSpPr>
+        <p:spPr>
+          <a:xfrm>
+            <a:off x="8074152" y="3666744"/>
+            <a:ext cx="2825496" cy="201168"/>
+          </a:xfrm>
+          <a:prstGeom prst="rect">
+            <a:avLst/>
+          </a:prstGeom>
+          <a:noFill/>
+          <a:ln/>
+        </p:spPr>
+        <p:txBody>
+          <a:bodyPr wrap="square" lIns="0" tIns="0" rIns="0" bIns="0" rtlCol="0" anchor="ctr"/>
+          <a:lstStyle/>
+          <a:p>
+            <a:pPr indent="0" marL="0">
+              <a:buNone/>
+            </a:pPr>
+            <a:r>
+              <a:rPr lang="en-US" sz="950" b="1" dirty="0">
+                <a:solidFill>
+                  <a:srgbClr val="0068B7"/>
+                </a:solidFill>
+                <a:latin typeface="Aptos" pitchFamily="34" charset="0"/>
+                <a:ea typeface="Aptos" pitchFamily="34" charset="-122"/>
+                <a:cs typeface="Aptos" pitchFamily="34" charset="-120"/>
+              </a:rPr>
+              <a:t>Use this for</a:t>
+            </a:r>
+            <a:endParaRPr lang="en-US" sz="950" dirty="0"/>
+          </a:p>
+        </p:txBody>
+      </p:sp>
+      <p:sp>
+        <p:nvSpPr>
+          <p:cNvPr id="16" name="Text 14"/>
+          <p:cNvSpPr/>
+          <p:nvPr/>
+        </p:nvSpPr>
+        <p:spPr>
+          <a:xfrm>
+            <a:off x="8074152" y="3959352"/>
+            <a:ext cx="2825496" cy="1170432"/>
+          </a:xfrm>
+          <a:prstGeom prst="rect">
+            <a:avLst/>
+          </a:prstGeom>
+          <a:noFill/>
+          <a:ln/>
+        </p:spPr>
+        <p:txBody>
+          <a:bodyPr wrap="square" lIns="0" tIns="0" rIns="0" bIns="0" rtlCol="0" anchor="t">
+            <a:normAutofit/>
+          </a:bodyPr>
+          <a:lstStyle/>
+          <a:p>
+            <a:pPr indent="0" marL="0">
+              <a:buNone/>
+            </a:pPr>
+            <a:r>
+              <a:rPr lang="en-US" sz="1250" dirty="0">
+                <a:solidFill>
+                  <a:srgbClr val="17364A"/>
+                </a:solidFill>
+                <a:latin typeface="Aptos" pitchFamily="34" charset="0"/>
+                <a:ea typeface="Aptos" pitchFamily="34" charset="-122"/>
+                <a:cs typeface="Aptos" pitchFamily="34" charset="-120"/>
+              </a:rPr>
+              <a:t>Connect the concept to public health decisions, safeguards, documentation, or implementation work.</a:t>
+            </a:r>
+            <a:endParaRPr lang="en-US" sz="1250" dirty="0"/>
+          </a:p>
+        </p:txBody>
+      </p:sp>
+    </p:spTree>
+  </p:cSld>
+  <p:clrMapOvr>
+    <a:masterClrMapping/>
+  </p:clrMapOvr>
+</p:sld>
+</file>
+
+<file path=ppt/slides/slide22.xml><?xml version="1.0" encoding="utf-8"?>
+<p:sld xmlns:a="http://schemas.openxmlformats.org/drawingml/2006/main" xmlns:r="http://schemas.openxmlformats.org/officeDocument/2006/relationships" xmlns:p="http://schemas.openxmlformats.org/presentationml/2006/main">
+  <p:cSld name="Slide 22">
+    <p:bg>
+      <p:bgPr>
+        <a:solidFill>
+          <a:srgbClr val="F7FBFD"/>
+        </a:solidFill>
+      </p:bgPr>
+    </p:bg>
+    <p:spTree>
+      <p:nvGrpSpPr>
+        <p:cNvPr id="1" name=""/>
+        <p:cNvGrpSpPr/>
+        <p:nvPr/>
+      </p:nvGrpSpPr>
+      <p:grpSpPr>
+        <a:xfrm>
+          <a:off x="0" y="0"/>
+          <a:ext cx="0" cy="0"/>
+          <a:chOff x="0" y="0"/>
+          <a:chExt cx="0" cy="0"/>
+        </a:xfrm>
+      </p:grpSpPr>
+      <p:sp>
+        <p:nvSpPr>
+          <p:cNvPr id="2" name="Shape 0"/>
+          <p:cNvSpPr/>
+          <p:nvPr/>
+        </p:nvSpPr>
+        <p:spPr>
+          <a:xfrm>
+            <a:off x="0" y="0"/>
+            <a:ext cx="12191695" cy="164592"/>
+          </a:xfrm>
+          <a:prstGeom prst="rect">
+            <a:avLst/>
+          </a:prstGeom>
+          <a:solidFill>
+            <a:srgbClr val="0068B7"/>
+          </a:solidFill>
+          <a:ln w="12700">
+            <a:solidFill>
+              <a:srgbClr val="0068B7"/>
+            </a:solidFill>
+            <a:prstDash val="solid"/>
+          </a:ln>
+        </p:spPr>
+      </p:sp>
+      <p:sp>
+        <p:nvSpPr>
+          <p:cNvPr id="3" name="Shape 1"/>
+          <p:cNvSpPr/>
+          <p:nvPr/>
+        </p:nvSpPr>
+        <p:spPr>
+          <a:xfrm>
+            <a:off x="0" y="164592"/>
+            <a:ext cx="146304" cy="6693408"/>
+          </a:xfrm>
+          <a:prstGeom prst="rect">
+            <a:avLst/>
+          </a:prstGeom>
+          <a:solidFill>
+            <a:srgbClr val="2F8A28"/>
+          </a:solidFill>
+          <a:ln w="12700">
+            <a:solidFill>
+              <a:srgbClr val="2F8A28"/>
+            </a:solidFill>
+            <a:prstDash val="solid"/>
+          </a:ln>
+        </p:spPr>
+      </p:sp>
+      <p:sp>
+        <p:nvSpPr>
+          <p:cNvPr id="4" name="Text 2"/>
+          <p:cNvSpPr/>
+          <p:nvPr/>
+        </p:nvSpPr>
+        <p:spPr>
+          <a:xfrm>
+            <a:off x="502920" y="292608"/>
+            <a:ext cx="10149840" cy="256032"/>
+          </a:xfrm>
+          <a:prstGeom prst="rect">
+            <a:avLst/>
+          </a:prstGeom>
+          <a:noFill/>
+          <a:ln/>
+        </p:spPr>
+        <p:txBody>
+          <a:bodyPr wrap="square" lIns="0" tIns="0" rIns="0" bIns="0" rtlCol="0" anchor="ctr"/>
+          <a:lstStyle/>
+          <a:p>
+            <a:pPr indent="0" marL="0">
+              <a:buNone/>
+            </a:pPr>
+            <a:r>
+              <a:rPr lang="en-US" sz="900" b="1" dirty="0">
+                <a:solidFill>
+                  <a:srgbClr val="5F7181"/>
+                </a:solidFill>
+                <a:latin typeface="Aptos" pitchFamily="34" charset="0"/>
+                <a:ea typeface="Aptos" pitchFamily="34" charset="-122"/>
+                <a:cs typeface="Aptos" pitchFamily="34" charset="-120"/>
+              </a:rPr>
+              <a:t>AI Project Management and Implementation Planning</a:t>
+            </a:r>
+            <a:endParaRPr lang="en-US" sz="900" dirty="0"/>
+          </a:p>
+        </p:txBody>
+      </p:sp>
+      <p:sp>
+        <p:nvSpPr>
+          <p:cNvPr id="5" name="Text 3"/>
+          <p:cNvSpPr/>
+          <p:nvPr/>
+        </p:nvSpPr>
+        <p:spPr>
+          <a:xfrm>
+            <a:off x="502920" y="6537960"/>
+            <a:ext cx="7772400" cy="201168"/>
+          </a:xfrm>
+          <a:prstGeom prst="rect">
+            <a:avLst/>
+          </a:prstGeom>
+          <a:noFill/>
+          <a:ln/>
+        </p:spPr>
+        <p:txBody>
+          <a:bodyPr wrap="square" lIns="0" tIns="0" rIns="0" bIns="0" rtlCol="0" anchor="ctr"/>
+          <a:lstStyle/>
+          <a:p>
+            <a:pPr indent="0" marL="0">
+              <a:buNone/>
+            </a:pPr>
+            <a:r>
+              <a:rPr lang="en-US" sz="800" dirty="0">
+                <a:solidFill>
+                  <a:srgbClr val="5F7181"/>
+                </a:solidFill>
+                <a:latin typeface="Aptos" pitchFamily="34" charset="0"/>
+                <a:ea typeface="Aptos" pitchFamily="34" charset="-122"/>
+                <a:cs typeface="Aptos" pitchFamily="34" charset="-120"/>
+              </a:rPr>
+              <a:t>AI Playbook and Toolkit for Public Health Departments</a:t>
+            </a:r>
+            <a:endParaRPr lang="en-US" sz="800" dirty="0"/>
+          </a:p>
+        </p:txBody>
+      </p:sp>
+      <p:sp>
+        <p:nvSpPr>
+          <p:cNvPr id="6" name="Text 4"/>
+          <p:cNvSpPr/>
+          <p:nvPr/>
+        </p:nvSpPr>
+        <p:spPr>
+          <a:xfrm>
+            <a:off x="9966960" y="6537960"/>
+            <a:ext cx="1645920" cy="201168"/>
+          </a:xfrm>
+          <a:prstGeom prst="rect">
+            <a:avLst/>
+          </a:prstGeom>
+          <a:noFill/>
+          <a:ln/>
+        </p:spPr>
+        <p:txBody>
+          <a:bodyPr wrap="square" lIns="0" tIns="0" rIns="0" bIns="0" rtlCol="0" anchor="ctr"/>
+          <a:lstStyle/>
+          <a:p>
+            <a:pPr algn="r" indent="0" marL="0">
+              <a:buNone/>
+            </a:pPr>
+            <a:r>
+              <a:rPr lang="en-US" sz="800" dirty="0">
+                <a:solidFill>
+                  <a:srgbClr val="5F7181"/>
+                </a:solidFill>
+                <a:latin typeface="Aptos" pitchFamily="34" charset="0"/>
+                <a:ea typeface="Aptos" pitchFamily="34" charset="-122"/>
+                <a:cs typeface="Aptos" pitchFamily="34" charset="-120"/>
+              </a:rPr>
+              <a:t>© Paula Soper</a:t>
+            </a:r>
+            <a:endParaRPr lang="en-US" sz="800" dirty="0"/>
+          </a:p>
+        </p:txBody>
+      </p:sp>
+      <p:sp>
+        <p:nvSpPr>
+          <p:cNvPr id="7" name="Text 5"/>
+          <p:cNvSpPr/>
+          <p:nvPr/>
+        </p:nvSpPr>
+        <p:spPr>
+          <a:xfrm>
+            <a:off x="640080" y="658368"/>
+            <a:ext cx="10881360" cy="566928"/>
+          </a:xfrm>
+          <a:prstGeom prst="rect">
+            <a:avLst/>
+          </a:prstGeom>
+          <a:noFill/>
+          <a:ln/>
+        </p:spPr>
+        <p:txBody>
+          <a:bodyPr wrap="square" lIns="0" tIns="0" rIns="0" bIns="0" rtlCol="0" anchor="ctr">
+            <a:normAutofit/>
+          </a:bodyPr>
+          <a:lstStyle/>
+          <a:p>
+            <a:pPr indent="0" marL="0">
+              <a:buNone/>
+            </a:pPr>
+            <a:r>
+              <a:rPr lang="en-US" sz="2700" b="1" dirty="0">
+                <a:solidFill>
+                  <a:srgbClr val="003A63"/>
+                </a:solidFill>
+                <a:latin typeface="Aptos Display" pitchFamily="34" charset="0"/>
+                <a:ea typeface="Aptos Display" pitchFamily="34" charset="-122"/>
+                <a:cs typeface="Aptos Display" pitchFamily="34" charset="-120"/>
+              </a:rPr>
+              <a:t>References and Resources Continued</a:t>
+            </a:r>
+            <a:endParaRPr lang="en-US" sz="2700" dirty="0"/>
+          </a:p>
+        </p:txBody>
+      </p:sp>
+      <p:sp>
+        <p:nvSpPr>
+          <p:cNvPr id="8" name="Text 6"/>
+          <p:cNvSpPr/>
+          <p:nvPr/>
+        </p:nvSpPr>
+        <p:spPr>
+          <a:xfrm>
+            <a:off x="868680" y="1417320"/>
+            <a:ext cx="6675120" cy="4434840"/>
+          </a:xfrm>
+          <a:prstGeom prst="rect">
+            <a:avLst/>
+          </a:prstGeom>
+          <a:noFill/>
+          <a:ln/>
+        </p:spPr>
+        <p:txBody>
+          <a:bodyPr wrap="square" lIns="635" tIns="635" rIns="635" bIns="635" rtlCol="0" anchor="t">
+            <a:normAutofit/>
+          </a:bodyPr>
+          <a:lstStyle/>
+          <a:p>
+            <a:r>
+              <a:rPr lang="en-US" sz="1700" dirty="0">
+                <a:solidFill>
+                  <a:srgbClr val="17364A"/>
+                </a:solidFill>
+                <a:latin typeface="Aptos" pitchFamily="34" charset="0"/>
+                <a:ea typeface="Aptos" pitchFamily="34" charset="-122"/>
+                <a:cs typeface="Aptos" pitchFamily="34" charset="-120"/>
+              </a:rPr>
               <a:t>Relevant public health program SOPs, data governance documentation, and implementation plans</a:t>
             </a:r>
-            <a:endParaRPr lang="en-US" sz="1450" dirty="0"/>
+            <a:endParaRPr lang="en-US" sz="1700" dirty="0"/>
+          </a:p>
+        </p:txBody>
+      </p:sp>
+      <p:sp>
+        <p:nvSpPr>
+          <p:cNvPr id="9" name="Shape 7"/>
+          <p:cNvSpPr/>
+          <p:nvPr/>
+        </p:nvSpPr>
+        <p:spPr>
+          <a:xfrm>
+            <a:off x="7909560" y="1417320"/>
+            <a:ext cx="3154680" cy="1828800"/>
+          </a:xfrm>
+          <a:prstGeom prst="roundRect">
+            <a:avLst>
+              <a:gd name="adj" fmla="val 6000"/>
+            </a:avLst>
+          </a:prstGeom>
+          <a:solidFill>
+            <a:srgbClr val="EEF8ED"/>
+          </a:solidFill>
+          <a:ln w="12700">
+            <a:solidFill>
+              <a:srgbClr val="B9D7E6"/>
+            </a:solidFill>
+            <a:prstDash val="solid"/>
+          </a:ln>
+        </p:spPr>
+      </p:sp>
+      <p:sp>
+        <p:nvSpPr>
+          <p:cNvPr id="10" name="Text 8"/>
+          <p:cNvSpPr/>
+          <p:nvPr/>
+        </p:nvSpPr>
+        <p:spPr>
+          <a:xfrm>
+            <a:off x="8074152" y="1563624"/>
+            <a:ext cx="2825496" cy="201168"/>
+          </a:xfrm>
+          <a:prstGeom prst="rect">
+            <a:avLst/>
+          </a:prstGeom>
+          <a:noFill/>
+          <a:ln/>
+        </p:spPr>
+        <p:txBody>
+          <a:bodyPr wrap="square" lIns="0" tIns="0" rIns="0" bIns="0" rtlCol="0" anchor="ctr"/>
+          <a:lstStyle/>
+          <a:p>
+            <a:pPr indent="0" marL="0">
+              <a:buNone/>
+            </a:pPr>
+            <a:r>
+              <a:rPr lang="en-US" sz="950" b="1" dirty="0">
+                <a:solidFill>
+                  <a:srgbClr val="0068B7"/>
+                </a:solidFill>
+                <a:latin typeface="Aptos" pitchFamily="34" charset="0"/>
+                <a:ea typeface="Aptos" pitchFamily="34" charset="-122"/>
+                <a:cs typeface="Aptos" pitchFamily="34" charset="-120"/>
+              </a:rPr>
+              <a:t>Key idea</a:t>
+            </a:r>
+            <a:endParaRPr lang="en-US" sz="950" dirty="0"/>
+          </a:p>
+        </p:txBody>
+      </p:sp>
+      <p:sp>
+        <p:nvSpPr>
+          <p:cNvPr id="11" name="Text 9"/>
+          <p:cNvSpPr/>
+          <p:nvPr/>
+        </p:nvSpPr>
+        <p:spPr>
+          <a:xfrm>
+            <a:off x="8074152" y="1856232"/>
+            <a:ext cx="2825496" cy="1261872"/>
+          </a:xfrm>
+          <a:prstGeom prst="rect">
+            <a:avLst/>
+          </a:prstGeom>
+          <a:noFill/>
+          <a:ln/>
+        </p:spPr>
+        <p:txBody>
+          <a:bodyPr wrap="square" lIns="0" tIns="0" rIns="0" bIns="0" rtlCol="0" anchor="t">
+            <a:normAutofit/>
+          </a:bodyPr>
+          <a:lstStyle/>
+          <a:p>
+            <a:pPr indent="0" marL="0">
+              <a:buNone/>
+            </a:pPr>
+            <a:r>
+              <a:rPr lang="en-US" sz="1250" dirty="0">
+                <a:solidFill>
+                  <a:srgbClr val="17364A"/>
+                </a:solidFill>
+                <a:latin typeface="Aptos" pitchFamily="34" charset="0"/>
+                <a:ea typeface="Aptos" pitchFamily="34" charset="-122"/>
+                <a:cs typeface="Aptos" pitchFamily="34" charset="-120"/>
+              </a:rPr>
+              <a:t>Relevant public health program SOPs, data governance documentation, and implementation plans</a:t>
+            </a:r>
+            <a:endParaRPr lang="en-US" sz="1250" dirty="0"/>
+          </a:p>
+        </p:txBody>
+      </p:sp>
+      <p:sp>
+        <p:nvSpPr>
+          <p:cNvPr id="12" name="Shape 10"/>
+          <p:cNvSpPr/>
+          <p:nvPr/>
+        </p:nvSpPr>
+        <p:spPr>
+          <a:xfrm>
+            <a:off x="7909560" y="3520440"/>
+            <a:ext cx="3154680" cy="1737360"/>
+          </a:xfrm>
+          <a:prstGeom prst="roundRect">
+            <a:avLst>
+              <a:gd name="adj" fmla="val 6316"/>
+            </a:avLst>
+          </a:prstGeom>
+          <a:solidFill>
+            <a:srgbClr val="EAF6F8"/>
+          </a:solidFill>
+          <a:ln w="12700">
+            <a:solidFill>
+              <a:srgbClr val="B9D7E6"/>
+            </a:solidFill>
+            <a:prstDash val="solid"/>
+          </a:ln>
+        </p:spPr>
+      </p:sp>
+      <p:sp>
+        <p:nvSpPr>
+          <p:cNvPr id="13" name="Text 11"/>
+          <p:cNvSpPr/>
+          <p:nvPr/>
+        </p:nvSpPr>
+        <p:spPr>
+          <a:xfrm>
+            <a:off x="8074152" y="3666744"/>
+            <a:ext cx="2825496" cy="201168"/>
+          </a:xfrm>
+          <a:prstGeom prst="rect">
+            <a:avLst/>
+          </a:prstGeom>
+          <a:noFill/>
+          <a:ln/>
+        </p:spPr>
+        <p:txBody>
+          <a:bodyPr wrap="square" lIns="0" tIns="0" rIns="0" bIns="0" rtlCol="0" anchor="ctr"/>
+          <a:lstStyle/>
+          <a:p>
+            <a:pPr indent="0" marL="0">
+              <a:buNone/>
+            </a:pPr>
+            <a:r>
+              <a:rPr lang="en-US" sz="950" b="1" dirty="0">
+                <a:solidFill>
+                  <a:srgbClr val="0068B7"/>
+                </a:solidFill>
+                <a:latin typeface="Aptos" pitchFamily="34" charset="0"/>
+                <a:ea typeface="Aptos" pitchFamily="34" charset="-122"/>
+                <a:cs typeface="Aptos" pitchFamily="34" charset="-120"/>
+              </a:rPr>
+              <a:t>Use this for</a:t>
+            </a:r>
+            <a:endParaRPr lang="en-US" sz="950" dirty="0"/>
+          </a:p>
+        </p:txBody>
+      </p:sp>
+      <p:sp>
+        <p:nvSpPr>
+          <p:cNvPr id="14" name="Text 12"/>
+          <p:cNvSpPr/>
+          <p:nvPr/>
+        </p:nvSpPr>
+        <p:spPr>
+          <a:xfrm>
+            <a:off x="8074152" y="3959352"/>
+            <a:ext cx="2825496" cy="1170432"/>
+          </a:xfrm>
+          <a:prstGeom prst="rect">
+            <a:avLst/>
+          </a:prstGeom>
+          <a:noFill/>
+          <a:ln/>
+        </p:spPr>
+        <p:txBody>
+          <a:bodyPr wrap="square" lIns="0" tIns="0" rIns="0" bIns="0" rtlCol="0" anchor="t">
+            <a:normAutofit/>
+          </a:bodyPr>
+          <a:lstStyle/>
+          <a:p>
+            <a:pPr indent="0" marL="0">
+              <a:buNone/>
+            </a:pPr>
+            <a:r>
+              <a:rPr lang="en-US" sz="1250" dirty="0">
+                <a:solidFill>
+                  <a:srgbClr val="17364A"/>
+                </a:solidFill>
+                <a:latin typeface="Aptos" pitchFamily="34" charset="0"/>
+                <a:ea typeface="Aptos" pitchFamily="34" charset="-122"/>
+                <a:cs typeface="Aptos" pitchFamily="34" charset="-120"/>
+              </a:rPr>
+              <a:t>Connect the concept to public health decisions, safeguards, documentation, or implementation work.</a:t>
+            </a:r>
+            <a:endParaRPr lang="en-US" sz="1250" dirty="0"/>
           </a:p>
         </p:txBody>
       </p:sp>
@@ -6167,7 +10809,32 @@
       </p:sp>
       <p:sp>
         <p:nvSpPr>
-          <p:cNvPr id="3" name="Text 1"/>
+          <p:cNvPr id="3" name="Shape 1"/>
+          <p:cNvSpPr/>
+          <p:nvPr/>
+        </p:nvSpPr>
+        <p:spPr>
+          <a:xfrm>
+            <a:off x="0" y="164592"/>
+            <a:ext cx="146304" cy="6693408"/>
+          </a:xfrm>
+          <a:prstGeom prst="rect">
+            <a:avLst/>
+          </a:prstGeom>
+          <a:solidFill>
+            <a:srgbClr val="2F8A28"/>
+          </a:solidFill>
+          <a:ln w="12700">
+            <a:solidFill>
+              <a:srgbClr val="2F8A28"/>
+            </a:solidFill>
+            <a:prstDash val="solid"/>
+          </a:ln>
+        </p:spPr>
+      </p:sp>
+      <p:sp>
+        <p:nvSpPr>
+          <p:cNvPr id="4" name="Text 2"/>
           <p:cNvSpPr/>
           <p:nvPr/>
         </p:nvSpPr>
@@ -6206,7 +10873,7 @@
       </p:sp>
       <p:sp>
         <p:nvSpPr>
-          <p:cNvPr id="4" name="Text 2"/>
+          <p:cNvPr id="5" name="Text 3"/>
           <p:cNvSpPr/>
           <p:nvPr/>
         </p:nvSpPr>
@@ -6245,7 +10912,7 @@
       </p:sp>
       <p:sp>
         <p:nvSpPr>
-          <p:cNvPr id="5" name="Text 3"/>
+          <p:cNvPr id="6" name="Text 4"/>
           <p:cNvSpPr/>
           <p:nvPr/>
         </p:nvSpPr>
@@ -6284,7 +10951,7 @@
       </p:sp>
       <p:sp>
         <p:nvSpPr>
-          <p:cNvPr id="6" name="Text 4"/>
+          <p:cNvPr id="7" name="Text 5"/>
           <p:cNvSpPr/>
           <p:nvPr/>
         </p:nvSpPr>
@@ -6317,7 +10984,7 @@
                 <a:ea typeface="Aptos Display" pitchFamily="34" charset="-122"/>
                 <a:cs typeface="Aptos Display" pitchFamily="34" charset="-120"/>
               </a:rPr>
-              <a:t>Learning Objectives</a:t>
+              <a:t>How this module connects to the playbook</a:t>
             </a:r>
             <a:endParaRPr lang="en-US" sz="2700" dirty="0"/>
           </a:p>
@@ -6325,14 +10992,14 @@
       </p:sp>
       <p:sp>
         <p:nvSpPr>
-          <p:cNvPr id="7" name="Text 5"/>
-          <p:cNvSpPr/>
-          <p:nvPr/>
-        </p:nvSpPr>
-        <p:spPr>
-          <a:xfrm>
-            <a:off x="822960" y="1325880"/>
-            <a:ext cx="10378440" cy="4800600"/>
+          <p:cNvPr id="8" name="Text 6"/>
+          <p:cNvSpPr/>
+          <p:nvPr/>
+        </p:nvSpPr>
+        <p:spPr>
+          <a:xfrm>
+            <a:off x="868680" y="1417320"/>
+            <a:ext cx="6903720" cy="4480560"/>
           </a:xfrm>
           <a:prstGeom prst="rect">
             <a:avLst/>
@@ -6347,7 +11014,7 @@
           <a:lstStyle/>
           <a:p>
             <a:r>
-              <a:rPr lang="en-US" sz="1450" dirty="0">
+              <a:rPr lang="en-US" sz="1540" dirty="0">
                 <a:solidFill>
                   <a:srgbClr val="17364A"/>
                 </a:solidFill>
@@ -6355,13 +11022,13 @@
                 <a:ea typeface="Aptos" pitchFamily="34" charset="-122"/>
                 <a:cs typeface="Aptos" pitchFamily="34" charset="-120"/>
               </a:rPr>
-              <a:t>Define the major phases of an AI implementation project.</a:t>
-            </a:r>
-            <a:endParaRPr lang="en-US" sz="1450" dirty="0"/>
-          </a:p>
-          <a:p>
-            <a:r>
-              <a:rPr lang="en-US" sz="1450" dirty="0">
+              <a:t>Play 11: Build and Deploy AI Solutions - This lesson informs Play 11 by helping learners connect the lesson topic to build and deploy.</a:t>
+            </a:r>
+            <a:endParaRPr lang="en-US" sz="1540" dirty="0"/>
+          </a:p>
+          <a:p>
+            <a:r>
+              <a:rPr lang="en-US" sz="1540" dirty="0">
                 <a:solidFill>
                   <a:srgbClr val="17364A"/>
                 </a:solidFill>
@@ -6369,13 +11036,13 @@
                 <a:ea typeface="Aptos" pitchFamily="34" charset="-122"/>
                 <a:cs typeface="Aptos" pitchFamily="34" charset="-120"/>
               </a:rPr>
-              <a:t>Develop an AI project charter that includes scope, objectives, roles, risks, dependencies, and governance gates.</a:t>
-            </a:r>
-            <a:endParaRPr lang="en-US" sz="1450" dirty="0"/>
-          </a:p>
-          <a:p>
-            <a:r>
-              <a:rPr lang="en-US" sz="1450" dirty="0">
+              <a:t>Play 2: Readiness Assessment - This lesson informs Play 2 by helping learners connect the lesson topic to readiness assessment work.</a:t>
+            </a:r>
+            <a:endParaRPr lang="en-US" sz="1540" dirty="0"/>
+          </a:p>
+          <a:p>
+            <a:r>
+              <a:rPr lang="en-US" sz="1540" dirty="0">
                 <a:solidFill>
                   <a:srgbClr val="17364A"/>
                 </a:solidFill>
@@ -6383,13 +11050,13 @@
                 <a:ea typeface="Aptos" pitchFamily="34" charset="-122"/>
                 <a:cs typeface="Aptos" pitchFamily="34" charset="-120"/>
               </a:rPr>
-              <a:t>Identify implementation dependencies across data, systems, privacy, security, procurement, workflow, training, and evaluation.</a:t>
-            </a:r>
-            <a:endParaRPr lang="en-US" sz="1450" dirty="0"/>
-          </a:p>
-          <a:p>
-            <a:r>
-              <a:rPr lang="en-US" sz="1450" dirty="0">
+              <a:t>Play 1: Vision &amp; Guardrails - This lesson informs Play 1 by helping learners connect the lesson topic to vision &amp; guardrails work in.</a:t>
+            </a:r>
+            <a:endParaRPr lang="en-US" sz="1540" dirty="0"/>
+          </a:p>
+          <a:p>
+            <a:r>
+              <a:rPr lang="en-US" sz="1540" dirty="0">
                 <a:solidFill>
                   <a:srgbClr val="17364A"/>
                 </a:solidFill>
@@ -6397,13 +11064,106 @@
                 <a:ea typeface="Aptos" pitchFamily="34" charset="-122"/>
                 <a:cs typeface="Aptos" pitchFamily="34" charset="-120"/>
               </a:rPr>
-              <a:t>Create a launch readiness checklist for an AI-supported workflow.</a:t>
-            </a:r>
-            <a:endParaRPr lang="en-US" sz="1450" dirty="0"/>
-          </a:p>
-          <a:p>
-            <a:r>
-              <a:rPr lang="en-US" sz="1450" dirty="0">
+              <a:t>Play 7: Prioritize Use Cases - This lesson informs Play 7 by helping learners connect the lesson topic to prioritize use cases work.</a:t>
+            </a:r>
+            <a:endParaRPr lang="en-US" sz="1540" dirty="0"/>
+          </a:p>
+        </p:txBody>
+      </p:sp>
+      <p:sp>
+        <p:nvSpPr>
+          <p:cNvPr id="9" name="Shape 7"/>
+          <p:cNvSpPr/>
+          <p:nvPr/>
+        </p:nvSpPr>
+        <p:spPr>
+          <a:xfrm>
+            <a:off x="8046720" y="1417320"/>
+            <a:ext cx="3063240" cy="2103120"/>
+          </a:xfrm>
+          <a:prstGeom prst="roundRect">
+            <a:avLst>
+              <a:gd name="adj" fmla="val 5217"/>
+            </a:avLst>
+          </a:prstGeom>
+          <a:solidFill>
+            <a:srgbClr val="EEF8ED"/>
+          </a:solidFill>
+          <a:ln w="12700">
+            <a:solidFill>
+              <a:srgbClr val="B9D7E6"/>
+            </a:solidFill>
+            <a:prstDash val="solid"/>
+          </a:ln>
+        </p:spPr>
+      </p:sp>
+      <p:sp>
+        <p:nvSpPr>
+          <p:cNvPr id="10" name="Text 8"/>
+          <p:cNvSpPr/>
+          <p:nvPr/>
+        </p:nvSpPr>
+        <p:spPr>
+          <a:xfrm>
+            <a:off x="8211312" y="1563624"/>
+            <a:ext cx="2734056" cy="201168"/>
+          </a:xfrm>
+          <a:prstGeom prst="rect">
+            <a:avLst/>
+          </a:prstGeom>
+          <a:noFill/>
+          <a:ln/>
+        </p:spPr>
+        <p:txBody>
+          <a:bodyPr wrap="square" lIns="0" tIns="0" rIns="0" bIns="0" rtlCol="0" anchor="ctr"/>
+          <a:lstStyle/>
+          <a:p>
+            <a:pPr indent="0" marL="0">
+              <a:buNone/>
+            </a:pPr>
+            <a:r>
+              <a:rPr lang="en-US" sz="950" b="1" dirty="0">
+                <a:solidFill>
+                  <a:srgbClr val="0068B7"/>
+                </a:solidFill>
+                <a:latin typeface="Aptos" pitchFamily="34" charset="0"/>
+                <a:ea typeface="Aptos" pitchFamily="34" charset="-122"/>
+                <a:cs typeface="Aptos" pitchFamily="34" charset="-120"/>
+              </a:rPr>
+              <a:t>Apply the lesson</a:t>
+            </a:r>
+            <a:endParaRPr lang="en-US" sz="950" dirty="0"/>
+          </a:p>
+        </p:txBody>
+      </p:sp>
+      <p:sp>
+        <p:nvSpPr>
+          <p:cNvPr id="11" name="Text 9"/>
+          <p:cNvSpPr/>
+          <p:nvPr/>
+        </p:nvSpPr>
+        <p:spPr>
+          <a:xfrm>
+            <a:off x="8211312" y="1856232"/>
+            <a:ext cx="2734056" cy="1536192"/>
+          </a:xfrm>
+          <a:prstGeom prst="rect">
+            <a:avLst/>
+          </a:prstGeom>
+          <a:noFill/>
+          <a:ln/>
+        </p:spPr>
+        <p:txBody>
+          <a:bodyPr wrap="square" lIns="0" tIns="0" rIns="0" bIns="0" rtlCol="0" anchor="t">
+            <a:normAutofit/>
+          </a:bodyPr>
+          <a:lstStyle/>
+          <a:p>
+            <a:pPr indent="0" marL="0">
+              <a:buNone/>
+            </a:pPr>
+            <a:r>
+              <a:rPr lang="en-US" sz="1250" dirty="0">
                 <a:solidFill>
                   <a:srgbClr val="17364A"/>
                 </a:solidFill>
@@ -6411,9 +11171,116 @@
                 <a:ea typeface="Aptos" pitchFamily="34" charset="-122"/>
                 <a:cs typeface="Aptos" pitchFamily="34" charset="-120"/>
               </a:rPr>
-              <a:t>Plan transition from pilot to operations, including ownership, monitoring, maintenance, and sustainability.</a:t>
-            </a:r>
-            <a:endParaRPr lang="en-US" sz="1450" dirty="0"/>
+              <a:t>Use the related plays to identify decisions, participants, timing, approvals, and documentation needed for responsible implementation.</a:t>
+            </a:r>
+            <a:endParaRPr lang="en-US" sz="1250" dirty="0"/>
+          </a:p>
+        </p:txBody>
+      </p:sp>
+      <p:sp>
+        <p:nvSpPr>
+          <p:cNvPr id="12" name="Shape 10"/>
+          <p:cNvSpPr/>
+          <p:nvPr/>
+        </p:nvSpPr>
+        <p:spPr>
+          <a:xfrm>
+            <a:off x="8046720" y="3794760"/>
+            <a:ext cx="3063240" cy="1508760"/>
+          </a:xfrm>
+          <a:prstGeom prst="roundRect">
+            <a:avLst>
+              <a:gd name="adj" fmla="val 7273"/>
+            </a:avLst>
+          </a:prstGeom>
+          <a:solidFill>
+            <a:srgbClr val="FFF4D9"/>
+          </a:solidFill>
+          <a:ln w="12700">
+            <a:solidFill>
+              <a:srgbClr val="B9D7E6"/>
+            </a:solidFill>
+            <a:prstDash val="solid"/>
+          </a:ln>
+        </p:spPr>
+      </p:sp>
+      <p:sp>
+        <p:nvSpPr>
+          <p:cNvPr id="13" name="Text 11"/>
+          <p:cNvSpPr/>
+          <p:nvPr/>
+        </p:nvSpPr>
+        <p:spPr>
+          <a:xfrm>
+            <a:off x="8211312" y="3941064"/>
+            <a:ext cx="2734056" cy="201168"/>
+          </a:xfrm>
+          <a:prstGeom prst="rect">
+            <a:avLst/>
+          </a:prstGeom>
+          <a:noFill/>
+          <a:ln/>
+        </p:spPr>
+        <p:txBody>
+          <a:bodyPr wrap="square" lIns="0" tIns="0" rIns="0" bIns="0" rtlCol="0" anchor="ctr"/>
+          <a:lstStyle/>
+          <a:p>
+            <a:pPr indent="0" marL="0">
+              <a:buNone/>
+            </a:pPr>
+            <a:r>
+              <a:rPr lang="en-US" sz="950" b="1" dirty="0">
+                <a:solidFill>
+                  <a:srgbClr val="0068B7"/>
+                </a:solidFill>
+                <a:latin typeface="Aptos" pitchFamily="34" charset="0"/>
+                <a:ea typeface="Aptos" pitchFamily="34" charset="-122"/>
+                <a:cs typeface="Aptos" pitchFamily="34" charset="-120"/>
+              </a:rPr>
+              <a:t>Keep in mind</a:t>
+            </a:r>
+            <a:endParaRPr lang="en-US" sz="950" dirty="0"/>
+          </a:p>
+        </p:txBody>
+      </p:sp>
+      <p:sp>
+        <p:nvSpPr>
+          <p:cNvPr id="14" name="Text 12"/>
+          <p:cNvSpPr/>
+          <p:nvPr/>
+        </p:nvSpPr>
+        <p:spPr>
+          <a:xfrm>
+            <a:off x="8211312" y="4233672"/>
+            <a:ext cx="2734056" cy="941832"/>
+          </a:xfrm>
+          <a:prstGeom prst="rect">
+            <a:avLst/>
+          </a:prstGeom>
+          <a:noFill/>
+          <a:ln/>
+        </p:spPr>
+        <p:txBody>
+          <a:bodyPr wrap="square" lIns="0" tIns="0" rIns="0" bIns="0" rtlCol="0" anchor="t">
+            <a:normAutofit/>
+          </a:bodyPr>
+          <a:lstStyle/>
+          <a:p>
+            <a:pPr indent="0" marL="0">
+              <a:buNone/>
+            </a:pPr>
+            <a:r>
+              <a:rPr lang="en-US" sz="1250" dirty="0">
+                <a:solidFill>
+                  <a:srgbClr val="17364A"/>
+                </a:solidFill>
+                <a:latin typeface="Aptos" pitchFamily="34" charset="0"/>
+                <a:ea typeface="Aptos" pitchFamily="34" charset="-122"/>
+                <a:cs typeface="Aptos" pitchFamily="34" charset="-120"/>
+              </a:rPr>
+              <a:t>The playbook connection helps turn training into agency work, not just individual knowledge.</a:t>
+            </a:r>
+            <a:endParaRPr lang="en-US" sz="1250" dirty="0"/>
           </a:p>
         </p:txBody>
       </p:sp>
@@ -6476,7 +11343,32 @@
       </p:sp>
       <p:sp>
         <p:nvSpPr>
-          <p:cNvPr id="3" name="Text 1"/>
+          <p:cNvPr id="3" name="Shape 1"/>
+          <p:cNvSpPr/>
+          <p:nvPr/>
+        </p:nvSpPr>
+        <p:spPr>
+          <a:xfrm>
+            <a:off x="0" y="164592"/>
+            <a:ext cx="146304" cy="6693408"/>
+          </a:xfrm>
+          <a:prstGeom prst="rect">
+            <a:avLst/>
+          </a:prstGeom>
+          <a:solidFill>
+            <a:srgbClr val="2F8A28"/>
+          </a:solidFill>
+          <a:ln w="12700">
+            <a:solidFill>
+              <a:srgbClr val="2F8A28"/>
+            </a:solidFill>
+            <a:prstDash val="solid"/>
+          </a:ln>
+        </p:spPr>
+      </p:sp>
+      <p:sp>
+        <p:nvSpPr>
+          <p:cNvPr id="4" name="Text 2"/>
           <p:cNvSpPr/>
           <p:nvPr/>
         </p:nvSpPr>
@@ -6515,7 +11407,7 @@
       </p:sp>
       <p:sp>
         <p:nvSpPr>
-          <p:cNvPr id="4" name="Text 2"/>
+          <p:cNvPr id="5" name="Text 3"/>
           <p:cNvSpPr/>
           <p:nvPr/>
         </p:nvSpPr>
@@ -6554,7 +11446,7 @@
       </p:sp>
       <p:sp>
         <p:nvSpPr>
-          <p:cNvPr id="5" name="Text 3"/>
+          <p:cNvPr id="6" name="Text 4"/>
           <p:cNvSpPr/>
           <p:nvPr/>
         </p:nvSpPr>
@@ -6593,7 +11485,7 @@
       </p:sp>
       <p:sp>
         <p:nvSpPr>
-          <p:cNvPr id="6" name="Text 4"/>
+          <p:cNvPr id="7" name="Text 5"/>
           <p:cNvSpPr/>
           <p:nvPr/>
         </p:nvSpPr>
@@ -6626,7 +11518,7 @@
                 <a:ea typeface="Aptos Display" pitchFamily="34" charset="-122"/>
                 <a:cs typeface="Aptos Display" pitchFamily="34" charset="-120"/>
               </a:rPr>
-              <a:t>Module Overview</a:t>
+              <a:t>Related toolkit resources</a:t>
             </a:r>
             <a:endParaRPr lang="en-US" sz="2700" dirty="0"/>
           </a:p>
@@ -6634,32 +11526,29 @@
       </p:sp>
       <p:sp>
         <p:nvSpPr>
-          <p:cNvPr id="7" name="Text 5"/>
-          <p:cNvSpPr/>
-          <p:nvPr/>
-        </p:nvSpPr>
-        <p:spPr>
-          <a:xfrm>
-            <a:off x="822960" y="1325880"/>
-            <a:ext cx="10378440" cy="4800600"/>
-          </a:xfrm>
-          <a:prstGeom prst="rect">
-            <a:avLst/>
-          </a:prstGeom>
-          <a:noFill/>
-          <a:ln/>
-        </p:spPr>
-        <p:txBody>
-          <a:bodyPr wrap="square" lIns="1016" tIns="1016" rIns="1016" bIns="1016" rtlCol="0" anchor="t">
+          <p:cNvPr id="8" name="Text 6"/>
+          <p:cNvSpPr/>
+          <p:nvPr/>
+        </p:nvSpPr>
+        <p:spPr>
+          <a:xfrm>
+            <a:off x="868680" y="1417320"/>
+            <a:ext cx="6903720" cy="4480560"/>
+          </a:xfrm>
+          <a:prstGeom prst="rect">
+            <a:avLst/>
+          </a:prstGeom>
+          <a:noFill/>
+          <a:ln/>
+        </p:spPr>
+        <p:txBody>
+          <a:bodyPr wrap="square" lIns="635" tIns="635" rIns="635" bIns="635" rtlCol="0" anchor="t">
             <a:normAutofit/>
           </a:bodyPr>
           <a:lstStyle/>
           <a:p>
-            <a:pPr indent="0" marL="0">
-              <a:buNone/>
-            </a:pPr>
-            <a:r>
-              <a:rPr lang="en-US" sz="1420" dirty="0">
+            <a:r>
+              <a:rPr lang="en-US" sz="1460" dirty="0">
                 <a:solidFill>
                   <a:srgbClr val="17364A"/>
                 </a:solidFill>
@@ -6667,9 +11556,279 @@
                 <a:ea typeface="Aptos" pitchFamily="34" charset="-122"/>
                 <a:cs typeface="Aptos" pitchFamily="34" charset="-120"/>
               </a:rPr>
-              <a:t>AI projects require disciplined implementation planning because they combine technology, data, governance, workflow change, training, validation, procurement, security, and evaluation. A project that appears small, such as adding an AI summarization tool, may still require data access decisions, system integration, human review design, communications planning, and post-launch monitoring. Public health agencies need project management methods that account for these dependencies before implementation begins. This module teaches program managers, product owners, implementation leads, and technical staff how to structure AI initiatives from concept through deployment and operations. The focus is on practical project controls: charters, milestones, governance gates, risk logs, stakeholder engagement, testing, training, launch readiness, and transition to operations. Strong AI project management helps agencies avoid pilots that never scale, tools that are deployed without ownership, and vendor-led projects that outpace governance or public health readiness. It also helps leadership understand what resources are needed for safe and sustainable implementation.</a:t>
-            </a:r>
-            <a:endParaRPr lang="en-US" sz="1420" dirty="0"/>
+              <a:t>Tool 4: AI Policy Landscape Scan (Worksheet) - Use AI Policy Landscape Scan to translate this lesson into a documented public health.</a:t>
+            </a:r>
+            <a:endParaRPr lang="en-US" sz="1460" dirty="0"/>
+          </a:p>
+          <a:p>
+            <a:r>
+              <a:rPr lang="en-US" sz="1460" dirty="0">
+                <a:solidFill>
+                  <a:srgbClr val="17364A"/>
+                </a:solidFill>
+                <a:latin typeface="Aptos" pitchFamily="34" charset="0"/>
+                <a:ea typeface="Aptos" pitchFamily="34" charset="-122"/>
+                <a:cs typeface="Aptos" pitchFamily="34" charset="-120"/>
+              </a:rPr>
+              <a:t>Tool 5: AI Environmental and Resource Impact Review (Checklist) - Use this tool to complete or strengthen the practical exercise for.</a:t>
+            </a:r>
+            <a:endParaRPr lang="en-US" sz="1460" dirty="0"/>
+          </a:p>
+          <a:p>
+            <a:r>
+              <a:rPr lang="en-US" sz="1460" dirty="0">
+                <a:solidFill>
+                  <a:srgbClr val="17364A"/>
+                </a:solidFill>
+                <a:latin typeface="Aptos" pitchFamily="34" charset="0"/>
+                <a:ea typeface="Aptos" pitchFamily="34" charset="-122"/>
+                <a:cs typeface="Aptos" pitchFamily="34" charset="-120"/>
+              </a:rPr>
+              <a:t>Tool 6: Human-Centered AI Decision Rule Checklist (Checklist) - Use Human-Centered AI Decision Rule Checklist to translate this.</a:t>
+            </a:r>
+            <a:endParaRPr lang="en-US" sz="1460" dirty="0"/>
+          </a:p>
+          <a:p>
+            <a:r>
+              <a:rPr lang="en-US" sz="1460" dirty="0">
+                <a:solidFill>
+                  <a:srgbClr val="17364A"/>
+                </a:solidFill>
+                <a:latin typeface="Aptos" pitchFamily="34" charset="0"/>
+                <a:ea typeface="Aptos" pitchFamily="34" charset="-122"/>
+                <a:cs typeface="Aptos" pitchFamily="34" charset="-120"/>
+              </a:rPr>
+              <a:t>Tool 8: AI Project Charter (Planning) - Use this tool to complete or strengthen the practical exercise for the module using.</a:t>
+            </a:r>
+            <a:endParaRPr lang="en-US" sz="1460" dirty="0"/>
+          </a:p>
+          <a:p>
+            <a:r>
+              <a:rPr lang="en-US" sz="1460" dirty="0">
+                <a:solidFill>
+                  <a:srgbClr val="17364A"/>
+                </a:solidFill>
+                <a:latin typeface="Aptos" pitchFamily="34" charset="0"/>
+                <a:ea typeface="Aptos" pitchFamily="34" charset="-122"/>
+                <a:cs typeface="Aptos" pitchFamily="34" charset="-120"/>
+              </a:rPr>
+              <a:t>Tool 9: Data Quality Assessment Checklist (Checklist) - Use this tool to complete or strengthen the practical exercise for the module.</a:t>
+            </a:r>
+            <a:endParaRPr lang="en-US" sz="1460" dirty="0"/>
+          </a:p>
+        </p:txBody>
+      </p:sp>
+      <p:sp>
+        <p:nvSpPr>
+          <p:cNvPr id="9" name="Shape 7"/>
+          <p:cNvSpPr/>
+          <p:nvPr/>
+        </p:nvSpPr>
+        <p:spPr>
+          <a:xfrm>
+            <a:off x="8046720" y="1417320"/>
+            <a:ext cx="3063240" cy="2103120"/>
+          </a:xfrm>
+          <a:prstGeom prst="roundRect">
+            <a:avLst>
+              <a:gd name="adj" fmla="val 5217"/>
+            </a:avLst>
+          </a:prstGeom>
+          <a:solidFill>
+            <a:srgbClr val="EAF6F8"/>
+          </a:solidFill>
+          <a:ln w="12700">
+            <a:solidFill>
+              <a:srgbClr val="B9D7E6"/>
+            </a:solidFill>
+            <a:prstDash val="solid"/>
+          </a:ln>
+        </p:spPr>
+      </p:sp>
+      <p:sp>
+        <p:nvSpPr>
+          <p:cNvPr id="10" name="Text 8"/>
+          <p:cNvSpPr/>
+          <p:nvPr/>
+        </p:nvSpPr>
+        <p:spPr>
+          <a:xfrm>
+            <a:off x="8211312" y="1563624"/>
+            <a:ext cx="2734056" cy="201168"/>
+          </a:xfrm>
+          <a:prstGeom prst="rect">
+            <a:avLst/>
+          </a:prstGeom>
+          <a:noFill/>
+          <a:ln/>
+        </p:spPr>
+        <p:txBody>
+          <a:bodyPr wrap="square" lIns="0" tIns="0" rIns="0" bIns="0" rtlCol="0" anchor="ctr"/>
+          <a:lstStyle/>
+          <a:p>
+            <a:pPr indent="0" marL="0">
+              <a:buNone/>
+            </a:pPr>
+            <a:r>
+              <a:rPr lang="en-US" sz="950" b="1" dirty="0">
+                <a:solidFill>
+                  <a:srgbClr val="0068B7"/>
+                </a:solidFill>
+                <a:latin typeface="Aptos" pitchFamily="34" charset="0"/>
+                <a:ea typeface="Aptos" pitchFamily="34" charset="-122"/>
+                <a:cs typeface="Aptos" pitchFamily="34" charset="-120"/>
+              </a:rPr>
+              <a:t>Use the tools</a:t>
+            </a:r>
+            <a:endParaRPr lang="en-US" sz="950" dirty="0"/>
+          </a:p>
+        </p:txBody>
+      </p:sp>
+      <p:sp>
+        <p:nvSpPr>
+          <p:cNvPr id="11" name="Text 9"/>
+          <p:cNvSpPr/>
+          <p:nvPr/>
+        </p:nvSpPr>
+        <p:spPr>
+          <a:xfrm>
+            <a:off x="8211312" y="1856232"/>
+            <a:ext cx="2734056" cy="1536192"/>
+          </a:xfrm>
+          <a:prstGeom prst="rect">
+            <a:avLst/>
+          </a:prstGeom>
+          <a:noFill/>
+          <a:ln/>
+        </p:spPr>
+        <p:txBody>
+          <a:bodyPr wrap="square" lIns="0" tIns="0" rIns="0" bIns="0" rtlCol="0" anchor="t">
+            <a:normAutofit/>
+          </a:bodyPr>
+          <a:lstStyle/>
+          <a:p>
+            <a:pPr indent="0" marL="0">
+              <a:buNone/>
+            </a:pPr>
+            <a:r>
+              <a:rPr lang="en-US" sz="1250" dirty="0">
+                <a:solidFill>
+                  <a:srgbClr val="17364A"/>
+                </a:solidFill>
+                <a:latin typeface="Aptos" pitchFamily="34" charset="0"/>
+                <a:ea typeface="Aptos" pitchFamily="34" charset="-122"/>
+                <a:cs typeface="Aptos" pitchFamily="34" charset="-120"/>
+              </a:rPr>
+              <a:t>Use linked tools when your department needs a structured worksheet, template, checklist, review process, or documentation artifact.</a:t>
+            </a:r>
+            <a:endParaRPr lang="en-US" sz="1250" dirty="0"/>
+          </a:p>
+        </p:txBody>
+      </p:sp>
+      <p:sp>
+        <p:nvSpPr>
+          <p:cNvPr id="12" name="Shape 10"/>
+          <p:cNvSpPr/>
+          <p:nvPr/>
+        </p:nvSpPr>
+        <p:spPr>
+          <a:xfrm>
+            <a:off x="8046720" y="3794760"/>
+            <a:ext cx="3063240" cy="1508760"/>
+          </a:xfrm>
+          <a:prstGeom prst="roundRect">
+            <a:avLst>
+              <a:gd name="adj" fmla="val 7273"/>
+            </a:avLst>
+          </a:prstGeom>
+          <a:solidFill>
+            <a:srgbClr val="EEF8ED"/>
+          </a:solidFill>
+          <a:ln w="12700">
+            <a:solidFill>
+              <a:srgbClr val="B9D7E6"/>
+            </a:solidFill>
+            <a:prstDash val="solid"/>
+          </a:ln>
+        </p:spPr>
+      </p:sp>
+      <p:sp>
+        <p:nvSpPr>
+          <p:cNvPr id="13" name="Text 11"/>
+          <p:cNvSpPr/>
+          <p:nvPr/>
+        </p:nvSpPr>
+        <p:spPr>
+          <a:xfrm>
+            <a:off x="8211312" y="3941064"/>
+            <a:ext cx="2734056" cy="201168"/>
+          </a:xfrm>
+          <a:prstGeom prst="rect">
+            <a:avLst/>
+          </a:prstGeom>
+          <a:noFill/>
+          <a:ln/>
+        </p:spPr>
+        <p:txBody>
+          <a:bodyPr wrap="square" lIns="0" tIns="0" rIns="0" bIns="0" rtlCol="0" anchor="ctr"/>
+          <a:lstStyle/>
+          <a:p>
+            <a:pPr indent="0" marL="0">
+              <a:buNone/>
+            </a:pPr>
+            <a:r>
+              <a:rPr lang="en-US" sz="950" b="1" dirty="0">
+                <a:solidFill>
+                  <a:srgbClr val="0068B7"/>
+                </a:solidFill>
+                <a:latin typeface="Aptos" pitchFamily="34" charset="0"/>
+                <a:ea typeface="Aptos" pitchFamily="34" charset="-122"/>
+                <a:cs typeface="Aptos" pitchFamily="34" charset="-120"/>
+              </a:rPr>
+              <a:t>Avoid duplication</a:t>
+            </a:r>
+            <a:endParaRPr lang="en-US" sz="950" dirty="0"/>
+          </a:p>
+        </p:txBody>
+      </p:sp>
+      <p:sp>
+        <p:nvSpPr>
+          <p:cNvPr id="14" name="Text 12"/>
+          <p:cNvSpPr/>
+          <p:nvPr/>
+        </p:nvSpPr>
+        <p:spPr>
+          <a:xfrm>
+            <a:off x="8211312" y="4233672"/>
+            <a:ext cx="2734056" cy="941832"/>
+          </a:xfrm>
+          <a:prstGeom prst="rect">
+            <a:avLst/>
+          </a:prstGeom>
+          <a:noFill/>
+          <a:ln/>
+        </p:spPr>
+        <p:txBody>
+          <a:bodyPr wrap="square" lIns="0" tIns="0" rIns="0" bIns="0" rtlCol="0" anchor="t">
+            <a:normAutofit/>
+          </a:bodyPr>
+          <a:lstStyle/>
+          <a:p>
+            <a:pPr indent="0" marL="0">
+              <a:buNone/>
+            </a:pPr>
+            <a:r>
+              <a:rPr lang="en-US" sz="1250" dirty="0">
+                <a:solidFill>
+                  <a:srgbClr val="17364A"/>
+                </a:solidFill>
+                <a:latin typeface="Aptos" pitchFamily="34" charset="0"/>
+                <a:ea typeface="Aptos" pitchFamily="34" charset="-122"/>
+                <a:cs typeface="Aptos" pitchFamily="34" charset="-120"/>
+              </a:rPr>
+              <a:t>If your department already has a strong equivalent tool, adapt or use the existing process instead of recreating it.</a:t>
+            </a:r>
+            <a:endParaRPr lang="en-US" sz="1250" dirty="0"/>
           </a:p>
         </p:txBody>
       </p:sp>
@@ -6732,7 +11891,32 @@
       </p:sp>
       <p:sp>
         <p:nvSpPr>
-          <p:cNvPr id="3" name="Text 1"/>
+          <p:cNvPr id="3" name="Shape 1"/>
+          <p:cNvSpPr/>
+          <p:nvPr/>
+        </p:nvSpPr>
+        <p:spPr>
+          <a:xfrm>
+            <a:off x="0" y="164592"/>
+            <a:ext cx="146304" cy="6693408"/>
+          </a:xfrm>
+          <a:prstGeom prst="rect">
+            <a:avLst/>
+          </a:prstGeom>
+          <a:solidFill>
+            <a:srgbClr val="2F8A28"/>
+          </a:solidFill>
+          <a:ln w="12700">
+            <a:solidFill>
+              <a:srgbClr val="2F8A28"/>
+            </a:solidFill>
+            <a:prstDash val="solid"/>
+          </a:ln>
+        </p:spPr>
+      </p:sp>
+      <p:sp>
+        <p:nvSpPr>
+          <p:cNvPr id="4" name="Text 2"/>
           <p:cNvSpPr/>
           <p:nvPr/>
         </p:nvSpPr>
@@ -6771,7 +11955,7 @@
       </p:sp>
       <p:sp>
         <p:nvSpPr>
-          <p:cNvPr id="4" name="Text 2"/>
+          <p:cNvPr id="5" name="Text 3"/>
           <p:cNvSpPr/>
           <p:nvPr/>
         </p:nvSpPr>
@@ -6810,7 +11994,7 @@
       </p:sp>
       <p:sp>
         <p:nvSpPr>
-          <p:cNvPr id="5" name="Text 3"/>
+          <p:cNvPr id="6" name="Text 4"/>
           <p:cNvSpPr/>
           <p:nvPr/>
         </p:nvSpPr>
@@ -6849,13 +12033,77 @@
       </p:sp>
       <p:sp>
         <p:nvSpPr>
-          <p:cNvPr id="6" name="Text 4"/>
+          <p:cNvPr id="7" name="Shape 5"/>
           <p:cNvSpPr/>
           <p:nvPr/>
         </p:nvSpPr>
         <p:spPr>
           <a:xfrm>
             <a:off x="640080" y="658368"/>
+            <a:ext cx="420624" cy="420624"/>
+          </a:xfrm>
+          <a:prstGeom prst="ellipse">
+            <a:avLst/>
+          </a:prstGeom>
+          <a:solidFill>
+            <a:srgbClr val="0068B7"/>
+          </a:solidFill>
+          <a:ln w="12700">
+            <a:solidFill>
+              <a:srgbClr val="0068B7"/>
+            </a:solidFill>
+            <a:prstDash val="solid"/>
+          </a:ln>
+        </p:spPr>
+      </p:sp>
+      <p:sp>
+        <p:nvSpPr>
+          <p:cNvPr id="8" name="Text 6"/>
+          <p:cNvSpPr/>
+          <p:nvPr/>
+        </p:nvSpPr>
+        <p:spPr>
+          <a:xfrm>
+            <a:off x="640080" y="731520"/>
+            <a:ext cx="420624" cy="164592"/>
+          </a:xfrm>
+          <a:prstGeom prst="rect">
+            <a:avLst/>
+          </a:prstGeom>
+          <a:noFill/>
+          <a:ln/>
+        </p:spPr>
+        <p:txBody>
+          <a:bodyPr wrap="square" lIns="0" tIns="0" rIns="0" bIns="0" rtlCol="0" anchor="ctr"/>
+          <a:lstStyle/>
+          <a:p>
+            <a:pPr algn="ctr" indent="0" marL="0">
+              <a:buNone/>
+            </a:pPr>
+            <a:r>
+              <a:rPr lang="en-US" sz="1100" b="1" dirty="0">
+                <a:solidFill>
+                  <a:srgbClr val="FFFFFF"/>
+                </a:solidFill>
+                <a:latin typeface="Aptos" pitchFamily="34" charset="0"/>
+                <a:ea typeface="Aptos" pitchFamily="34" charset="-122"/>
+                <a:cs typeface="Aptos" pitchFamily="34" charset="-120"/>
+              </a:rPr>
+              <a:t>1</a:t>
+            </a:r>
+            <a:endParaRPr lang="en-US" sz="1100" dirty="0"/>
+          </a:p>
+        </p:txBody>
+      </p:sp>
+      <p:sp>
+        <p:nvSpPr>
+          <p:cNvPr id="9" name="Text 7"/>
+          <p:cNvSpPr/>
+          <p:nvPr/>
+        </p:nvSpPr>
+        <p:spPr>
+          <a:xfrm>
+            <a:off x="640080" y="621792"/>
             <a:ext cx="10881360" cy="566928"/>
           </a:xfrm>
           <a:prstGeom prst="rect">
@@ -6882,7 +12130,7 @@
                 <a:ea typeface="Aptos Display" pitchFamily="34" charset="-122"/>
                 <a:cs typeface="Aptos Display" pitchFamily="34" charset="-120"/>
               </a:rPr>
-              <a:t>Public Health Example</a:t>
+              <a:t>Learning Objectives</a:t>
             </a:r>
             <a:endParaRPr lang="en-US" sz="2700" dirty="0"/>
           </a:p>
@@ -6890,32 +12138,29 @@
       </p:sp>
       <p:sp>
         <p:nvSpPr>
-          <p:cNvPr id="7" name="Text 5"/>
-          <p:cNvSpPr/>
-          <p:nvPr/>
-        </p:nvSpPr>
-        <p:spPr>
-          <a:xfrm>
-            <a:off x="822960" y="1325880"/>
-            <a:ext cx="10378440" cy="4800600"/>
-          </a:xfrm>
-          <a:prstGeom prst="rect">
-            <a:avLst/>
-          </a:prstGeom>
-          <a:noFill/>
-          <a:ln/>
-        </p:spPr>
-        <p:txBody>
-          <a:bodyPr wrap="square" lIns="1016" tIns="1016" rIns="1016" bIns="1016" rtlCol="0" anchor="t">
+          <p:cNvPr id="10" name="Text 8"/>
+          <p:cNvSpPr/>
+          <p:nvPr/>
+        </p:nvSpPr>
+        <p:spPr>
+          <a:xfrm>
+            <a:off x="868680" y="1417320"/>
+            <a:ext cx="6675120" cy="4434840"/>
+          </a:xfrm>
+          <a:prstGeom prst="rect">
+            <a:avLst/>
+          </a:prstGeom>
+          <a:noFill/>
+          <a:ln/>
+        </p:spPr>
+        <p:txBody>
+          <a:bodyPr wrap="square" lIns="635" tIns="635" rIns="635" bIns="635" rtlCol="0" anchor="t">
             <a:normAutofit/>
           </a:bodyPr>
           <a:lstStyle/>
           <a:p>
-            <a:pPr indent="0" marL="0">
-              <a:buNone/>
-            </a:pPr>
-            <a:r>
-              <a:rPr lang="en-US" sz="1420" dirty="0">
+            <a:r>
+              <a:rPr lang="en-US" sz="1700" dirty="0">
                 <a:solidFill>
                   <a:srgbClr val="17364A"/>
                 </a:solidFill>
@@ -6923,9 +12168,265 @@
                 <a:ea typeface="Aptos" pitchFamily="34" charset="-122"/>
                 <a:cs typeface="Aptos" pitchFamily="34" charset="-120"/>
               </a:rPr>
-              <a:t>A public health agency plans to pilot an AI tool that drafts summaries of incoming case reports. The project plan identifies governance approval, data access, system integration, validation, user training, SOP development, incident response, and monitoring as required workstreams. The project cannot launch simply because the tool works in a demonstration. It must pass readiness checks showing that staff know how to review the output, errors can be reported, and the tool is monitored after launch.</a:t>
-            </a:r>
-            <a:endParaRPr lang="en-US" sz="1420" dirty="0"/>
+              <a:t>Define the major phases of an AI implementation project.</a:t>
+            </a:r>
+            <a:endParaRPr lang="en-US" sz="1700" dirty="0"/>
+          </a:p>
+          <a:p>
+            <a:r>
+              <a:rPr lang="en-US" sz="1700" dirty="0">
+                <a:solidFill>
+                  <a:srgbClr val="17364A"/>
+                </a:solidFill>
+                <a:latin typeface="Aptos" pitchFamily="34" charset="0"/>
+                <a:ea typeface="Aptos" pitchFamily="34" charset="-122"/>
+                <a:cs typeface="Aptos" pitchFamily="34" charset="-120"/>
+              </a:rPr>
+              <a:t>Develop an AI project charter that includes scope, objectives, roles, risks, dependencies, and governance gates.</a:t>
+            </a:r>
+            <a:endParaRPr lang="en-US" sz="1700" dirty="0"/>
+          </a:p>
+          <a:p>
+            <a:r>
+              <a:rPr lang="en-US" sz="1700" dirty="0">
+                <a:solidFill>
+                  <a:srgbClr val="17364A"/>
+                </a:solidFill>
+                <a:latin typeface="Aptos" pitchFamily="34" charset="0"/>
+                <a:ea typeface="Aptos" pitchFamily="34" charset="-122"/>
+                <a:cs typeface="Aptos" pitchFamily="34" charset="-120"/>
+              </a:rPr>
+              <a:t>Identify implementation dependencies across data, systems, privacy, security, procurement, workflow, training, and evaluation.</a:t>
+            </a:r>
+            <a:endParaRPr lang="en-US" sz="1700" dirty="0"/>
+          </a:p>
+          <a:p>
+            <a:r>
+              <a:rPr lang="en-US" sz="1700" dirty="0">
+                <a:solidFill>
+                  <a:srgbClr val="17364A"/>
+                </a:solidFill>
+                <a:latin typeface="Aptos" pitchFamily="34" charset="0"/>
+                <a:ea typeface="Aptos" pitchFamily="34" charset="-122"/>
+                <a:cs typeface="Aptos" pitchFamily="34" charset="-120"/>
+              </a:rPr>
+              <a:t>Create a launch readiness checklist for an AI-supported workflow.</a:t>
+            </a:r>
+            <a:endParaRPr lang="en-US" sz="1700" dirty="0"/>
+          </a:p>
+        </p:txBody>
+      </p:sp>
+      <p:sp>
+        <p:nvSpPr>
+          <p:cNvPr id="11" name="Shape 9"/>
+          <p:cNvSpPr/>
+          <p:nvPr/>
+        </p:nvSpPr>
+        <p:spPr>
+          <a:xfrm>
+            <a:off x="7909560" y="1417320"/>
+            <a:ext cx="3154680" cy="1828800"/>
+          </a:xfrm>
+          <a:prstGeom prst="roundRect">
+            <a:avLst>
+              <a:gd name="adj" fmla="val 6000"/>
+            </a:avLst>
+          </a:prstGeom>
+          <a:solidFill>
+            <a:srgbClr val="EEF8ED"/>
+          </a:solidFill>
+          <a:ln w="12700">
+            <a:solidFill>
+              <a:srgbClr val="B9D7E6"/>
+            </a:solidFill>
+            <a:prstDash val="solid"/>
+          </a:ln>
+        </p:spPr>
+      </p:sp>
+      <p:sp>
+        <p:nvSpPr>
+          <p:cNvPr id="12" name="Text 10"/>
+          <p:cNvSpPr/>
+          <p:nvPr/>
+        </p:nvSpPr>
+        <p:spPr>
+          <a:xfrm>
+            <a:off x="8074152" y="1563624"/>
+            <a:ext cx="2825496" cy="201168"/>
+          </a:xfrm>
+          <a:prstGeom prst="rect">
+            <a:avLst/>
+          </a:prstGeom>
+          <a:noFill/>
+          <a:ln/>
+        </p:spPr>
+        <p:txBody>
+          <a:bodyPr wrap="square" lIns="0" tIns="0" rIns="0" bIns="0" rtlCol="0" anchor="ctr"/>
+          <a:lstStyle/>
+          <a:p>
+            <a:pPr indent="0" marL="0">
+              <a:buNone/>
+            </a:pPr>
+            <a:r>
+              <a:rPr lang="en-US" sz="950" b="1" dirty="0">
+                <a:solidFill>
+                  <a:srgbClr val="0068B7"/>
+                </a:solidFill>
+                <a:latin typeface="Aptos" pitchFamily="34" charset="0"/>
+                <a:ea typeface="Aptos" pitchFamily="34" charset="-122"/>
+                <a:cs typeface="Aptos" pitchFamily="34" charset="-120"/>
+              </a:rPr>
+              <a:t>Key idea</a:t>
+            </a:r>
+            <a:endParaRPr lang="en-US" sz="950" dirty="0"/>
+          </a:p>
+        </p:txBody>
+      </p:sp>
+      <p:sp>
+        <p:nvSpPr>
+          <p:cNvPr id="13" name="Text 11"/>
+          <p:cNvSpPr/>
+          <p:nvPr/>
+        </p:nvSpPr>
+        <p:spPr>
+          <a:xfrm>
+            <a:off x="8074152" y="1856232"/>
+            <a:ext cx="2825496" cy="1261872"/>
+          </a:xfrm>
+          <a:prstGeom prst="rect">
+            <a:avLst/>
+          </a:prstGeom>
+          <a:noFill/>
+          <a:ln/>
+        </p:spPr>
+        <p:txBody>
+          <a:bodyPr wrap="square" lIns="0" tIns="0" rIns="0" bIns="0" rtlCol="0" anchor="t">
+            <a:normAutofit/>
+          </a:bodyPr>
+          <a:lstStyle/>
+          <a:p>
+            <a:pPr indent="0" marL="0">
+              <a:buNone/>
+            </a:pPr>
+            <a:r>
+              <a:rPr lang="en-US" sz="1250" dirty="0">
+                <a:solidFill>
+                  <a:srgbClr val="17364A"/>
+                </a:solidFill>
+                <a:latin typeface="Aptos" pitchFamily="34" charset="0"/>
+                <a:ea typeface="Aptos" pitchFamily="34" charset="-122"/>
+                <a:cs typeface="Aptos" pitchFamily="34" charset="-120"/>
+              </a:rPr>
+              <a:t>Define the major phases of an AI implementation project.</a:t>
+            </a:r>
+            <a:endParaRPr lang="en-US" sz="1250" dirty="0"/>
+          </a:p>
+        </p:txBody>
+      </p:sp>
+      <p:sp>
+        <p:nvSpPr>
+          <p:cNvPr id="14" name="Shape 12"/>
+          <p:cNvSpPr/>
+          <p:nvPr/>
+        </p:nvSpPr>
+        <p:spPr>
+          <a:xfrm>
+            <a:off x="7909560" y="3520440"/>
+            <a:ext cx="3154680" cy="1737360"/>
+          </a:xfrm>
+          <a:prstGeom prst="roundRect">
+            <a:avLst>
+              <a:gd name="adj" fmla="val 6316"/>
+            </a:avLst>
+          </a:prstGeom>
+          <a:solidFill>
+            <a:srgbClr val="EAF6F8"/>
+          </a:solidFill>
+          <a:ln w="12700">
+            <a:solidFill>
+              <a:srgbClr val="B9D7E6"/>
+            </a:solidFill>
+            <a:prstDash val="solid"/>
+          </a:ln>
+        </p:spPr>
+      </p:sp>
+      <p:sp>
+        <p:nvSpPr>
+          <p:cNvPr id="15" name="Text 13"/>
+          <p:cNvSpPr/>
+          <p:nvPr/>
+        </p:nvSpPr>
+        <p:spPr>
+          <a:xfrm>
+            <a:off x="8074152" y="3666744"/>
+            <a:ext cx="2825496" cy="201168"/>
+          </a:xfrm>
+          <a:prstGeom prst="rect">
+            <a:avLst/>
+          </a:prstGeom>
+          <a:noFill/>
+          <a:ln/>
+        </p:spPr>
+        <p:txBody>
+          <a:bodyPr wrap="square" lIns="0" tIns="0" rIns="0" bIns="0" rtlCol="0" anchor="ctr"/>
+          <a:lstStyle/>
+          <a:p>
+            <a:pPr indent="0" marL="0">
+              <a:buNone/>
+            </a:pPr>
+            <a:r>
+              <a:rPr lang="en-US" sz="950" b="1" dirty="0">
+                <a:solidFill>
+                  <a:srgbClr val="0068B7"/>
+                </a:solidFill>
+                <a:latin typeface="Aptos" pitchFamily="34" charset="0"/>
+                <a:ea typeface="Aptos" pitchFamily="34" charset="-122"/>
+                <a:cs typeface="Aptos" pitchFamily="34" charset="-120"/>
+              </a:rPr>
+              <a:t>Use this for</a:t>
+            </a:r>
+            <a:endParaRPr lang="en-US" sz="950" dirty="0"/>
+          </a:p>
+        </p:txBody>
+      </p:sp>
+      <p:sp>
+        <p:nvSpPr>
+          <p:cNvPr id="16" name="Text 14"/>
+          <p:cNvSpPr/>
+          <p:nvPr/>
+        </p:nvSpPr>
+        <p:spPr>
+          <a:xfrm>
+            <a:off x="8074152" y="3959352"/>
+            <a:ext cx="2825496" cy="1170432"/>
+          </a:xfrm>
+          <a:prstGeom prst="rect">
+            <a:avLst/>
+          </a:prstGeom>
+          <a:noFill/>
+          <a:ln/>
+        </p:spPr>
+        <p:txBody>
+          <a:bodyPr wrap="square" lIns="0" tIns="0" rIns="0" bIns="0" rtlCol="0" anchor="t">
+            <a:normAutofit/>
+          </a:bodyPr>
+          <a:lstStyle/>
+          <a:p>
+            <a:pPr indent="0" marL="0">
+              <a:buNone/>
+            </a:pPr>
+            <a:r>
+              <a:rPr lang="en-US" sz="1250" dirty="0">
+                <a:solidFill>
+                  <a:srgbClr val="17364A"/>
+                </a:solidFill>
+                <a:latin typeface="Aptos" pitchFamily="34" charset="0"/>
+                <a:ea typeface="Aptos" pitchFamily="34" charset="-122"/>
+                <a:cs typeface="Aptos" pitchFamily="34" charset="-120"/>
+              </a:rPr>
+              <a:t>Connect the concept to public health decisions, safeguards, documentation, or implementation work.</a:t>
+            </a:r>
+            <a:endParaRPr lang="en-US" sz="1250" dirty="0"/>
           </a:p>
         </p:txBody>
       </p:sp>
@@ -6988,7 +12489,32 @@
       </p:sp>
       <p:sp>
         <p:nvSpPr>
-          <p:cNvPr id="3" name="Text 1"/>
+          <p:cNvPr id="3" name="Shape 1"/>
+          <p:cNvSpPr/>
+          <p:nvPr/>
+        </p:nvSpPr>
+        <p:spPr>
+          <a:xfrm>
+            <a:off x="0" y="164592"/>
+            <a:ext cx="146304" cy="6693408"/>
+          </a:xfrm>
+          <a:prstGeom prst="rect">
+            <a:avLst/>
+          </a:prstGeom>
+          <a:solidFill>
+            <a:srgbClr val="2F8A28"/>
+          </a:solidFill>
+          <a:ln w="12700">
+            <a:solidFill>
+              <a:srgbClr val="2F8A28"/>
+            </a:solidFill>
+            <a:prstDash val="solid"/>
+          </a:ln>
+        </p:spPr>
+      </p:sp>
+      <p:sp>
+        <p:nvSpPr>
+          <p:cNvPr id="4" name="Text 2"/>
           <p:cNvSpPr/>
           <p:nvPr/>
         </p:nvSpPr>
@@ -7027,7 +12553,7 @@
       </p:sp>
       <p:sp>
         <p:nvSpPr>
-          <p:cNvPr id="4" name="Text 2"/>
+          <p:cNvPr id="5" name="Text 3"/>
           <p:cNvSpPr/>
           <p:nvPr/>
         </p:nvSpPr>
@@ -7066,7 +12592,7 @@
       </p:sp>
       <p:sp>
         <p:nvSpPr>
-          <p:cNvPr id="5" name="Text 3"/>
+          <p:cNvPr id="6" name="Text 4"/>
           <p:cNvSpPr/>
           <p:nvPr/>
         </p:nvSpPr>
@@ -7105,13 +12631,77 @@
       </p:sp>
       <p:sp>
         <p:nvSpPr>
-          <p:cNvPr id="6" name="Text 4"/>
+          <p:cNvPr id="7" name="Shape 5"/>
           <p:cNvSpPr/>
           <p:nvPr/>
         </p:nvSpPr>
         <p:spPr>
           <a:xfrm>
             <a:off x="640080" y="658368"/>
+            <a:ext cx="420624" cy="420624"/>
+          </a:xfrm>
+          <a:prstGeom prst="ellipse">
+            <a:avLst/>
+          </a:prstGeom>
+          <a:solidFill>
+            <a:srgbClr val="0068B7"/>
+          </a:solidFill>
+          <a:ln w="12700">
+            <a:solidFill>
+              <a:srgbClr val="0068B7"/>
+            </a:solidFill>
+            <a:prstDash val="solid"/>
+          </a:ln>
+        </p:spPr>
+      </p:sp>
+      <p:sp>
+        <p:nvSpPr>
+          <p:cNvPr id="8" name="Text 6"/>
+          <p:cNvSpPr/>
+          <p:nvPr/>
+        </p:nvSpPr>
+        <p:spPr>
+          <a:xfrm>
+            <a:off x="640080" y="731520"/>
+            <a:ext cx="420624" cy="164592"/>
+          </a:xfrm>
+          <a:prstGeom prst="rect">
+            <a:avLst/>
+          </a:prstGeom>
+          <a:noFill/>
+          <a:ln/>
+        </p:spPr>
+        <p:txBody>
+          <a:bodyPr wrap="square" lIns="0" tIns="0" rIns="0" bIns="0" rtlCol="0" anchor="ctr"/>
+          <a:lstStyle/>
+          <a:p>
+            <a:pPr algn="ctr" indent="0" marL="0">
+              <a:buNone/>
+            </a:pPr>
+            <a:r>
+              <a:rPr lang="en-US" sz="1100" b="1" dirty="0">
+                <a:solidFill>
+                  <a:srgbClr val="FFFFFF"/>
+                </a:solidFill>
+                <a:latin typeface="Aptos" pitchFamily="34" charset="0"/>
+                <a:ea typeface="Aptos" pitchFamily="34" charset="-122"/>
+                <a:cs typeface="Aptos" pitchFamily="34" charset="-120"/>
+              </a:rPr>
+              <a:t>2</a:t>
+            </a:r>
+            <a:endParaRPr lang="en-US" sz="1100" dirty="0"/>
+          </a:p>
+        </p:txBody>
+      </p:sp>
+      <p:sp>
+        <p:nvSpPr>
+          <p:cNvPr id="9" name="Text 7"/>
+          <p:cNvSpPr/>
+          <p:nvPr/>
+        </p:nvSpPr>
+        <p:spPr>
+          <a:xfrm>
+            <a:off x="640080" y="621792"/>
             <a:ext cx="10881360" cy="566928"/>
           </a:xfrm>
           <a:prstGeom prst="rect">
@@ -7138,7 +12728,7 @@
                 <a:ea typeface="Aptos Display" pitchFamily="34" charset="-122"/>
                 <a:cs typeface="Aptos Display" pitchFamily="34" charset="-120"/>
               </a:rPr>
-              <a:t>Topic Deep Dive</a:t>
+              <a:t>Module Overview</a:t>
             </a:r>
             <a:endParaRPr lang="en-US" sz="2700" dirty="0"/>
           </a:p>
@@ -7146,32 +12736,29 @@
       </p:sp>
       <p:sp>
         <p:nvSpPr>
-          <p:cNvPr id="7" name="Text 5"/>
-          <p:cNvSpPr/>
-          <p:nvPr/>
-        </p:nvSpPr>
-        <p:spPr>
-          <a:xfrm>
-            <a:off x="822960" y="1325880"/>
-            <a:ext cx="10378440" cy="4800600"/>
-          </a:xfrm>
-          <a:prstGeom prst="rect">
-            <a:avLst/>
-          </a:prstGeom>
-          <a:noFill/>
-          <a:ln/>
-        </p:spPr>
-        <p:txBody>
-          <a:bodyPr wrap="square" lIns="1016" tIns="1016" rIns="1016" bIns="1016" rtlCol="0" anchor="t">
+          <p:cNvPr id="10" name="Text 8"/>
+          <p:cNvSpPr/>
+          <p:nvPr/>
+        </p:nvSpPr>
+        <p:spPr>
+          <a:xfrm>
+            <a:off x="868680" y="1417320"/>
+            <a:ext cx="6675120" cy="4434840"/>
+          </a:xfrm>
+          <a:prstGeom prst="rect">
+            <a:avLst/>
+          </a:prstGeom>
+          <a:noFill/>
+          <a:ln/>
+        </p:spPr>
+        <p:txBody>
+          <a:bodyPr wrap="square" lIns="635" tIns="635" rIns="635" bIns="635" rtlCol="0" anchor="t">
             <a:normAutofit/>
           </a:bodyPr>
           <a:lstStyle/>
           <a:p>
-            <a:pPr indent="0" marL="0">
-              <a:buNone/>
-            </a:pPr>
-            <a:r>
-              <a:rPr lang="en-US" sz="1420" dirty="0">
+            <a:r>
+              <a:rPr lang="en-US" sz="1700" dirty="0">
                 <a:solidFill>
                   <a:srgbClr val="17364A"/>
                 </a:solidFill>
@@ -7179,9 +12766,265 @@
                 <a:ea typeface="Aptos" pitchFamily="34" charset="-122"/>
                 <a:cs typeface="Aptos" pitchFamily="34" charset="-120"/>
               </a:rPr>
-              <a:t>AI project planning should begin with a charter that defines the use case and sets boundaries. The charter should explain the public health problem, intended users, expected benefits, data involved, systems affected, approved use, prohibited use, and success measures. It should also identify the sponsor, product owner, implementation lead, technical lead, privacy or legal contacts, security contact, evaluation lead, and operational owner. Implementation should be organized into phases. Early phases usually include discovery, intake, feasibility review, governance approval, and business analysis. Middle phases include design, procurement or configuration, data access setup, integration, validation, workflow design, SOP development, and training. Later phases include user acceptance testing, launch readiness review, deployment, monitoring, and transition to operations. Governance gates should be placed between phases to prevent premature launch. AI project risk management should be more detailed than a general project risk log. Risks may include poor data quality, unavailable interfaces, unclear authority, model performance problems, vendor delays, privacy concerns, security vulnerabilities, staff resistance, workflow burden, community trust concerns, and sustainability gaps. Each risk should have an owner, mitigation plan, status, and escalation threshold.</a:t>
-            </a:r>
-            <a:endParaRPr lang="en-US" sz="1420" dirty="0"/>
+              <a:t>AI projects require disciplined implementation planning because they combine technology, data, governance, workflow change,.</a:t>
+            </a:r>
+            <a:endParaRPr lang="en-US" sz="1700" dirty="0"/>
+          </a:p>
+          <a:p>
+            <a:r>
+              <a:rPr lang="en-US" sz="1700" dirty="0">
+                <a:solidFill>
+                  <a:srgbClr val="17364A"/>
+                </a:solidFill>
+                <a:latin typeface="Aptos" pitchFamily="34" charset="0"/>
+                <a:ea typeface="Aptos" pitchFamily="34" charset="-122"/>
+                <a:cs typeface="Aptos" pitchFamily="34" charset="-120"/>
+              </a:rPr>
+              <a:t>A project that appears small, such as adding an AI summarization tool, may still require data access decisions, system.</a:t>
+            </a:r>
+            <a:endParaRPr lang="en-US" sz="1700" dirty="0"/>
+          </a:p>
+          <a:p>
+            <a:r>
+              <a:rPr lang="en-US" sz="1700" dirty="0">
+                <a:solidFill>
+                  <a:srgbClr val="17364A"/>
+                </a:solidFill>
+                <a:latin typeface="Aptos" pitchFamily="34" charset="0"/>
+                <a:ea typeface="Aptos" pitchFamily="34" charset="-122"/>
+                <a:cs typeface="Aptos" pitchFamily="34" charset="-120"/>
+              </a:rPr>
+              <a:t>Public health agencies need project management methods that account for these dependencies before implementation begins.</a:t>
+            </a:r>
+            <a:endParaRPr lang="en-US" sz="1700" dirty="0"/>
+          </a:p>
+          <a:p>
+            <a:r>
+              <a:rPr lang="en-US" sz="1700" dirty="0">
+                <a:solidFill>
+                  <a:srgbClr val="17364A"/>
+                </a:solidFill>
+                <a:latin typeface="Aptos" pitchFamily="34" charset="0"/>
+                <a:ea typeface="Aptos" pitchFamily="34" charset="-122"/>
+                <a:cs typeface="Aptos" pitchFamily="34" charset="-120"/>
+              </a:rPr>
+              <a:t>This module teaches program managers, product owners, implementation leads, and technical staff how to structure AI.</a:t>
+            </a:r>
+            <a:endParaRPr lang="en-US" sz="1700" dirty="0"/>
+          </a:p>
+        </p:txBody>
+      </p:sp>
+      <p:sp>
+        <p:nvSpPr>
+          <p:cNvPr id="11" name="Shape 9"/>
+          <p:cNvSpPr/>
+          <p:nvPr/>
+        </p:nvSpPr>
+        <p:spPr>
+          <a:xfrm>
+            <a:off x="7909560" y="1417320"/>
+            <a:ext cx="3154680" cy="1828800"/>
+          </a:xfrm>
+          <a:prstGeom prst="roundRect">
+            <a:avLst>
+              <a:gd name="adj" fmla="val 6000"/>
+            </a:avLst>
+          </a:prstGeom>
+          <a:solidFill>
+            <a:srgbClr val="EEF8ED"/>
+          </a:solidFill>
+          <a:ln w="12700">
+            <a:solidFill>
+              <a:srgbClr val="B9D7E6"/>
+            </a:solidFill>
+            <a:prstDash val="solid"/>
+          </a:ln>
+        </p:spPr>
+      </p:sp>
+      <p:sp>
+        <p:nvSpPr>
+          <p:cNvPr id="12" name="Text 10"/>
+          <p:cNvSpPr/>
+          <p:nvPr/>
+        </p:nvSpPr>
+        <p:spPr>
+          <a:xfrm>
+            <a:off x="8074152" y="1563624"/>
+            <a:ext cx="2825496" cy="201168"/>
+          </a:xfrm>
+          <a:prstGeom prst="rect">
+            <a:avLst/>
+          </a:prstGeom>
+          <a:noFill/>
+          <a:ln/>
+        </p:spPr>
+        <p:txBody>
+          <a:bodyPr wrap="square" lIns="0" tIns="0" rIns="0" bIns="0" rtlCol="0" anchor="ctr"/>
+          <a:lstStyle/>
+          <a:p>
+            <a:pPr indent="0" marL="0">
+              <a:buNone/>
+            </a:pPr>
+            <a:r>
+              <a:rPr lang="en-US" sz="950" b="1" dirty="0">
+                <a:solidFill>
+                  <a:srgbClr val="0068B7"/>
+                </a:solidFill>
+                <a:latin typeface="Aptos" pitchFamily="34" charset="0"/>
+                <a:ea typeface="Aptos" pitchFamily="34" charset="-122"/>
+                <a:cs typeface="Aptos" pitchFamily="34" charset="-120"/>
+              </a:rPr>
+              <a:t>Key idea</a:t>
+            </a:r>
+            <a:endParaRPr lang="en-US" sz="950" dirty="0"/>
+          </a:p>
+        </p:txBody>
+      </p:sp>
+      <p:sp>
+        <p:nvSpPr>
+          <p:cNvPr id="13" name="Text 11"/>
+          <p:cNvSpPr/>
+          <p:nvPr/>
+        </p:nvSpPr>
+        <p:spPr>
+          <a:xfrm>
+            <a:off x="8074152" y="1856232"/>
+            <a:ext cx="2825496" cy="1261872"/>
+          </a:xfrm>
+          <a:prstGeom prst="rect">
+            <a:avLst/>
+          </a:prstGeom>
+          <a:noFill/>
+          <a:ln/>
+        </p:spPr>
+        <p:txBody>
+          <a:bodyPr wrap="square" lIns="0" tIns="0" rIns="0" bIns="0" rtlCol="0" anchor="t">
+            <a:normAutofit/>
+          </a:bodyPr>
+          <a:lstStyle/>
+          <a:p>
+            <a:pPr indent="0" marL="0">
+              <a:buNone/>
+            </a:pPr>
+            <a:r>
+              <a:rPr lang="en-US" sz="1250" dirty="0">
+                <a:solidFill>
+                  <a:srgbClr val="17364A"/>
+                </a:solidFill>
+                <a:latin typeface="Aptos" pitchFamily="34" charset="0"/>
+                <a:ea typeface="Aptos" pitchFamily="34" charset="-122"/>
+                <a:cs typeface="Aptos" pitchFamily="34" charset="-120"/>
+              </a:rPr>
+              <a:t>AI projects require disciplined implementation planning because they combine technology, data, governance, workflow change,.</a:t>
+            </a:r>
+            <a:endParaRPr lang="en-US" sz="1250" dirty="0"/>
+          </a:p>
+        </p:txBody>
+      </p:sp>
+      <p:sp>
+        <p:nvSpPr>
+          <p:cNvPr id="14" name="Shape 12"/>
+          <p:cNvSpPr/>
+          <p:nvPr/>
+        </p:nvSpPr>
+        <p:spPr>
+          <a:xfrm>
+            <a:off x="7909560" y="3520440"/>
+            <a:ext cx="3154680" cy="1737360"/>
+          </a:xfrm>
+          <a:prstGeom prst="roundRect">
+            <a:avLst>
+              <a:gd name="adj" fmla="val 6316"/>
+            </a:avLst>
+          </a:prstGeom>
+          <a:solidFill>
+            <a:srgbClr val="EAF6F8"/>
+          </a:solidFill>
+          <a:ln w="12700">
+            <a:solidFill>
+              <a:srgbClr val="B9D7E6"/>
+            </a:solidFill>
+            <a:prstDash val="solid"/>
+          </a:ln>
+        </p:spPr>
+      </p:sp>
+      <p:sp>
+        <p:nvSpPr>
+          <p:cNvPr id="15" name="Text 13"/>
+          <p:cNvSpPr/>
+          <p:nvPr/>
+        </p:nvSpPr>
+        <p:spPr>
+          <a:xfrm>
+            <a:off x="8074152" y="3666744"/>
+            <a:ext cx="2825496" cy="201168"/>
+          </a:xfrm>
+          <a:prstGeom prst="rect">
+            <a:avLst/>
+          </a:prstGeom>
+          <a:noFill/>
+          <a:ln/>
+        </p:spPr>
+        <p:txBody>
+          <a:bodyPr wrap="square" lIns="0" tIns="0" rIns="0" bIns="0" rtlCol="0" anchor="ctr"/>
+          <a:lstStyle/>
+          <a:p>
+            <a:pPr indent="0" marL="0">
+              <a:buNone/>
+            </a:pPr>
+            <a:r>
+              <a:rPr lang="en-US" sz="950" b="1" dirty="0">
+                <a:solidFill>
+                  <a:srgbClr val="0068B7"/>
+                </a:solidFill>
+                <a:latin typeface="Aptos" pitchFamily="34" charset="0"/>
+                <a:ea typeface="Aptos" pitchFamily="34" charset="-122"/>
+                <a:cs typeface="Aptos" pitchFamily="34" charset="-120"/>
+              </a:rPr>
+              <a:t>Use this for</a:t>
+            </a:r>
+            <a:endParaRPr lang="en-US" sz="950" dirty="0"/>
+          </a:p>
+        </p:txBody>
+      </p:sp>
+      <p:sp>
+        <p:nvSpPr>
+          <p:cNvPr id="16" name="Text 14"/>
+          <p:cNvSpPr/>
+          <p:nvPr/>
+        </p:nvSpPr>
+        <p:spPr>
+          <a:xfrm>
+            <a:off x="8074152" y="3959352"/>
+            <a:ext cx="2825496" cy="1170432"/>
+          </a:xfrm>
+          <a:prstGeom prst="rect">
+            <a:avLst/>
+          </a:prstGeom>
+          <a:noFill/>
+          <a:ln/>
+        </p:spPr>
+        <p:txBody>
+          <a:bodyPr wrap="square" lIns="0" tIns="0" rIns="0" bIns="0" rtlCol="0" anchor="t">
+            <a:normAutofit/>
+          </a:bodyPr>
+          <a:lstStyle/>
+          <a:p>
+            <a:pPr indent="0" marL="0">
+              <a:buNone/>
+            </a:pPr>
+            <a:r>
+              <a:rPr lang="en-US" sz="1250" dirty="0">
+                <a:solidFill>
+                  <a:srgbClr val="17364A"/>
+                </a:solidFill>
+                <a:latin typeface="Aptos" pitchFamily="34" charset="0"/>
+                <a:ea typeface="Aptos" pitchFamily="34" charset="-122"/>
+                <a:cs typeface="Aptos" pitchFamily="34" charset="-120"/>
+              </a:rPr>
+              <a:t>Connect the concept to public health decisions, safeguards, documentation, or implementation work.</a:t>
+            </a:r>
+            <a:endParaRPr lang="en-US" sz="1250" dirty="0"/>
           </a:p>
         </p:txBody>
       </p:sp>
@@ -7244,7 +13087,32 @@
       </p:sp>
       <p:sp>
         <p:nvSpPr>
-          <p:cNvPr id="3" name="Text 1"/>
+          <p:cNvPr id="3" name="Shape 1"/>
+          <p:cNvSpPr/>
+          <p:nvPr/>
+        </p:nvSpPr>
+        <p:spPr>
+          <a:xfrm>
+            <a:off x="0" y="164592"/>
+            <a:ext cx="146304" cy="6693408"/>
+          </a:xfrm>
+          <a:prstGeom prst="rect">
+            <a:avLst/>
+          </a:prstGeom>
+          <a:solidFill>
+            <a:srgbClr val="2F8A28"/>
+          </a:solidFill>
+          <a:ln w="12700">
+            <a:solidFill>
+              <a:srgbClr val="2F8A28"/>
+            </a:solidFill>
+            <a:prstDash val="solid"/>
+          </a:ln>
+        </p:spPr>
+      </p:sp>
+      <p:sp>
+        <p:nvSpPr>
+          <p:cNvPr id="4" name="Text 2"/>
           <p:cNvSpPr/>
           <p:nvPr/>
         </p:nvSpPr>
@@ -7283,7 +13151,7 @@
       </p:sp>
       <p:sp>
         <p:nvSpPr>
-          <p:cNvPr id="4" name="Text 2"/>
+          <p:cNvPr id="5" name="Text 3"/>
           <p:cNvSpPr/>
           <p:nvPr/>
         </p:nvSpPr>
@@ -7322,7 +13190,7 @@
       </p:sp>
       <p:sp>
         <p:nvSpPr>
-          <p:cNvPr id="5" name="Text 3"/>
+          <p:cNvPr id="6" name="Text 4"/>
           <p:cNvSpPr/>
           <p:nvPr/>
         </p:nvSpPr>
@@ -7361,13 +13229,77 @@
       </p:sp>
       <p:sp>
         <p:nvSpPr>
-          <p:cNvPr id="6" name="Text 4"/>
+          <p:cNvPr id="7" name="Shape 5"/>
           <p:cNvSpPr/>
           <p:nvPr/>
         </p:nvSpPr>
         <p:spPr>
           <a:xfrm>
             <a:off x="640080" y="658368"/>
+            <a:ext cx="420624" cy="420624"/>
+          </a:xfrm>
+          <a:prstGeom prst="ellipse">
+            <a:avLst/>
+          </a:prstGeom>
+          <a:solidFill>
+            <a:srgbClr val="0068B7"/>
+          </a:solidFill>
+          <a:ln w="12700">
+            <a:solidFill>
+              <a:srgbClr val="0068B7"/>
+            </a:solidFill>
+            <a:prstDash val="solid"/>
+          </a:ln>
+        </p:spPr>
+      </p:sp>
+      <p:sp>
+        <p:nvSpPr>
+          <p:cNvPr id="8" name="Text 6"/>
+          <p:cNvSpPr/>
+          <p:nvPr/>
+        </p:nvSpPr>
+        <p:spPr>
+          <a:xfrm>
+            <a:off x="640080" y="731520"/>
+            <a:ext cx="420624" cy="164592"/>
+          </a:xfrm>
+          <a:prstGeom prst="rect">
+            <a:avLst/>
+          </a:prstGeom>
+          <a:noFill/>
+          <a:ln/>
+        </p:spPr>
+        <p:txBody>
+          <a:bodyPr wrap="square" lIns="0" tIns="0" rIns="0" bIns="0" rtlCol="0" anchor="ctr"/>
+          <a:lstStyle/>
+          <a:p>
+            <a:pPr algn="ctr" indent="0" marL="0">
+              <a:buNone/>
+            </a:pPr>
+            <a:r>
+              <a:rPr lang="en-US" sz="1100" b="1" dirty="0">
+                <a:solidFill>
+                  <a:srgbClr val="FFFFFF"/>
+                </a:solidFill>
+                <a:latin typeface="Aptos" pitchFamily="34" charset="0"/>
+                <a:ea typeface="Aptos" pitchFamily="34" charset="-122"/>
+                <a:cs typeface="Aptos" pitchFamily="34" charset="-120"/>
+              </a:rPr>
+              <a:t>3</a:t>
+            </a:r>
+            <a:endParaRPr lang="en-US" sz="1100" dirty="0"/>
+          </a:p>
+        </p:txBody>
+      </p:sp>
+      <p:sp>
+        <p:nvSpPr>
+          <p:cNvPr id="9" name="Text 7"/>
+          <p:cNvSpPr/>
+          <p:nvPr/>
+        </p:nvSpPr>
+        <p:spPr>
+          <a:xfrm>
+            <a:off x="640080" y="621792"/>
             <a:ext cx="10881360" cy="566928"/>
           </a:xfrm>
           <a:prstGeom prst="rect">
@@ -7394,7 +13326,7 @@
                 <a:ea typeface="Aptos Display" pitchFamily="34" charset="-122"/>
                 <a:cs typeface="Aptos Display" pitchFamily="34" charset="-120"/>
               </a:rPr>
-              <a:t>Topic Deep Dive Continued</a:t>
+              <a:t>Public Health Example</a:t>
             </a:r>
             <a:endParaRPr lang="en-US" sz="2700" dirty="0"/>
           </a:p>
@@ -7402,32 +13334,29 @@
       </p:sp>
       <p:sp>
         <p:nvSpPr>
-          <p:cNvPr id="7" name="Text 5"/>
-          <p:cNvSpPr/>
-          <p:nvPr/>
-        </p:nvSpPr>
-        <p:spPr>
-          <a:xfrm>
-            <a:off x="822960" y="1325880"/>
-            <a:ext cx="10378440" cy="4800600"/>
-          </a:xfrm>
-          <a:prstGeom prst="rect">
-            <a:avLst/>
-          </a:prstGeom>
-          <a:noFill/>
-          <a:ln/>
-        </p:spPr>
-        <p:txBody>
-          <a:bodyPr wrap="square" lIns="1016" tIns="1016" rIns="1016" bIns="1016" rtlCol="0" anchor="t">
+          <p:cNvPr id="10" name="Text 8"/>
+          <p:cNvSpPr/>
+          <p:nvPr/>
+        </p:nvSpPr>
+        <p:spPr>
+          <a:xfrm>
+            <a:off x="868680" y="1417320"/>
+            <a:ext cx="6675120" cy="4434840"/>
+          </a:xfrm>
+          <a:prstGeom prst="rect">
+            <a:avLst/>
+          </a:prstGeom>
+          <a:noFill/>
+          <a:ln/>
+        </p:spPr>
+        <p:txBody>
+          <a:bodyPr wrap="square" lIns="635" tIns="635" rIns="635" bIns="635" rtlCol="0" anchor="t">
             <a:normAutofit/>
           </a:bodyPr>
           <a:lstStyle/>
           <a:p>
-            <a:pPr indent="0" marL="0">
-              <a:buNone/>
-            </a:pPr>
-            <a:r>
-              <a:rPr lang="en-US" sz="1420" dirty="0">
+            <a:r>
+              <a:rPr lang="en-US" sz="1700" dirty="0">
                 <a:solidFill>
                   <a:srgbClr val="17364A"/>
                 </a:solidFill>
@@ -7435,9 +13364,265 @@
                 <a:ea typeface="Aptos" pitchFamily="34" charset="-122"/>
                 <a:cs typeface="Aptos" pitchFamily="34" charset="-120"/>
               </a:rPr>
-              <a:t>Transition to operations is often neglected. A pilot may show promise, but routine use requires support, monitoring, maintenance, budget, staff training, user feedback, incident response, and periodic review. The project plan should define when the implementation team ends and who becomes responsible for ongoing operations.</a:t>
-            </a:r>
-            <a:endParaRPr lang="en-US" sz="1420" dirty="0"/>
+              <a:t>A public health agency plans to pilot an AI tool that drafts summaries of incoming case reports.</a:t>
+            </a:r>
+            <a:endParaRPr lang="en-US" sz="1700" dirty="0"/>
+          </a:p>
+          <a:p>
+            <a:r>
+              <a:rPr lang="en-US" sz="1700" dirty="0">
+                <a:solidFill>
+                  <a:srgbClr val="17364A"/>
+                </a:solidFill>
+                <a:latin typeface="Aptos" pitchFamily="34" charset="0"/>
+                <a:ea typeface="Aptos" pitchFamily="34" charset="-122"/>
+                <a:cs typeface="Aptos" pitchFamily="34" charset="-120"/>
+              </a:rPr>
+              <a:t>The project plan identifies governance approval, data access, system integration, validation, user training, SOP.</a:t>
+            </a:r>
+            <a:endParaRPr lang="en-US" sz="1700" dirty="0"/>
+          </a:p>
+          <a:p>
+            <a:r>
+              <a:rPr lang="en-US" sz="1700" dirty="0">
+                <a:solidFill>
+                  <a:srgbClr val="17364A"/>
+                </a:solidFill>
+                <a:latin typeface="Aptos" pitchFamily="34" charset="0"/>
+                <a:ea typeface="Aptos" pitchFamily="34" charset="-122"/>
+                <a:cs typeface="Aptos" pitchFamily="34" charset="-120"/>
+              </a:rPr>
+              <a:t>The project cannot launch simply because the tool works in a demonstration.</a:t>
+            </a:r>
+            <a:endParaRPr lang="en-US" sz="1700" dirty="0"/>
+          </a:p>
+          <a:p>
+            <a:r>
+              <a:rPr lang="en-US" sz="1700" dirty="0">
+                <a:solidFill>
+                  <a:srgbClr val="17364A"/>
+                </a:solidFill>
+                <a:latin typeface="Aptos" pitchFamily="34" charset="0"/>
+                <a:ea typeface="Aptos" pitchFamily="34" charset="-122"/>
+                <a:cs typeface="Aptos" pitchFamily="34" charset="-120"/>
+              </a:rPr>
+              <a:t>It must pass readiness checks showing that staff know how to review the output, errors can be reported, and the tool is.</a:t>
+            </a:r>
+            <a:endParaRPr lang="en-US" sz="1700" dirty="0"/>
+          </a:p>
+        </p:txBody>
+      </p:sp>
+      <p:sp>
+        <p:nvSpPr>
+          <p:cNvPr id="11" name="Shape 9"/>
+          <p:cNvSpPr/>
+          <p:nvPr/>
+        </p:nvSpPr>
+        <p:spPr>
+          <a:xfrm>
+            <a:off x="7909560" y="1417320"/>
+            <a:ext cx="3154680" cy="1828800"/>
+          </a:xfrm>
+          <a:prstGeom prst="roundRect">
+            <a:avLst>
+              <a:gd name="adj" fmla="val 6000"/>
+            </a:avLst>
+          </a:prstGeom>
+          <a:solidFill>
+            <a:srgbClr val="EEF8ED"/>
+          </a:solidFill>
+          <a:ln w="12700">
+            <a:solidFill>
+              <a:srgbClr val="B9D7E6"/>
+            </a:solidFill>
+            <a:prstDash val="solid"/>
+          </a:ln>
+        </p:spPr>
+      </p:sp>
+      <p:sp>
+        <p:nvSpPr>
+          <p:cNvPr id="12" name="Text 10"/>
+          <p:cNvSpPr/>
+          <p:nvPr/>
+        </p:nvSpPr>
+        <p:spPr>
+          <a:xfrm>
+            <a:off x="8074152" y="1563624"/>
+            <a:ext cx="2825496" cy="201168"/>
+          </a:xfrm>
+          <a:prstGeom prst="rect">
+            <a:avLst/>
+          </a:prstGeom>
+          <a:noFill/>
+          <a:ln/>
+        </p:spPr>
+        <p:txBody>
+          <a:bodyPr wrap="square" lIns="0" tIns="0" rIns="0" bIns="0" rtlCol="0" anchor="ctr"/>
+          <a:lstStyle/>
+          <a:p>
+            <a:pPr indent="0" marL="0">
+              <a:buNone/>
+            </a:pPr>
+            <a:r>
+              <a:rPr lang="en-US" sz="950" b="1" dirty="0">
+                <a:solidFill>
+                  <a:srgbClr val="0068B7"/>
+                </a:solidFill>
+                <a:latin typeface="Aptos" pitchFamily="34" charset="0"/>
+                <a:ea typeface="Aptos" pitchFamily="34" charset="-122"/>
+                <a:cs typeface="Aptos" pitchFamily="34" charset="-120"/>
+              </a:rPr>
+              <a:t>Key idea</a:t>
+            </a:r>
+            <a:endParaRPr lang="en-US" sz="950" dirty="0"/>
+          </a:p>
+        </p:txBody>
+      </p:sp>
+      <p:sp>
+        <p:nvSpPr>
+          <p:cNvPr id="13" name="Text 11"/>
+          <p:cNvSpPr/>
+          <p:nvPr/>
+        </p:nvSpPr>
+        <p:spPr>
+          <a:xfrm>
+            <a:off x="8074152" y="1856232"/>
+            <a:ext cx="2825496" cy="1261872"/>
+          </a:xfrm>
+          <a:prstGeom prst="rect">
+            <a:avLst/>
+          </a:prstGeom>
+          <a:noFill/>
+          <a:ln/>
+        </p:spPr>
+        <p:txBody>
+          <a:bodyPr wrap="square" lIns="0" tIns="0" rIns="0" bIns="0" rtlCol="0" anchor="t">
+            <a:normAutofit/>
+          </a:bodyPr>
+          <a:lstStyle/>
+          <a:p>
+            <a:pPr indent="0" marL="0">
+              <a:buNone/>
+            </a:pPr>
+            <a:r>
+              <a:rPr lang="en-US" sz="1250" dirty="0">
+                <a:solidFill>
+                  <a:srgbClr val="17364A"/>
+                </a:solidFill>
+                <a:latin typeface="Aptos" pitchFamily="34" charset="0"/>
+                <a:ea typeface="Aptos" pitchFamily="34" charset="-122"/>
+                <a:cs typeface="Aptos" pitchFamily="34" charset="-120"/>
+              </a:rPr>
+              <a:t>A public health agency plans to pilot an AI tool that drafts summaries of incoming case reports.</a:t>
+            </a:r>
+            <a:endParaRPr lang="en-US" sz="1250" dirty="0"/>
+          </a:p>
+        </p:txBody>
+      </p:sp>
+      <p:sp>
+        <p:nvSpPr>
+          <p:cNvPr id="14" name="Shape 12"/>
+          <p:cNvSpPr/>
+          <p:nvPr/>
+        </p:nvSpPr>
+        <p:spPr>
+          <a:xfrm>
+            <a:off x="7909560" y="3520440"/>
+            <a:ext cx="3154680" cy="1737360"/>
+          </a:xfrm>
+          <a:prstGeom prst="roundRect">
+            <a:avLst>
+              <a:gd name="adj" fmla="val 6316"/>
+            </a:avLst>
+          </a:prstGeom>
+          <a:solidFill>
+            <a:srgbClr val="EAF6F8"/>
+          </a:solidFill>
+          <a:ln w="12700">
+            <a:solidFill>
+              <a:srgbClr val="B9D7E6"/>
+            </a:solidFill>
+            <a:prstDash val="solid"/>
+          </a:ln>
+        </p:spPr>
+      </p:sp>
+      <p:sp>
+        <p:nvSpPr>
+          <p:cNvPr id="15" name="Text 13"/>
+          <p:cNvSpPr/>
+          <p:nvPr/>
+        </p:nvSpPr>
+        <p:spPr>
+          <a:xfrm>
+            <a:off x="8074152" y="3666744"/>
+            <a:ext cx="2825496" cy="201168"/>
+          </a:xfrm>
+          <a:prstGeom prst="rect">
+            <a:avLst/>
+          </a:prstGeom>
+          <a:noFill/>
+          <a:ln/>
+        </p:spPr>
+        <p:txBody>
+          <a:bodyPr wrap="square" lIns="0" tIns="0" rIns="0" bIns="0" rtlCol="0" anchor="ctr"/>
+          <a:lstStyle/>
+          <a:p>
+            <a:pPr indent="0" marL="0">
+              <a:buNone/>
+            </a:pPr>
+            <a:r>
+              <a:rPr lang="en-US" sz="950" b="1" dirty="0">
+                <a:solidFill>
+                  <a:srgbClr val="0068B7"/>
+                </a:solidFill>
+                <a:latin typeface="Aptos" pitchFamily="34" charset="0"/>
+                <a:ea typeface="Aptos" pitchFamily="34" charset="-122"/>
+                <a:cs typeface="Aptos" pitchFamily="34" charset="-120"/>
+              </a:rPr>
+              <a:t>Use this for</a:t>
+            </a:r>
+            <a:endParaRPr lang="en-US" sz="950" dirty="0"/>
+          </a:p>
+        </p:txBody>
+      </p:sp>
+      <p:sp>
+        <p:nvSpPr>
+          <p:cNvPr id="16" name="Text 14"/>
+          <p:cNvSpPr/>
+          <p:nvPr/>
+        </p:nvSpPr>
+        <p:spPr>
+          <a:xfrm>
+            <a:off x="8074152" y="3959352"/>
+            <a:ext cx="2825496" cy="1170432"/>
+          </a:xfrm>
+          <a:prstGeom prst="rect">
+            <a:avLst/>
+          </a:prstGeom>
+          <a:noFill/>
+          <a:ln/>
+        </p:spPr>
+        <p:txBody>
+          <a:bodyPr wrap="square" lIns="0" tIns="0" rIns="0" bIns="0" rtlCol="0" anchor="t">
+            <a:normAutofit/>
+          </a:bodyPr>
+          <a:lstStyle/>
+          <a:p>
+            <a:pPr indent="0" marL="0">
+              <a:buNone/>
+            </a:pPr>
+            <a:r>
+              <a:rPr lang="en-US" sz="1250" dirty="0">
+                <a:solidFill>
+                  <a:srgbClr val="17364A"/>
+                </a:solidFill>
+                <a:latin typeface="Aptos" pitchFamily="34" charset="0"/>
+                <a:ea typeface="Aptos" pitchFamily="34" charset="-122"/>
+                <a:cs typeface="Aptos" pitchFamily="34" charset="-120"/>
+              </a:rPr>
+              <a:t>Connect the concept to public health decisions, safeguards, documentation, or implementation work.</a:t>
+            </a:r>
+            <a:endParaRPr lang="en-US" sz="1250" dirty="0"/>
           </a:p>
         </p:txBody>
       </p:sp>
@@ -7500,7 +13685,32 @@
       </p:sp>
       <p:sp>
         <p:nvSpPr>
-          <p:cNvPr id="3" name="Text 1"/>
+          <p:cNvPr id="3" name="Shape 1"/>
+          <p:cNvSpPr/>
+          <p:nvPr/>
+        </p:nvSpPr>
+        <p:spPr>
+          <a:xfrm>
+            <a:off x="0" y="164592"/>
+            <a:ext cx="146304" cy="6693408"/>
+          </a:xfrm>
+          <a:prstGeom prst="rect">
+            <a:avLst/>
+          </a:prstGeom>
+          <a:solidFill>
+            <a:srgbClr val="2F8A28"/>
+          </a:solidFill>
+          <a:ln w="12700">
+            <a:solidFill>
+              <a:srgbClr val="2F8A28"/>
+            </a:solidFill>
+            <a:prstDash val="solid"/>
+          </a:ln>
+        </p:spPr>
+      </p:sp>
+      <p:sp>
+        <p:nvSpPr>
+          <p:cNvPr id="4" name="Text 2"/>
           <p:cNvSpPr/>
           <p:nvPr/>
         </p:nvSpPr>
@@ -7539,7 +13749,7 @@
       </p:sp>
       <p:sp>
         <p:nvSpPr>
-          <p:cNvPr id="4" name="Text 2"/>
+          <p:cNvPr id="5" name="Text 3"/>
           <p:cNvSpPr/>
           <p:nvPr/>
         </p:nvSpPr>
@@ -7578,7 +13788,7 @@
       </p:sp>
       <p:sp>
         <p:nvSpPr>
-          <p:cNvPr id="5" name="Text 3"/>
+          <p:cNvPr id="6" name="Text 4"/>
           <p:cNvSpPr/>
           <p:nvPr/>
         </p:nvSpPr>
@@ -7617,13 +13827,77 @@
       </p:sp>
       <p:sp>
         <p:nvSpPr>
-          <p:cNvPr id="6" name="Text 4"/>
+          <p:cNvPr id="7" name="Shape 5"/>
           <p:cNvSpPr/>
           <p:nvPr/>
         </p:nvSpPr>
         <p:spPr>
           <a:xfrm>
             <a:off x="640080" y="658368"/>
+            <a:ext cx="420624" cy="420624"/>
+          </a:xfrm>
+          <a:prstGeom prst="ellipse">
+            <a:avLst/>
+          </a:prstGeom>
+          <a:solidFill>
+            <a:srgbClr val="0068B7"/>
+          </a:solidFill>
+          <a:ln w="12700">
+            <a:solidFill>
+              <a:srgbClr val="0068B7"/>
+            </a:solidFill>
+            <a:prstDash val="solid"/>
+          </a:ln>
+        </p:spPr>
+      </p:sp>
+      <p:sp>
+        <p:nvSpPr>
+          <p:cNvPr id="8" name="Text 6"/>
+          <p:cNvSpPr/>
+          <p:nvPr/>
+        </p:nvSpPr>
+        <p:spPr>
+          <a:xfrm>
+            <a:off x="640080" y="731520"/>
+            <a:ext cx="420624" cy="164592"/>
+          </a:xfrm>
+          <a:prstGeom prst="rect">
+            <a:avLst/>
+          </a:prstGeom>
+          <a:noFill/>
+          <a:ln/>
+        </p:spPr>
+        <p:txBody>
+          <a:bodyPr wrap="square" lIns="0" tIns="0" rIns="0" bIns="0" rtlCol="0" anchor="ctr"/>
+          <a:lstStyle/>
+          <a:p>
+            <a:pPr algn="ctr" indent="0" marL="0">
+              <a:buNone/>
+            </a:pPr>
+            <a:r>
+              <a:rPr lang="en-US" sz="1100" b="1" dirty="0">
+                <a:solidFill>
+                  <a:srgbClr val="FFFFFF"/>
+                </a:solidFill>
+                <a:latin typeface="Aptos" pitchFamily="34" charset="0"/>
+                <a:ea typeface="Aptos" pitchFamily="34" charset="-122"/>
+                <a:cs typeface="Aptos" pitchFamily="34" charset="-120"/>
+              </a:rPr>
+              <a:t>4</a:t>
+            </a:r>
+            <a:endParaRPr lang="en-US" sz="1100" dirty="0"/>
+          </a:p>
+        </p:txBody>
+      </p:sp>
+      <p:sp>
+        <p:nvSpPr>
+          <p:cNvPr id="9" name="Text 7"/>
+          <p:cNvSpPr/>
+          <p:nvPr/>
+        </p:nvSpPr>
+        <p:spPr>
+          <a:xfrm>
+            <a:off x="640080" y="621792"/>
             <a:ext cx="10881360" cy="566928"/>
           </a:xfrm>
           <a:prstGeom prst="rect">
@@ -7650,7 +13924,7 @@
                 <a:ea typeface="Aptos Display" pitchFamily="34" charset="-122"/>
                 <a:cs typeface="Aptos Display" pitchFamily="34" charset="-120"/>
               </a:rPr>
-              <a:t>Risks, Failure Modes, and Guardrails</a:t>
+              <a:t>Topic Deep Dive</a:t>
             </a:r>
             <a:endParaRPr lang="en-US" sz="2700" dirty="0"/>
           </a:p>
@@ -7658,32 +13932,29 @@
       </p:sp>
       <p:sp>
         <p:nvSpPr>
-          <p:cNvPr id="7" name="Text 5"/>
-          <p:cNvSpPr/>
-          <p:nvPr/>
-        </p:nvSpPr>
-        <p:spPr>
-          <a:xfrm>
-            <a:off x="822960" y="1325880"/>
-            <a:ext cx="10378440" cy="4800600"/>
-          </a:xfrm>
-          <a:prstGeom prst="rect">
-            <a:avLst/>
-          </a:prstGeom>
-          <a:noFill/>
-          <a:ln/>
-        </p:spPr>
-        <p:txBody>
-          <a:bodyPr wrap="square" lIns="1016" tIns="1016" rIns="1016" bIns="1016" rtlCol="0" anchor="t">
+          <p:cNvPr id="10" name="Text 8"/>
+          <p:cNvSpPr/>
+          <p:nvPr/>
+        </p:nvSpPr>
+        <p:spPr>
+          <a:xfrm>
+            <a:off x="868680" y="1417320"/>
+            <a:ext cx="6675120" cy="4434840"/>
+          </a:xfrm>
+          <a:prstGeom prst="rect">
+            <a:avLst/>
+          </a:prstGeom>
+          <a:noFill/>
+          <a:ln/>
+        </p:spPr>
+        <p:txBody>
+          <a:bodyPr wrap="square" lIns="635" tIns="635" rIns="635" bIns="635" rtlCol="0" anchor="t">
             <a:normAutofit/>
           </a:bodyPr>
           <a:lstStyle/>
           <a:p>
-            <a:pPr indent="0" marL="0">
-              <a:buNone/>
-            </a:pPr>
-            <a:r>
-              <a:rPr lang="en-US" sz="1420" dirty="0">
+            <a:r>
+              <a:rPr lang="en-US" sz="1700" dirty="0">
                 <a:solidFill>
                   <a:srgbClr val="17364A"/>
                 </a:solidFill>
@@ -7691,9 +13962,265 @@
                 <a:ea typeface="Aptos" pitchFamily="34" charset="-122"/>
                 <a:cs typeface="Aptos" pitchFamily="34" charset="-120"/>
               </a:rPr>
-              <a:t>Risks and failure modes include the following: Pilots launching without governance approval or operational ownership. Project plans overlooking data, privacy, security, workflow, or training dependencies.</a:t>
-            </a:r>
-            <a:endParaRPr lang="en-US" sz="1420" dirty="0"/>
+              <a:t>AI project planning should begin with a charter that defines the use case and sets boundaries.</a:t>
+            </a:r>
+            <a:endParaRPr lang="en-US" sz="1700" dirty="0"/>
+          </a:p>
+          <a:p>
+            <a:r>
+              <a:rPr lang="en-US" sz="1700" dirty="0">
+                <a:solidFill>
+                  <a:srgbClr val="17364A"/>
+                </a:solidFill>
+                <a:latin typeface="Aptos" pitchFamily="34" charset="0"/>
+                <a:ea typeface="Aptos" pitchFamily="34" charset="-122"/>
+                <a:cs typeface="Aptos" pitchFamily="34" charset="-120"/>
+              </a:rPr>
+              <a:t>The charter should explain the public health problem, intended users, expected benefits, data involved, systems affected,.</a:t>
+            </a:r>
+            <a:endParaRPr lang="en-US" sz="1700" dirty="0"/>
+          </a:p>
+          <a:p>
+            <a:r>
+              <a:rPr lang="en-US" sz="1700" dirty="0">
+                <a:solidFill>
+                  <a:srgbClr val="17364A"/>
+                </a:solidFill>
+                <a:latin typeface="Aptos" pitchFamily="34" charset="0"/>
+                <a:ea typeface="Aptos" pitchFamily="34" charset="-122"/>
+                <a:cs typeface="Aptos" pitchFamily="34" charset="-120"/>
+              </a:rPr>
+              <a:t>It should also identify the sponsor, product owner, implementation lead, technical lead, privacy or legal contacts,.</a:t>
+            </a:r>
+            <a:endParaRPr lang="en-US" sz="1700" dirty="0"/>
+          </a:p>
+          <a:p>
+            <a:r>
+              <a:rPr lang="en-US" sz="1700" dirty="0">
+                <a:solidFill>
+                  <a:srgbClr val="17364A"/>
+                </a:solidFill>
+                <a:latin typeface="Aptos" pitchFamily="34" charset="0"/>
+                <a:ea typeface="Aptos" pitchFamily="34" charset="-122"/>
+                <a:cs typeface="Aptos" pitchFamily="34" charset="-120"/>
+              </a:rPr>
+              <a:t>Implementation should be organized into phases.</a:t>
+            </a:r>
+            <a:endParaRPr lang="en-US" sz="1700" dirty="0"/>
+          </a:p>
+        </p:txBody>
+      </p:sp>
+      <p:sp>
+        <p:nvSpPr>
+          <p:cNvPr id="11" name="Shape 9"/>
+          <p:cNvSpPr/>
+          <p:nvPr/>
+        </p:nvSpPr>
+        <p:spPr>
+          <a:xfrm>
+            <a:off x="7909560" y="1417320"/>
+            <a:ext cx="3154680" cy="1828800"/>
+          </a:xfrm>
+          <a:prstGeom prst="roundRect">
+            <a:avLst>
+              <a:gd name="adj" fmla="val 6000"/>
+            </a:avLst>
+          </a:prstGeom>
+          <a:solidFill>
+            <a:srgbClr val="EEF8ED"/>
+          </a:solidFill>
+          <a:ln w="12700">
+            <a:solidFill>
+              <a:srgbClr val="B9D7E6"/>
+            </a:solidFill>
+            <a:prstDash val="solid"/>
+          </a:ln>
+        </p:spPr>
+      </p:sp>
+      <p:sp>
+        <p:nvSpPr>
+          <p:cNvPr id="12" name="Text 10"/>
+          <p:cNvSpPr/>
+          <p:nvPr/>
+        </p:nvSpPr>
+        <p:spPr>
+          <a:xfrm>
+            <a:off x="8074152" y="1563624"/>
+            <a:ext cx="2825496" cy="201168"/>
+          </a:xfrm>
+          <a:prstGeom prst="rect">
+            <a:avLst/>
+          </a:prstGeom>
+          <a:noFill/>
+          <a:ln/>
+        </p:spPr>
+        <p:txBody>
+          <a:bodyPr wrap="square" lIns="0" tIns="0" rIns="0" bIns="0" rtlCol="0" anchor="ctr"/>
+          <a:lstStyle/>
+          <a:p>
+            <a:pPr indent="0" marL="0">
+              <a:buNone/>
+            </a:pPr>
+            <a:r>
+              <a:rPr lang="en-US" sz="950" b="1" dirty="0">
+                <a:solidFill>
+                  <a:srgbClr val="0068B7"/>
+                </a:solidFill>
+                <a:latin typeface="Aptos" pitchFamily="34" charset="0"/>
+                <a:ea typeface="Aptos" pitchFamily="34" charset="-122"/>
+                <a:cs typeface="Aptos" pitchFamily="34" charset="-120"/>
+              </a:rPr>
+              <a:t>Key idea</a:t>
+            </a:r>
+            <a:endParaRPr lang="en-US" sz="950" dirty="0"/>
+          </a:p>
+        </p:txBody>
+      </p:sp>
+      <p:sp>
+        <p:nvSpPr>
+          <p:cNvPr id="13" name="Text 11"/>
+          <p:cNvSpPr/>
+          <p:nvPr/>
+        </p:nvSpPr>
+        <p:spPr>
+          <a:xfrm>
+            <a:off x="8074152" y="1856232"/>
+            <a:ext cx="2825496" cy="1261872"/>
+          </a:xfrm>
+          <a:prstGeom prst="rect">
+            <a:avLst/>
+          </a:prstGeom>
+          <a:noFill/>
+          <a:ln/>
+        </p:spPr>
+        <p:txBody>
+          <a:bodyPr wrap="square" lIns="0" tIns="0" rIns="0" bIns="0" rtlCol="0" anchor="t">
+            <a:normAutofit/>
+          </a:bodyPr>
+          <a:lstStyle/>
+          <a:p>
+            <a:pPr indent="0" marL="0">
+              <a:buNone/>
+            </a:pPr>
+            <a:r>
+              <a:rPr lang="en-US" sz="1250" dirty="0">
+                <a:solidFill>
+                  <a:srgbClr val="17364A"/>
+                </a:solidFill>
+                <a:latin typeface="Aptos" pitchFamily="34" charset="0"/>
+                <a:ea typeface="Aptos" pitchFamily="34" charset="-122"/>
+                <a:cs typeface="Aptos" pitchFamily="34" charset="-120"/>
+              </a:rPr>
+              <a:t>AI project planning should begin with a charter that defines the use case and sets boundaries.</a:t>
+            </a:r>
+            <a:endParaRPr lang="en-US" sz="1250" dirty="0"/>
+          </a:p>
+        </p:txBody>
+      </p:sp>
+      <p:sp>
+        <p:nvSpPr>
+          <p:cNvPr id="14" name="Shape 12"/>
+          <p:cNvSpPr/>
+          <p:nvPr/>
+        </p:nvSpPr>
+        <p:spPr>
+          <a:xfrm>
+            <a:off x="7909560" y="3520440"/>
+            <a:ext cx="3154680" cy="1737360"/>
+          </a:xfrm>
+          <a:prstGeom prst="roundRect">
+            <a:avLst>
+              <a:gd name="adj" fmla="val 6316"/>
+            </a:avLst>
+          </a:prstGeom>
+          <a:solidFill>
+            <a:srgbClr val="EAF6F8"/>
+          </a:solidFill>
+          <a:ln w="12700">
+            <a:solidFill>
+              <a:srgbClr val="B9D7E6"/>
+            </a:solidFill>
+            <a:prstDash val="solid"/>
+          </a:ln>
+        </p:spPr>
+      </p:sp>
+      <p:sp>
+        <p:nvSpPr>
+          <p:cNvPr id="15" name="Text 13"/>
+          <p:cNvSpPr/>
+          <p:nvPr/>
+        </p:nvSpPr>
+        <p:spPr>
+          <a:xfrm>
+            <a:off x="8074152" y="3666744"/>
+            <a:ext cx="2825496" cy="201168"/>
+          </a:xfrm>
+          <a:prstGeom prst="rect">
+            <a:avLst/>
+          </a:prstGeom>
+          <a:noFill/>
+          <a:ln/>
+        </p:spPr>
+        <p:txBody>
+          <a:bodyPr wrap="square" lIns="0" tIns="0" rIns="0" bIns="0" rtlCol="0" anchor="ctr"/>
+          <a:lstStyle/>
+          <a:p>
+            <a:pPr indent="0" marL="0">
+              <a:buNone/>
+            </a:pPr>
+            <a:r>
+              <a:rPr lang="en-US" sz="950" b="1" dirty="0">
+                <a:solidFill>
+                  <a:srgbClr val="0068B7"/>
+                </a:solidFill>
+                <a:latin typeface="Aptos" pitchFamily="34" charset="0"/>
+                <a:ea typeface="Aptos" pitchFamily="34" charset="-122"/>
+                <a:cs typeface="Aptos" pitchFamily="34" charset="-120"/>
+              </a:rPr>
+              <a:t>Use this for</a:t>
+            </a:r>
+            <a:endParaRPr lang="en-US" sz="950" dirty="0"/>
+          </a:p>
+        </p:txBody>
+      </p:sp>
+      <p:sp>
+        <p:nvSpPr>
+          <p:cNvPr id="16" name="Text 14"/>
+          <p:cNvSpPr/>
+          <p:nvPr/>
+        </p:nvSpPr>
+        <p:spPr>
+          <a:xfrm>
+            <a:off x="8074152" y="3959352"/>
+            <a:ext cx="2825496" cy="1170432"/>
+          </a:xfrm>
+          <a:prstGeom prst="rect">
+            <a:avLst/>
+          </a:prstGeom>
+          <a:noFill/>
+          <a:ln/>
+        </p:spPr>
+        <p:txBody>
+          <a:bodyPr wrap="square" lIns="0" tIns="0" rIns="0" bIns="0" rtlCol="0" anchor="t">
+            <a:normAutofit/>
+          </a:bodyPr>
+          <a:lstStyle/>
+          <a:p>
+            <a:pPr indent="0" marL="0">
+              <a:buNone/>
+            </a:pPr>
+            <a:r>
+              <a:rPr lang="en-US" sz="1250" dirty="0">
+                <a:solidFill>
+                  <a:srgbClr val="17364A"/>
+                </a:solidFill>
+                <a:latin typeface="Aptos" pitchFamily="34" charset="0"/>
+                <a:ea typeface="Aptos" pitchFamily="34" charset="-122"/>
+                <a:cs typeface="Aptos" pitchFamily="34" charset="-120"/>
+              </a:rPr>
+              <a:t>Connect the concept to public health decisions, safeguards, documentation, or implementation work.</a:t>
+            </a:r>
+            <a:endParaRPr lang="en-US" sz="1250" dirty="0"/>
           </a:p>
         </p:txBody>
       </p:sp>
@@ -7756,7 +14283,32 @@
       </p:sp>
       <p:sp>
         <p:nvSpPr>
-          <p:cNvPr id="3" name="Text 1"/>
+          <p:cNvPr id="3" name="Shape 1"/>
+          <p:cNvSpPr/>
+          <p:nvPr/>
+        </p:nvSpPr>
+        <p:spPr>
+          <a:xfrm>
+            <a:off x="0" y="164592"/>
+            <a:ext cx="146304" cy="6693408"/>
+          </a:xfrm>
+          <a:prstGeom prst="rect">
+            <a:avLst/>
+          </a:prstGeom>
+          <a:solidFill>
+            <a:srgbClr val="2F8A28"/>
+          </a:solidFill>
+          <a:ln w="12700">
+            <a:solidFill>
+              <a:srgbClr val="2F8A28"/>
+            </a:solidFill>
+            <a:prstDash val="solid"/>
+          </a:ln>
+        </p:spPr>
+      </p:sp>
+      <p:sp>
+        <p:nvSpPr>
+          <p:cNvPr id="4" name="Text 2"/>
           <p:cNvSpPr/>
           <p:nvPr/>
         </p:nvSpPr>
@@ -7795,7 +14347,7 @@
       </p:sp>
       <p:sp>
         <p:nvSpPr>
-          <p:cNvPr id="4" name="Text 2"/>
+          <p:cNvPr id="5" name="Text 3"/>
           <p:cNvSpPr/>
           <p:nvPr/>
         </p:nvSpPr>
@@ -7834,7 +14386,7 @@
       </p:sp>
       <p:sp>
         <p:nvSpPr>
-          <p:cNvPr id="5" name="Text 3"/>
+          <p:cNvPr id="6" name="Text 4"/>
           <p:cNvSpPr/>
           <p:nvPr/>
         </p:nvSpPr>
@@ -7873,7 +14425,7 @@
       </p:sp>
       <p:sp>
         <p:nvSpPr>
-          <p:cNvPr id="6" name="Text 4"/>
+          <p:cNvPr id="7" name="Text 5"/>
           <p:cNvSpPr/>
           <p:nvPr/>
         </p:nvSpPr>
@@ -7906,7 +14458,7 @@
                 <a:ea typeface="Aptos Display" pitchFamily="34" charset="-122"/>
                 <a:cs typeface="Aptos Display" pitchFamily="34" charset="-120"/>
               </a:rPr>
-              <a:t>Risks, Failure Modes, and Guardrails Continued</a:t>
+              <a:t>Topic Deep Dive Continued</a:t>
             </a:r>
             <a:endParaRPr lang="en-US" sz="2700" dirty="0"/>
           </a:p>
@@ -7914,32 +14466,29 @@
       </p:sp>
       <p:sp>
         <p:nvSpPr>
-          <p:cNvPr id="7" name="Text 5"/>
-          <p:cNvSpPr/>
-          <p:nvPr/>
-        </p:nvSpPr>
-        <p:spPr>
-          <a:xfrm>
-            <a:off x="822960" y="1325880"/>
-            <a:ext cx="10378440" cy="4800600"/>
-          </a:xfrm>
-          <a:prstGeom prst="rect">
-            <a:avLst/>
-          </a:prstGeom>
-          <a:noFill/>
-          <a:ln/>
-        </p:spPr>
-        <p:txBody>
-          <a:bodyPr wrap="square" lIns="1016" tIns="1016" rIns="1016" bIns="1016" rtlCol="0" anchor="t">
+          <p:cNvPr id="8" name="Text 6"/>
+          <p:cNvSpPr/>
+          <p:nvPr/>
+        </p:nvSpPr>
+        <p:spPr>
+          <a:xfrm>
+            <a:off x="868680" y="1417320"/>
+            <a:ext cx="6675120" cy="4434840"/>
+          </a:xfrm>
+          <a:prstGeom prst="rect">
+            <a:avLst/>
+          </a:prstGeom>
+          <a:noFill/>
+          <a:ln/>
+        </p:spPr>
+        <p:txBody>
+          <a:bodyPr wrap="square" lIns="635" tIns="635" rIns="635" bIns="635" rtlCol="0" anchor="t">
             <a:normAutofit/>
           </a:bodyPr>
           <a:lstStyle/>
           <a:p>
-            <a:pPr indent="0" marL="0">
-              <a:buNone/>
-            </a:pPr>
-            <a:r>
-              <a:rPr lang="en-US" sz="1420" dirty="0">
+            <a:r>
+              <a:rPr lang="en-US" sz="1700" dirty="0">
                 <a:solidFill>
                   <a:srgbClr val="17364A"/>
                 </a:solidFill>
@@ -7947,9 +14496,251 @@
                 <a:ea typeface="Aptos" pitchFamily="34" charset="-122"/>
                 <a:cs typeface="Aptos" pitchFamily="34" charset="-120"/>
               </a:rPr>
-              <a:t>Vendors controlling implementation timelines without agency readiness gates. No transition plan from pilot to routine operations. Success measured only by deployment rather than public health value and safe use.</a:t>
-            </a:r>
-            <a:endParaRPr lang="en-US" sz="1420" dirty="0"/>
+              <a:t>Transition to operations is often neglected.</a:t>
+            </a:r>
+            <a:endParaRPr lang="en-US" sz="1700" dirty="0"/>
+          </a:p>
+          <a:p>
+            <a:r>
+              <a:rPr lang="en-US" sz="1700" dirty="0">
+                <a:solidFill>
+                  <a:srgbClr val="17364A"/>
+                </a:solidFill>
+                <a:latin typeface="Aptos" pitchFamily="34" charset="0"/>
+                <a:ea typeface="Aptos" pitchFamily="34" charset="-122"/>
+                <a:cs typeface="Aptos" pitchFamily="34" charset="-120"/>
+              </a:rPr>
+              <a:t>A pilot may show promise, but routine use requires support, monitoring, maintenance, budget, staff training, user feedback,.</a:t>
+            </a:r>
+            <a:endParaRPr lang="en-US" sz="1700" dirty="0"/>
+          </a:p>
+          <a:p>
+            <a:r>
+              <a:rPr lang="en-US" sz="1700" dirty="0">
+                <a:solidFill>
+                  <a:srgbClr val="17364A"/>
+                </a:solidFill>
+                <a:latin typeface="Aptos" pitchFamily="34" charset="0"/>
+                <a:ea typeface="Aptos" pitchFamily="34" charset="-122"/>
+                <a:cs typeface="Aptos" pitchFamily="34" charset="-120"/>
+              </a:rPr>
+              <a:t>The project plan should define when the implementation team ends and who becomes responsible for ongoing operations.</a:t>
+            </a:r>
+            <a:endParaRPr lang="en-US" sz="1700" dirty="0"/>
+          </a:p>
+        </p:txBody>
+      </p:sp>
+      <p:sp>
+        <p:nvSpPr>
+          <p:cNvPr id="9" name="Shape 7"/>
+          <p:cNvSpPr/>
+          <p:nvPr/>
+        </p:nvSpPr>
+        <p:spPr>
+          <a:xfrm>
+            <a:off x="7909560" y="1417320"/>
+            <a:ext cx="3154680" cy="1828800"/>
+          </a:xfrm>
+          <a:prstGeom prst="roundRect">
+            <a:avLst>
+              <a:gd name="adj" fmla="val 6000"/>
+            </a:avLst>
+          </a:prstGeom>
+          <a:solidFill>
+            <a:srgbClr val="EEF8ED"/>
+          </a:solidFill>
+          <a:ln w="12700">
+            <a:solidFill>
+              <a:srgbClr val="B9D7E6"/>
+            </a:solidFill>
+            <a:prstDash val="solid"/>
+          </a:ln>
+        </p:spPr>
+      </p:sp>
+      <p:sp>
+        <p:nvSpPr>
+          <p:cNvPr id="10" name="Text 8"/>
+          <p:cNvSpPr/>
+          <p:nvPr/>
+        </p:nvSpPr>
+        <p:spPr>
+          <a:xfrm>
+            <a:off x="8074152" y="1563624"/>
+            <a:ext cx="2825496" cy="201168"/>
+          </a:xfrm>
+          <a:prstGeom prst="rect">
+            <a:avLst/>
+          </a:prstGeom>
+          <a:noFill/>
+          <a:ln/>
+        </p:spPr>
+        <p:txBody>
+          <a:bodyPr wrap="square" lIns="0" tIns="0" rIns="0" bIns="0" rtlCol="0" anchor="ctr"/>
+          <a:lstStyle/>
+          <a:p>
+            <a:pPr indent="0" marL="0">
+              <a:buNone/>
+            </a:pPr>
+            <a:r>
+              <a:rPr lang="en-US" sz="950" b="1" dirty="0">
+                <a:solidFill>
+                  <a:srgbClr val="0068B7"/>
+                </a:solidFill>
+                <a:latin typeface="Aptos" pitchFamily="34" charset="0"/>
+                <a:ea typeface="Aptos" pitchFamily="34" charset="-122"/>
+                <a:cs typeface="Aptos" pitchFamily="34" charset="-120"/>
+              </a:rPr>
+              <a:t>Key idea</a:t>
+            </a:r>
+            <a:endParaRPr lang="en-US" sz="950" dirty="0"/>
+          </a:p>
+        </p:txBody>
+      </p:sp>
+      <p:sp>
+        <p:nvSpPr>
+          <p:cNvPr id="11" name="Text 9"/>
+          <p:cNvSpPr/>
+          <p:nvPr/>
+        </p:nvSpPr>
+        <p:spPr>
+          <a:xfrm>
+            <a:off x="8074152" y="1856232"/>
+            <a:ext cx="2825496" cy="1261872"/>
+          </a:xfrm>
+          <a:prstGeom prst="rect">
+            <a:avLst/>
+          </a:prstGeom>
+          <a:noFill/>
+          <a:ln/>
+        </p:spPr>
+        <p:txBody>
+          <a:bodyPr wrap="square" lIns="0" tIns="0" rIns="0" bIns="0" rtlCol="0" anchor="t">
+            <a:normAutofit/>
+          </a:bodyPr>
+          <a:lstStyle/>
+          <a:p>
+            <a:pPr indent="0" marL="0">
+              <a:buNone/>
+            </a:pPr>
+            <a:r>
+              <a:rPr lang="en-US" sz="1250" dirty="0">
+                <a:solidFill>
+                  <a:srgbClr val="17364A"/>
+                </a:solidFill>
+                <a:latin typeface="Aptos" pitchFamily="34" charset="0"/>
+                <a:ea typeface="Aptos" pitchFamily="34" charset="-122"/>
+                <a:cs typeface="Aptos" pitchFamily="34" charset="-120"/>
+              </a:rPr>
+              <a:t>Transition to operations is often neglected.</a:t>
+            </a:r>
+            <a:endParaRPr lang="en-US" sz="1250" dirty="0"/>
+          </a:p>
+        </p:txBody>
+      </p:sp>
+      <p:sp>
+        <p:nvSpPr>
+          <p:cNvPr id="12" name="Shape 10"/>
+          <p:cNvSpPr/>
+          <p:nvPr/>
+        </p:nvSpPr>
+        <p:spPr>
+          <a:xfrm>
+            <a:off x="7909560" y="3520440"/>
+            <a:ext cx="3154680" cy="1737360"/>
+          </a:xfrm>
+          <a:prstGeom prst="roundRect">
+            <a:avLst>
+              <a:gd name="adj" fmla="val 6316"/>
+            </a:avLst>
+          </a:prstGeom>
+          <a:solidFill>
+            <a:srgbClr val="EAF6F8"/>
+          </a:solidFill>
+          <a:ln w="12700">
+            <a:solidFill>
+              <a:srgbClr val="B9D7E6"/>
+            </a:solidFill>
+            <a:prstDash val="solid"/>
+          </a:ln>
+        </p:spPr>
+      </p:sp>
+      <p:sp>
+        <p:nvSpPr>
+          <p:cNvPr id="13" name="Text 11"/>
+          <p:cNvSpPr/>
+          <p:nvPr/>
+        </p:nvSpPr>
+        <p:spPr>
+          <a:xfrm>
+            <a:off x="8074152" y="3666744"/>
+            <a:ext cx="2825496" cy="201168"/>
+          </a:xfrm>
+          <a:prstGeom prst="rect">
+            <a:avLst/>
+          </a:prstGeom>
+          <a:noFill/>
+          <a:ln/>
+        </p:spPr>
+        <p:txBody>
+          <a:bodyPr wrap="square" lIns="0" tIns="0" rIns="0" bIns="0" rtlCol="0" anchor="ctr"/>
+          <a:lstStyle/>
+          <a:p>
+            <a:pPr indent="0" marL="0">
+              <a:buNone/>
+            </a:pPr>
+            <a:r>
+              <a:rPr lang="en-US" sz="950" b="1" dirty="0">
+                <a:solidFill>
+                  <a:srgbClr val="0068B7"/>
+                </a:solidFill>
+                <a:latin typeface="Aptos" pitchFamily="34" charset="0"/>
+                <a:ea typeface="Aptos" pitchFamily="34" charset="-122"/>
+                <a:cs typeface="Aptos" pitchFamily="34" charset="-120"/>
+              </a:rPr>
+              <a:t>Use this for</a:t>
+            </a:r>
+            <a:endParaRPr lang="en-US" sz="950" dirty="0"/>
+          </a:p>
+        </p:txBody>
+      </p:sp>
+      <p:sp>
+        <p:nvSpPr>
+          <p:cNvPr id="14" name="Text 12"/>
+          <p:cNvSpPr/>
+          <p:nvPr/>
+        </p:nvSpPr>
+        <p:spPr>
+          <a:xfrm>
+            <a:off x="8074152" y="3959352"/>
+            <a:ext cx="2825496" cy="1170432"/>
+          </a:xfrm>
+          <a:prstGeom prst="rect">
+            <a:avLst/>
+          </a:prstGeom>
+          <a:noFill/>
+          <a:ln/>
+        </p:spPr>
+        <p:txBody>
+          <a:bodyPr wrap="square" lIns="0" tIns="0" rIns="0" bIns="0" rtlCol="0" anchor="t">
+            <a:normAutofit/>
+          </a:bodyPr>
+          <a:lstStyle/>
+          <a:p>
+            <a:pPr indent="0" marL="0">
+              <a:buNone/>
+            </a:pPr>
+            <a:r>
+              <a:rPr lang="en-US" sz="1250" dirty="0">
+                <a:solidFill>
+                  <a:srgbClr val="17364A"/>
+                </a:solidFill>
+                <a:latin typeface="Aptos" pitchFamily="34" charset="0"/>
+                <a:ea typeface="Aptos" pitchFamily="34" charset="-122"/>
+                <a:cs typeface="Aptos" pitchFamily="34" charset="-120"/>
+              </a:rPr>
+              <a:t>Connect the concept to public health decisions, safeguards, documentation, or implementation work.</a:t>
+            </a:r>
+            <a:endParaRPr lang="en-US" sz="1250" dirty="0"/>
           </a:p>
         </p:txBody>
       </p:sp>

--- a/downloads/presentations/modules/lesson-63-ai-project-management-and-implementation-planning.pptx
+++ b/downloads/presentations/modules/lesson-63-ai-project-management-and-implementation-planning.pptx
@@ -3002,6 +3002,45 @@
           </a:p>
         </p:txBody>
       </p:sp>
+      <p:sp>
+        <p:nvSpPr>
+          <p:cNvPr id="8" name="Text 5"/>
+          <p:cNvSpPr/>
+          <p:nvPr/>
+        </p:nvSpPr>
+        <p:spPr>
+          <a:xfrm>
+            <a:off x="11137392" y="6510528"/>
+            <a:ext cx="411480" cy="201168"/>
+          </a:xfrm>
+          <a:prstGeom prst="rect">
+            <a:avLst/>
+          </a:prstGeom>
+          <a:noFill/>
+          <a:ln/>
+        </p:spPr>
+        <p:txBody>
+          <a:bodyPr wrap="square" lIns="0" tIns="0" rIns="0" bIns="0" rtlCol="0" anchor="ctr"/>
+          <a:lstStyle/>
+          <a:p>
+            <a:pPr algn="r" indent="0" marL="0">
+              <a:buNone/>
+            </a:pPr>
+            <a:r>
+              <a:rPr lang="en-US" sz="900" dirty="0">
+                <a:solidFill>
+                  <a:srgbClr val="5F7181"/>
+                </a:solidFill>
+                <a:latin typeface="Aptos" pitchFamily="34" charset="0"/>
+                <a:ea typeface="Aptos" pitchFamily="34" charset="-122"/>
+                <a:cs typeface="Aptos" pitchFamily="34" charset="-120"/>
+              </a:rPr>
+              <a:t>1</a:t>
+            </a:r>
+            <a:endParaRPr lang="en-US" sz="900" dirty="0"/>
+          </a:p>
+        </p:txBody>
+      </p:sp>
     </p:spTree>
   </p:cSld>
   <p:clrMapOvr>
@@ -3195,7 +3234,7 @@
                 <a:ea typeface="Aptos" pitchFamily="34" charset="-122"/>
                 <a:cs typeface="Aptos" pitchFamily="34" charset="-120"/>
               </a:rPr>
-              <a:t>© Paula Soper</a:t>
+              <a:t>Â© Paula Soper</a:t>
             </a:r>
             <a:endParaRPr lang="en-US" sz="800" dirty="0"/>
           </a:p>
@@ -3203,7 +3242,46 @@
       </p:sp>
       <p:sp>
         <p:nvSpPr>
-          <p:cNvPr id="7" name="Shape 5"/>
+          <p:cNvPr id="7" name="Text 5"/>
+          <p:cNvSpPr/>
+          <p:nvPr/>
+        </p:nvSpPr>
+        <p:spPr>
+          <a:xfrm>
+            <a:off x="11137392" y="6510528"/>
+            <a:ext cx="411480" cy="201168"/>
+          </a:xfrm>
+          <a:prstGeom prst="rect">
+            <a:avLst/>
+          </a:prstGeom>
+          <a:noFill/>
+          <a:ln/>
+        </p:spPr>
+        <p:txBody>
+          <a:bodyPr wrap="square" lIns="0" tIns="0" rIns="0" bIns="0" rtlCol="0" anchor="ctr"/>
+          <a:lstStyle/>
+          <a:p>
+            <a:pPr algn="r" indent="0" marL="0">
+              <a:buNone/>
+            </a:pPr>
+            <a:r>
+              <a:rPr lang="en-US" sz="900" dirty="0">
+                <a:solidFill>
+                  <a:srgbClr val="5F7181"/>
+                </a:solidFill>
+                <a:latin typeface="Aptos" pitchFamily="34" charset="0"/>
+                <a:ea typeface="Aptos" pitchFamily="34" charset="-122"/>
+                <a:cs typeface="Aptos" pitchFamily="34" charset="-120"/>
+              </a:rPr>
+              <a:t>10</a:t>
+            </a:r>
+            <a:endParaRPr lang="en-US" sz="900" dirty="0"/>
+          </a:p>
+        </p:txBody>
+      </p:sp>
+      <p:sp>
+        <p:nvSpPr>
+          <p:cNvPr id="8" name="Shape 6"/>
           <p:cNvSpPr/>
           <p:nvPr/>
         </p:nvSpPr>
@@ -3228,7 +3306,7 @@
       </p:sp>
       <p:sp>
         <p:nvSpPr>
-          <p:cNvPr id="8" name="Text 6"/>
+          <p:cNvPr id="9" name="Text 7"/>
           <p:cNvSpPr/>
           <p:nvPr/>
         </p:nvSpPr>
@@ -3267,14 +3345,14 @@
       </p:sp>
       <p:sp>
         <p:nvSpPr>
-          <p:cNvPr id="9" name="Text 7"/>
+          <p:cNvPr id="10" name="Text 8"/>
           <p:cNvSpPr/>
           <p:nvPr/>
         </p:nvSpPr>
         <p:spPr>
           <a:xfrm>
             <a:off x="640080" y="621792"/>
-            <a:ext cx="10881360" cy="566928"/>
+            <a:ext cx="10881360" cy="713232"/>
           </a:xfrm>
           <a:prstGeom prst="rect">
             <a:avLst/>
@@ -3292,7 +3370,7 @@
               <a:buNone/>
             </a:pPr>
             <a:r>
-              <a:rPr lang="en-US" sz="2700" b="1" dirty="0">
+              <a:rPr lang="en-US" sz="3400" b="1" dirty="0">
                 <a:solidFill>
                   <a:srgbClr val="003A63"/>
                 </a:solidFill>
@@ -3302,20 +3380,20 @@
               </a:rPr>
               <a:t>Risks, Failure Modes, and Guardrails</a:t>
             </a:r>
-            <a:endParaRPr lang="en-US" sz="2700" dirty="0"/>
-          </a:p>
-        </p:txBody>
-      </p:sp>
-      <p:sp>
-        <p:nvSpPr>
-          <p:cNvPr id="10" name="Text 8"/>
-          <p:cNvSpPr/>
-          <p:nvPr/>
-        </p:nvSpPr>
-        <p:spPr>
-          <a:xfrm>
-            <a:off x="868680" y="1417320"/>
-            <a:ext cx="6675120" cy="4434840"/>
+            <a:endParaRPr lang="en-US" sz="3400" dirty="0"/>
+          </a:p>
+        </p:txBody>
+      </p:sp>
+      <p:sp>
+        <p:nvSpPr>
+          <p:cNvPr id="11" name="Text 9"/>
+          <p:cNvSpPr/>
+          <p:nvPr/>
+        </p:nvSpPr>
+        <p:spPr>
+          <a:xfrm>
+            <a:off x="868680" y="1508760"/>
+            <a:ext cx="6537960" cy="4160520"/>
           </a:xfrm>
           <a:prstGeom prst="rect">
             <a:avLst/>
@@ -3330,7 +3408,7 @@
           <a:lstStyle/>
           <a:p>
             <a:r>
-              <a:rPr lang="en-US" sz="1700" dirty="0">
+              <a:rPr lang="en-US" sz="2100" dirty="0">
                 <a:solidFill>
                   <a:srgbClr val="17364A"/>
                 </a:solidFill>
@@ -3340,11 +3418,11 @@
               </a:rPr>
               <a:t>Risks and failure modes include the following:</a:t>
             </a:r>
-            <a:endParaRPr lang="en-US" sz="1700" dirty="0"/>
-          </a:p>
-          <a:p>
-            <a:r>
-              <a:rPr lang="en-US" sz="1700" dirty="0">
+            <a:endParaRPr lang="en-US" sz="2100" dirty="0"/>
+          </a:p>
+          <a:p>
+            <a:r>
+              <a:rPr lang="en-US" sz="2100" dirty="0">
                 <a:solidFill>
                   <a:srgbClr val="17364A"/>
                 </a:solidFill>
@@ -3354,11 +3432,11 @@
               </a:rPr>
               <a:t>Pilots launching without governance approval or operational ownership.</a:t>
             </a:r>
-            <a:endParaRPr lang="en-US" sz="1700" dirty="0"/>
-          </a:p>
-          <a:p>
-            <a:r>
-              <a:rPr lang="en-US" sz="1700" dirty="0">
+            <a:endParaRPr lang="en-US" sz="2100" dirty="0"/>
+          </a:p>
+          <a:p>
+            <a:r>
+              <a:rPr lang="en-US" sz="2100" dirty="0">
                 <a:solidFill>
                   <a:srgbClr val="17364A"/>
                 </a:solidFill>
@@ -3368,13 +3446,13 @@
               </a:rPr>
               <a:t>Project plans overlooking data, privacy, security, workflow, or training dependencies.</a:t>
             </a:r>
-            <a:endParaRPr lang="en-US" sz="1700" dirty="0"/>
-          </a:p>
-        </p:txBody>
-      </p:sp>
-      <p:sp>
-        <p:nvSpPr>
-          <p:cNvPr id="11" name="Shape 9"/>
+            <a:endParaRPr lang="en-US" sz="2100" dirty="0"/>
+          </a:p>
+        </p:txBody>
+      </p:sp>
+      <p:sp>
+        <p:nvSpPr>
+          <p:cNvPr id="12" name="Shape 10"/>
           <p:cNvSpPr/>
           <p:nvPr/>
         </p:nvSpPr>
@@ -3401,14 +3479,14 @@
       </p:sp>
       <p:sp>
         <p:nvSpPr>
-          <p:cNvPr id="12" name="Text 10"/>
+          <p:cNvPr id="13" name="Text 11"/>
           <p:cNvSpPr/>
           <p:nvPr/>
         </p:nvSpPr>
         <p:spPr>
           <a:xfrm>
             <a:off x="8074152" y="1563624"/>
-            <a:ext cx="2825496" cy="201168"/>
+            <a:ext cx="2825496" cy="256032"/>
           </a:xfrm>
           <a:prstGeom prst="rect">
             <a:avLst/>
@@ -3424,7 +3502,7 @@
               <a:buNone/>
             </a:pPr>
             <a:r>
-              <a:rPr lang="en-US" sz="950" b="1" dirty="0">
+              <a:rPr lang="en-US" sz="1300" b="1" dirty="0">
                 <a:solidFill>
                   <a:srgbClr val="0068B7"/>
                 </a:solidFill>
@@ -3434,20 +3512,20 @@
               </a:rPr>
               <a:t>Key idea</a:t>
             </a:r>
-            <a:endParaRPr lang="en-US" sz="950" dirty="0"/>
-          </a:p>
-        </p:txBody>
-      </p:sp>
-      <p:sp>
-        <p:nvSpPr>
-          <p:cNvPr id="13" name="Text 11"/>
-          <p:cNvSpPr/>
-          <p:nvPr/>
-        </p:nvSpPr>
-        <p:spPr>
-          <a:xfrm>
-            <a:off x="8074152" y="1856232"/>
-            <a:ext cx="2825496" cy="1261872"/>
+            <a:endParaRPr lang="en-US" sz="1300" dirty="0"/>
+          </a:p>
+        </p:txBody>
+      </p:sp>
+      <p:sp>
+        <p:nvSpPr>
+          <p:cNvPr id="14" name="Text 12"/>
+          <p:cNvSpPr/>
+          <p:nvPr/>
+        </p:nvSpPr>
+        <p:spPr>
+          <a:xfrm>
+            <a:off x="8074152" y="1920240"/>
+            <a:ext cx="2825496" cy="1188720"/>
           </a:xfrm>
           <a:prstGeom prst="rect">
             <a:avLst/>
@@ -3465,7 +3543,7 @@
               <a:buNone/>
             </a:pPr>
             <a:r>
-              <a:rPr lang="en-US" sz="1250" dirty="0">
+              <a:rPr lang="en-US" sz="1550" dirty="0">
                 <a:solidFill>
                   <a:srgbClr val="17364A"/>
                 </a:solidFill>
@@ -3475,13 +3553,13 @@
               </a:rPr>
               <a:t>Risks and failure modes include the following:</a:t>
             </a:r>
-            <a:endParaRPr lang="en-US" sz="1250" dirty="0"/>
-          </a:p>
-        </p:txBody>
-      </p:sp>
-      <p:sp>
-        <p:nvSpPr>
-          <p:cNvPr id="14" name="Shape 12"/>
+            <a:endParaRPr lang="en-US" sz="1550" dirty="0"/>
+          </a:p>
+        </p:txBody>
+      </p:sp>
+      <p:sp>
+        <p:nvSpPr>
+          <p:cNvPr id="15" name="Shape 13"/>
           <p:cNvSpPr/>
           <p:nvPr/>
         </p:nvSpPr>
@@ -3508,14 +3586,14 @@
       </p:sp>
       <p:sp>
         <p:nvSpPr>
-          <p:cNvPr id="15" name="Text 13"/>
+          <p:cNvPr id="16" name="Text 14"/>
           <p:cNvSpPr/>
           <p:nvPr/>
         </p:nvSpPr>
         <p:spPr>
           <a:xfrm>
             <a:off x="8074152" y="3666744"/>
-            <a:ext cx="2825496" cy="201168"/>
+            <a:ext cx="2825496" cy="256032"/>
           </a:xfrm>
           <a:prstGeom prst="rect">
             <a:avLst/>
@@ -3531,7 +3609,7 @@
               <a:buNone/>
             </a:pPr>
             <a:r>
-              <a:rPr lang="en-US" sz="950" b="1" dirty="0">
+              <a:rPr lang="en-US" sz="1300" b="1" dirty="0">
                 <a:solidFill>
                   <a:srgbClr val="0068B7"/>
                 </a:solidFill>
@@ -3541,20 +3619,20 @@
               </a:rPr>
               <a:t>Use this for</a:t>
             </a:r>
-            <a:endParaRPr lang="en-US" sz="950" dirty="0"/>
-          </a:p>
-        </p:txBody>
-      </p:sp>
-      <p:sp>
-        <p:nvSpPr>
-          <p:cNvPr id="16" name="Text 14"/>
-          <p:cNvSpPr/>
-          <p:nvPr/>
-        </p:nvSpPr>
-        <p:spPr>
-          <a:xfrm>
-            <a:off x="8074152" y="3959352"/>
-            <a:ext cx="2825496" cy="1170432"/>
+            <a:endParaRPr lang="en-US" sz="1300" dirty="0"/>
+          </a:p>
+        </p:txBody>
+      </p:sp>
+      <p:sp>
+        <p:nvSpPr>
+          <p:cNvPr id="17" name="Text 15"/>
+          <p:cNvSpPr/>
+          <p:nvPr/>
+        </p:nvSpPr>
+        <p:spPr>
+          <a:xfrm>
+            <a:off x="8074152" y="4023360"/>
+            <a:ext cx="2825496" cy="1097280"/>
           </a:xfrm>
           <a:prstGeom prst="rect">
             <a:avLst/>
@@ -3572,7 +3650,7 @@
               <a:buNone/>
             </a:pPr>
             <a:r>
-              <a:rPr lang="en-US" sz="1250" dirty="0">
+              <a:rPr lang="en-US" sz="1550" dirty="0">
                 <a:solidFill>
                   <a:srgbClr val="17364A"/>
                 </a:solidFill>
@@ -3582,7 +3660,7 @@
               </a:rPr>
               <a:t>Connect the concept to public health decisions, safeguards, documentation, or implementation work.</a:t>
             </a:r>
-            <a:endParaRPr lang="en-US" sz="1250" dirty="0"/>
+            <a:endParaRPr lang="en-US" sz="1550" dirty="0"/>
           </a:p>
         </p:txBody>
       </p:sp>
@@ -3779,7 +3857,7 @@
                 <a:ea typeface="Aptos" pitchFamily="34" charset="-122"/>
                 <a:cs typeface="Aptos" pitchFamily="34" charset="-120"/>
               </a:rPr>
-              <a:t>© Paula Soper</a:t>
+              <a:t>Â© Paula Soper</a:t>
             </a:r>
             <a:endParaRPr lang="en-US" sz="800" dirty="0"/>
           </a:p>
@@ -3793,8 +3871,47 @@
         </p:nvSpPr>
         <p:spPr>
           <a:xfrm>
+            <a:off x="11137392" y="6510528"/>
+            <a:ext cx="411480" cy="201168"/>
+          </a:xfrm>
+          <a:prstGeom prst="rect">
+            <a:avLst/>
+          </a:prstGeom>
+          <a:noFill/>
+          <a:ln/>
+        </p:spPr>
+        <p:txBody>
+          <a:bodyPr wrap="square" lIns="0" tIns="0" rIns="0" bIns="0" rtlCol="0" anchor="ctr"/>
+          <a:lstStyle/>
+          <a:p>
+            <a:pPr algn="r" indent="0" marL="0">
+              <a:buNone/>
+            </a:pPr>
+            <a:r>
+              <a:rPr lang="en-US" sz="900" dirty="0">
+                <a:solidFill>
+                  <a:srgbClr val="5F7181"/>
+                </a:solidFill>
+                <a:latin typeface="Aptos" pitchFamily="34" charset="0"/>
+                <a:ea typeface="Aptos" pitchFamily="34" charset="-122"/>
+                <a:cs typeface="Aptos" pitchFamily="34" charset="-120"/>
+              </a:rPr>
+              <a:t>11</a:t>
+            </a:r>
+            <a:endParaRPr lang="en-US" sz="900" dirty="0"/>
+          </a:p>
+        </p:txBody>
+      </p:sp>
+      <p:sp>
+        <p:nvSpPr>
+          <p:cNvPr id="8" name="Text 6"/>
+          <p:cNvSpPr/>
+          <p:nvPr/>
+        </p:nvSpPr>
+        <p:spPr>
+          <a:xfrm>
             <a:off x="640080" y="658368"/>
-            <a:ext cx="10881360" cy="566928"/>
+            <a:ext cx="10881360" cy="713232"/>
           </a:xfrm>
           <a:prstGeom prst="rect">
             <a:avLst/>
@@ -3812,7 +3929,7 @@
               <a:buNone/>
             </a:pPr>
             <a:r>
-              <a:rPr lang="en-US" sz="2700" b="1" dirty="0">
+              <a:rPr lang="en-US" sz="3400" b="1" dirty="0">
                 <a:solidFill>
                   <a:srgbClr val="003A63"/>
                 </a:solidFill>
@@ -3822,20 +3939,20 @@
               </a:rPr>
               <a:t>Risks, Failure Modes, and Guardrails Continued</a:t>
             </a:r>
-            <a:endParaRPr lang="en-US" sz="2700" dirty="0"/>
-          </a:p>
-        </p:txBody>
-      </p:sp>
-      <p:sp>
-        <p:nvSpPr>
-          <p:cNvPr id="8" name="Text 6"/>
-          <p:cNvSpPr/>
-          <p:nvPr/>
-        </p:nvSpPr>
-        <p:spPr>
-          <a:xfrm>
-            <a:off x="868680" y="1417320"/>
-            <a:ext cx="6675120" cy="4434840"/>
+            <a:endParaRPr lang="en-US" sz="3400" dirty="0"/>
+          </a:p>
+        </p:txBody>
+      </p:sp>
+      <p:sp>
+        <p:nvSpPr>
+          <p:cNvPr id="9" name="Text 7"/>
+          <p:cNvSpPr/>
+          <p:nvPr/>
+        </p:nvSpPr>
+        <p:spPr>
+          <a:xfrm>
+            <a:off x="868680" y="1508760"/>
+            <a:ext cx="6537960" cy="4160520"/>
           </a:xfrm>
           <a:prstGeom prst="rect">
             <a:avLst/>
@@ -3850,7 +3967,7 @@
           <a:lstStyle/>
           <a:p>
             <a:r>
-              <a:rPr lang="en-US" sz="1700" dirty="0">
+              <a:rPr lang="en-US" sz="2100" dirty="0">
                 <a:solidFill>
                   <a:srgbClr val="17364A"/>
                 </a:solidFill>
@@ -3860,11 +3977,11 @@
               </a:rPr>
               <a:t>Vendors controlling implementation timelines without agency readiness gates.</a:t>
             </a:r>
-            <a:endParaRPr lang="en-US" sz="1700" dirty="0"/>
-          </a:p>
-          <a:p>
-            <a:r>
-              <a:rPr lang="en-US" sz="1700" dirty="0">
+            <a:endParaRPr lang="en-US" sz="2100" dirty="0"/>
+          </a:p>
+          <a:p>
+            <a:r>
+              <a:rPr lang="en-US" sz="2100" dirty="0">
                 <a:solidFill>
                   <a:srgbClr val="17364A"/>
                 </a:solidFill>
@@ -3874,11 +3991,11 @@
               </a:rPr>
               <a:t>No transition plan from pilot to routine operations.</a:t>
             </a:r>
-            <a:endParaRPr lang="en-US" sz="1700" dirty="0"/>
-          </a:p>
-          <a:p>
-            <a:r>
-              <a:rPr lang="en-US" sz="1700" dirty="0">
+            <a:endParaRPr lang="en-US" sz="2100" dirty="0"/>
+          </a:p>
+          <a:p>
+            <a:r>
+              <a:rPr lang="en-US" sz="2100" dirty="0">
                 <a:solidFill>
                   <a:srgbClr val="17364A"/>
                 </a:solidFill>
@@ -3888,13 +4005,13 @@
               </a:rPr>
               <a:t>Success measured only by deployment rather than public health value and safe use.</a:t>
             </a:r>
-            <a:endParaRPr lang="en-US" sz="1700" dirty="0"/>
-          </a:p>
-        </p:txBody>
-      </p:sp>
-      <p:sp>
-        <p:nvSpPr>
-          <p:cNvPr id="9" name="Shape 7"/>
+            <a:endParaRPr lang="en-US" sz="2100" dirty="0"/>
+          </a:p>
+        </p:txBody>
+      </p:sp>
+      <p:sp>
+        <p:nvSpPr>
+          <p:cNvPr id="10" name="Shape 8"/>
           <p:cNvSpPr/>
           <p:nvPr/>
         </p:nvSpPr>
@@ -3921,14 +4038,14 @@
       </p:sp>
       <p:sp>
         <p:nvSpPr>
-          <p:cNvPr id="10" name="Text 8"/>
+          <p:cNvPr id="11" name="Text 9"/>
           <p:cNvSpPr/>
           <p:nvPr/>
         </p:nvSpPr>
         <p:spPr>
           <a:xfrm>
             <a:off x="8074152" y="1563624"/>
-            <a:ext cx="2825496" cy="201168"/>
+            <a:ext cx="2825496" cy="256032"/>
           </a:xfrm>
           <a:prstGeom prst="rect">
             <a:avLst/>
@@ -3944,7 +4061,7 @@
               <a:buNone/>
             </a:pPr>
             <a:r>
-              <a:rPr lang="en-US" sz="950" b="1" dirty="0">
+              <a:rPr lang="en-US" sz="1300" b="1" dirty="0">
                 <a:solidFill>
                   <a:srgbClr val="0068B7"/>
                 </a:solidFill>
@@ -3954,20 +4071,20 @@
               </a:rPr>
               <a:t>Key idea</a:t>
             </a:r>
-            <a:endParaRPr lang="en-US" sz="950" dirty="0"/>
-          </a:p>
-        </p:txBody>
-      </p:sp>
-      <p:sp>
-        <p:nvSpPr>
-          <p:cNvPr id="11" name="Text 9"/>
-          <p:cNvSpPr/>
-          <p:nvPr/>
-        </p:nvSpPr>
-        <p:spPr>
-          <a:xfrm>
-            <a:off x="8074152" y="1856232"/>
-            <a:ext cx="2825496" cy="1261872"/>
+            <a:endParaRPr lang="en-US" sz="1300" dirty="0"/>
+          </a:p>
+        </p:txBody>
+      </p:sp>
+      <p:sp>
+        <p:nvSpPr>
+          <p:cNvPr id="12" name="Text 10"/>
+          <p:cNvSpPr/>
+          <p:nvPr/>
+        </p:nvSpPr>
+        <p:spPr>
+          <a:xfrm>
+            <a:off x="8074152" y="1920240"/>
+            <a:ext cx="2825496" cy="1188720"/>
           </a:xfrm>
           <a:prstGeom prst="rect">
             <a:avLst/>
@@ -3985,7 +4102,7 @@
               <a:buNone/>
             </a:pPr>
             <a:r>
-              <a:rPr lang="en-US" sz="1250" dirty="0">
+              <a:rPr lang="en-US" sz="1550" dirty="0">
                 <a:solidFill>
                   <a:srgbClr val="17364A"/>
                 </a:solidFill>
@@ -3995,13 +4112,13 @@
               </a:rPr>
               <a:t>Vendors controlling implementation timelines without agency readiness gates.</a:t>
             </a:r>
-            <a:endParaRPr lang="en-US" sz="1250" dirty="0"/>
-          </a:p>
-        </p:txBody>
-      </p:sp>
-      <p:sp>
-        <p:nvSpPr>
-          <p:cNvPr id="12" name="Shape 10"/>
+            <a:endParaRPr lang="en-US" sz="1550" dirty="0"/>
+          </a:p>
+        </p:txBody>
+      </p:sp>
+      <p:sp>
+        <p:nvSpPr>
+          <p:cNvPr id="13" name="Shape 11"/>
           <p:cNvSpPr/>
           <p:nvPr/>
         </p:nvSpPr>
@@ -4028,14 +4145,14 @@
       </p:sp>
       <p:sp>
         <p:nvSpPr>
-          <p:cNvPr id="13" name="Text 11"/>
+          <p:cNvPr id="14" name="Text 12"/>
           <p:cNvSpPr/>
           <p:nvPr/>
         </p:nvSpPr>
         <p:spPr>
           <a:xfrm>
             <a:off x="8074152" y="3666744"/>
-            <a:ext cx="2825496" cy="201168"/>
+            <a:ext cx="2825496" cy="256032"/>
           </a:xfrm>
           <a:prstGeom prst="rect">
             <a:avLst/>
@@ -4051,7 +4168,7 @@
               <a:buNone/>
             </a:pPr>
             <a:r>
-              <a:rPr lang="en-US" sz="950" b="1" dirty="0">
+              <a:rPr lang="en-US" sz="1300" b="1" dirty="0">
                 <a:solidFill>
                   <a:srgbClr val="0068B7"/>
                 </a:solidFill>
@@ -4061,20 +4178,20 @@
               </a:rPr>
               <a:t>Use this for</a:t>
             </a:r>
-            <a:endParaRPr lang="en-US" sz="950" dirty="0"/>
-          </a:p>
-        </p:txBody>
-      </p:sp>
-      <p:sp>
-        <p:nvSpPr>
-          <p:cNvPr id="14" name="Text 12"/>
-          <p:cNvSpPr/>
-          <p:nvPr/>
-        </p:nvSpPr>
-        <p:spPr>
-          <a:xfrm>
-            <a:off x="8074152" y="3959352"/>
-            <a:ext cx="2825496" cy="1170432"/>
+            <a:endParaRPr lang="en-US" sz="1300" dirty="0"/>
+          </a:p>
+        </p:txBody>
+      </p:sp>
+      <p:sp>
+        <p:nvSpPr>
+          <p:cNvPr id="15" name="Text 13"/>
+          <p:cNvSpPr/>
+          <p:nvPr/>
+        </p:nvSpPr>
+        <p:spPr>
+          <a:xfrm>
+            <a:off x="8074152" y="4023360"/>
+            <a:ext cx="2825496" cy="1097280"/>
           </a:xfrm>
           <a:prstGeom prst="rect">
             <a:avLst/>
@@ -4092,7 +4209,7 @@
               <a:buNone/>
             </a:pPr>
             <a:r>
-              <a:rPr lang="en-US" sz="1250" dirty="0">
+              <a:rPr lang="en-US" sz="1550" dirty="0">
                 <a:solidFill>
                   <a:srgbClr val="17364A"/>
                 </a:solidFill>
@@ -4102,7 +4219,7 @@
               </a:rPr>
               <a:t>Connect the concept to public health decisions, safeguards, documentation, or implementation work.</a:t>
             </a:r>
-            <a:endParaRPr lang="en-US" sz="1250" dirty="0"/>
+            <a:endParaRPr lang="en-US" sz="1550" dirty="0"/>
           </a:p>
         </p:txBody>
       </p:sp>
@@ -4299,7 +4416,7 @@
                 <a:ea typeface="Aptos" pitchFamily="34" charset="-122"/>
                 <a:cs typeface="Aptos" pitchFamily="34" charset="-120"/>
               </a:rPr>
-              <a:t>© Paula Soper</a:t>
+              <a:t>Â© Paula Soper</a:t>
             </a:r>
             <a:endParaRPr lang="en-US" sz="800" dirty="0"/>
           </a:p>
@@ -4313,8 +4430,47 @@
         </p:nvSpPr>
         <p:spPr>
           <a:xfrm>
+            <a:off x="11137392" y="6510528"/>
+            <a:ext cx="411480" cy="201168"/>
+          </a:xfrm>
+          <a:prstGeom prst="rect">
+            <a:avLst/>
+          </a:prstGeom>
+          <a:noFill/>
+          <a:ln/>
+        </p:spPr>
+        <p:txBody>
+          <a:bodyPr wrap="square" lIns="0" tIns="0" rIns="0" bIns="0" rtlCol="0" anchor="ctr"/>
+          <a:lstStyle/>
+          <a:p>
+            <a:pPr algn="r" indent="0" marL="0">
+              <a:buNone/>
+            </a:pPr>
+            <a:r>
+              <a:rPr lang="en-US" sz="900" dirty="0">
+                <a:solidFill>
+                  <a:srgbClr val="5F7181"/>
+                </a:solidFill>
+                <a:latin typeface="Aptos" pitchFamily="34" charset="0"/>
+                <a:ea typeface="Aptos" pitchFamily="34" charset="-122"/>
+                <a:cs typeface="Aptos" pitchFamily="34" charset="-120"/>
+              </a:rPr>
+              <a:t>12</a:t>
+            </a:r>
+            <a:endParaRPr lang="en-US" sz="900" dirty="0"/>
+          </a:p>
+        </p:txBody>
+      </p:sp>
+      <p:sp>
+        <p:nvSpPr>
+          <p:cNvPr id="8" name="Text 6"/>
+          <p:cNvSpPr/>
+          <p:nvPr/>
+        </p:nvSpPr>
+        <p:spPr>
+          <a:xfrm>
             <a:off x="640080" y="658368"/>
-            <a:ext cx="10881360" cy="566928"/>
+            <a:ext cx="10881360" cy="713232"/>
           </a:xfrm>
           <a:prstGeom prst="rect">
             <a:avLst/>
@@ -4332,7 +4488,7 @@
               <a:buNone/>
             </a:pPr>
             <a:r>
-              <a:rPr lang="en-US" sz="2700" b="1" dirty="0">
+              <a:rPr lang="en-US" sz="3400" b="1" dirty="0">
                 <a:solidFill>
                   <a:srgbClr val="003A63"/>
                 </a:solidFill>
@@ -4342,20 +4498,20 @@
               </a:rPr>
               <a:t>Risks, Failure Modes, and Guardrails Continued</a:t>
             </a:r>
-            <a:endParaRPr lang="en-US" sz="2700" dirty="0"/>
-          </a:p>
-        </p:txBody>
-      </p:sp>
-      <p:sp>
-        <p:nvSpPr>
-          <p:cNvPr id="8" name="Text 6"/>
-          <p:cNvSpPr/>
-          <p:nvPr/>
-        </p:nvSpPr>
-        <p:spPr>
-          <a:xfrm>
-            <a:off x="868680" y="1417320"/>
-            <a:ext cx="6675120" cy="4434840"/>
+            <a:endParaRPr lang="en-US" sz="3400" dirty="0"/>
+          </a:p>
+        </p:txBody>
+      </p:sp>
+      <p:sp>
+        <p:nvSpPr>
+          <p:cNvPr id="9" name="Text 7"/>
+          <p:cNvSpPr/>
+          <p:nvPr/>
+        </p:nvSpPr>
+        <p:spPr>
+          <a:xfrm>
+            <a:off x="868680" y="1508760"/>
+            <a:ext cx="6537960" cy="4160520"/>
           </a:xfrm>
           <a:prstGeom prst="rect">
             <a:avLst/>
@@ -4370,7 +4526,7 @@
           <a:lstStyle/>
           <a:p>
             <a:r>
-              <a:rPr lang="en-US" sz="1700" dirty="0">
+              <a:rPr lang="en-US" sz="2100" dirty="0">
                 <a:solidFill>
                   <a:srgbClr val="17364A"/>
                 </a:solidFill>
@@ -4380,11 +4536,11 @@
               </a:rPr>
               <a:t>Recommended guardrails include the following:</a:t>
             </a:r>
-            <a:endParaRPr lang="en-US" sz="1700" dirty="0"/>
-          </a:p>
-          <a:p>
-            <a:r>
-              <a:rPr lang="en-US" sz="1700" dirty="0">
+            <a:endParaRPr lang="en-US" sz="2100" dirty="0"/>
+          </a:p>
+          <a:p>
+            <a:r>
+              <a:rPr lang="en-US" sz="2100" dirty="0">
                 <a:solidFill>
                   <a:srgbClr val="17364A"/>
                 </a:solidFill>
@@ -4394,11 +4550,11 @@
               </a:rPr>
               <a:t>Use an AI-specific project charter and risk log.</a:t>
             </a:r>
-            <a:endParaRPr lang="en-US" sz="1700" dirty="0"/>
-          </a:p>
-          <a:p>
-            <a:r>
-              <a:rPr lang="en-US" sz="1700" dirty="0">
+            <a:endParaRPr lang="en-US" sz="2100" dirty="0"/>
+          </a:p>
+          <a:p>
+            <a:r>
+              <a:rPr lang="en-US" sz="2100" dirty="0">
                 <a:solidFill>
                   <a:srgbClr val="17364A"/>
                 </a:solidFill>
@@ -4408,13 +4564,13 @@
               </a:rPr>
               <a:t>Define governance gates before implementation begins.</a:t>
             </a:r>
-            <a:endParaRPr lang="en-US" sz="1700" dirty="0"/>
-          </a:p>
-        </p:txBody>
-      </p:sp>
-      <p:sp>
-        <p:nvSpPr>
-          <p:cNvPr id="9" name="Shape 7"/>
+            <a:endParaRPr lang="en-US" sz="2100" dirty="0"/>
+          </a:p>
+        </p:txBody>
+      </p:sp>
+      <p:sp>
+        <p:nvSpPr>
+          <p:cNvPr id="10" name="Shape 8"/>
           <p:cNvSpPr/>
           <p:nvPr/>
         </p:nvSpPr>
@@ -4441,14 +4597,14 @@
       </p:sp>
       <p:sp>
         <p:nvSpPr>
-          <p:cNvPr id="10" name="Text 8"/>
+          <p:cNvPr id="11" name="Text 9"/>
           <p:cNvSpPr/>
           <p:nvPr/>
         </p:nvSpPr>
         <p:spPr>
           <a:xfrm>
             <a:off x="8074152" y="1563624"/>
-            <a:ext cx="2825496" cy="201168"/>
+            <a:ext cx="2825496" cy="256032"/>
           </a:xfrm>
           <a:prstGeom prst="rect">
             <a:avLst/>
@@ -4464,7 +4620,7 @@
               <a:buNone/>
             </a:pPr>
             <a:r>
-              <a:rPr lang="en-US" sz="950" b="1" dirty="0">
+              <a:rPr lang="en-US" sz="1300" b="1" dirty="0">
                 <a:solidFill>
                   <a:srgbClr val="0068B7"/>
                 </a:solidFill>
@@ -4474,20 +4630,20 @@
               </a:rPr>
               <a:t>Key idea</a:t>
             </a:r>
-            <a:endParaRPr lang="en-US" sz="950" dirty="0"/>
-          </a:p>
-        </p:txBody>
-      </p:sp>
-      <p:sp>
-        <p:nvSpPr>
-          <p:cNvPr id="11" name="Text 9"/>
-          <p:cNvSpPr/>
-          <p:nvPr/>
-        </p:nvSpPr>
-        <p:spPr>
-          <a:xfrm>
-            <a:off x="8074152" y="1856232"/>
-            <a:ext cx="2825496" cy="1261872"/>
+            <a:endParaRPr lang="en-US" sz="1300" dirty="0"/>
+          </a:p>
+        </p:txBody>
+      </p:sp>
+      <p:sp>
+        <p:nvSpPr>
+          <p:cNvPr id="12" name="Text 10"/>
+          <p:cNvSpPr/>
+          <p:nvPr/>
+        </p:nvSpPr>
+        <p:spPr>
+          <a:xfrm>
+            <a:off x="8074152" y="1920240"/>
+            <a:ext cx="2825496" cy="1188720"/>
           </a:xfrm>
           <a:prstGeom prst="rect">
             <a:avLst/>
@@ -4505,7 +4661,7 @@
               <a:buNone/>
             </a:pPr>
             <a:r>
-              <a:rPr lang="en-US" sz="1250" dirty="0">
+              <a:rPr lang="en-US" sz="1550" dirty="0">
                 <a:solidFill>
                   <a:srgbClr val="17364A"/>
                 </a:solidFill>
@@ -4515,13 +4671,13 @@
               </a:rPr>
               <a:t>Recommended guardrails include the following:</a:t>
             </a:r>
-            <a:endParaRPr lang="en-US" sz="1250" dirty="0"/>
-          </a:p>
-        </p:txBody>
-      </p:sp>
-      <p:sp>
-        <p:nvSpPr>
-          <p:cNvPr id="12" name="Shape 10"/>
+            <a:endParaRPr lang="en-US" sz="1550" dirty="0"/>
+          </a:p>
+        </p:txBody>
+      </p:sp>
+      <p:sp>
+        <p:nvSpPr>
+          <p:cNvPr id="13" name="Shape 11"/>
           <p:cNvSpPr/>
           <p:nvPr/>
         </p:nvSpPr>
@@ -4548,14 +4704,14 @@
       </p:sp>
       <p:sp>
         <p:nvSpPr>
-          <p:cNvPr id="13" name="Text 11"/>
+          <p:cNvPr id="14" name="Text 12"/>
           <p:cNvSpPr/>
           <p:nvPr/>
         </p:nvSpPr>
         <p:spPr>
           <a:xfrm>
             <a:off x="8074152" y="3666744"/>
-            <a:ext cx="2825496" cy="201168"/>
+            <a:ext cx="2825496" cy="256032"/>
           </a:xfrm>
           <a:prstGeom prst="rect">
             <a:avLst/>
@@ -4571,7 +4727,7 @@
               <a:buNone/>
             </a:pPr>
             <a:r>
-              <a:rPr lang="en-US" sz="950" b="1" dirty="0">
+              <a:rPr lang="en-US" sz="1300" b="1" dirty="0">
                 <a:solidFill>
                   <a:srgbClr val="0068B7"/>
                 </a:solidFill>
@@ -4581,20 +4737,20 @@
               </a:rPr>
               <a:t>Use this for</a:t>
             </a:r>
-            <a:endParaRPr lang="en-US" sz="950" dirty="0"/>
-          </a:p>
-        </p:txBody>
-      </p:sp>
-      <p:sp>
-        <p:nvSpPr>
-          <p:cNvPr id="14" name="Text 12"/>
-          <p:cNvSpPr/>
-          <p:nvPr/>
-        </p:nvSpPr>
-        <p:spPr>
-          <a:xfrm>
-            <a:off x="8074152" y="3959352"/>
-            <a:ext cx="2825496" cy="1170432"/>
+            <a:endParaRPr lang="en-US" sz="1300" dirty="0"/>
+          </a:p>
+        </p:txBody>
+      </p:sp>
+      <p:sp>
+        <p:nvSpPr>
+          <p:cNvPr id="15" name="Text 13"/>
+          <p:cNvSpPr/>
+          <p:nvPr/>
+        </p:nvSpPr>
+        <p:spPr>
+          <a:xfrm>
+            <a:off x="8074152" y="4023360"/>
+            <a:ext cx="2825496" cy="1097280"/>
           </a:xfrm>
           <a:prstGeom prst="rect">
             <a:avLst/>
@@ -4612,7 +4768,7 @@
               <a:buNone/>
             </a:pPr>
             <a:r>
-              <a:rPr lang="en-US" sz="1250" dirty="0">
+              <a:rPr lang="en-US" sz="1550" dirty="0">
                 <a:solidFill>
                   <a:srgbClr val="17364A"/>
                 </a:solidFill>
@@ -4622,7 +4778,7 @@
               </a:rPr>
               <a:t>Connect the concept to public health decisions, safeguards, documentation, or implementation work.</a:t>
             </a:r>
-            <a:endParaRPr lang="en-US" sz="1250" dirty="0"/>
+            <a:endParaRPr lang="en-US" sz="1550" dirty="0"/>
           </a:p>
         </p:txBody>
       </p:sp>
@@ -4819,7 +4975,7 @@
                 <a:ea typeface="Aptos" pitchFamily="34" charset="-122"/>
                 <a:cs typeface="Aptos" pitchFamily="34" charset="-120"/>
               </a:rPr>
-              <a:t>© Paula Soper</a:t>
+              <a:t>Â© Paula Soper</a:t>
             </a:r>
             <a:endParaRPr lang="en-US" sz="800" dirty="0"/>
           </a:p>
@@ -4833,8 +4989,47 @@
         </p:nvSpPr>
         <p:spPr>
           <a:xfrm>
+            <a:off x="11137392" y="6510528"/>
+            <a:ext cx="411480" cy="201168"/>
+          </a:xfrm>
+          <a:prstGeom prst="rect">
+            <a:avLst/>
+          </a:prstGeom>
+          <a:noFill/>
+          <a:ln/>
+        </p:spPr>
+        <p:txBody>
+          <a:bodyPr wrap="square" lIns="0" tIns="0" rIns="0" bIns="0" rtlCol="0" anchor="ctr"/>
+          <a:lstStyle/>
+          <a:p>
+            <a:pPr algn="r" indent="0" marL="0">
+              <a:buNone/>
+            </a:pPr>
+            <a:r>
+              <a:rPr lang="en-US" sz="900" dirty="0">
+                <a:solidFill>
+                  <a:srgbClr val="5F7181"/>
+                </a:solidFill>
+                <a:latin typeface="Aptos" pitchFamily="34" charset="0"/>
+                <a:ea typeface="Aptos" pitchFamily="34" charset="-122"/>
+                <a:cs typeface="Aptos" pitchFamily="34" charset="-120"/>
+              </a:rPr>
+              <a:t>13</a:t>
+            </a:r>
+            <a:endParaRPr lang="en-US" sz="900" dirty="0"/>
+          </a:p>
+        </p:txBody>
+      </p:sp>
+      <p:sp>
+        <p:nvSpPr>
+          <p:cNvPr id="8" name="Text 6"/>
+          <p:cNvSpPr/>
+          <p:nvPr/>
+        </p:nvSpPr>
+        <p:spPr>
+          <a:xfrm>
             <a:off x="640080" y="658368"/>
-            <a:ext cx="10881360" cy="566928"/>
+            <a:ext cx="10881360" cy="713232"/>
           </a:xfrm>
           <a:prstGeom prst="rect">
             <a:avLst/>
@@ -4852,7 +5047,7 @@
               <a:buNone/>
             </a:pPr>
             <a:r>
-              <a:rPr lang="en-US" sz="2700" b="1" dirty="0">
+              <a:rPr lang="en-US" sz="3400" b="1" dirty="0">
                 <a:solidFill>
                   <a:srgbClr val="003A63"/>
                 </a:solidFill>
@@ -4862,20 +5057,20 @@
               </a:rPr>
               <a:t>Risks, Failure Modes, and Guardrails Continued</a:t>
             </a:r>
-            <a:endParaRPr lang="en-US" sz="2700" dirty="0"/>
-          </a:p>
-        </p:txBody>
-      </p:sp>
-      <p:sp>
-        <p:nvSpPr>
-          <p:cNvPr id="8" name="Text 6"/>
-          <p:cNvSpPr/>
-          <p:nvPr/>
-        </p:nvSpPr>
-        <p:spPr>
-          <a:xfrm>
-            <a:off x="868680" y="1417320"/>
-            <a:ext cx="6675120" cy="4434840"/>
+            <a:endParaRPr lang="en-US" sz="3400" dirty="0"/>
+          </a:p>
+        </p:txBody>
+      </p:sp>
+      <p:sp>
+        <p:nvSpPr>
+          <p:cNvPr id="9" name="Text 7"/>
+          <p:cNvSpPr/>
+          <p:nvPr/>
+        </p:nvSpPr>
+        <p:spPr>
+          <a:xfrm>
+            <a:off x="868680" y="1508760"/>
+            <a:ext cx="6537960" cy="4160520"/>
           </a:xfrm>
           <a:prstGeom prst="rect">
             <a:avLst/>
@@ -4890,7 +5085,7 @@
           <a:lstStyle/>
           <a:p>
             <a:r>
-              <a:rPr lang="en-US" sz="1700" dirty="0">
+              <a:rPr lang="en-US" sz="2100" dirty="0">
                 <a:solidFill>
                   <a:srgbClr val="17364A"/>
                 </a:solidFill>
@@ -4898,13 +5093,13 @@
                 <a:ea typeface="Aptos" pitchFamily="34" charset="-122"/>
                 <a:cs typeface="Aptos" pitchFamily="34" charset="-120"/>
               </a:rPr>
-              <a:t>Create separate workstreams for data, technology, governance, workflow, training, validation, and evaluation.</a:t>
-            </a:r>
-            <a:endParaRPr lang="en-US" sz="1700" dirty="0"/>
-          </a:p>
-          <a:p>
-            <a:r>
-              <a:rPr lang="en-US" sz="1700" dirty="0">
+              <a:t>Create separate workstreams for data, technology, governance, workflow, training, validation, and.</a:t>
+            </a:r>
+            <a:endParaRPr lang="en-US" sz="2100" dirty="0"/>
+          </a:p>
+          <a:p>
+            <a:r>
+              <a:rPr lang="en-US" sz="2100" dirty="0">
                 <a:solidFill>
                   <a:srgbClr val="17364A"/>
                 </a:solidFill>
@@ -4914,11 +5109,11 @@
               </a:rPr>
               <a:t>Require launch readiness review before deployment.</a:t>
             </a:r>
-            <a:endParaRPr lang="en-US" sz="1700" dirty="0"/>
-          </a:p>
-          <a:p>
-            <a:r>
-              <a:rPr lang="en-US" sz="1700" dirty="0">
+            <a:endParaRPr lang="en-US" sz="2100" dirty="0"/>
+          </a:p>
+          <a:p>
+            <a:r>
+              <a:rPr lang="en-US" sz="2100" dirty="0">
                 <a:solidFill>
                   <a:srgbClr val="17364A"/>
                 </a:solidFill>
@@ -4928,13 +5123,13 @@
               </a:rPr>
               <a:t>Document transition to operations and sustainability responsibilities.</a:t>
             </a:r>
-            <a:endParaRPr lang="en-US" sz="1700" dirty="0"/>
-          </a:p>
-        </p:txBody>
-      </p:sp>
-      <p:sp>
-        <p:nvSpPr>
-          <p:cNvPr id="9" name="Shape 7"/>
+            <a:endParaRPr lang="en-US" sz="2100" dirty="0"/>
+          </a:p>
+        </p:txBody>
+      </p:sp>
+      <p:sp>
+        <p:nvSpPr>
+          <p:cNvPr id="10" name="Shape 8"/>
           <p:cNvSpPr/>
           <p:nvPr/>
         </p:nvSpPr>
@@ -4961,14 +5156,14 @@
       </p:sp>
       <p:sp>
         <p:nvSpPr>
-          <p:cNvPr id="10" name="Text 8"/>
+          <p:cNvPr id="11" name="Text 9"/>
           <p:cNvSpPr/>
           <p:nvPr/>
         </p:nvSpPr>
         <p:spPr>
           <a:xfrm>
             <a:off x="8074152" y="1563624"/>
-            <a:ext cx="2825496" cy="201168"/>
+            <a:ext cx="2825496" cy="256032"/>
           </a:xfrm>
           <a:prstGeom prst="rect">
             <a:avLst/>
@@ -4984,7 +5179,7 @@
               <a:buNone/>
             </a:pPr>
             <a:r>
-              <a:rPr lang="en-US" sz="950" b="1" dirty="0">
+              <a:rPr lang="en-US" sz="1300" b="1" dirty="0">
                 <a:solidFill>
                   <a:srgbClr val="0068B7"/>
                 </a:solidFill>
@@ -4994,20 +5189,20 @@
               </a:rPr>
               <a:t>Key idea</a:t>
             </a:r>
-            <a:endParaRPr lang="en-US" sz="950" dirty="0"/>
-          </a:p>
-        </p:txBody>
-      </p:sp>
-      <p:sp>
-        <p:nvSpPr>
-          <p:cNvPr id="11" name="Text 9"/>
-          <p:cNvSpPr/>
-          <p:nvPr/>
-        </p:nvSpPr>
-        <p:spPr>
-          <a:xfrm>
-            <a:off x="8074152" y="1856232"/>
-            <a:ext cx="2825496" cy="1261872"/>
+            <a:endParaRPr lang="en-US" sz="1300" dirty="0"/>
+          </a:p>
+        </p:txBody>
+      </p:sp>
+      <p:sp>
+        <p:nvSpPr>
+          <p:cNvPr id="12" name="Text 10"/>
+          <p:cNvSpPr/>
+          <p:nvPr/>
+        </p:nvSpPr>
+        <p:spPr>
+          <a:xfrm>
+            <a:off x="8074152" y="1920240"/>
+            <a:ext cx="2825496" cy="1188720"/>
           </a:xfrm>
           <a:prstGeom prst="rect">
             <a:avLst/>
@@ -5025,7 +5220,7 @@
               <a:buNone/>
             </a:pPr>
             <a:r>
-              <a:rPr lang="en-US" sz="1250" dirty="0">
+              <a:rPr lang="en-US" sz="1550" dirty="0">
                 <a:solidFill>
                   <a:srgbClr val="17364A"/>
                 </a:solidFill>
@@ -5033,15 +5228,15 @@
                 <a:ea typeface="Aptos" pitchFamily="34" charset="-122"/>
                 <a:cs typeface="Aptos" pitchFamily="34" charset="-120"/>
               </a:rPr>
-              <a:t>Create separate workstreams for data, technology, governance, workflow, training, validation, and evaluation.</a:t>
-            </a:r>
-            <a:endParaRPr lang="en-US" sz="1250" dirty="0"/>
-          </a:p>
-        </p:txBody>
-      </p:sp>
-      <p:sp>
-        <p:nvSpPr>
-          <p:cNvPr id="12" name="Shape 10"/>
+              <a:t>Create separate workstreams for data, technology, governance, workflow, training, validation, and.</a:t>
+            </a:r>
+            <a:endParaRPr lang="en-US" sz="1550" dirty="0"/>
+          </a:p>
+        </p:txBody>
+      </p:sp>
+      <p:sp>
+        <p:nvSpPr>
+          <p:cNvPr id="13" name="Shape 11"/>
           <p:cNvSpPr/>
           <p:nvPr/>
         </p:nvSpPr>
@@ -5068,14 +5263,14 @@
       </p:sp>
       <p:sp>
         <p:nvSpPr>
-          <p:cNvPr id="13" name="Text 11"/>
+          <p:cNvPr id="14" name="Text 12"/>
           <p:cNvSpPr/>
           <p:nvPr/>
         </p:nvSpPr>
         <p:spPr>
           <a:xfrm>
             <a:off x="8074152" y="3666744"/>
-            <a:ext cx="2825496" cy="201168"/>
+            <a:ext cx="2825496" cy="256032"/>
           </a:xfrm>
           <a:prstGeom prst="rect">
             <a:avLst/>
@@ -5091,7 +5286,7 @@
               <a:buNone/>
             </a:pPr>
             <a:r>
-              <a:rPr lang="en-US" sz="950" b="1" dirty="0">
+              <a:rPr lang="en-US" sz="1300" b="1" dirty="0">
                 <a:solidFill>
                   <a:srgbClr val="0068B7"/>
                 </a:solidFill>
@@ -5101,20 +5296,20 @@
               </a:rPr>
               <a:t>Use this for</a:t>
             </a:r>
-            <a:endParaRPr lang="en-US" sz="950" dirty="0"/>
-          </a:p>
-        </p:txBody>
-      </p:sp>
-      <p:sp>
-        <p:nvSpPr>
-          <p:cNvPr id="14" name="Text 12"/>
-          <p:cNvSpPr/>
-          <p:nvPr/>
-        </p:nvSpPr>
-        <p:spPr>
-          <a:xfrm>
-            <a:off x="8074152" y="3959352"/>
-            <a:ext cx="2825496" cy="1170432"/>
+            <a:endParaRPr lang="en-US" sz="1300" dirty="0"/>
+          </a:p>
+        </p:txBody>
+      </p:sp>
+      <p:sp>
+        <p:nvSpPr>
+          <p:cNvPr id="15" name="Text 13"/>
+          <p:cNvSpPr/>
+          <p:nvPr/>
+        </p:nvSpPr>
+        <p:spPr>
+          <a:xfrm>
+            <a:off x="8074152" y="4023360"/>
+            <a:ext cx="2825496" cy="1097280"/>
           </a:xfrm>
           <a:prstGeom prst="rect">
             <a:avLst/>
@@ -5132,7 +5327,7 @@
               <a:buNone/>
             </a:pPr>
             <a:r>
-              <a:rPr lang="en-US" sz="1250" dirty="0">
+              <a:rPr lang="en-US" sz="1550" dirty="0">
                 <a:solidFill>
                   <a:srgbClr val="17364A"/>
                 </a:solidFill>
@@ -5142,7 +5337,7 @@
               </a:rPr>
               <a:t>Connect the concept to public health decisions, safeguards, documentation, or implementation work.</a:t>
             </a:r>
-            <a:endParaRPr lang="en-US" sz="1250" dirty="0"/>
+            <a:endParaRPr lang="en-US" sz="1550" dirty="0"/>
           </a:p>
         </p:txBody>
       </p:sp>
@@ -5339,7 +5534,7 @@
                 <a:ea typeface="Aptos" pitchFamily="34" charset="-122"/>
                 <a:cs typeface="Aptos" pitchFamily="34" charset="-120"/>
               </a:rPr>
-              <a:t>© Paula Soper</a:t>
+              <a:t>Â© Paula Soper</a:t>
             </a:r>
             <a:endParaRPr lang="en-US" sz="800" dirty="0"/>
           </a:p>
@@ -5347,7 +5542,46 @@
       </p:sp>
       <p:sp>
         <p:nvSpPr>
-          <p:cNvPr id="7" name="Shape 5"/>
+          <p:cNvPr id="7" name="Text 5"/>
+          <p:cNvSpPr/>
+          <p:nvPr/>
+        </p:nvSpPr>
+        <p:spPr>
+          <a:xfrm>
+            <a:off x="11137392" y="6510528"/>
+            <a:ext cx="411480" cy="201168"/>
+          </a:xfrm>
+          <a:prstGeom prst="rect">
+            <a:avLst/>
+          </a:prstGeom>
+          <a:noFill/>
+          <a:ln/>
+        </p:spPr>
+        <p:txBody>
+          <a:bodyPr wrap="square" lIns="0" tIns="0" rIns="0" bIns="0" rtlCol="0" anchor="ctr"/>
+          <a:lstStyle/>
+          <a:p>
+            <a:pPr algn="r" indent="0" marL="0">
+              <a:buNone/>
+            </a:pPr>
+            <a:r>
+              <a:rPr lang="en-US" sz="900" dirty="0">
+                <a:solidFill>
+                  <a:srgbClr val="5F7181"/>
+                </a:solidFill>
+                <a:latin typeface="Aptos" pitchFamily="34" charset="0"/>
+                <a:ea typeface="Aptos" pitchFamily="34" charset="-122"/>
+                <a:cs typeface="Aptos" pitchFamily="34" charset="-120"/>
+              </a:rPr>
+              <a:t>14</a:t>
+            </a:r>
+            <a:endParaRPr lang="en-US" sz="900" dirty="0"/>
+          </a:p>
+        </p:txBody>
+      </p:sp>
+      <p:sp>
+        <p:nvSpPr>
+          <p:cNvPr id="8" name="Shape 6"/>
           <p:cNvSpPr/>
           <p:nvPr/>
         </p:nvSpPr>
@@ -5372,7 +5606,7 @@
       </p:sp>
       <p:sp>
         <p:nvSpPr>
-          <p:cNvPr id="8" name="Text 6"/>
+          <p:cNvPr id="9" name="Text 7"/>
           <p:cNvSpPr/>
           <p:nvPr/>
         </p:nvSpPr>
@@ -5411,14 +5645,14 @@
       </p:sp>
       <p:sp>
         <p:nvSpPr>
-          <p:cNvPr id="9" name="Text 7"/>
+          <p:cNvPr id="10" name="Text 8"/>
           <p:cNvSpPr/>
           <p:nvPr/>
         </p:nvSpPr>
         <p:spPr>
           <a:xfrm>
             <a:off x="640080" y="621792"/>
-            <a:ext cx="10881360" cy="566928"/>
+            <a:ext cx="10881360" cy="713232"/>
           </a:xfrm>
           <a:prstGeom prst="rect">
             <a:avLst/>
@@ -5436,7 +5670,7 @@
               <a:buNone/>
             </a:pPr>
             <a:r>
-              <a:rPr lang="en-US" sz="2700" b="1" dirty="0">
+              <a:rPr lang="en-US" sz="3400" b="1" dirty="0">
                 <a:solidFill>
                   <a:srgbClr val="003A63"/>
                 </a:solidFill>
@@ -5446,20 +5680,20 @@
               </a:rPr>
               <a:t>Reflection Questions</a:t>
             </a:r>
-            <a:endParaRPr lang="en-US" sz="2700" dirty="0"/>
-          </a:p>
-        </p:txBody>
-      </p:sp>
-      <p:sp>
-        <p:nvSpPr>
-          <p:cNvPr id="10" name="Text 8"/>
-          <p:cNvSpPr/>
-          <p:nvPr/>
-        </p:nvSpPr>
-        <p:spPr>
-          <a:xfrm>
-            <a:off x="868680" y="1417320"/>
-            <a:ext cx="6675120" cy="4434840"/>
+            <a:endParaRPr lang="en-US" sz="3400" dirty="0"/>
+          </a:p>
+        </p:txBody>
+      </p:sp>
+      <p:sp>
+        <p:nvSpPr>
+          <p:cNvPr id="11" name="Text 9"/>
+          <p:cNvSpPr/>
+          <p:nvPr/>
+        </p:nvSpPr>
+        <p:spPr>
+          <a:xfrm>
+            <a:off x="868680" y="1508760"/>
+            <a:ext cx="6537960" cy="4160520"/>
           </a:xfrm>
           <a:prstGeom prst="rect">
             <a:avLst/>
@@ -5474,7 +5708,7 @@
           <a:lstStyle/>
           <a:p>
             <a:r>
-              <a:rPr lang="en-US" sz="1700" dirty="0">
+              <a:rPr lang="en-US" sz="2100" dirty="0">
                 <a:solidFill>
                   <a:srgbClr val="17364A"/>
                 </a:solidFill>
@@ -5484,11 +5718,11 @@
               </a:rPr>
               <a:t>Where does this topic appear in your agency, program, or workflow?</a:t>
             </a:r>
-            <a:endParaRPr lang="en-US" sz="1700" dirty="0"/>
-          </a:p>
-          <a:p>
-            <a:r>
-              <a:rPr lang="en-US" sz="1700" dirty="0">
+            <a:endParaRPr lang="en-US" sz="2100" dirty="0"/>
+          </a:p>
+          <a:p>
+            <a:r>
+              <a:rPr lang="en-US" sz="2100" dirty="0">
                 <a:solidFill>
                   <a:srgbClr val="17364A"/>
                 </a:solidFill>
@@ -5498,11 +5732,11 @@
               </a:rPr>
               <a:t>Which staff roles would need to understand or apply this concept before AI use is approved?</a:t>
             </a:r>
-            <a:endParaRPr lang="en-US" sz="1700" dirty="0"/>
-          </a:p>
-          <a:p>
-            <a:r>
-              <a:rPr lang="en-US" sz="1700" dirty="0">
+            <a:endParaRPr lang="en-US" sz="2100" dirty="0"/>
+          </a:p>
+          <a:p>
+            <a:r>
+              <a:rPr lang="en-US" sz="2100" dirty="0">
                 <a:solidFill>
                   <a:srgbClr val="17364A"/>
                 </a:solidFill>
@@ -5512,13 +5746,13 @@
               </a:rPr>
               <a:t>What could go wrong if this topic is not addressed before implementation?</a:t>
             </a:r>
-            <a:endParaRPr lang="en-US" sz="1700" dirty="0"/>
-          </a:p>
-        </p:txBody>
-      </p:sp>
-      <p:sp>
-        <p:nvSpPr>
-          <p:cNvPr id="11" name="Shape 9"/>
+            <a:endParaRPr lang="en-US" sz="2100" dirty="0"/>
+          </a:p>
+        </p:txBody>
+      </p:sp>
+      <p:sp>
+        <p:nvSpPr>
+          <p:cNvPr id="12" name="Shape 10"/>
           <p:cNvSpPr/>
           <p:nvPr/>
         </p:nvSpPr>
@@ -5545,14 +5779,14 @@
       </p:sp>
       <p:sp>
         <p:nvSpPr>
-          <p:cNvPr id="12" name="Text 10"/>
+          <p:cNvPr id="13" name="Text 11"/>
           <p:cNvSpPr/>
           <p:nvPr/>
         </p:nvSpPr>
         <p:spPr>
           <a:xfrm>
             <a:off x="8074152" y="1563624"/>
-            <a:ext cx="2825496" cy="201168"/>
+            <a:ext cx="2825496" cy="256032"/>
           </a:xfrm>
           <a:prstGeom prst="rect">
             <a:avLst/>
@@ -5568,7 +5802,7 @@
               <a:buNone/>
             </a:pPr>
             <a:r>
-              <a:rPr lang="en-US" sz="950" b="1" dirty="0">
+              <a:rPr lang="en-US" sz="1300" b="1" dirty="0">
                 <a:solidFill>
                   <a:srgbClr val="0068B7"/>
                 </a:solidFill>
@@ -5578,20 +5812,20 @@
               </a:rPr>
               <a:t>Key idea</a:t>
             </a:r>
-            <a:endParaRPr lang="en-US" sz="950" dirty="0"/>
-          </a:p>
-        </p:txBody>
-      </p:sp>
-      <p:sp>
-        <p:nvSpPr>
-          <p:cNvPr id="13" name="Text 11"/>
-          <p:cNvSpPr/>
-          <p:nvPr/>
-        </p:nvSpPr>
-        <p:spPr>
-          <a:xfrm>
-            <a:off x="8074152" y="1856232"/>
-            <a:ext cx="2825496" cy="1261872"/>
+            <a:endParaRPr lang="en-US" sz="1300" dirty="0"/>
+          </a:p>
+        </p:txBody>
+      </p:sp>
+      <p:sp>
+        <p:nvSpPr>
+          <p:cNvPr id="14" name="Text 12"/>
+          <p:cNvSpPr/>
+          <p:nvPr/>
+        </p:nvSpPr>
+        <p:spPr>
+          <a:xfrm>
+            <a:off x="8074152" y="1920240"/>
+            <a:ext cx="2825496" cy="1188720"/>
           </a:xfrm>
           <a:prstGeom prst="rect">
             <a:avLst/>
@@ -5609,7 +5843,7 @@
               <a:buNone/>
             </a:pPr>
             <a:r>
-              <a:rPr lang="en-US" sz="1250" dirty="0">
+              <a:rPr lang="en-US" sz="1550" dirty="0">
                 <a:solidFill>
                   <a:srgbClr val="17364A"/>
                 </a:solidFill>
@@ -5619,13 +5853,13 @@
               </a:rPr>
               <a:t>Where does this topic appear in your agency, program, or workflow?</a:t>
             </a:r>
-            <a:endParaRPr lang="en-US" sz="1250" dirty="0"/>
-          </a:p>
-        </p:txBody>
-      </p:sp>
-      <p:sp>
-        <p:nvSpPr>
-          <p:cNvPr id="14" name="Shape 12"/>
+            <a:endParaRPr lang="en-US" sz="1550" dirty="0"/>
+          </a:p>
+        </p:txBody>
+      </p:sp>
+      <p:sp>
+        <p:nvSpPr>
+          <p:cNvPr id="15" name="Shape 13"/>
           <p:cNvSpPr/>
           <p:nvPr/>
         </p:nvSpPr>
@@ -5652,14 +5886,14 @@
       </p:sp>
       <p:sp>
         <p:nvSpPr>
-          <p:cNvPr id="15" name="Text 13"/>
+          <p:cNvPr id="16" name="Text 14"/>
           <p:cNvSpPr/>
           <p:nvPr/>
         </p:nvSpPr>
         <p:spPr>
           <a:xfrm>
             <a:off x="8074152" y="3666744"/>
-            <a:ext cx="2825496" cy="201168"/>
+            <a:ext cx="2825496" cy="256032"/>
           </a:xfrm>
           <a:prstGeom prst="rect">
             <a:avLst/>
@@ -5675,7 +5909,7 @@
               <a:buNone/>
             </a:pPr>
             <a:r>
-              <a:rPr lang="en-US" sz="950" b="1" dirty="0">
+              <a:rPr lang="en-US" sz="1300" b="1" dirty="0">
                 <a:solidFill>
                   <a:srgbClr val="0068B7"/>
                 </a:solidFill>
@@ -5685,20 +5919,20 @@
               </a:rPr>
               <a:t>Use this for</a:t>
             </a:r>
-            <a:endParaRPr lang="en-US" sz="950" dirty="0"/>
-          </a:p>
-        </p:txBody>
-      </p:sp>
-      <p:sp>
-        <p:nvSpPr>
-          <p:cNvPr id="16" name="Text 14"/>
-          <p:cNvSpPr/>
-          <p:nvPr/>
-        </p:nvSpPr>
-        <p:spPr>
-          <a:xfrm>
-            <a:off x="8074152" y="3959352"/>
-            <a:ext cx="2825496" cy="1170432"/>
+            <a:endParaRPr lang="en-US" sz="1300" dirty="0"/>
+          </a:p>
+        </p:txBody>
+      </p:sp>
+      <p:sp>
+        <p:nvSpPr>
+          <p:cNvPr id="17" name="Text 15"/>
+          <p:cNvSpPr/>
+          <p:nvPr/>
+        </p:nvSpPr>
+        <p:spPr>
+          <a:xfrm>
+            <a:off x="8074152" y="4023360"/>
+            <a:ext cx="2825496" cy="1097280"/>
           </a:xfrm>
           <a:prstGeom prst="rect">
             <a:avLst/>
@@ -5716,7 +5950,7 @@
               <a:buNone/>
             </a:pPr>
             <a:r>
-              <a:rPr lang="en-US" sz="1250" dirty="0">
+              <a:rPr lang="en-US" sz="1550" dirty="0">
                 <a:solidFill>
                   <a:srgbClr val="17364A"/>
                 </a:solidFill>
@@ -5726,7 +5960,7 @@
               </a:rPr>
               <a:t>Connect the concept to public health decisions, safeguards, documentation, or implementation work.</a:t>
             </a:r>
-            <a:endParaRPr lang="en-US" sz="1250" dirty="0"/>
+            <a:endParaRPr lang="en-US" sz="1550" dirty="0"/>
           </a:p>
         </p:txBody>
       </p:sp>
@@ -5923,7 +6157,7 @@
                 <a:ea typeface="Aptos" pitchFamily="34" charset="-122"/>
                 <a:cs typeface="Aptos" pitchFamily="34" charset="-120"/>
               </a:rPr>
-              <a:t>© Paula Soper</a:t>
+              <a:t>Â© Paula Soper</a:t>
             </a:r>
             <a:endParaRPr lang="en-US" sz="800" dirty="0"/>
           </a:p>
@@ -5937,8 +6171,47 @@
         </p:nvSpPr>
         <p:spPr>
           <a:xfrm>
+            <a:off x="11137392" y="6510528"/>
+            <a:ext cx="411480" cy="201168"/>
+          </a:xfrm>
+          <a:prstGeom prst="rect">
+            <a:avLst/>
+          </a:prstGeom>
+          <a:noFill/>
+          <a:ln/>
+        </p:spPr>
+        <p:txBody>
+          <a:bodyPr wrap="square" lIns="0" tIns="0" rIns="0" bIns="0" rtlCol="0" anchor="ctr"/>
+          <a:lstStyle/>
+          <a:p>
+            <a:pPr algn="r" indent="0" marL="0">
+              <a:buNone/>
+            </a:pPr>
+            <a:r>
+              <a:rPr lang="en-US" sz="900" dirty="0">
+                <a:solidFill>
+                  <a:srgbClr val="5F7181"/>
+                </a:solidFill>
+                <a:latin typeface="Aptos" pitchFamily="34" charset="0"/>
+                <a:ea typeface="Aptos" pitchFamily="34" charset="-122"/>
+                <a:cs typeface="Aptos" pitchFamily="34" charset="-120"/>
+              </a:rPr>
+              <a:t>15</a:t>
+            </a:r>
+            <a:endParaRPr lang="en-US" sz="900" dirty="0"/>
+          </a:p>
+        </p:txBody>
+      </p:sp>
+      <p:sp>
+        <p:nvSpPr>
+          <p:cNvPr id="8" name="Text 6"/>
+          <p:cNvSpPr/>
+          <p:nvPr/>
+        </p:nvSpPr>
+        <p:spPr>
+          <a:xfrm>
             <a:off x="640080" y="658368"/>
-            <a:ext cx="10881360" cy="566928"/>
+            <a:ext cx="10881360" cy="713232"/>
           </a:xfrm>
           <a:prstGeom prst="rect">
             <a:avLst/>
@@ -5956,7 +6229,7 @@
               <a:buNone/>
             </a:pPr>
             <a:r>
-              <a:rPr lang="en-US" sz="2700" b="1" dirty="0">
+              <a:rPr lang="en-US" sz="3400" b="1" dirty="0">
                 <a:solidFill>
                   <a:srgbClr val="003A63"/>
                 </a:solidFill>
@@ -5966,20 +6239,20 @@
               </a:rPr>
               <a:t>Reflection Questions Continued</a:t>
             </a:r>
-            <a:endParaRPr lang="en-US" sz="2700" dirty="0"/>
-          </a:p>
-        </p:txBody>
-      </p:sp>
-      <p:sp>
-        <p:nvSpPr>
-          <p:cNvPr id="8" name="Text 6"/>
-          <p:cNvSpPr/>
-          <p:nvPr/>
-        </p:nvSpPr>
-        <p:spPr>
-          <a:xfrm>
-            <a:off x="868680" y="1417320"/>
-            <a:ext cx="6675120" cy="4434840"/>
+            <a:endParaRPr lang="en-US" sz="3400" dirty="0"/>
+          </a:p>
+        </p:txBody>
+      </p:sp>
+      <p:sp>
+        <p:nvSpPr>
+          <p:cNvPr id="9" name="Text 7"/>
+          <p:cNvSpPr/>
+          <p:nvPr/>
+        </p:nvSpPr>
+        <p:spPr>
+          <a:xfrm>
+            <a:off x="868680" y="1508760"/>
+            <a:ext cx="6537960" cy="4160520"/>
           </a:xfrm>
           <a:prstGeom prst="rect">
             <a:avLst/>
@@ -5994,7 +6267,7 @@
           <a:lstStyle/>
           <a:p>
             <a:r>
-              <a:rPr lang="en-US" sz="1700" dirty="0">
+              <a:rPr lang="en-US" sz="2100" dirty="0">
                 <a:solidFill>
                   <a:srgbClr val="17364A"/>
                 </a:solidFill>
@@ -6004,11 +6277,11 @@
               </a:rPr>
               <a:t>What evidence would governance, leadership, or operations staff need before moving forward?</a:t>
             </a:r>
-            <a:endParaRPr lang="en-US" sz="1700" dirty="0"/>
-          </a:p>
-          <a:p>
-            <a:r>
-              <a:rPr lang="en-US" sz="1700" dirty="0">
+            <a:endParaRPr lang="en-US" sz="2100" dirty="0"/>
+          </a:p>
+          <a:p>
+            <a:r>
+              <a:rPr lang="en-US" sz="2100" dirty="0">
                 <a:solidFill>
                   <a:srgbClr val="17364A"/>
                 </a:solidFill>
@@ -6018,13 +6291,13 @@
               </a:rPr>
               <a:t>Which policy, data, equity, privacy, security, or workflow questions remain unresolved?</a:t>
             </a:r>
-            <a:endParaRPr lang="en-US" sz="1700" dirty="0"/>
-          </a:p>
-        </p:txBody>
-      </p:sp>
-      <p:sp>
-        <p:nvSpPr>
-          <p:cNvPr id="9" name="Shape 7"/>
+            <a:endParaRPr lang="en-US" sz="2100" dirty="0"/>
+          </a:p>
+        </p:txBody>
+      </p:sp>
+      <p:sp>
+        <p:nvSpPr>
+          <p:cNvPr id="10" name="Shape 8"/>
           <p:cNvSpPr/>
           <p:nvPr/>
         </p:nvSpPr>
@@ -6051,14 +6324,14 @@
       </p:sp>
       <p:sp>
         <p:nvSpPr>
-          <p:cNvPr id="10" name="Text 8"/>
+          <p:cNvPr id="11" name="Text 9"/>
           <p:cNvSpPr/>
           <p:nvPr/>
         </p:nvSpPr>
         <p:spPr>
           <a:xfrm>
             <a:off x="8074152" y="1563624"/>
-            <a:ext cx="2825496" cy="201168"/>
+            <a:ext cx="2825496" cy="256032"/>
           </a:xfrm>
           <a:prstGeom prst="rect">
             <a:avLst/>
@@ -6074,7 +6347,7 @@
               <a:buNone/>
             </a:pPr>
             <a:r>
-              <a:rPr lang="en-US" sz="950" b="1" dirty="0">
+              <a:rPr lang="en-US" sz="1300" b="1" dirty="0">
                 <a:solidFill>
                   <a:srgbClr val="0068B7"/>
                 </a:solidFill>
@@ -6084,20 +6357,20 @@
               </a:rPr>
               <a:t>Key idea</a:t>
             </a:r>
-            <a:endParaRPr lang="en-US" sz="950" dirty="0"/>
-          </a:p>
-        </p:txBody>
-      </p:sp>
-      <p:sp>
-        <p:nvSpPr>
-          <p:cNvPr id="11" name="Text 9"/>
-          <p:cNvSpPr/>
-          <p:nvPr/>
-        </p:nvSpPr>
-        <p:spPr>
-          <a:xfrm>
-            <a:off x="8074152" y="1856232"/>
-            <a:ext cx="2825496" cy="1261872"/>
+            <a:endParaRPr lang="en-US" sz="1300" dirty="0"/>
+          </a:p>
+        </p:txBody>
+      </p:sp>
+      <p:sp>
+        <p:nvSpPr>
+          <p:cNvPr id="12" name="Text 10"/>
+          <p:cNvSpPr/>
+          <p:nvPr/>
+        </p:nvSpPr>
+        <p:spPr>
+          <a:xfrm>
+            <a:off x="8074152" y="1920240"/>
+            <a:ext cx="2825496" cy="1188720"/>
           </a:xfrm>
           <a:prstGeom prst="rect">
             <a:avLst/>
@@ -6115,7 +6388,7 @@
               <a:buNone/>
             </a:pPr>
             <a:r>
-              <a:rPr lang="en-US" sz="1250" dirty="0">
+              <a:rPr lang="en-US" sz="1550" dirty="0">
                 <a:solidFill>
                   <a:srgbClr val="17364A"/>
                 </a:solidFill>
@@ -6125,13 +6398,13 @@
               </a:rPr>
               <a:t>What evidence would governance, leadership, or operations staff need before moving forward?</a:t>
             </a:r>
-            <a:endParaRPr lang="en-US" sz="1250" dirty="0"/>
-          </a:p>
-        </p:txBody>
-      </p:sp>
-      <p:sp>
-        <p:nvSpPr>
-          <p:cNvPr id="12" name="Shape 10"/>
+            <a:endParaRPr lang="en-US" sz="1550" dirty="0"/>
+          </a:p>
+        </p:txBody>
+      </p:sp>
+      <p:sp>
+        <p:nvSpPr>
+          <p:cNvPr id="13" name="Shape 11"/>
           <p:cNvSpPr/>
           <p:nvPr/>
         </p:nvSpPr>
@@ -6158,14 +6431,14 @@
       </p:sp>
       <p:sp>
         <p:nvSpPr>
-          <p:cNvPr id="13" name="Text 11"/>
+          <p:cNvPr id="14" name="Text 12"/>
           <p:cNvSpPr/>
           <p:nvPr/>
         </p:nvSpPr>
         <p:spPr>
           <a:xfrm>
             <a:off x="8074152" y="3666744"/>
-            <a:ext cx="2825496" cy="201168"/>
+            <a:ext cx="2825496" cy="256032"/>
           </a:xfrm>
           <a:prstGeom prst="rect">
             <a:avLst/>
@@ -6181,7 +6454,7 @@
               <a:buNone/>
             </a:pPr>
             <a:r>
-              <a:rPr lang="en-US" sz="950" b="1" dirty="0">
+              <a:rPr lang="en-US" sz="1300" b="1" dirty="0">
                 <a:solidFill>
                   <a:srgbClr val="0068B7"/>
                 </a:solidFill>
@@ -6191,20 +6464,20 @@
               </a:rPr>
               <a:t>Use this for</a:t>
             </a:r>
-            <a:endParaRPr lang="en-US" sz="950" dirty="0"/>
-          </a:p>
-        </p:txBody>
-      </p:sp>
-      <p:sp>
-        <p:nvSpPr>
-          <p:cNvPr id="14" name="Text 12"/>
-          <p:cNvSpPr/>
-          <p:nvPr/>
-        </p:nvSpPr>
-        <p:spPr>
-          <a:xfrm>
-            <a:off x="8074152" y="3959352"/>
-            <a:ext cx="2825496" cy="1170432"/>
+            <a:endParaRPr lang="en-US" sz="1300" dirty="0"/>
+          </a:p>
+        </p:txBody>
+      </p:sp>
+      <p:sp>
+        <p:nvSpPr>
+          <p:cNvPr id="15" name="Text 13"/>
+          <p:cNvSpPr/>
+          <p:nvPr/>
+        </p:nvSpPr>
+        <p:spPr>
+          <a:xfrm>
+            <a:off x="8074152" y="4023360"/>
+            <a:ext cx="2825496" cy="1097280"/>
           </a:xfrm>
           <a:prstGeom prst="rect">
             <a:avLst/>
@@ -6222,7 +6495,7 @@
               <a:buNone/>
             </a:pPr>
             <a:r>
-              <a:rPr lang="en-US" sz="1250" dirty="0">
+              <a:rPr lang="en-US" sz="1550" dirty="0">
                 <a:solidFill>
                   <a:srgbClr val="17364A"/>
                 </a:solidFill>
@@ -6232,7 +6505,7 @@
               </a:rPr>
               <a:t>Connect the concept to public health decisions, safeguards, documentation, or implementation work.</a:t>
             </a:r>
-            <a:endParaRPr lang="en-US" sz="1250" dirty="0"/>
+            <a:endParaRPr lang="en-US" sz="1550" dirty="0"/>
           </a:p>
         </p:txBody>
       </p:sp>
@@ -6429,7 +6702,7 @@
                 <a:ea typeface="Aptos" pitchFamily="34" charset="-122"/>
                 <a:cs typeface="Aptos" pitchFamily="34" charset="-120"/>
               </a:rPr>
-              <a:t>© Paula Soper</a:t>
+              <a:t>Â© Paula Soper</a:t>
             </a:r>
             <a:endParaRPr lang="en-US" sz="800" dirty="0"/>
           </a:p>
@@ -6437,7 +6710,46 @@
       </p:sp>
       <p:sp>
         <p:nvSpPr>
-          <p:cNvPr id="7" name="Shape 5"/>
+          <p:cNvPr id="7" name="Text 5"/>
+          <p:cNvSpPr/>
+          <p:nvPr/>
+        </p:nvSpPr>
+        <p:spPr>
+          <a:xfrm>
+            <a:off x="11137392" y="6510528"/>
+            <a:ext cx="411480" cy="201168"/>
+          </a:xfrm>
+          <a:prstGeom prst="rect">
+            <a:avLst/>
+          </a:prstGeom>
+          <a:noFill/>
+          <a:ln/>
+        </p:spPr>
+        <p:txBody>
+          <a:bodyPr wrap="square" lIns="0" tIns="0" rIns="0" bIns="0" rtlCol="0" anchor="ctr"/>
+          <a:lstStyle/>
+          <a:p>
+            <a:pPr algn="r" indent="0" marL="0">
+              <a:buNone/>
+            </a:pPr>
+            <a:r>
+              <a:rPr lang="en-US" sz="900" dirty="0">
+                <a:solidFill>
+                  <a:srgbClr val="5F7181"/>
+                </a:solidFill>
+                <a:latin typeface="Aptos" pitchFamily="34" charset="0"/>
+                <a:ea typeface="Aptos" pitchFamily="34" charset="-122"/>
+                <a:cs typeface="Aptos" pitchFamily="34" charset="-120"/>
+              </a:rPr>
+              <a:t>16</a:t>
+            </a:r>
+            <a:endParaRPr lang="en-US" sz="900" dirty="0"/>
+          </a:p>
+        </p:txBody>
+      </p:sp>
+      <p:sp>
+        <p:nvSpPr>
+          <p:cNvPr id="8" name="Shape 6"/>
           <p:cNvSpPr/>
           <p:nvPr/>
         </p:nvSpPr>
@@ -6462,7 +6774,7 @@
       </p:sp>
       <p:sp>
         <p:nvSpPr>
-          <p:cNvPr id="8" name="Text 6"/>
+          <p:cNvPr id="9" name="Text 7"/>
           <p:cNvSpPr/>
           <p:nvPr/>
         </p:nvSpPr>
@@ -6501,14 +6813,14 @@
       </p:sp>
       <p:sp>
         <p:nvSpPr>
-          <p:cNvPr id="9" name="Text 7"/>
+          <p:cNvPr id="10" name="Text 8"/>
           <p:cNvSpPr/>
           <p:nvPr/>
         </p:nvSpPr>
         <p:spPr>
           <a:xfrm>
             <a:off x="640080" y="621792"/>
-            <a:ext cx="10881360" cy="566928"/>
+            <a:ext cx="10881360" cy="713232"/>
           </a:xfrm>
           <a:prstGeom prst="rect">
             <a:avLst/>
@@ -6526,7 +6838,7 @@
               <a:buNone/>
             </a:pPr>
             <a:r>
-              <a:rPr lang="en-US" sz="2700" b="1" dirty="0">
+              <a:rPr lang="en-US" sz="3400" b="1" dirty="0">
                 <a:solidFill>
                   <a:srgbClr val="003A63"/>
                 </a:solidFill>
@@ -6536,20 +6848,20 @@
               </a:rPr>
               <a:t>Practical Exercise</a:t>
             </a:r>
-            <a:endParaRPr lang="en-US" sz="2700" dirty="0"/>
-          </a:p>
-        </p:txBody>
-      </p:sp>
-      <p:sp>
-        <p:nvSpPr>
-          <p:cNvPr id="10" name="Text 8"/>
-          <p:cNvSpPr/>
-          <p:nvPr/>
-        </p:nvSpPr>
-        <p:spPr>
-          <a:xfrm>
-            <a:off x="868680" y="1417320"/>
-            <a:ext cx="6675120" cy="4434840"/>
+            <a:endParaRPr lang="en-US" sz="3400" dirty="0"/>
+          </a:p>
+        </p:txBody>
+      </p:sp>
+      <p:sp>
+        <p:nvSpPr>
+          <p:cNvPr id="11" name="Text 9"/>
+          <p:cNvSpPr/>
+          <p:nvPr/>
+        </p:nvSpPr>
+        <p:spPr>
+          <a:xfrm>
+            <a:off x="868680" y="1508760"/>
+            <a:ext cx="6537960" cy="4160520"/>
           </a:xfrm>
           <a:prstGeom prst="rect">
             <a:avLst/>
@@ -6564,7 +6876,7 @@
           <a:lstStyle/>
           <a:p>
             <a:r>
-              <a:rPr lang="en-US" sz="1700" dirty="0">
+              <a:rPr lang="en-US" sz="2100" dirty="0">
                 <a:solidFill>
                   <a:srgbClr val="17364A"/>
                 </a:solidFill>
@@ -6572,13 +6884,13 @@
                 <a:ea typeface="Aptos" pitchFamily="34" charset="-122"/>
                 <a:cs typeface="Aptos" pitchFamily="34" charset="-120"/>
               </a:rPr>
-              <a:t>Create an AI project charter and implementation plan for one proposed AI-supported public health workflow.</a:t>
-            </a:r>
-            <a:endParaRPr lang="en-US" sz="1700" dirty="0"/>
-          </a:p>
-          <a:p>
-            <a:r>
-              <a:rPr lang="en-US" sz="1700" dirty="0">
+              <a:t>Create an AI project charter and implementation plan for one proposed AI-supported public health.</a:t>
+            </a:r>
+            <a:endParaRPr lang="en-US" sz="2100" dirty="0"/>
+          </a:p>
+          <a:p>
+            <a:r>
+              <a:rPr lang="en-US" sz="2100" dirty="0">
                 <a:solidFill>
                   <a:srgbClr val="17364A"/>
                 </a:solidFill>
@@ -6586,15 +6898,15 @@
                 <a:ea typeface="Aptos" pitchFamily="34" charset="-122"/>
                 <a:cs typeface="Aptos" pitchFamily="34" charset="-120"/>
               </a:rPr>
-              <a:t>Include project purpose, scope, objectives, roles, governance gates, milestones, workstreams, dependencies, risks, launch.</a:t>
-            </a:r>
-            <a:endParaRPr lang="en-US" sz="1700" dirty="0"/>
-          </a:p>
-        </p:txBody>
-      </p:sp>
-      <p:sp>
-        <p:nvSpPr>
-          <p:cNvPr id="11" name="Shape 9"/>
+              <a:t>Include project purpose, scope, objectives, roles, governance gates, milestones, workstreams,.</a:t>
+            </a:r>
+            <a:endParaRPr lang="en-US" sz="2100" dirty="0"/>
+          </a:p>
+        </p:txBody>
+      </p:sp>
+      <p:sp>
+        <p:nvSpPr>
+          <p:cNvPr id="12" name="Shape 10"/>
           <p:cNvSpPr/>
           <p:nvPr/>
         </p:nvSpPr>
@@ -6621,14 +6933,14 @@
       </p:sp>
       <p:sp>
         <p:nvSpPr>
-          <p:cNvPr id="12" name="Text 10"/>
+          <p:cNvPr id="13" name="Text 11"/>
           <p:cNvSpPr/>
           <p:nvPr/>
         </p:nvSpPr>
         <p:spPr>
           <a:xfrm>
             <a:off x="8074152" y="1563624"/>
-            <a:ext cx="2825496" cy="201168"/>
+            <a:ext cx="2825496" cy="256032"/>
           </a:xfrm>
           <a:prstGeom prst="rect">
             <a:avLst/>
@@ -6644,7 +6956,7 @@
               <a:buNone/>
             </a:pPr>
             <a:r>
-              <a:rPr lang="en-US" sz="950" b="1" dirty="0">
+              <a:rPr lang="en-US" sz="1300" b="1" dirty="0">
                 <a:solidFill>
                   <a:srgbClr val="0068B7"/>
                 </a:solidFill>
@@ -6654,20 +6966,20 @@
               </a:rPr>
               <a:t>Key idea</a:t>
             </a:r>
-            <a:endParaRPr lang="en-US" sz="950" dirty="0"/>
-          </a:p>
-        </p:txBody>
-      </p:sp>
-      <p:sp>
-        <p:nvSpPr>
-          <p:cNvPr id="13" name="Text 11"/>
-          <p:cNvSpPr/>
-          <p:nvPr/>
-        </p:nvSpPr>
-        <p:spPr>
-          <a:xfrm>
-            <a:off x="8074152" y="1856232"/>
-            <a:ext cx="2825496" cy="1261872"/>
+            <a:endParaRPr lang="en-US" sz="1300" dirty="0"/>
+          </a:p>
+        </p:txBody>
+      </p:sp>
+      <p:sp>
+        <p:nvSpPr>
+          <p:cNvPr id="14" name="Text 12"/>
+          <p:cNvSpPr/>
+          <p:nvPr/>
+        </p:nvSpPr>
+        <p:spPr>
+          <a:xfrm>
+            <a:off x="8074152" y="1920240"/>
+            <a:ext cx="2825496" cy="1188720"/>
           </a:xfrm>
           <a:prstGeom prst="rect">
             <a:avLst/>
@@ -6685,7 +6997,7 @@
               <a:buNone/>
             </a:pPr>
             <a:r>
-              <a:rPr lang="en-US" sz="1250" dirty="0">
+              <a:rPr lang="en-US" sz="1550" dirty="0">
                 <a:solidFill>
                   <a:srgbClr val="17364A"/>
                 </a:solidFill>
@@ -6693,15 +7005,15 @@
                 <a:ea typeface="Aptos" pitchFamily="34" charset="-122"/>
                 <a:cs typeface="Aptos" pitchFamily="34" charset="-120"/>
               </a:rPr>
-              <a:t>Create an AI project charter and implementation plan for one proposed AI-supported public health workflow.</a:t>
-            </a:r>
-            <a:endParaRPr lang="en-US" sz="1250" dirty="0"/>
-          </a:p>
-        </p:txBody>
-      </p:sp>
-      <p:sp>
-        <p:nvSpPr>
-          <p:cNvPr id="14" name="Shape 12"/>
+              <a:t>Create an AI project charter and implementation plan for one proposed AI-supported public health.</a:t>
+            </a:r>
+            <a:endParaRPr lang="en-US" sz="1550" dirty="0"/>
+          </a:p>
+        </p:txBody>
+      </p:sp>
+      <p:sp>
+        <p:nvSpPr>
+          <p:cNvPr id="15" name="Shape 13"/>
           <p:cNvSpPr/>
           <p:nvPr/>
         </p:nvSpPr>
@@ -6728,14 +7040,14 @@
       </p:sp>
       <p:sp>
         <p:nvSpPr>
-          <p:cNvPr id="15" name="Text 13"/>
+          <p:cNvPr id="16" name="Text 14"/>
           <p:cNvSpPr/>
           <p:nvPr/>
         </p:nvSpPr>
         <p:spPr>
           <a:xfrm>
             <a:off x="8074152" y="3666744"/>
-            <a:ext cx="2825496" cy="201168"/>
+            <a:ext cx="2825496" cy="256032"/>
           </a:xfrm>
           <a:prstGeom prst="rect">
             <a:avLst/>
@@ -6751,7 +7063,7 @@
               <a:buNone/>
             </a:pPr>
             <a:r>
-              <a:rPr lang="en-US" sz="950" b="1" dirty="0">
+              <a:rPr lang="en-US" sz="1300" b="1" dirty="0">
                 <a:solidFill>
                   <a:srgbClr val="0068B7"/>
                 </a:solidFill>
@@ -6761,20 +7073,20 @@
               </a:rPr>
               <a:t>Use this for</a:t>
             </a:r>
-            <a:endParaRPr lang="en-US" sz="950" dirty="0"/>
-          </a:p>
-        </p:txBody>
-      </p:sp>
-      <p:sp>
-        <p:nvSpPr>
-          <p:cNvPr id="16" name="Text 14"/>
-          <p:cNvSpPr/>
-          <p:nvPr/>
-        </p:nvSpPr>
-        <p:spPr>
-          <a:xfrm>
-            <a:off x="8074152" y="3959352"/>
-            <a:ext cx="2825496" cy="1170432"/>
+            <a:endParaRPr lang="en-US" sz="1300" dirty="0"/>
+          </a:p>
+        </p:txBody>
+      </p:sp>
+      <p:sp>
+        <p:nvSpPr>
+          <p:cNvPr id="17" name="Text 15"/>
+          <p:cNvSpPr/>
+          <p:nvPr/>
+        </p:nvSpPr>
+        <p:spPr>
+          <a:xfrm>
+            <a:off x="8074152" y="4023360"/>
+            <a:ext cx="2825496" cy="1097280"/>
           </a:xfrm>
           <a:prstGeom prst="rect">
             <a:avLst/>
@@ -6792,7 +7104,7 @@
               <a:buNone/>
             </a:pPr>
             <a:r>
-              <a:rPr lang="en-US" sz="1250" dirty="0">
+              <a:rPr lang="en-US" sz="1550" dirty="0">
                 <a:solidFill>
                   <a:srgbClr val="17364A"/>
                 </a:solidFill>
@@ -6802,7 +7114,7 @@
               </a:rPr>
               <a:t>Connect the concept to public health decisions, safeguards, documentation, or implementation work.</a:t>
             </a:r>
-            <a:endParaRPr lang="en-US" sz="1250" dirty="0"/>
+            <a:endParaRPr lang="en-US" sz="1550" dirty="0"/>
           </a:p>
         </p:txBody>
       </p:sp>
@@ -6999,7 +7311,7 @@
                 <a:ea typeface="Aptos" pitchFamily="34" charset="-122"/>
                 <a:cs typeface="Aptos" pitchFamily="34" charset="-120"/>
               </a:rPr>
-              <a:t>© Paula Soper</a:t>
+              <a:t>Â© Paula Soper</a:t>
             </a:r>
             <a:endParaRPr lang="en-US" sz="800" dirty="0"/>
           </a:p>
@@ -7007,7 +7319,46 @@
       </p:sp>
       <p:sp>
         <p:nvSpPr>
-          <p:cNvPr id="7" name="Shape 5"/>
+          <p:cNvPr id="7" name="Text 5"/>
+          <p:cNvSpPr/>
+          <p:nvPr/>
+        </p:nvSpPr>
+        <p:spPr>
+          <a:xfrm>
+            <a:off x="11137392" y="6510528"/>
+            <a:ext cx="411480" cy="201168"/>
+          </a:xfrm>
+          <a:prstGeom prst="rect">
+            <a:avLst/>
+          </a:prstGeom>
+          <a:noFill/>
+          <a:ln/>
+        </p:spPr>
+        <p:txBody>
+          <a:bodyPr wrap="square" lIns="0" tIns="0" rIns="0" bIns="0" rtlCol="0" anchor="ctr"/>
+          <a:lstStyle/>
+          <a:p>
+            <a:pPr algn="r" indent="0" marL="0">
+              <a:buNone/>
+            </a:pPr>
+            <a:r>
+              <a:rPr lang="en-US" sz="900" dirty="0">
+                <a:solidFill>
+                  <a:srgbClr val="5F7181"/>
+                </a:solidFill>
+                <a:latin typeface="Aptos" pitchFamily="34" charset="0"/>
+                <a:ea typeface="Aptos" pitchFamily="34" charset="-122"/>
+                <a:cs typeface="Aptos" pitchFamily="34" charset="-120"/>
+              </a:rPr>
+              <a:t>17</a:t>
+            </a:r>
+            <a:endParaRPr lang="en-US" sz="900" dirty="0"/>
+          </a:p>
+        </p:txBody>
+      </p:sp>
+      <p:sp>
+        <p:nvSpPr>
+          <p:cNvPr id="8" name="Shape 6"/>
           <p:cNvSpPr/>
           <p:nvPr/>
         </p:nvSpPr>
@@ -7032,7 +7383,7 @@
       </p:sp>
       <p:sp>
         <p:nvSpPr>
-          <p:cNvPr id="8" name="Text 6"/>
+          <p:cNvPr id="9" name="Text 7"/>
           <p:cNvSpPr/>
           <p:nvPr/>
         </p:nvSpPr>
@@ -7071,14 +7422,14 @@
       </p:sp>
       <p:sp>
         <p:nvSpPr>
-          <p:cNvPr id="9" name="Text 7"/>
+          <p:cNvPr id="10" name="Text 8"/>
           <p:cNvSpPr/>
           <p:nvPr/>
         </p:nvSpPr>
         <p:spPr>
           <a:xfrm>
             <a:off x="640080" y="621792"/>
-            <a:ext cx="10881360" cy="566928"/>
+            <a:ext cx="10881360" cy="713232"/>
           </a:xfrm>
           <a:prstGeom prst="rect">
             <a:avLst/>
@@ -7096,7 +7447,7 @@
               <a:buNone/>
             </a:pPr>
             <a:r>
-              <a:rPr lang="en-US" sz="2700" b="1" dirty="0">
+              <a:rPr lang="en-US" sz="3400" b="1" dirty="0">
                 <a:solidFill>
                   <a:srgbClr val="003A63"/>
                 </a:solidFill>
@@ -7106,20 +7457,20 @@
               </a:rPr>
               <a:t>Expected Artifact or Evidence</a:t>
             </a:r>
-            <a:endParaRPr lang="en-US" sz="2700" dirty="0"/>
-          </a:p>
-        </p:txBody>
-      </p:sp>
-      <p:sp>
-        <p:nvSpPr>
-          <p:cNvPr id="10" name="Text 8"/>
-          <p:cNvSpPr/>
-          <p:nvPr/>
-        </p:nvSpPr>
-        <p:spPr>
-          <a:xfrm>
-            <a:off x="868680" y="1417320"/>
-            <a:ext cx="6675120" cy="4434840"/>
+            <a:endParaRPr lang="en-US" sz="3400" dirty="0"/>
+          </a:p>
+        </p:txBody>
+      </p:sp>
+      <p:sp>
+        <p:nvSpPr>
+          <p:cNvPr id="11" name="Text 9"/>
+          <p:cNvSpPr/>
+          <p:nvPr/>
+        </p:nvSpPr>
+        <p:spPr>
+          <a:xfrm>
+            <a:off x="868680" y="1508760"/>
+            <a:ext cx="6537960" cy="4160520"/>
           </a:xfrm>
           <a:prstGeom prst="rect">
             <a:avLst/>
@@ -7134,7 +7485,7 @@
           <a:lstStyle/>
           <a:p>
             <a:r>
-              <a:rPr lang="en-US" sz="1700" dirty="0">
+              <a:rPr lang="en-US" sz="2100" dirty="0">
                 <a:solidFill>
                   <a:srgbClr val="17364A"/>
                 </a:solidFill>
@@ -7144,11 +7495,11 @@
               </a:rPr>
               <a:t>AI project charter</a:t>
             </a:r>
-            <a:endParaRPr lang="en-US" sz="1700" dirty="0"/>
-          </a:p>
-          <a:p>
-            <a:r>
-              <a:rPr lang="en-US" sz="1700" dirty="0">
+            <a:endParaRPr lang="en-US" sz="2100" dirty="0"/>
+          </a:p>
+          <a:p>
+            <a:r>
+              <a:rPr lang="en-US" sz="2100" dirty="0">
                 <a:solidFill>
                   <a:srgbClr val="17364A"/>
                 </a:solidFill>
@@ -7158,11 +7509,11 @@
               </a:rPr>
               <a:t>Implementation workplan</a:t>
             </a:r>
-            <a:endParaRPr lang="en-US" sz="1700" dirty="0"/>
-          </a:p>
-          <a:p>
-            <a:r>
-              <a:rPr lang="en-US" sz="1700" dirty="0">
+            <a:endParaRPr lang="en-US" sz="2100" dirty="0"/>
+          </a:p>
+          <a:p>
+            <a:r>
+              <a:rPr lang="en-US" sz="2100" dirty="0">
                 <a:solidFill>
                   <a:srgbClr val="17364A"/>
                 </a:solidFill>
@@ -7172,13 +7523,13 @@
               </a:rPr>
               <a:t>AI-specific risk log</a:t>
             </a:r>
-            <a:endParaRPr lang="en-US" sz="1700" dirty="0"/>
-          </a:p>
-        </p:txBody>
-      </p:sp>
-      <p:sp>
-        <p:nvSpPr>
-          <p:cNvPr id="11" name="Shape 9"/>
+            <a:endParaRPr lang="en-US" sz="2100" dirty="0"/>
+          </a:p>
+        </p:txBody>
+      </p:sp>
+      <p:sp>
+        <p:nvSpPr>
+          <p:cNvPr id="12" name="Shape 10"/>
           <p:cNvSpPr/>
           <p:nvPr/>
         </p:nvSpPr>
@@ -7205,14 +7556,14 @@
       </p:sp>
       <p:sp>
         <p:nvSpPr>
-          <p:cNvPr id="12" name="Text 10"/>
+          <p:cNvPr id="13" name="Text 11"/>
           <p:cNvSpPr/>
           <p:nvPr/>
         </p:nvSpPr>
         <p:spPr>
           <a:xfrm>
             <a:off x="8074152" y="1563624"/>
-            <a:ext cx="2825496" cy="201168"/>
+            <a:ext cx="2825496" cy="256032"/>
           </a:xfrm>
           <a:prstGeom prst="rect">
             <a:avLst/>
@@ -7228,7 +7579,7 @@
               <a:buNone/>
             </a:pPr>
             <a:r>
-              <a:rPr lang="en-US" sz="950" b="1" dirty="0">
+              <a:rPr lang="en-US" sz="1300" b="1" dirty="0">
                 <a:solidFill>
                   <a:srgbClr val="0068B7"/>
                 </a:solidFill>
@@ -7238,20 +7589,20 @@
               </a:rPr>
               <a:t>Key idea</a:t>
             </a:r>
-            <a:endParaRPr lang="en-US" sz="950" dirty="0"/>
-          </a:p>
-        </p:txBody>
-      </p:sp>
-      <p:sp>
-        <p:nvSpPr>
-          <p:cNvPr id="13" name="Text 11"/>
-          <p:cNvSpPr/>
-          <p:nvPr/>
-        </p:nvSpPr>
-        <p:spPr>
-          <a:xfrm>
-            <a:off x="8074152" y="1856232"/>
-            <a:ext cx="2825496" cy="1261872"/>
+            <a:endParaRPr lang="en-US" sz="1300" dirty="0"/>
+          </a:p>
+        </p:txBody>
+      </p:sp>
+      <p:sp>
+        <p:nvSpPr>
+          <p:cNvPr id="14" name="Text 12"/>
+          <p:cNvSpPr/>
+          <p:nvPr/>
+        </p:nvSpPr>
+        <p:spPr>
+          <a:xfrm>
+            <a:off x="8074152" y="1920240"/>
+            <a:ext cx="2825496" cy="1188720"/>
           </a:xfrm>
           <a:prstGeom prst="rect">
             <a:avLst/>
@@ -7269,7 +7620,7 @@
               <a:buNone/>
             </a:pPr>
             <a:r>
-              <a:rPr lang="en-US" sz="1250" dirty="0">
+              <a:rPr lang="en-US" sz="1550" dirty="0">
                 <a:solidFill>
                   <a:srgbClr val="17364A"/>
                 </a:solidFill>
@@ -7279,13 +7630,13 @@
               </a:rPr>
               <a:t>AI project charter</a:t>
             </a:r>
-            <a:endParaRPr lang="en-US" sz="1250" dirty="0"/>
-          </a:p>
-        </p:txBody>
-      </p:sp>
-      <p:sp>
-        <p:nvSpPr>
-          <p:cNvPr id="14" name="Shape 12"/>
+            <a:endParaRPr lang="en-US" sz="1550" dirty="0"/>
+          </a:p>
+        </p:txBody>
+      </p:sp>
+      <p:sp>
+        <p:nvSpPr>
+          <p:cNvPr id="15" name="Shape 13"/>
           <p:cNvSpPr/>
           <p:nvPr/>
         </p:nvSpPr>
@@ -7312,14 +7663,14 @@
       </p:sp>
       <p:sp>
         <p:nvSpPr>
-          <p:cNvPr id="15" name="Text 13"/>
+          <p:cNvPr id="16" name="Text 14"/>
           <p:cNvSpPr/>
           <p:nvPr/>
         </p:nvSpPr>
         <p:spPr>
           <a:xfrm>
             <a:off x="8074152" y="3666744"/>
-            <a:ext cx="2825496" cy="201168"/>
+            <a:ext cx="2825496" cy="256032"/>
           </a:xfrm>
           <a:prstGeom prst="rect">
             <a:avLst/>
@@ -7335,7 +7686,7 @@
               <a:buNone/>
             </a:pPr>
             <a:r>
-              <a:rPr lang="en-US" sz="950" b="1" dirty="0">
+              <a:rPr lang="en-US" sz="1300" b="1" dirty="0">
                 <a:solidFill>
                   <a:srgbClr val="0068B7"/>
                 </a:solidFill>
@@ -7345,20 +7696,20 @@
               </a:rPr>
               <a:t>Use this for</a:t>
             </a:r>
-            <a:endParaRPr lang="en-US" sz="950" dirty="0"/>
-          </a:p>
-        </p:txBody>
-      </p:sp>
-      <p:sp>
-        <p:nvSpPr>
-          <p:cNvPr id="16" name="Text 14"/>
-          <p:cNvSpPr/>
-          <p:nvPr/>
-        </p:nvSpPr>
-        <p:spPr>
-          <a:xfrm>
-            <a:off x="8074152" y="3959352"/>
-            <a:ext cx="2825496" cy="1170432"/>
+            <a:endParaRPr lang="en-US" sz="1300" dirty="0"/>
+          </a:p>
+        </p:txBody>
+      </p:sp>
+      <p:sp>
+        <p:nvSpPr>
+          <p:cNvPr id="17" name="Text 15"/>
+          <p:cNvSpPr/>
+          <p:nvPr/>
+        </p:nvSpPr>
+        <p:spPr>
+          <a:xfrm>
+            <a:off x="8074152" y="4023360"/>
+            <a:ext cx="2825496" cy="1097280"/>
           </a:xfrm>
           <a:prstGeom prst="rect">
             <a:avLst/>
@@ -7376,7 +7727,7 @@
               <a:buNone/>
             </a:pPr>
             <a:r>
-              <a:rPr lang="en-US" sz="1250" dirty="0">
+              <a:rPr lang="en-US" sz="1550" dirty="0">
                 <a:solidFill>
                   <a:srgbClr val="17364A"/>
                 </a:solidFill>
@@ -7386,7 +7737,7 @@
               </a:rPr>
               <a:t>Connect the concept to public health decisions, safeguards, documentation, or implementation work.</a:t>
             </a:r>
-            <a:endParaRPr lang="en-US" sz="1250" dirty="0"/>
+            <a:endParaRPr lang="en-US" sz="1550" dirty="0"/>
           </a:p>
         </p:txBody>
       </p:sp>
@@ -7583,7 +7934,7 @@
                 <a:ea typeface="Aptos" pitchFamily="34" charset="-122"/>
                 <a:cs typeface="Aptos" pitchFamily="34" charset="-120"/>
               </a:rPr>
-              <a:t>© Paula Soper</a:t>
+              <a:t>Â© Paula Soper</a:t>
             </a:r>
             <a:endParaRPr lang="en-US" sz="800" dirty="0"/>
           </a:p>
@@ -7597,8 +7948,47 @@
         </p:nvSpPr>
         <p:spPr>
           <a:xfrm>
+            <a:off x="11137392" y="6510528"/>
+            <a:ext cx="411480" cy="201168"/>
+          </a:xfrm>
+          <a:prstGeom prst="rect">
+            <a:avLst/>
+          </a:prstGeom>
+          <a:noFill/>
+          <a:ln/>
+        </p:spPr>
+        <p:txBody>
+          <a:bodyPr wrap="square" lIns="0" tIns="0" rIns="0" bIns="0" rtlCol="0" anchor="ctr"/>
+          <a:lstStyle/>
+          <a:p>
+            <a:pPr algn="r" indent="0" marL="0">
+              <a:buNone/>
+            </a:pPr>
+            <a:r>
+              <a:rPr lang="en-US" sz="900" dirty="0">
+                <a:solidFill>
+                  <a:srgbClr val="5F7181"/>
+                </a:solidFill>
+                <a:latin typeface="Aptos" pitchFamily="34" charset="0"/>
+                <a:ea typeface="Aptos" pitchFamily="34" charset="-122"/>
+                <a:cs typeface="Aptos" pitchFamily="34" charset="-120"/>
+              </a:rPr>
+              <a:t>18</a:t>
+            </a:r>
+            <a:endParaRPr lang="en-US" sz="900" dirty="0"/>
+          </a:p>
+        </p:txBody>
+      </p:sp>
+      <p:sp>
+        <p:nvSpPr>
+          <p:cNvPr id="8" name="Text 6"/>
+          <p:cNvSpPr/>
+          <p:nvPr/>
+        </p:nvSpPr>
+        <p:spPr>
+          <a:xfrm>
             <a:off x="640080" y="658368"/>
-            <a:ext cx="10881360" cy="566928"/>
+            <a:ext cx="10881360" cy="713232"/>
           </a:xfrm>
           <a:prstGeom prst="rect">
             <a:avLst/>
@@ -7616,7 +8006,7 @@
               <a:buNone/>
             </a:pPr>
             <a:r>
-              <a:rPr lang="en-US" sz="2700" b="1" dirty="0">
+              <a:rPr lang="en-US" sz="3400" b="1" dirty="0">
                 <a:solidFill>
                   <a:srgbClr val="003A63"/>
                 </a:solidFill>
@@ -7626,20 +8016,20 @@
               </a:rPr>
               <a:t>Expected Artifact or Evidence Continued</a:t>
             </a:r>
-            <a:endParaRPr lang="en-US" sz="2700" dirty="0"/>
-          </a:p>
-        </p:txBody>
-      </p:sp>
-      <p:sp>
-        <p:nvSpPr>
-          <p:cNvPr id="8" name="Text 6"/>
-          <p:cNvSpPr/>
-          <p:nvPr/>
-        </p:nvSpPr>
-        <p:spPr>
-          <a:xfrm>
-            <a:off x="868680" y="1417320"/>
-            <a:ext cx="6675120" cy="4434840"/>
+            <a:endParaRPr lang="en-US" sz="3400" dirty="0"/>
+          </a:p>
+        </p:txBody>
+      </p:sp>
+      <p:sp>
+        <p:nvSpPr>
+          <p:cNvPr id="9" name="Text 7"/>
+          <p:cNvSpPr/>
+          <p:nvPr/>
+        </p:nvSpPr>
+        <p:spPr>
+          <a:xfrm>
+            <a:off x="868680" y="1508760"/>
+            <a:ext cx="6537960" cy="4160520"/>
           </a:xfrm>
           <a:prstGeom prst="rect">
             <a:avLst/>
@@ -7654,7 +8044,7 @@
           <a:lstStyle/>
           <a:p>
             <a:r>
-              <a:rPr lang="en-US" sz="1700" dirty="0">
+              <a:rPr lang="en-US" sz="2100" dirty="0">
                 <a:solidFill>
                   <a:srgbClr val="17364A"/>
                 </a:solidFill>
@@ -7664,11 +8054,11 @@
               </a:rPr>
               <a:t>Launch readiness checklist</a:t>
             </a:r>
-            <a:endParaRPr lang="en-US" sz="1700" dirty="0"/>
-          </a:p>
-          <a:p>
-            <a:r>
-              <a:rPr lang="en-US" sz="1700" dirty="0">
+            <a:endParaRPr lang="en-US" sz="2100" dirty="0"/>
+          </a:p>
+          <a:p>
+            <a:r>
+              <a:rPr lang="en-US" sz="2100" dirty="0">
                 <a:solidFill>
                   <a:srgbClr val="17364A"/>
                 </a:solidFill>
@@ -7678,13 +8068,13 @@
               </a:rPr>
               <a:t>Transition-to-operations plan</a:t>
             </a:r>
-            <a:endParaRPr lang="en-US" sz="1700" dirty="0"/>
-          </a:p>
-        </p:txBody>
-      </p:sp>
-      <p:sp>
-        <p:nvSpPr>
-          <p:cNvPr id="9" name="Shape 7"/>
+            <a:endParaRPr lang="en-US" sz="2100" dirty="0"/>
+          </a:p>
+        </p:txBody>
+      </p:sp>
+      <p:sp>
+        <p:nvSpPr>
+          <p:cNvPr id="10" name="Shape 8"/>
           <p:cNvSpPr/>
           <p:nvPr/>
         </p:nvSpPr>
@@ -7711,14 +8101,14 @@
       </p:sp>
       <p:sp>
         <p:nvSpPr>
-          <p:cNvPr id="10" name="Text 8"/>
+          <p:cNvPr id="11" name="Text 9"/>
           <p:cNvSpPr/>
           <p:nvPr/>
         </p:nvSpPr>
         <p:spPr>
           <a:xfrm>
             <a:off x="8074152" y="1563624"/>
-            <a:ext cx="2825496" cy="201168"/>
+            <a:ext cx="2825496" cy="256032"/>
           </a:xfrm>
           <a:prstGeom prst="rect">
             <a:avLst/>
@@ -7734,7 +8124,7 @@
               <a:buNone/>
             </a:pPr>
             <a:r>
-              <a:rPr lang="en-US" sz="950" b="1" dirty="0">
+              <a:rPr lang="en-US" sz="1300" b="1" dirty="0">
                 <a:solidFill>
                   <a:srgbClr val="0068B7"/>
                 </a:solidFill>
@@ -7744,20 +8134,20 @@
               </a:rPr>
               <a:t>Key idea</a:t>
             </a:r>
-            <a:endParaRPr lang="en-US" sz="950" dirty="0"/>
-          </a:p>
-        </p:txBody>
-      </p:sp>
-      <p:sp>
-        <p:nvSpPr>
-          <p:cNvPr id="11" name="Text 9"/>
-          <p:cNvSpPr/>
-          <p:nvPr/>
-        </p:nvSpPr>
-        <p:spPr>
-          <a:xfrm>
-            <a:off x="8074152" y="1856232"/>
-            <a:ext cx="2825496" cy="1261872"/>
+            <a:endParaRPr lang="en-US" sz="1300" dirty="0"/>
+          </a:p>
+        </p:txBody>
+      </p:sp>
+      <p:sp>
+        <p:nvSpPr>
+          <p:cNvPr id="12" name="Text 10"/>
+          <p:cNvSpPr/>
+          <p:nvPr/>
+        </p:nvSpPr>
+        <p:spPr>
+          <a:xfrm>
+            <a:off x="8074152" y="1920240"/>
+            <a:ext cx="2825496" cy="1188720"/>
           </a:xfrm>
           <a:prstGeom prst="rect">
             <a:avLst/>
@@ -7775,7 +8165,7 @@
               <a:buNone/>
             </a:pPr>
             <a:r>
-              <a:rPr lang="en-US" sz="1250" dirty="0">
+              <a:rPr lang="en-US" sz="1550" dirty="0">
                 <a:solidFill>
                   <a:srgbClr val="17364A"/>
                 </a:solidFill>
@@ -7785,13 +8175,13 @@
               </a:rPr>
               <a:t>Launch readiness checklist</a:t>
             </a:r>
-            <a:endParaRPr lang="en-US" sz="1250" dirty="0"/>
-          </a:p>
-        </p:txBody>
-      </p:sp>
-      <p:sp>
-        <p:nvSpPr>
-          <p:cNvPr id="12" name="Shape 10"/>
+            <a:endParaRPr lang="en-US" sz="1550" dirty="0"/>
+          </a:p>
+        </p:txBody>
+      </p:sp>
+      <p:sp>
+        <p:nvSpPr>
+          <p:cNvPr id="13" name="Shape 11"/>
           <p:cNvSpPr/>
           <p:nvPr/>
         </p:nvSpPr>
@@ -7818,14 +8208,14 @@
       </p:sp>
       <p:sp>
         <p:nvSpPr>
-          <p:cNvPr id="13" name="Text 11"/>
+          <p:cNvPr id="14" name="Text 12"/>
           <p:cNvSpPr/>
           <p:nvPr/>
         </p:nvSpPr>
         <p:spPr>
           <a:xfrm>
             <a:off x="8074152" y="3666744"/>
-            <a:ext cx="2825496" cy="201168"/>
+            <a:ext cx="2825496" cy="256032"/>
           </a:xfrm>
           <a:prstGeom prst="rect">
             <a:avLst/>
@@ -7841,7 +8231,7 @@
               <a:buNone/>
             </a:pPr>
             <a:r>
-              <a:rPr lang="en-US" sz="950" b="1" dirty="0">
+              <a:rPr lang="en-US" sz="1300" b="1" dirty="0">
                 <a:solidFill>
                   <a:srgbClr val="0068B7"/>
                 </a:solidFill>
@@ -7851,20 +8241,20 @@
               </a:rPr>
               <a:t>Use this for</a:t>
             </a:r>
-            <a:endParaRPr lang="en-US" sz="950" dirty="0"/>
-          </a:p>
-        </p:txBody>
-      </p:sp>
-      <p:sp>
-        <p:nvSpPr>
-          <p:cNvPr id="14" name="Text 12"/>
-          <p:cNvSpPr/>
-          <p:nvPr/>
-        </p:nvSpPr>
-        <p:spPr>
-          <a:xfrm>
-            <a:off x="8074152" y="3959352"/>
-            <a:ext cx="2825496" cy="1170432"/>
+            <a:endParaRPr lang="en-US" sz="1300" dirty="0"/>
+          </a:p>
+        </p:txBody>
+      </p:sp>
+      <p:sp>
+        <p:nvSpPr>
+          <p:cNvPr id="15" name="Text 13"/>
+          <p:cNvSpPr/>
+          <p:nvPr/>
+        </p:nvSpPr>
+        <p:spPr>
+          <a:xfrm>
+            <a:off x="8074152" y="4023360"/>
+            <a:ext cx="2825496" cy="1097280"/>
           </a:xfrm>
           <a:prstGeom prst="rect">
             <a:avLst/>
@@ -7882,7 +8272,7 @@
               <a:buNone/>
             </a:pPr>
             <a:r>
-              <a:rPr lang="en-US" sz="1250" dirty="0">
+              <a:rPr lang="en-US" sz="1550" dirty="0">
                 <a:solidFill>
                   <a:srgbClr val="17364A"/>
                 </a:solidFill>
@@ -7892,7 +8282,7 @@
               </a:rPr>
               <a:t>Connect the concept to public health decisions, safeguards, documentation, or implementation work.</a:t>
             </a:r>
-            <a:endParaRPr lang="en-US" sz="1250" dirty="0"/>
+            <a:endParaRPr lang="en-US" sz="1550" dirty="0"/>
           </a:p>
         </p:txBody>
       </p:sp>
@@ -8089,7 +8479,7 @@
                 <a:ea typeface="Aptos" pitchFamily="34" charset="-122"/>
                 <a:cs typeface="Aptos" pitchFamily="34" charset="-120"/>
               </a:rPr>
-              <a:t>© Paula Soper</a:t>
+              <a:t>Â© Paula Soper</a:t>
             </a:r>
             <a:endParaRPr lang="en-US" sz="800" dirty="0"/>
           </a:p>
@@ -8097,7 +8487,46 @@
       </p:sp>
       <p:sp>
         <p:nvSpPr>
-          <p:cNvPr id="7" name="Shape 5"/>
+          <p:cNvPr id="7" name="Text 5"/>
+          <p:cNvSpPr/>
+          <p:nvPr/>
+        </p:nvSpPr>
+        <p:spPr>
+          <a:xfrm>
+            <a:off x="11137392" y="6510528"/>
+            <a:ext cx="411480" cy="201168"/>
+          </a:xfrm>
+          <a:prstGeom prst="rect">
+            <a:avLst/>
+          </a:prstGeom>
+          <a:noFill/>
+          <a:ln/>
+        </p:spPr>
+        <p:txBody>
+          <a:bodyPr wrap="square" lIns="0" tIns="0" rIns="0" bIns="0" rtlCol="0" anchor="ctr"/>
+          <a:lstStyle/>
+          <a:p>
+            <a:pPr algn="r" indent="0" marL="0">
+              <a:buNone/>
+            </a:pPr>
+            <a:r>
+              <a:rPr lang="en-US" sz="900" dirty="0">
+                <a:solidFill>
+                  <a:srgbClr val="5F7181"/>
+                </a:solidFill>
+                <a:latin typeface="Aptos" pitchFamily="34" charset="0"/>
+                <a:ea typeface="Aptos" pitchFamily="34" charset="-122"/>
+                <a:cs typeface="Aptos" pitchFamily="34" charset="-120"/>
+              </a:rPr>
+              <a:t>19</a:t>
+            </a:r>
+            <a:endParaRPr lang="en-US" sz="900" dirty="0"/>
+          </a:p>
+        </p:txBody>
+      </p:sp>
+      <p:sp>
+        <p:nvSpPr>
+          <p:cNvPr id="8" name="Shape 6"/>
           <p:cNvSpPr/>
           <p:nvPr/>
         </p:nvSpPr>
@@ -8122,7 +8551,7 @@
       </p:sp>
       <p:sp>
         <p:nvSpPr>
-          <p:cNvPr id="8" name="Text 6"/>
+          <p:cNvPr id="9" name="Text 7"/>
           <p:cNvSpPr/>
           <p:nvPr/>
         </p:nvSpPr>
@@ -8161,14 +8590,14 @@
       </p:sp>
       <p:sp>
         <p:nvSpPr>
-          <p:cNvPr id="9" name="Text 7"/>
+          <p:cNvPr id="10" name="Text 8"/>
           <p:cNvSpPr/>
           <p:nvPr/>
         </p:nvSpPr>
         <p:spPr>
           <a:xfrm>
             <a:off x="640080" y="621792"/>
-            <a:ext cx="10881360" cy="566928"/>
+            <a:ext cx="10881360" cy="713232"/>
           </a:xfrm>
           <a:prstGeom prst="rect">
             <a:avLst/>
@@ -8186,7 +8615,7 @@
               <a:buNone/>
             </a:pPr>
             <a:r>
-              <a:rPr lang="en-US" sz="2700" b="1" dirty="0">
+              <a:rPr lang="en-US" sz="3400" b="1" dirty="0">
                 <a:solidFill>
                   <a:srgbClr val="003A63"/>
                 </a:solidFill>
@@ -8196,20 +8625,20 @@
               </a:rPr>
               <a:t>Expected Assignment</a:t>
             </a:r>
-            <a:endParaRPr lang="en-US" sz="2700" dirty="0"/>
-          </a:p>
-        </p:txBody>
-      </p:sp>
-      <p:sp>
-        <p:nvSpPr>
-          <p:cNvPr id="10" name="Text 8"/>
-          <p:cNvSpPr/>
-          <p:nvPr/>
-        </p:nvSpPr>
-        <p:spPr>
-          <a:xfrm>
-            <a:off x="868680" y="1417320"/>
-            <a:ext cx="6675120" cy="4434840"/>
+            <a:endParaRPr lang="en-US" sz="3400" dirty="0"/>
+          </a:p>
+        </p:txBody>
+      </p:sp>
+      <p:sp>
+        <p:nvSpPr>
+          <p:cNvPr id="11" name="Text 9"/>
+          <p:cNvSpPr/>
+          <p:nvPr/>
+        </p:nvSpPr>
+        <p:spPr>
+          <a:xfrm>
+            <a:off x="868680" y="1508760"/>
+            <a:ext cx="6537960" cy="4160520"/>
           </a:xfrm>
           <a:prstGeom prst="rect">
             <a:avLst/>
@@ -8224,7 +8653,7 @@
           <a:lstStyle/>
           <a:p>
             <a:r>
-              <a:rPr lang="en-US" sz="1700" dirty="0">
+              <a:rPr lang="en-US" sz="2100" dirty="0">
                 <a:solidFill>
                   <a:srgbClr val="17364A"/>
                 </a:solidFill>
@@ -8234,11 +8663,11 @@
               </a:rPr>
               <a:t>AI project charter</a:t>
             </a:r>
-            <a:endParaRPr lang="en-US" sz="1700" dirty="0"/>
-          </a:p>
-          <a:p>
-            <a:r>
-              <a:rPr lang="en-US" sz="1700" dirty="0">
+            <a:endParaRPr lang="en-US" sz="2100" dirty="0"/>
+          </a:p>
+          <a:p>
+            <a:r>
+              <a:rPr lang="en-US" sz="2100" dirty="0">
                 <a:solidFill>
                   <a:srgbClr val="17364A"/>
                 </a:solidFill>
@@ -8248,11 +8677,11 @@
               </a:rPr>
               <a:t>Implementation workplan</a:t>
             </a:r>
-            <a:endParaRPr lang="en-US" sz="1700" dirty="0"/>
-          </a:p>
-          <a:p>
-            <a:r>
-              <a:rPr lang="en-US" sz="1700" dirty="0">
+            <a:endParaRPr lang="en-US" sz="2100" dirty="0"/>
+          </a:p>
+          <a:p>
+            <a:r>
+              <a:rPr lang="en-US" sz="2100" dirty="0">
                 <a:solidFill>
                   <a:srgbClr val="17364A"/>
                 </a:solidFill>
@@ -8262,27 +8691,13 @@
               </a:rPr>
               <a:t>AI-specific risk log</a:t>
             </a:r>
-            <a:endParaRPr lang="en-US" sz="1700" dirty="0"/>
-          </a:p>
-          <a:p>
-            <a:r>
-              <a:rPr lang="en-US" sz="1700" dirty="0">
-                <a:solidFill>
-                  <a:srgbClr val="17364A"/>
-                </a:solidFill>
-                <a:latin typeface="Aptos" pitchFamily="34" charset="0"/>
-                <a:ea typeface="Aptos" pitchFamily="34" charset="-122"/>
-                <a:cs typeface="Aptos" pitchFamily="34" charset="-120"/>
-              </a:rPr>
-              <a:t>Launch readiness checklist</a:t>
-            </a:r>
-            <a:endParaRPr lang="en-US" sz="1700" dirty="0"/>
-          </a:p>
-        </p:txBody>
-      </p:sp>
-      <p:sp>
-        <p:nvSpPr>
-          <p:cNvPr id="11" name="Shape 9"/>
+            <a:endParaRPr lang="en-US" sz="2100" dirty="0"/>
+          </a:p>
+        </p:txBody>
+      </p:sp>
+      <p:sp>
+        <p:nvSpPr>
+          <p:cNvPr id="12" name="Shape 10"/>
           <p:cNvSpPr/>
           <p:nvPr/>
         </p:nvSpPr>
@@ -8309,14 +8724,14 @@
       </p:sp>
       <p:sp>
         <p:nvSpPr>
-          <p:cNvPr id="12" name="Text 10"/>
+          <p:cNvPr id="13" name="Text 11"/>
           <p:cNvSpPr/>
           <p:nvPr/>
         </p:nvSpPr>
         <p:spPr>
           <a:xfrm>
             <a:off x="8074152" y="1563624"/>
-            <a:ext cx="2825496" cy="201168"/>
+            <a:ext cx="2825496" cy="256032"/>
           </a:xfrm>
           <a:prstGeom prst="rect">
             <a:avLst/>
@@ -8332,7 +8747,7 @@
               <a:buNone/>
             </a:pPr>
             <a:r>
-              <a:rPr lang="en-US" sz="950" b="1" dirty="0">
+              <a:rPr lang="en-US" sz="1300" b="1" dirty="0">
                 <a:solidFill>
                   <a:srgbClr val="0068B7"/>
                 </a:solidFill>
@@ -8342,20 +8757,20 @@
               </a:rPr>
               <a:t>Key idea</a:t>
             </a:r>
-            <a:endParaRPr lang="en-US" sz="950" dirty="0"/>
-          </a:p>
-        </p:txBody>
-      </p:sp>
-      <p:sp>
-        <p:nvSpPr>
-          <p:cNvPr id="13" name="Text 11"/>
-          <p:cNvSpPr/>
-          <p:nvPr/>
-        </p:nvSpPr>
-        <p:spPr>
-          <a:xfrm>
-            <a:off x="8074152" y="1856232"/>
-            <a:ext cx="2825496" cy="1261872"/>
+            <a:endParaRPr lang="en-US" sz="1300" dirty="0"/>
+          </a:p>
+        </p:txBody>
+      </p:sp>
+      <p:sp>
+        <p:nvSpPr>
+          <p:cNvPr id="14" name="Text 12"/>
+          <p:cNvSpPr/>
+          <p:nvPr/>
+        </p:nvSpPr>
+        <p:spPr>
+          <a:xfrm>
+            <a:off x="8074152" y="1920240"/>
+            <a:ext cx="2825496" cy="1188720"/>
           </a:xfrm>
           <a:prstGeom prst="rect">
             <a:avLst/>
@@ -8373,7 +8788,7 @@
               <a:buNone/>
             </a:pPr>
             <a:r>
-              <a:rPr lang="en-US" sz="1250" dirty="0">
+              <a:rPr lang="en-US" sz="1550" dirty="0">
                 <a:solidFill>
                   <a:srgbClr val="17364A"/>
                 </a:solidFill>
@@ -8383,13 +8798,13 @@
               </a:rPr>
               <a:t>AI project charter</a:t>
             </a:r>
-            <a:endParaRPr lang="en-US" sz="1250" dirty="0"/>
-          </a:p>
-        </p:txBody>
-      </p:sp>
-      <p:sp>
-        <p:nvSpPr>
-          <p:cNvPr id="14" name="Shape 12"/>
+            <a:endParaRPr lang="en-US" sz="1550" dirty="0"/>
+          </a:p>
+        </p:txBody>
+      </p:sp>
+      <p:sp>
+        <p:nvSpPr>
+          <p:cNvPr id="15" name="Shape 13"/>
           <p:cNvSpPr/>
           <p:nvPr/>
         </p:nvSpPr>
@@ -8416,14 +8831,14 @@
       </p:sp>
       <p:sp>
         <p:nvSpPr>
-          <p:cNvPr id="15" name="Text 13"/>
+          <p:cNvPr id="16" name="Text 14"/>
           <p:cNvSpPr/>
           <p:nvPr/>
         </p:nvSpPr>
         <p:spPr>
           <a:xfrm>
             <a:off x="8074152" y="3666744"/>
-            <a:ext cx="2825496" cy="201168"/>
+            <a:ext cx="2825496" cy="256032"/>
           </a:xfrm>
           <a:prstGeom prst="rect">
             <a:avLst/>
@@ -8439,7 +8854,7 @@
               <a:buNone/>
             </a:pPr>
             <a:r>
-              <a:rPr lang="en-US" sz="950" b="1" dirty="0">
+              <a:rPr lang="en-US" sz="1300" b="1" dirty="0">
                 <a:solidFill>
                   <a:srgbClr val="0068B7"/>
                 </a:solidFill>
@@ -8449,20 +8864,20 @@
               </a:rPr>
               <a:t>Use this for</a:t>
             </a:r>
-            <a:endParaRPr lang="en-US" sz="950" dirty="0"/>
-          </a:p>
-        </p:txBody>
-      </p:sp>
-      <p:sp>
-        <p:nvSpPr>
-          <p:cNvPr id="16" name="Text 14"/>
-          <p:cNvSpPr/>
-          <p:nvPr/>
-        </p:nvSpPr>
-        <p:spPr>
-          <a:xfrm>
-            <a:off x="8074152" y="3959352"/>
-            <a:ext cx="2825496" cy="1170432"/>
+            <a:endParaRPr lang="en-US" sz="1300" dirty="0"/>
+          </a:p>
+        </p:txBody>
+      </p:sp>
+      <p:sp>
+        <p:nvSpPr>
+          <p:cNvPr id="17" name="Text 15"/>
+          <p:cNvSpPr/>
+          <p:nvPr/>
+        </p:nvSpPr>
+        <p:spPr>
+          <a:xfrm>
+            <a:off x="8074152" y="4023360"/>
+            <a:ext cx="2825496" cy="1097280"/>
           </a:xfrm>
           <a:prstGeom prst="rect">
             <a:avLst/>
@@ -8480,7 +8895,7 @@
               <a:buNone/>
             </a:pPr>
             <a:r>
-              <a:rPr lang="en-US" sz="1250" dirty="0">
+              <a:rPr lang="en-US" sz="1550" dirty="0">
                 <a:solidFill>
                   <a:srgbClr val="17364A"/>
                 </a:solidFill>
@@ -8490,7 +8905,7 @@
               </a:rPr>
               <a:t>Connect the concept to public health decisions, safeguards, documentation, or implementation work.</a:t>
             </a:r>
-            <a:endParaRPr lang="en-US" sz="1250" dirty="0"/>
+            <a:endParaRPr lang="en-US" sz="1550" dirty="0"/>
           </a:p>
         </p:txBody>
       </p:sp>
@@ -8687,7 +9102,7 @@
                 <a:ea typeface="Aptos" pitchFamily="34" charset="-122"/>
                 <a:cs typeface="Aptos" pitchFamily="34" charset="-120"/>
               </a:rPr>
-              <a:t>© Paula Soper</a:t>
+              <a:t>Â© Paula Soper</a:t>
             </a:r>
             <a:endParaRPr lang="en-US" sz="800" dirty="0"/>
           </a:p>
@@ -8701,8 +9116,47 @@
         </p:nvSpPr>
         <p:spPr>
           <a:xfrm>
+            <a:off x="11137392" y="6510528"/>
+            <a:ext cx="411480" cy="201168"/>
+          </a:xfrm>
+          <a:prstGeom prst="rect">
+            <a:avLst/>
+          </a:prstGeom>
+          <a:noFill/>
+          <a:ln/>
+        </p:spPr>
+        <p:txBody>
+          <a:bodyPr wrap="square" lIns="0" tIns="0" rIns="0" bIns="0" rtlCol="0" anchor="ctr"/>
+          <a:lstStyle/>
+          <a:p>
+            <a:pPr algn="r" indent="0" marL="0">
+              <a:buNone/>
+            </a:pPr>
+            <a:r>
+              <a:rPr lang="en-US" sz="900" dirty="0">
+                <a:solidFill>
+                  <a:srgbClr val="5F7181"/>
+                </a:solidFill>
+                <a:latin typeface="Aptos" pitchFamily="34" charset="0"/>
+                <a:ea typeface="Aptos" pitchFamily="34" charset="-122"/>
+                <a:cs typeface="Aptos" pitchFamily="34" charset="-120"/>
+              </a:rPr>
+              <a:t>2</a:t>
+            </a:r>
+            <a:endParaRPr lang="en-US" sz="900" dirty="0"/>
+          </a:p>
+        </p:txBody>
+      </p:sp>
+      <p:sp>
+        <p:nvSpPr>
+          <p:cNvPr id="8" name="Text 6"/>
+          <p:cNvSpPr/>
+          <p:nvPr/>
+        </p:nvSpPr>
+        <p:spPr>
+          <a:xfrm>
             <a:off x="640080" y="658368"/>
-            <a:ext cx="10881360" cy="566928"/>
+            <a:ext cx="10881360" cy="713232"/>
           </a:xfrm>
           <a:prstGeom prst="rect">
             <a:avLst/>
@@ -8720,7 +9174,7 @@
               <a:buNone/>
             </a:pPr>
             <a:r>
-              <a:rPr lang="en-US" sz="2700" b="1" dirty="0">
+              <a:rPr lang="en-US" sz="3400" b="1" dirty="0">
                 <a:solidFill>
                   <a:srgbClr val="003A63"/>
                 </a:solidFill>
@@ -8730,20 +9184,20 @@
               </a:rPr>
               <a:t>What this module helps you do</a:t>
             </a:r>
-            <a:endParaRPr lang="en-US" sz="2700" dirty="0"/>
-          </a:p>
-        </p:txBody>
-      </p:sp>
-      <p:sp>
-        <p:nvSpPr>
-          <p:cNvPr id="8" name="Text 6"/>
-          <p:cNvSpPr/>
-          <p:nvPr/>
-        </p:nvSpPr>
-        <p:spPr>
-          <a:xfrm>
-            <a:off x="868680" y="1417320"/>
-            <a:ext cx="6675120" cy="3291840"/>
+            <a:endParaRPr lang="en-US" sz="3400" dirty="0"/>
+          </a:p>
+        </p:txBody>
+      </p:sp>
+      <p:sp>
+        <p:nvSpPr>
+          <p:cNvPr id="9" name="Text 7"/>
+          <p:cNvSpPr/>
+          <p:nvPr/>
+        </p:nvSpPr>
+        <p:spPr>
+          <a:xfrm>
+            <a:off x="868680" y="1508760"/>
+            <a:ext cx="6446520" cy="2926080"/>
           </a:xfrm>
           <a:prstGeom prst="rect">
             <a:avLst/>
@@ -8758,7 +9212,7 @@
           <a:lstStyle/>
           <a:p>
             <a:r>
-              <a:rPr lang="en-US" sz="1700" dirty="0">
+              <a:rPr lang="en-US" sz="2100" dirty="0">
                 <a:solidFill>
                   <a:srgbClr val="17364A"/>
                 </a:solidFill>
@@ -8766,13 +9220,13 @@
                 <a:ea typeface="Aptos" pitchFamily="34" charset="-122"/>
                 <a:cs typeface="Aptos" pitchFamily="34" charset="-120"/>
               </a:rPr>
-              <a:t>AI projects require disciplined implementation planning because they combine technology, data, governance, workflow change, training, validation,.</a:t>
-            </a:r>
-            <a:endParaRPr lang="en-US" sz="1700" dirty="0"/>
-          </a:p>
-          <a:p>
-            <a:r>
-              <a:rPr lang="en-US" sz="1700" dirty="0">
+              <a:t>AI projects require disciplined implementation planning because they combine technology, data, governance,.</a:t>
+            </a:r>
+            <a:endParaRPr lang="en-US" sz="2100" dirty="0"/>
+          </a:p>
+          <a:p>
+            <a:r>
+              <a:rPr lang="en-US" sz="2100" dirty="0">
                 <a:solidFill>
                   <a:srgbClr val="17364A"/>
                 </a:solidFill>
@@ -8780,13 +9234,13 @@
                 <a:ea typeface="Aptos" pitchFamily="34" charset="-122"/>
                 <a:cs typeface="Aptos" pitchFamily="34" charset="-120"/>
               </a:rPr>
-              <a:t>A project that appears small, such as adding an AI summarization tool, may still require data access decisions, system integration, human review.</a:t>
-            </a:r>
-            <a:endParaRPr lang="en-US" sz="1700" dirty="0"/>
-          </a:p>
-          <a:p>
-            <a:r>
-              <a:rPr lang="en-US" sz="1700" dirty="0">
+              <a:t>A project that appears small, such as adding an AI summarization tool, may still require data access decisions,.</a:t>
+            </a:r>
+            <a:endParaRPr lang="en-US" sz="2100" dirty="0"/>
+          </a:p>
+          <a:p>
+            <a:r>
+              <a:rPr lang="en-US" sz="2100" dirty="0">
                 <a:solidFill>
                   <a:srgbClr val="17364A"/>
                 </a:solidFill>
@@ -8794,29 +9248,15 @@
                 <a:ea typeface="Aptos" pitchFamily="34" charset="-122"/>
                 <a:cs typeface="Aptos" pitchFamily="34" charset="-120"/>
               </a:rPr>
-              <a:t>Public health agencies need project management methods that account for these dependencies before implementation begins.</a:t>
-            </a:r>
-            <a:endParaRPr lang="en-US" sz="1700" dirty="0"/>
-          </a:p>
-          <a:p>
-            <a:r>
-              <a:rPr lang="en-US" sz="1700" dirty="0">
-                <a:solidFill>
-                  <a:srgbClr val="17364A"/>
-                </a:solidFill>
-                <a:latin typeface="Aptos" pitchFamily="34" charset="0"/>
-                <a:ea typeface="Aptos" pitchFamily="34" charset="-122"/>
-                <a:cs typeface="Aptos" pitchFamily="34" charset="-120"/>
-              </a:rPr>
-              <a:t>This module teaches program managers, product owners, implementation leads, and technical staff how to structure AI initiatives from concept through.</a:t>
-            </a:r>
-            <a:endParaRPr lang="en-US" sz="1700" dirty="0"/>
-          </a:p>
-        </p:txBody>
-      </p:sp>
-      <p:sp>
-        <p:nvSpPr>
-          <p:cNvPr id="9" name="Shape 7"/>
+              <a:t>Public health agencies need project management methods that account for these dependencies before implementation.</a:t>
+            </a:r>
+            <a:endParaRPr lang="en-US" sz="2100" dirty="0"/>
+          </a:p>
+        </p:txBody>
+      </p:sp>
+      <p:sp>
+        <p:nvSpPr>
+          <p:cNvPr id="10" name="Shape 8"/>
           <p:cNvSpPr/>
           <p:nvPr/>
         </p:nvSpPr>
@@ -8843,14 +9283,14 @@
       </p:sp>
       <p:sp>
         <p:nvSpPr>
-          <p:cNvPr id="10" name="Text 8"/>
+          <p:cNvPr id="11" name="Text 9"/>
           <p:cNvSpPr/>
           <p:nvPr/>
         </p:nvSpPr>
         <p:spPr>
           <a:xfrm>
             <a:off x="8074152" y="1563624"/>
-            <a:ext cx="2825496" cy="201168"/>
+            <a:ext cx="2825496" cy="256032"/>
           </a:xfrm>
           <a:prstGeom prst="rect">
             <a:avLst/>
@@ -8866,7 +9306,7 @@
               <a:buNone/>
             </a:pPr>
             <a:r>
-              <a:rPr lang="en-US" sz="950" b="1" dirty="0">
+              <a:rPr lang="en-US" sz="1300" b="1" dirty="0">
                 <a:solidFill>
                   <a:srgbClr val="0068B7"/>
                 </a:solidFill>
@@ -8876,20 +9316,20 @@
               </a:rPr>
               <a:t>Module details</a:t>
             </a:r>
-            <a:endParaRPr lang="en-US" sz="950" dirty="0"/>
-          </a:p>
-        </p:txBody>
-      </p:sp>
-      <p:sp>
-        <p:nvSpPr>
-          <p:cNvPr id="11" name="Text 9"/>
-          <p:cNvSpPr/>
-          <p:nvPr/>
-        </p:nvSpPr>
-        <p:spPr>
-          <a:xfrm>
-            <a:off x="8074152" y="1856232"/>
-            <a:ext cx="2825496" cy="1353312"/>
+            <a:endParaRPr lang="en-US" sz="1300" dirty="0"/>
+          </a:p>
+        </p:txBody>
+      </p:sp>
+      <p:sp>
+        <p:nvSpPr>
+          <p:cNvPr id="12" name="Text 10"/>
+          <p:cNvSpPr/>
+          <p:nvPr/>
+        </p:nvSpPr>
+        <p:spPr>
+          <a:xfrm>
+            <a:off x="8074152" y="1920240"/>
+            <a:ext cx="2825496" cy="1280160"/>
           </a:xfrm>
           <a:prstGeom prst="rect">
             <a:avLst/>
@@ -8907,7 +9347,7 @@
               <a:buNone/>
             </a:pPr>
             <a:r>
-              <a:rPr lang="en-US" sz="1250" dirty="0">
+              <a:rPr lang="en-US" sz="1550" dirty="0">
                 <a:solidFill>
                   <a:srgbClr val="17364A"/>
                 </a:solidFill>
@@ -8917,14 +9357,14 @@
               </a:rPr>
               <a:t>Level: applied/foundational</a:t>
             </a:r>
-            <a:endParaRPr lang="en-US" sz="1250" dirty="0"/>
+            <a:endParaRPr lang="en-US" sz="1550" dirty="0"/>
           </a:p>
           <a:p>
             <a:pPr indent="0" marL="0">
               <a:buNone/>
             </a:pPr>
             <a:r>
-              <a:rPr lang="en-US" sz="1250" dirty="0">
+              <a:rPr lang="en-US" sz="1550" dirty="0">
                 <a:solidFill>
                   <a:srgbClr val="17364A"/>
                 </a:solidFill>
@@ -8934,14 +9374,14 @@
               </a:rPr>
               <a:t>Primary track: Program Management Role-Based Track</a:t>
             </a:r>
-            <a:endParaRPr lang="en-US" sz="1250" dirty="0"/>
+            <a:endParaRPr lang="en-US" sz="1550" dirty="0"/>
           </a:p>
           <a:p>
             <a:pPr indent="0" marL="0">
               <a:buNone/>
             </a:pPr>
             <a:r>
-              <a:rPr lang="en-US" sz="1250" dirty="0">
+              <a:rPr lang="en-US" sz="1550" dirty="0">
                 <a:solidFill>
                   <a:srgbClr val="17364A"/>
                 </a:solidFill>
@@ -8951,32 +9391,32 @@
               </a:rPr>
               <a:t>Appears in tracks: program-management, operations-and-data-quality, technical-architecture, public-health-executive-leadership</a:t>
             </a:r>
-            <a:endParaRPr lang="en-US" sz="1250" dirty="0"/>
-          </a:p>
-        </p:txBody>
-      </p:sp>
-      <p:sp>
-        <p:nvSpPr>
-          <p:cNvPr id="12" name="Shape 10"/>
-          <p:cNvSpPr/>
-          <p:nvPr/>
-        </p:nvSpPr>
-        <p:spPr>
-          <a:xfrm>
-            <a:off x="7909560" y="3611880"/>
-            <a:ext cx="3154680" cy="1783080"/>
+            <a:endParaRPr lang="en-US" sz="1550" dirty="0"/>
+          </a:p>
+        </p:txBody>
+      </p:sp>
+      <p:sp>
+        <p:nvSpPr>
+          <p:cNvPr id="13" name="Shape 11"/>
+          <p:cNvSpPr/>
+          <p:nvPr/>
+        </p:nvSpPr>
+        <p:spPr>
+          <a:xfrm>
+            <a:off x="7635240" y="3730752"/>
+            <a:ext cx="1033272" cy="749808"/>
           </a:xfrm>
           <a:prstGeom prst="roundRect">
             <a:avLst>
-              <a:gd name="adj" fmla="val 6154"/>
+              <a:gd name="adj" fmla="val 14634"/>
             </a:avLst>
           </a:prstGeom>
           <a:solidFill>
-            <a:srgbClr val="EEF8ED"/>
+            <a:srgbClr val="0068B7"/>
           </a:solidFill>
           <a:ln w="12700">
             <a:solidFill>
-              <a:srgbClr val="B9D7E6"/>
+              <a:srgbClr val="0068B7"/>
             </a:solidFill>
             <a:prstDash val="solid"/>
           </a:ln>
@@ -8984,81 +9424,256 @@
       </p:sp>
       <p:sp>
         <p:nvSpPr>
-          <p:cNvPr id="13" name="Text 11"/>
-          <p:cNvSpPr/>
-          <p:nvPr/>
-        </p:nvSpPr>
-        <p:spPr>
-          <a:xfrm>
-            <a:off x="8074152" y="3758184"/>
-            <a:ext cx="2825496" cy="201168"/>
-          </a:xfrm>
-          <a:prstGeom prst="rect">
-            <a:avLst/>
-          </a:prstGeom>
-          <a:noFill/>
-          <a:ln/>
-        </p:spPr>
-        <p:txBody>
-          <a:bodyPr wrap="square" lIns="0" tIns="0" rIns="0" bIns="0" rtlCol="0" anchor="ctr"/>
-          <a:lstStyle/>
-          <a:p>
-            <a:pPr indent="0" marL="0">
-              <a:buNone/>
-            </a:pPr>
-            <a:r>
-              <a:rPr lang="en-US" sz="950" b="1" dirty="0">
-                <a:solidFill>
-                  <a:srgbClr val="0068B7"/>
-                </a:solidFill>
-                <a:latin typeface="Aptos" pitchFamily="34" charset="0"/>
-                <a:ea typeface="Aptos" pitchFamily="34" charset="-122"/>
-                <a:cs typeface="Aptos" pitchFamily="34" charset="-120"/>
-              </a:rPr>
-              <a:t>Learning approach</a:t>
-            </a:r>
-            <a:endParaRPr lang="en-US" sz="950" dirty="0"/>
-          </a:p>
-        </p:txBody>
-      </p:sp>
-      <p:sp>
-        <p:nvSpPr>
           <p:cNvPr id="14" name="Text 12"/>
           <p:cNvSpPr/>
           <p:nvPr/>
         </p:nvSpPr>
         <p:spPr>
           <a:xfrm>
-            <a:off x="8074152" y="4050792"/>
-            <a:ext cx="2825496" cy="1216152"/>
-          </a:xfrm>
-          <a:prstGeom prst="rect">
-            <a:avLst/>
-          </a:prstGeom>
-          <a:noFill/>
-          <a:ln/>
-        </p:spPr>
-        <p:txBody>
-          <a:bodyPr wrap="square" lIns="0" tIns="0" rIns="0" bIns="0" rtlCol="0" anchor="t">
+            <a:off x="7708392" y="3922776"/>
+            <a:ext cx="886968" cy="310896"/>
+          </a:xfrm>
+          <a:prstGeom prst="rect">
+            <a:avLst/>
+          </a:prstGeom>
+          <a:noFill/>
+          <a:ln/>
+        </p:spPr>
+        <p:txBody>
+          <a:bodyPr wrap="square" lIns="0" tIns="0" rIns="0" bIns="0" rtlCol="0" anchor="ctr">
             <a:normAutofit/>
           </a:bodyPr>
           <a:lstStyle/>
           <a:p>
-            <a:pPr indent="0" marL="0">
-              <a:buNone/>
-            </a:pPr>
-            <a:r>
-              <a:rPr lang="en-US" sz="1250" dirty="0">
-                <a:solidFill>
-                  <a:srgbClr val="17364A"/>
-                </a:solidFill>
-                <a:latin typeface="Aptos" pitchFamily="34" charset="0"/>
-                <a:ea typeface="Aptos" pitchFamily="34" charset="-122"/>
-                <a:cs typeface="Aptos" pitchFamily="34" charset="-120"/>
-              </a:rPr>
-              <a:t>Review the core ideas, complete the practical exercise, check your understanding, and use the related plays and tools to apply the lesson.</a:t>
-            </a:r>
-            <a:endParaRPr lang="en-US" sz="1250" dirty="0"/>
+            <a:pPr algn="ctr" indent="0" marL="0">
+              <a:buNone/>
+            </a:pPr>
+            <a:r>
+              <a:rPr lang="en-US" sz="1500" b="1" dirty="0">
+                <a:solidFill>
+                  <a:srgbClr val="FFFFFF"/>
+                </a:solidFill>
+                <a:latin typeface="Aptos" pitchFamily="34" charset="0"/>
+                <a:ea typeface="Aptos" pitchFamily="34" charset="-122"/>
+                <a:cs typeface="Aptos" pitchFamily="34" charset="-120"/>
+              </a:rPr>
+              <a:t>Learn</a:t>
+            </a:r>
+            <a:endParaRPr lang="en-US" sz="1500" dirty="0"/>
+          </a:p>
+        </p:txBody>
+      </p:sp>
+      <p:sp>
+        <p:nvSpPr>
+          <p:cNvPr id="15" name="Text 13"/>
+          <p:cNvSpPr/>
+          <p:nvPr/>
+        </p:nvSpPr>
+        <p:spPr>
+          <a:xfrm>
+            <a:off x="8695944" y="3941064"/>
+            <a:ext cx="201168" cy="256032"/>
+          </a:xfrm>
+          <a:prstGeom prst="rect">
+            <a:avLst/>
+          </a:prstGeom>
+          <a:noFill/>
+          <a:ln/>
+        </p:spPr>
+        <p:txBody>
+          <a:bodyPr wrap="square" lIns="0" tIns="0" rIns="0" bIns="0" rtlCol="0" anchor="ctr"/>
+          <a:lstStyle/>
+          <a:p>
+            <a:pPr algn="ctr" indent="0" marL="0">
+              <a:buNone/>
+            </a:pPr>
+            <a:r>
+              <a:rPr lang="en-US" sz="1800" b="1" dirty="0">
+                <a:solidFill>
+                  <a:srgbClr val="0068B7"/>
+                </a:solidFill>
+                <a:latin typeface="Aptos" pitchFamily="34" charset="0"/>
+                <a:ea typeface="Aptos" pitchFamily="34" charset="-122"/>
+                <a:cs typeface="Aptos" pitchFamily="34" charset="-120"/>
+              </a:rPr>
+              <a:t>â†’</a:t>
+            </a:r>
+            <a:endParaRPr lang="en-US" sz="1800" dirty="0"/>
+          </a:p>
+        </p:txBody>
+      </p:sp>
+      <p:sp>
+        <p:nvSpPr>
+          <p:cNvPr id="16" name="Shape 14"/>
+          <p:cNvSpPr/>
+          <p:nvPr/>
+        </p:nvSpPr>
+        <p:spPr>
+          <a:xfrm>
+            <a:off x="8924544" y="3730752"/>
+            <a:ext cx="1033272" cy="749808"/>
+          </a:xfrm>
+          <a:prstGeom prst="roundRect">
+            <a:avLst>
+              <a:gd name="adj" fmla="val 14634"/>
+            </a:avLst>
+          </a:prstGeom>
+          <a:solidFill>
+            <a:srgbClr val="2F8A28"/>
+          </a:solidFill>
+          <a:ln w="12700">
+            <a:solidFill>
+              <a:srgbClr val="2F8A28"/>
+            </a:solidFill>
+            <a:prstDash val="solid"/>
+          </a:ln>
+        </p:spPr>
+      </p:sp>
+      <p:sp>
+        <p:nvSpPr>
+          <p:cNvPr id="17" name="Text 15"/>
+          <p:cNvSpPr/>
+          <p:nvPr/>
+        </p:nvSpPr>
+        <p:spPr>
+          <a:xfrm>
+            <a:off x="8997696" y="3922776"/>
+            <a:ext cx="886968" cy="310896"/>
+          </a:xfrm>
+          <a:prstGeom prst="rect">
+            <a:avLst/>
+          </a:prstGeom>
+          <a:noFill/>
+          <a:ln/>
+        </p:spPr>
+        <p:txBody>
+          <a:bodyPr wrap="square" lIns="0" tIns="0" rIns="0" bIns="0" rtlCol="0" anchor="ctr">
+            <a:normAutofit/>
+          </a:bodyPr>
+          <a:lstStyle/>
+          <a:p>
+            <a:pPr algn="ctr" indent="0" marL="0">
+              <a:buNone/>
+            </a:pPr>
+            <a:r>
+              <a:rPr lang="en-US" sz="1500" b="1" dirty="0">
+                <a:solidFill>
+                  <a:srgbClr val="FFFFFF"/>
+                </a:solidFill>
+                <a:latin typeface="Aptos" pitchFamily="34" charset="0"/>
+                <a:ea typeface="Aptos" pitchFamily="34" charset="-122"/>
+                <a:cs typeface="Aptos" pitchFamily="34" charset="-120"/>
+              </a:rPr>
+              <a:t>Apply</a:t>
+            </a:r>
+            <a:endParaRPr lang="en-US" sz="1500" dirty="0"/>
+          </a:p>
+        </p:txBody>
+      </p:sp>
+      <p:sp>
+        <p:nvSpPr>
+          <p:cNvPr id="18" name="Text 16"/>
+          <p:cNvSpPr/>
+          <p:nvPr/>
+        </p:nvSpPr>
+        <p:spPr>
+          <a:xfrm>
+            <a:off x="9985248" y="3941064"/>
+            <a:ext cx="201168" cy="256032"/>
+          </a:xfrm>
+          <a:prstGeom prst="rect">
+            <a:avLst/>
+          </a:prstGeom>
+          <a:noFill/>
+          <a:ln/>
+        </p:spPr>
+        <p:txBody>
+          <a:bodyPr wrap="square" lIns="0" tIns="0" rIns="0" bIns="0" rtlCol="0" anchor="ctr"/>
+          <a:lstStyle/>
+          <a:p>
+            <a:pPr algn="ctr" indent="0" marL="0">
+              <a:buNone/>
+            </a:pPr>
+            <a:r>
+              <a:rPr lang="en-US" sz="1800" b="1" dirty="0">
+                <a:solidFill>
+                  <a:srgbClr val="0068B7"/>
+                </a:solidFill>
+                <a:latin typeface="Aptos" pitchFamily="34" charset="0"/>
+                <a:ea typeface="Aptos" pitchFamily="34" charset="-122"/>
+                <a:cs typeface="Aptos" pitchFamily="34" charset="-120"/>
+              </a:rPr>
+              <a:t>â†’</a:t>
+            </a:r>
+            <a:endParaRPr lang="en-US" sz="1800" dirty="0"/>
+          </a:p>
+        </p:txBody>
+      </p:sp>
+      <p:sp>
+        <p:nvSpPr>
+          <p:cNvPr id="19" name="Shape 17"/>
+          <p:cNvSpPr/>
+          <p:nvPr/>
+        </p:nvSpPr>
+        <p:spPr>
+          <a:xfrm>
+            <a:off x="10213848" y="3730752"/>
+            <a:ext cx="1033272" cy="749808"/>
+          </a:xfrm>
+          <a:prstGeom prst="roundRect">
+            <a:avLst>
+              <a:gd name="adj" fmla="val 14634"/>
+            </a:avLst>
+          </a:prstGeom>
+          <a:solidFill>
+            <a:srgbClr val="6A4CA3"/>
+          </a:solidFill>
+          <a:ln w="12700">
+            <a:solidFill>
+              <a:srgbClr val="6A4CA3"/>
+            </a:solidFill>
+            <a:prstDash val="solid"/>
+          </a:ln>
+        </p:spPr>
+      </p:sp>
+      <p:sp>
+        <p:nvSpPr>
+          <p:cNvPr id="20" name="Text 18"/>
+          <p:cNvSpPr/>
+          <p:nvPr/>
+        </p:nvSpPr>
+        <p:spPr>
+          <a:xfrm>
+            <a:off x="10287000" y="3922776"/>
+            <a:ext cx="886968" cy="310896"/>
+          </a:xfrm>
+          <a:prstGeom prst="rect">
+            <a:avLst/>
+          </a:prstGeom>
+          <a:noFill/>
+          <a:ln/>
+        </p:spPr>
+        <p:txBody>
+          <a:bodyPr wrap="square" lIns="0" tIns="0" rIns="0" bIns="0" rtlCol="0" anchor="ctr">
+            <a:normAutofit/>
+          </a:bodyPr>
+          <a:lstStyle/>
+          <a:p>
+            <a:pPr algn="ctr" indent="0" marL="0">
+              <a:buNone/>
+            </a:pPr>
+            <a:r>
+              <a:rPr lang="en-US" sz="1500" b="1" dirty="0">
+                <a:solidFill>
+                  <a:srgbClr val="FFFFFF"/>
+                </a:solidFill>
+                <a:latin typeface="Aptos" pitchFamily="34" charset="0"/>
+                <a:ea typeface="Aptos" pitchFamily="34" charset="-122"/>
+                <a:cs typeface="Aptos" pitchFamily="34" charset="-120"/>
+              </a:rPr>
+              <a:t>Document</a:t>
+            </a:r>
+            <a:endParaRPr lang="en-US" sz="1500" dirty="0"/>
           </a:p>
         </p:txBody>
       </p:sp>
@@ -9255,7 +9870,7 @@
                 <a:ea typeface="Aptos" pitchFamily="34" charset="-122"/>
                 <a:cs typeface="Aptos" pitchFamily="34" charset="-120"/>
               </a:rPr>
-              <a:t>© Paula Soper</a:t>
+              <a:t>Â© Paula Soper</a:t>
             </a:r>
             <a:endParaRPr lang="en-US" sz="800" dirty="0"/>
           </a:p>
@@ -9263,7 +9878,46 @@
       </p:sp>
       <p:sp>
         <p:nvSpPr>
-          <p:cNvPr id="7" name="Shape 5"/>
+          <p:cNvPr id="7" name="Text 5"/>
+          <p:cNvSpPr/>
+          <p:nvPr/>
+        </p:nvSpPr>
+        <p:spPr>
+          <a:xfrm>
+            <a:off x="11137392" y="6510528"/>
+            <a:ext cx="411480" cy="201168"/>
+          </a:xfrm>
+          <a:prstGeom prst="rect">
+            <a:avLst/>
+          </a:prstGeom>
+          <a:noFill/>
+          <a:ln/>
+        </p:spPr>
+        <p:txBody>
+          <a:bodyPr wrap="square" lIns="0" tIns="0" rIns="0" bIns="0" rtlCol="0" anchor="ctr"/>
+          <a:lstStyle/>
+          <a:p>
+            <a:pPr algn="r" indent="0" marL="0">
+              <a:buNone/>
+            </a:pPr>
+            <a:r>
+              <a:rPr lang="en-US" sz="900" dirty="0">
+                <a:solidFill>
+                  <a:srgbClr val="5F7181"/>
+                </a:solidFill>
+                <a:latin typeface="Aptos" pitchFamily="34" charset="0"/>
+                <a:ea typeface="Aptos" pitchFamily="34" charset="-122"/>
+                <a:cs typeface="Aptos" pitchFamily="34" charset="-120"/>
+              </a:rPr>
+              <a:t>20</a:t>
+            </a:r>
+            <a:endParaRPr lang="en-US" sz="900" dirty="0"/>
+          </a:p>
+        </p:txBody>
+      </p:sp>
+      <p:sp>
+        <p:nvSpPr>
+          <p:cNvPr id="8" name="Shape 6"/>
           <p:cNvSpPr/>
           <p:nvPr/>
         </p:nvSpPr>
@@ -9288,7 +9942,7 @@
       </p:sp>
       <p:sp>
         <p:nvSpPr>
-          <p:cNvPr id="8" name="Text 6"/>
+          <p:cNvPr id="9" name="Text 7"/>
           <p:cNvSpPr/>
           <p:nvPr/>
         </p:nvSpPr>
@@ -9327,14 +9981,14 @@
       </p:sp>
       <p:sp>
         <p:nvSpPr>
-          <p:cNvPr id="9" name="Text 7"/>
+          <p:cNvPr id="10" name="Text 8"/>
           <p:cNvSpPr/>
           <p:nvPr/>
         </p:nvSpPr>
         <p:spPr>
           <a:xfrm>
             <a:off x="640080" y="621792"/>
-            <a:ext cx="10881360" cy="566928"/>
+            <a:ext cx="10881360" cy="713232"/>
           </a:xfrm>
           <a:prstGeom prst="rect">
             <a:avLst/>
@@ -9352,7 +10006,7 @@
               <a:buNone/>
             </a:pPr>
             <a:r>
-              <a:rPr lang="en-US" sz="2700" b="1" dirty="0">
+              <a:rPr lang="en-US" sz="3400" b="1" dirty="0">
                 <a:solidFill>
                   <a:srgbClr val="003A63"/>
                 </a:solidFill>
@@ -9362,20 +10016,20 @@
               </a:rPr>
               <a:t>Knowledge Check</a:t>
             </a:r>
-            <a:endParaRPr lang="en-US" sz="2700" dirty="0"/>
-          </a:p>
-        </p:txBody>
-      </p:sp>
-      <p:sp>
-        <p:nvSpPr>
-          <p:cNvPr id="10" name="Text 8"/>
-          <p:cNvSpPr/>
-          <p:nvPr/>
-        </p:nvSpPr>
-        <p:spPr>
-          <a:xfrm>
-            <a:off x="868680" y="1417320"/>
-            <a:ext cx="6675120" cy="4434840"/>
+            <a:endParaRPr lang="en-US" sz="3400" dirty="0"/>
+          </a:p>
+        </p:txBody>
+      </p:sp>
+      <p:sp>
+        <p:nvSpPr>
+          <p:cNvPr id="11" name="Text 9"/>
+          <p:cNvSpPr/>
+          <p:nvPr/>
+        </p:nvSpPr>
+        <p:spPr>
+          <a:xfrm>
+            <a:off x="868680" y="1508760"/>
+            <a:ext cx="6537960" cy="4160520"/>
           </a:xfrm>
           <a:prstGeom prst="rect">
             <a:avLst/>
@@ -9390,7 +10044,7 @@
           <a:lstStyle/>
           <a:p>
             <a:r>
-              <a:rPr lang="en-US" sz="1700" dirty="0">
+              <a:rPr lang="en-US" sz="2100" dirty="0">
                 <a:solidFill>
                   <a:srgbClr val="17364A"/>
                 </a:solidFill>
@@ -9400,11 +10054,11 @@
               </a:rPr>
               <a:t>1. What distinguishes AI project management from ordinary software implementation?</a:t>
             </a:r>
-            <a:endParaRPr lang="en-US" sz="1700" dirty="0"/>
-          </a:p>
-          <a:p>
-            <a:r>
-              <a:rPr lang="en-US" sz="1700" dirty="0">
+            <a:endParaRPr lang="en-US" sz="2100" dirty="0"/>
+          </a:p>
+          <a:p>
+            <a:r>
+              <a:rPr lang="en-US" sz="2100" dirty="0">
                 <a:solidFill>
                   <a:srgbClr val="17364A"/>
                 </a:solidFill>
@@ -9414,11 +10068,11 @@
               </a:rPr>
               <a:t>2. What is a governance gate?</a:t>
             </a:r>
-            <a:endParaRPr lang="en-US" sz="1700" dirty="0"/>
-          </a:p>
-          <a:p>
-            <a:r>
-              <a:rPr lang="en-US" sz="1700" dirty="0">
+            <a:endParaRPr lang="en-US" sz="2100" dirty="0"/>
+          </a:p>
+          <a:p>
+            <a:r>
+              <a:rPr lang="en-US" sz="2100" dirty="0">
                 <a:solidFill>
                   <a:srgbClr val="17364A"/>
                 </a:solidFill>
@@ -9428,27 +10082,13 @@
               </a:rPr>
               <a:t>3. Which item belongs in an AI project charter?</a:t>
             </a:r>
-            <a:endParaRPr lang="en-US" sz="1700" dirty="0"/>
-          </a:p>
-          <a:p>
-            <a:r>
-              <a:rPr lang="en-US" sz="1700" dirty="0">
-                <a:solidFill>
-                  <a:srgbClr val="17364A"/>
-                </a:solidFill>
-                <a:latin typeface="Aptos" pitchFamily="34" charset="0"/>
-                <a:ea typeface="Aptos" pitchFamily="34" charset="-122"/>
-                <a:cs typeface="Aptos" pitchFamily="34" charset="-120"/>
-              </a:rPr>
-              <a:t>4. Why is transition to operations important?</a:t>
-            </a:r>
-            <a:endParaRPr lang="en-US" sz="1700" dirty="0"/>
-          </a:p>
-        </p:txBody>
-      </p:sp>
-      <p:sp>
-        <p:nvSpPr>
-          <p:cNvPr id="11" name="Shape 9"/>
+            <a:endParaRPr lang="en-US" sz="2100" dirty="0"/>
+          </a:p>
+        </p:txBody>
+      </p:sp>
+      <p:sp>
+        <p:nvSpPr>
+          <p:cNvPr id="12" name="Shape 10"/>
           <p:cNvSpPr/>
           <p:nvPr/>
         </p:nvSpPr>
@@ -9475,14 +10115,14 @@
       </p:sp>
       <p:sp>
         <p:nvSpPr>
-          <p:cNvPr id="12" name="Text 10"/>
+          <p:cNvPr id="13" name="Text 11"/>
           <p:cNvSpPr/>
           <p:nvPr/>
         </p:nvSpPr>
         <p:spPr>
           <a:xfrm>
             <a:off x="8074152" y="1563624"/>
-            <a:ext cx="2825496" cy="201168"/>
+            <a:ext cx="2825496" cy="256032"/>
           </a:xfrm>
           <a:prstGeom prst="rect">
             <a:avLst/>
@@ -9498,7 +10138,7 @@
               <a:buNone/>
             </a:pPr>
             <a:r>
-              <a:rPr lang="en-US" sz="950" b="1" dirty="0">
+              <a:rPr lang="en-US" sz="1300" b="1" dirty="0">
                 <a:solidFill>
                   <a:srgbClr val="0068B7"/>
                 </a:solidFill>
@@ -9508,20 +10148,20 @@
               </a:rPr>
               <a:t>Key idea</a:t>
             </a:r>
-            <a:endParaRPr lang="en-US" sz="950" dirty="0"/>
-          </a:p>
-        </p:txBody>
-      </p:sp>
-      <p:sp>
-        <p:nvSpPr>
-          <p:cNvPr id="13" name="Text 11"/>
-          <p:cNvSpPr/>
-          <p:nvPr/>
-        </p:nvSpPr>
-        <p:spPr>
-          <a:xfrm>
-            <a:off x="8074152" y="1856232"/>
-            <a:ext cx="2825496" cy="1261872"/>
+            <a:endParaRPr lang="en-US" sz="1300" dirty="0"/>
+          </a:p>
+        </p:txBody>
+      </p:sp>
+      <p:sp>
+        <p:nvSpPr>
+          <p:cNvPr id="14" name="Text 12"/>
+          <p:cNvSpPr/>
+          <p:nvPr/>
+        </p:nvSpPr>
+        <p:spPr>
+          <a:xfrm>
+            <a:off x="8074152" y="1920240"/>
+            <a:ext cx="2825496" cy="1188720"/>
           </a:xfrm>
           <a:prstGeom prst="rect">
             <a:avLst/>
@@ -9539,7 +10179,7 @@
               <a:buNone/>
             </a:pPr>
             <a:r>
-              <a:rPr lang="en-US" sz="1250" dirty="0">
+              <a:rPr lang="en-US" sz="1550" dirty="0">
                 <a:solidFill>
                   <a:srgbClr val="17364A"/>
                 </a:solidFill>
@@ -9549,13 +10189,13 @@
               </a:rPr>
               <a:t>1. What distinguishes AI project management from ordinary software implementation?</a:t>
             </a:r>
-            <a:endParaRPr lang="en-US" sz="1250" dirty="0"/>
-          </a:p>
-        </p:txBody>
-      </p:sp>
-      <p:sp>
-        <p:nvSpPr>
-          <p:cNvPr id="14" name="Shape 12"/>
+            <a:endParaRPr lang="en-US" sz="1550" dirty="0"/>
+          </a:p>
+        </p:txBody>
+      </p:sp>
+      <p:sp>
+        <p:nvSpPr>
+          <p:cNvPr id="15" name="Shape 13"/>
           <p:cNvSpPr/>
           <p:nvPr/>
         </p:nvSpPr>
@@ -9582,14 +10222,14 @@
       </p:sp>
       <p:sp>
         <p:nvSpPr>
-          <p:cNvPr id="15" name="Text 13"/>
+          <p:cNvPr id="16" name="Text 14"/>
           <p:cNvSpPr/>
           <p:nvPr/>
         </p:nvSpPr>
         <p:spPr>
           <a:xfrm>
             <a:off x="8074152" y="3666744"/>
-            <a:ext cx="2825496" cy="201168"/>
+            <a:ext cx="2825496" cy="256032"/>
           </a:xfrm>
           <a:prstGeom prst="rect">
             <a:avLst/>
@@ -9605,7 +10245,7 @@
               <a:buNone/>
             </a:pPr>
             <a:r>
-              <a:rPr lang="en-US" sz="950" b="1" dirty="0">
+              <a:rPr lang="en-US" sz="1300" b="1" dirty="0">
                 <a:solidFill>
                   <a:srgbClr val="0068B7"/>
                 </a:solidFill>
@@ -9615,20 +10255,20 @@
               </a:rPr>
               <a:t>Use this for</a:t>
             </a:r>
-            <a:endParaRPr lang="en-US" sz="950" dirty="0"/>
-          </a:p>
-        </p:txBody>
-      </p:sp>
-      <p:sp>
-        <p:nvSpPr>
-          <p:cNvPr id="16" name="Text 14"/>
-          <p:cNvSpPr/>
-          <p:nvPr/>
-        </p:nvSpPr>
-        <p:spPr>
-          <a:xfrm>
-            <a:off x="8074152" y="3959352"/>
-            <a:ext cx="2825496" cy="1170432"/>
+            <a:endParaRPr lang="en-US" sz="1300" dirty="0"/>
+          </a:p>
+        </p:txBody>
+      </p:sp>
+      <p:sp>
+        <p:nvSpPr>
+          <p:cNvPr id="17" name="Text 15"/>
+          <p:cNvSpPr/>
+          <p:nvPr/>
+        </p:nvSpPr>
+        <p:spPr>
+          <a:xfrm>
+            <a:off x="8074152" y="4023360"/>
+            <a:ext cx="2825496" cy="1097280"/>
           </a:xfrm>
           <a:prstGeom prst="rect">
             <a:avLst/>
@@ -9646,7 +10286,7 @@
               <a:buNone/>
             </a:pPr>
             <a:r>
-              <a:rPr lang="en-US" sz="1250" dirty="0">
+              <a:rPr lang="en-US" sz="1550" dirty="0">
                 <a:solidFill>
                   <a:srgbClr val="17364A"/>
                 </a:solidFill>
@@ -9656,7 +10296,7 @@
               </a:rPr>
               <a:t>Connect the concept to public health decisions, safeguards, documentation, or implementation work.</a:t>
             </a:r>
-            <a:endParaRPr lang="en-US" sz="1250" dirty="0"/>
+            <a:endParaRPr lang="en-US" sz="1550" dirty="0"/>
           </a:p>
         </p:txBody>
       </p:sp>
@@ -9853,7 +10493,7 @@
                 <a:ea typeface="Aptos" pitchFamily="34" charset="-122"/>
                 <a:cs typeface="Aptos" pitchFamily="34" charset="-120"/>
               </a:rPr>
-              <a:t>© Paula Soper</a:t>
+              <a:t>Â© Paula Soper</a:t>
             </a:r>
             <a:endParaRPr lang="en-US" sz="800" dirty="0"/>
           </a:p>
@@ -9861,7 +10501,46 @@
       </p:sp>
       <p:sp>
         <p:nvSpPr>
-          <p:cNvPr id="7" name="Shape 5"/>
+          <p:cNvPr id="7" name="Text 5"/>
+          <p:cNvSpPr/>
+          <p:nvPr/>
+        </p:nvSpPr>
+        <p:spPr>
+          <a:xfrm>
+            <a:off x="11137392" y="6510528"/>
+            <a:ext cx="411480" cy="201168"/>
+          </a:xfrm>
+          <a:prstGeom prst="rect">
+            <a:avLst/>
+          </a:prstGeom>
+          <a:noFill/>
+          <a:ln/>
+        </p:spPr>
+        <p:txBody>
+          <a:bodyPr wrap="square" lIns="0" tIns="0" rIns="0" bIns="0" rtlCol="0" anchor="ctr"/>
+          <a:lstStyle/>
+          <a:p>
+            <a:pPr algn="r" indent="0" marL="0">
+              <a:buNone/>
+            </a:pPr>
+            <a:r>
+              <a:rPr lang="en-US" sz="900" dirty="0">
+                <a:solidFill>
+                  <a:srgbClr val="5F7181"/>
+                </a:solidFill>
+                <a:latin typeface="Aptos" pitchFamily="34" charset="0"/>
+                <a:ea typeface="Aptos" pitchFamily="34" charset="-122"/>
+                <a:cs typeface="Aptos" pitchFamily="34" charset="-120"/>
+              </a:rPr>
+              <a:t>21</a:t>
+            </a:r>
+            <a:endParaRPr lang="en-US" sz="900" dirty="0"/>
+          </a:p>
+        </p:txBody>
+      </p:sp>
+      <p:sp>
+        <p:nvSpPr>
+          <p:cNvPr id="8" name="Shape 6"/>
           <p:cNvSpPr/>
           <p:nvPr/>
         </p:nvSpPr>
@@ -9886,7 +10565,7 @@
       </p:sp>
       <p:sp>
         <p:nvSpPr>
-          <p:cNvPr id="8" name="Text 6"/>
+          <p:cNvPr id="9" name="Text 7"/>
           <p:cNvSpPr/>
           <p:nvPr/>
         </p:nvSpPr>
@@ -9925,14 +10604,14 @@
       </p:sp>
       <p:sp>
         <p:nvSpPr>
-          <p:cNvPr id="9" name="Text 7"/>
+          <p:cNvPr id="10" name="Text 8"/>
           <p:cNvSpPr/>
           <p:nvPr/>
         </p:nvSpPr>
         <p:spPr>
           <a:xfrm>
             <a:off x="640080" y="621792"/>
-            <a:ext cx="10881360" cy="566928"/>
+            <a:ext cx="10881360" cy="713232"/>
           </a:xfrm>
           <a:prstGeom prst="rect">
             <a:avLst/>
@@ -9950,7 +10629,7 @@
               <a:buNone/>
             </a:pPr>
             <a:r>
-              <a:rPr lang="en-US" sz="2700" b="1" dirty="0">
+              <a:rPr lang="en-US" sz="3400" b="1" dirty="0">
                 <a:solidFill>
                   <a:srgbClr val="003A63"/>
                 </a:solidFill>
@@ -9960,20 +10639,20 @@
               </a:rPr>
               <a:t>References and Resources</a:t>
             </a:r>
-            <a:endParaRPr lang="en-US" sz="2700" dirty="0"/>
-          </a:p>
-        </p:txBody>
-      </p:sp>
-      <p:sp>
-        <p:nvSpPr>
-          <p:cNvPr id="10" name="Text 8"/>
-          <p:cNvSpPr/>
-          <p:nvPr/>
-        </p:nvSpPr>
-        <p:spPr>
-          <a:xfrm>
-            <a:off x="868680" y="1417320"/>
-            <a:ext cx="6675120" cy="4434840"/>
+            <a:endParaRPr lang="en-US" sz="3400" dirty="0"/>
+          </a:p>
+        </p:txBody>
+      </p:sp>
+      <p:sp>
+        <p:nvSpPr>
+          <p:cNvPr id="11" name="Text 9"/>
+          <p:cNvSpPr/>
+          <p:nvPr/>
+        </p:nvSpPr>
+        <p:spPr>
+          <a:xfrm>
+            <a:off x="868680" y="1508760"/>
+            <a:ext cx="6537960" cy="4160520"/>
           </a:xfrm>
           <a:prstGeom prst="rect">
             <a:avLst/>
@@ -9988,7 +10667,7 @@
           <a:lstStyle/>
           <a:p>
             <a:r>
-              <a:rPr lang="en-US" sz="1700" dirty="0">
+              <a:rPr lang="en-US" sz="2100" dirty="0">
                 <a:solidFill>
                   <a:srgbClr val="17364A"/>
                 </a:solidFill>
@@ -9996,13 +10675,13 @@
                 <a:ea typeface="Aptos" pitchFamily="34" charset="-122"/>
                 <a:cs typeface="Aptos" pitchFamily="34" charset="-120"/>
               </a:rPr>
-              <a:t>NIST Artificial Intelligence Risk Management Framework: https://www.nist.gov/itl/ai-risk-management-framework</a:t>
-            </a:r>
-            <a:endParaRPr lang="en-US" sz="1700" dirty="0"/>
-          </a:p>
-          <a:p>
-            <a:r>
-              <a:rPr lang="en-US" sz="1700" dirty="0">
+              <a:t>NIST Artificial Intelligence Risk Management Framework:.</a:t>
+            </a:r>
+            <a:endParaRPr lang="en-US" sz="2100" dirty="0"/>
+          </a:p>
+          <a:p>
+            <a:r>
+              <a:rPr lang="en-US" sz="2100" dirty="0">
                 <a:solidFill>
                   <a:srgbClr val="17364A"/>
                 </a:solidFill>
@@ -10012,11 +10691,11 @@
               </a:rPr>
               <a:t>NIST Generative AI Profile:.</a:t>
             </a:r>
-            <a:endParaRPr lang="en-US" sz="1700" dirty="0"/>
-          </a:p>
-          <a:p>
-            <a:r>
-              <a:rPr lang="en-US" sz="1700" dirty="0">
+            <a:endParaRPr lang="en-US" sz="2100" dirty="0"/>
+          </a:p>
+          <a:p>
+            <a:r>
+              <a:rPr lang="en-US" sz="2100" dirty="0">
                 <a:solidFill>
                   <a:srgbClr val="17364A"/>
                 </a:solidFill>
@@ -10026,27 +10705,13 @@
               </a:rPr>
               <a:t>CDC Public Health Data Strategy and Data Modernization resources:.</a:t>
             </a:r>
-            <a:endParaRPr lang="en-US" sz="1700" dirty="0"/>
-          </a:p>
-          <a:p>
-            <a:r>
-              <a:rPr lang="en-US" sz="1700" dirty="0">
-                <a:solidFill>
-                  <a:srgbClr val="17364A"/>
-                </a:solidFill>
-                <a:latin typeface="Aptos" pitchFamily="34" charset="0"/>
-                <a:ea typeface="Aptos" pitchFamily="34" charset="-122"/>
-                <a:cs typeface="Aptos" pitchFamily="34" charset="-120"/>
-              </a:rPr>
-              <a:t>OWASP guidance for LLM application security</a:t>
-            </a:r>
-            <a:endParaRPr lang="en-US" sz="1700" dirty="0"/>
-          </a:p>
-        </p:txBody>
-      </p:sp>
-      <p:sp>
-        <p:nvSpPr>
-          <p:cNvPr id="11" name="Shape 9"/>
+            <a:endParaRPr lang="en-US" sz="2100" dirty="0"/>
+          </a:p>
+        </p:txBody>
+      </p:sp>
+      <p:sp>
+        <p:nvSpPr>
+          <p:cNvPr id="12" name="Shape 10"/>
           <p:cNvSpPr/>
           <p:nvPr/>
         </p:nvSpPr>
@@ -10073,14 +10738,14 @@
       </p:sp>
       <p:sp>
         <p:nvSpPr>
-          <p:cNvPr id="12" name="Text 10"/>
+          <p:cNvPr id="13" name="Text 11"/>
           <p:cNvSpPr/>
           <p:nvPr/>
         </p:nvSpPr>
         <p:spPr>
           <a:xfrm>
             <a:off x="8074152" y="1563624"/>
-            <a:ext cx="2825496" cy="201168"/>
+            <a:ext cx="2825496" cy="256032"/>
           </a:xfrm>
           <a:prstGeom prst="rect">
             <a:avLst/>
@@ -10096,7 +10761,7 @@
               <a:buNone/>
             </a:pPr>
             <a:r>
-              <a:rPr lang="en-US" sz="950" b="1" dirty="0">
+              <a:rPr lang="en-US" sz="1300" b="1" dirty="0">
                 <a:solidFill>
                   <a:srgbClr val="0068B7"/>
                 </a:solidFill>
@@ -10106,20 +10771,20 @@
               </a:rPr>
               <a:t>Key idea</a:t>
             </a:r>
-            <a:endParaRPr lang="en-US" sz="950" dirty="0"/>
-          </a:p>
-        </p:txBody>
-      </p:sp>
-      <p:sp>
-        <p:nvSpPr>
-          <p:cNvPr id="13" name="Text 11"/>
-          <p:cNvSpPr/>
-          <p:nvPr/>
-        </p:nvSpPr>
-        <p:spPr>
-          <a:xfrm>
-            <a:off x="8074152" y="1856232"/>
-            <a:ext cx="2825496" cy="1261872"/>
+            <a:endParaRPr lang="en-US" sz="1300" dirty="0"/>
+          </a:p>
+        </p:txBody>
+      </p:sp>
+      <p:sp>
+        <p:nvSpPr>
+          <p:cNvPr id="14" name="Text 12"/>
+          <p:cNvSpPr/>
+          <p:nvPr/>
+        </p:nvSpPr>
+        <p:spPr>
+          <a:xfrm>
+            <a:off x="8074152" y="1920240"/>
+            <a:ext cx="2825496" cy="1188720"/>
           </a:xfrm>
           <a:prstGeom prst="rect">
             <a:avLst/>
@@ -10137,7 +10802,7 @@
               <a:buNone/>
             </a:pPr>
             <a:r>
-              <a:rPr lang="en-US" sz="1250" dirty="0">
+              <a:rPr lang="en-US" sz="1550" dirty="0">
                 <a:solidFill>
                   <a:srgbClr val="17364A"/>
                 </a:solidFill>
@@ -10145,15 +10810,15 @@
                 <a:ea typeface="Aptos" pitchFamily="34" charset="-122"/>
                 <a:cs typeface="Aptos" pitchFamily="34" charset="-120"/>
               </a:rPr>
-              <a:t>NIST Artificial Intelligence Risk Management Framework: https://www.nist.gov/itl/ai-risk-management-framework</a:t>
-            </a:r>
-            <a:endParaRPr lang="en-US" sz="1250" dirty="0"/>
-          </a:p>
-        </p:txBody>
-      </p:sp>
-      <p:sp>
-        <p:nvSpPr>
-          <p:cNvPr id="14" name="Shape 12"/>
+              <a:t>NIST Artificial Intelligence Risk Management Framework:.</a:t>
+            </a:r>
+            <a:endParaRPr lang="en-US" sz="1550" dirty="0"/>
+          </a:p>
+        </p:txBody>
+      </p:sp>
+      <p:sp>
+        <p:nvSpPr>
+          <p:cNvPr id="15" name="Shape 13"/>
           <p:cNvSpPr/>
           <p:nvPr/>
         </p:nvSpPr>
@@ -10180,14 +10845,14 @@
       </p:sp>
       <p:sp>
         <p:nvSpPr>
-          <p:cNvPr id="15" name="Text 13"/>
+          <p:cNvPr id="16" name="Text 14"/>
           <p:cNvSpPr/>
           <p:nvPr/>
         </p:nvSpPr>
         <p:spPr>
           <a:xfrm>
             <a:off x="8074152" y="3666744"/>
-            <a:ext cx="2825496" cy="201168"/>
+            <a:ext cx="2825496" cy="256032"/>
           </a:xfrm>
           <a:prstGeom prst="rect">
             <a:avLst/>
@@ -10203,7 +10868,7 @@
               <a:buNone/>
             </a:pPr>
             <a:r>
-              <a:rPr lang="en-US" sz="950" b="1" dirty="0">
+              <a:rPr lang="en-US" sz="1300" b="1" dirty="0">
                 <a:solidFill>
                   <a:srgbClr val="0068B7"/>
                 </a:solidFill>
@@ -10213,20 +10878,20 @@
               </a:rPr>
               <a:t>Use this for</a:t>
             </a:r>
-            <a:endParaRPr lang="en-US" sz="950" dirty="0"/>
-          </a:p>
-        </p:txBody>
-      </p:sp>
-      <p:sp>
-        <p:nvSpPr>
-          <p:cNvPr id="16" name="Text 14"/>
-          <p:cNvSpPr/>
-          <p:nvPr/>
-        </p:nvSpPr>
-        <p:spPr>
-          <a:xfrm>
-            <a:off x="8074152" y="3959352"/>
-            <a:ext cx="2825496" cy="1170432"/>
+            <a:endParaRPr lang="en-US" sz="1300" dirty="0"/>
+          </a:p>
+        </p:txBody>
+      </p:sp>
+      <p:sp>
+        <p:nvSpPr>
+          <p:cNvPr id="17" name="Text 15"/>
+          <p:cNvSpPr/>
+          <p:nvPr/>
+        </p:nvSpPr>
+        <p:spPr>
+          <a:xfrm>
+            <a:off x="8074152" y="4023360"/>
+            <a:ext cx="2825496" cy="1097280"/>
           </a:xfrm>
           <a:prstGeom prst="rect">
             <a:avLst/>
@@ -10244,7 +10909,7 @@
               <a:buNone/>
             </a:pPr>
             <a:r>
-              <a:rPr lang="en-US" sz="1250" dirty="0">
+              <a:rPr lang="en-US" sz="1550" dirty="0">
                 <a:solidFill>
                   <a:srgbClr val="17364A"/>
                 </a:solidFill>
@@ -10254,7 +10919,7 @@
               </a:rPr>
               <a:t>Connect the concept to public health decisions, safeguards, documentation, or implementation work.</a:t>
             </a:r>
-            <a:endParaRPr lang="en-US" sz="1250" dirty="0"/>
+            <a:endParaRPr lang="en-US" sz="1550" dirty="0"/>
           </a:p>
         </p:txBody>
       </p:sp>
@@ -10451,7 +11116,7 @@
                 <a:ea typeface="Aptos" pitchFamily="34" charset="-122"/>
                 <a:cs typeface="Aptos" pitchFamily="34" charset="-120"/>
               </a:rPr>
-              <a:t>© Paula Soper</a:t>
+              <a:t>Â© Paula Soper</a:t>
             </a:r>
             <a:endParaRPr lang="en-US" sz="800" dirty="0"/>
           </a:p>
@@ -10465,8 +11130,47 @@
         </p:nvSpPr>
         <p:spPr>
           <a:xfrm>
+            <a:off x="11137392" y="6510528"/>
+            <a:ext cx="411480" cy="201168"/>
+          </a:xfrm>
+          <a:prstGeom prst="rect">
+            <a:avLst/>
+          </a:prstGeom>
+          <a:noFill/>
+          <a:ln/>
+        </p:spPr>
+        <p:txBody>
+          <a:bodyPr wrap="square" lIns="0" tIns="0" rIns="0" bIns="0" rtlCol="0" anchor="ctr"/>
+          <a:lstStyle/>
+          <a:p>
+            <a:pPr algn="r" indent="0" marL="0">
+              <a:buNone/>
+            </a:pPr>
+            <a:r>
+              <a:rPr lang="en-US" sz="900" dirty="0">
+                <a:solidFill>
+                  <a:srgbClr val="5F7181"/>
+                </a:solidFill>
+                <a:latin typeface="Aptos" pitchFamily="34" charset="0"/>
+                <a:ea typeface="Aptos" pitchFamily="34" charset="-122"/>
+                <a:cs typeface="Aptos" pitchFamily="34" charset="-120"/>
+              </a:rPr>
+              <a:t>22</a:t>
+            </a:r>
+            <a:endParaRPr lang="en-US" sz="900" dirty="0"/>
+          </a:p>
+        </p:txBody>
+      </p:sp>
+      <p:sp>
+        <p:nvSpPr>
+          <p:cNvPr id="8" name="Text 6"/>
+          <p:cNvSpPr/>
+          <p:nvPr/>
+        </p:nvSpPr>
+        <p:spPr>
+          <a:xfrm>
             <a:off x="640080" y="658368"/>
-            <a:ext cx="10881360" cy="566928"/>
+            <a:ext cx="10881360" cy="713232"/>
           </a:xfrm>
           <a:prstGeom prst="rect">
             <a:avLst/>
@@ -10484,7 +11188,7 @@
               <a:buNone/>
             </a:pPr>
             <a:r>
-              <a:rPr lang="en-US" sz="2700" b="1" dirty="0">
+              <a:rPr lang="en-US" sz="3400" b="1" dirty="0">
                 <a:solidFill>
                   <a:srgbClr val="003A63"/>
                 </a:solidFill>
@@ -10494,20 +11198,20 @@
               </a:rPr>
               <a:t>References and Resources Continued</a:t>
             </a:r>
-            <a:endParaRPr lang="en-US" sz="2700" dirty="0"/>
-          </a:p>
-        </p:txBody>
-      </p:sp>
-      <p:sp>
-        <p:nvSpPr>
-          <p:cNvPr id="8" name="Text 6"/>
-          <p:cNvSpPr/>
-          <p:nvPr/>
-        </p:nvSpPr>
-        <p:spPr>
-          <a:xfrm>
-            <a:off x="868680" y="1417320"/>
-            <a:ext cx="6675120" cy="4434840"/>
+            <a:endParaRPr lang="en-US" sz="3400" dirty="0"/>
+          </a:p>
+        </p:txBody>
+      </p:sp>
+      <p:sp>
+        <p:nvSpPr>
+          <p:cNvPr id="9" name="Text 7"/>
+          <p:cNvSpPr/>
+          <p:nvPr/>
+        </p:nvSpPr>
+        <p:spPr>
+          <a:xfrm>
+            <a:off x="868680" y="1508760"/>
+            <a:ext cx="6537960" cy="4160520"/>
           </a:xfrm>
           <a:prstGeom prst="rect">
             <a:avLst/>
@@ -10522,7 +11226,7 @@
           <a:lstStyle/>
           <a:p>
             <a:r>
-              <a:rPr lang="en-US" sz="1700" dirty="0">
+              <a:rPr lang="en-US" sz="2100" dirty="0">
                 <a:solidFill>
                   <a:srgbClr val="17364A"/>
                 </a:solidFill>
@@ -10532,13 +11236,13 @@
               </a:rPr>
               <a:t>Relevant public health program SOPs, data governance documentation, and implementation plans</a:t>
             </a:r>
-            <a:endParaRPr lang="en-US" sz="1700" dirty="0"/>
-          </a:p>
-        </p:txBody>
-      </p:sp>
-      <p:sp>
-        <p:nvSpPr>
-          <p:cNvPr id="9" name="Shape 7"/>
+            <a:endParaRPr lang="en-US" sz="2100" dirty="0"/>
+          </a:p>
+        </p:txBody>
+      </p:sp>
+      <p:sp>
+        <p:nvSpPr>
+          <p:cNvPr id="10" name="Shape 8"/>
           <p:cNvSpPr/>
           <p:nvPr/>
         </p:nvSpPr>
@@ -10565,14 +11269,14 @@
       </p:sp>
       <p:sp>
         <p:nvSpPr>
-          <p:cNvPr id="10" name="Text 8"/>
+          <p:cNvPr id="11" name="Text 9"/>
           <p:cNvSpPr/>
           <p:nvPr/>
         </p:nvSpPr>
         <p:spPr>
           <a:xfrm>
             <a:off x="8074152" y="1563624"/>
-            <a:ext cx="2825496" cy="201168"/>
+            <a:ext cx="2825496" cy="256032"/>
           </a:xfrm>
           <a:prstGeom prst="rect">
             <a:avLst/>
@@ -10588,7 +11292,7 @@
               <a:buNone/>
             </a:pPr>
             <a:r>
-              <a:rPr lang="en-US" sz="950" b="1" dirty="0">
+              <a:rPr lang="en-US" sz="1300" b="1" dirty="0">
                 <a:solidFill>
                   <a:srgbClr val="0068B7"/>
                 </a:solidFill>
@@ -10598,20 +11302,20 @@
               </a:rPr>
               <a:t>Key idea</a:t>
             </a:r>
-            <a:endParaRPr lang="en-US" sz="950" dirty="0"/>
-          </a:p>
-        </p:txBody>
-      </p:sp>
-      <p:sp>
-        <p:nvSpPr>
-          <p:cNvPr id="11" name="Text 9"/>
-          <p:cNvSpPr/>
-          <p:nvPr/>
-        </p:nvSpPr>
-        <p:spPr>
-          <a:xfrm>
-            <a:off x="8074152" y="1856232"/>
-            <a:ext cx="2825496" cy="1261872"/>
+            <a:endParaRPr lang="en-US" sz="1300" dirty="0"/>
+          </a:p>
+        </p:txBody>
+      </p:sp>
+      <p:sp>
+        <p:nvSpPr>
+          <p:cNvPr id="12" name="Text 10"/>
+          <p:cNvSpPr/>
+          <p:nvPr/>
+        </p:nvSpPr>
+        <p:spPr>
+          <a:xfrm>
+            <a:off x="8074152" y="1920240"/>
+            <a:ext cx="2825496" cy="1188720"/>
           </a:xfrm>
           <a:prstGeom prst="rect">
             <a:avLst/>
@@ -10629,7 +11333,7 @@
               <a:buNone/>
             </a:pPr>
             <a:r>
-              <a:rPr lang="en-US" sz="1250" dirty="0">
+              <a:rPr lang="en-US" sz="1550" dirty="0">
                 <a:solidFill>
                   <a:srgbClr val="17364A"/>
                 </a:solidFill>
@@ -10639,13 +11343,13 @@
               </a:rPr>
               <a:t>Relevant public health program SOPs, data governance documentation, and implementation plans</a:t>
             </a:r>
-            <a:endParaRPr lang="en-US" sz="1250" dirty="0"/>
-          </a:p>
-        </p:txBody>
-      </p:sp>
-      <p:sp>
-        <p:nvSpPr>
-          <p:cNvPr id="12" name="Shape 10"/>
+            <a:endParaRPr lang="en-US" sz="1550" dirty="0"/>
+          </a:p>
+        </p:txBody>
+      </p:sp>
+      <p:sp>
+        <p:nvSpPr>
+          <p:cNvPr id="13" name="Shape 11"/>
           <p:cNvSpPr/>
           <p:nvPr/>
         </p:nvSpPr>
@@ -10672,14 +11376,14 @@
       </p:sp>
       <p:sp>
         <p:nvSpPr>
-          <p:cNvPr id="13" name="Text 11"/>
+          <p:cNvPr id="14" name="Text 12"/>
           <p:cNvSpPr/>
           <p:nvPr/>
         </p:nvSpPr>
         <p:spPr>
           <a:xfrm>
             <a:off x="8074152" y="3666744"/>
-            <a:ext cx="2825496" cy="201168"/>
+            <a:ext cx="2825496" cy="256032"/>
           </a:xfrm>
           <a:prstGeom prst="rect">
             <a:avLst/>
@@ -10695,7 +11399,7 @@
               <a:buNone/>
             </a:pPr>
             <a:r>
-              <a:rPr lang="en-US" sz="950" b="1" dirty="0">
+              <a:rPr lang="en-US" sz="1300" b="1" dirty="0">
                 <a:solidFill>
                   <a:srgbClr val="0068B7"/>
                 </a:solidFill>
@@ -10705,20 +11409,20 @@
               </a:rPr>
               <a:t>Use this for</a:t>
             </a:r>
-            <a:endParaRPr lang="en-US" sz="950" dirty="0"/>
-          </a:p>
-        </p:txBody>
-      </p:sp>
-      <p:sp>
-        <p:nvSpPr>
-          <p:cNvPr id="14" name="Text 12"/>
-          <p:cNvSpPr/>
-          <p:nvPr/>
-        </p:nvSpPr>
-        <p:spPr>
-          <a:xfrm>
-            <a:off x="8074152" y="3959352"/>
-            <a:ext cx="2825496" cy="1170432"/>
+            <a:endParaRPr lang="en-US" sz="1300" dirty="0"/>
+          </a:p>
+        </p:txBody>
+      </p:sp>
+      <p:sp>
+        <p:nvSpPr>
+          <p:cNvPr id="15" name="Text 13"/>
+          <p:cNvSpPr/>
+          <p:nvPr/>
+        </p:nvSpPr>
+        <p:spPr>
+          <a:xfrm>
+            <a:off x="8074152" y="4023360"/>
+            <a:ext cx="2825496" cy="1097280"/>
           </a:xfrm>
           <a:prstGeom prst="rect">
             <a:avLst/>
@@ -10736,7 +11440,7 @@
               <a:buNone/>
             </a:pPr>
             <a:r>
-              <a:rPr lang="en-US" sz="1250" dirty="0">
+              <a:rPr lang="en-US" sz="1550" dirty="0">
                 <a:solidFill>
                   <a:srgbClr val="17364A"/>
                 </a:solidFill>
@@ -10746,7 +11450,7 @@
               </a:rPr>
               <a:t>Connect the concept to public health decisions, safeguards, documentation, or implementation work.</a:t>
             </a:r>
-            <a:endParaRPr lang="en-US" sz="1250" dirty="0"/>
+            <a:endParaRPr lang="en-US" sz="1550" dirty="0"/>
           </a:p>
         </p:txBody>
       </p:sp>
@@ -10943,7 +11647,7 @@
                 <a:ea typeface="Aptos" pitchFamily="34" charset="-122"/>
                 <a:cs typeface="Aptos" pitchFamily="34" charset="-120"/>
               </a:rPr>
-              <a:t>© Paula Soper</a:t>
+              <a:t>Â© Paula Soper</a:t>
             </a:r>
             <a:endParaRPr lang="en-US" sz="800" dirty="0"/>
           </a:p>
@@ -10957,8 +11661,47 @@
         </p:nvSpPr>
         <p:spPr>
           <a:xfrm>
+            <a:off x="11137392" y="6510528"/>
+            <a:ext cx="411480" cy="201168"/>
+          </a:xfrm>
+          <a:prstGeom prst="rect">
+            <a:avLst/>
+          </a:prstGeom>
+          <a:noFill/>
+          <a:ln/>
+        </p:spPr>
+        <p:txBody>
+          <a:bodyPr wrap="square" lIns="0" tIns="0" rIns="0" bIns="0" rtlCol="0" anchor="ctr"/>
+          <a:lstStyle/>
+          <a:p>
+            <a:pPr algn="r" indent="0" marL="0">
+              <a:buNone/>
+            </a:pPr>
+            <a:r>
+              <a:rPr lang="en-US" sz="900" dirty="0">
+                <a:solidFill>
+                  <a:srgbClr val="5F7181"/>
+                </a:solidFill>
+                <a:latin typeface="Aptos" pitchFamily="34" charset="0"/>
+                <a:ea typeface="Aptos" pitchFamily="34" charset="-122"/>
+                <a:cs typeface="Aptos" pitchFamily="34" charset="-120"/>
+              </a:rPr>
+              <a:t>3</a:t>
+            </a:r>
+            <a:endParaRPr lang="en-US" sz="900" dirty="0"/>
+          </a:p>
+        </p:txBody>
+      </p:sp>
+      <p:sp>
+        <p:nvSpPr>
+          <p:cNvPr id="8" name="Text 6"/>
+          <p:cNvSpPr/>
+          <p:nvPr/>
+        </p:nvSpPr>
+        <p:spPr>
+          <a:xfrm>
             <a:off x="640080" y="658368"/>
-            <a:ext cx="10881360" cy="566928"/>
+            <a:ext cx="10881360" cy="713232"/>
           </a:xfrm>
           <a:prstGeom prst="rect">
             <a:avLst/>
@@ -10976,7 +11719,7 @@
               <a:buNone/>
             </a:pPr>
             <a:r>
-              <a:rPr lang="en-US" sz="2700" b="1" dirty="0">
+              <a:rPr lang="en-US" sz="3400" b="1" dirty="0">
                 <a:solidFill>
                   <a:srgbClr val="003A63"/>
                 </a:solidFill>
@@ -10986,20 +11729,20 @@
               </a:rPr>
               <a:t>How this module connects to the playbook</a:t>
             </a:r>
-            <a:endParaRPr lang="en-US" sz="2700" dirty="0"/>
-          </a:p>
-        </p:txBody>
-      </p:sp>
-      <p:sp>
-        <p:nvSpPr>
-          <p:cNvPr id="8" name="Text 6"/>
-          <p:cNvSpPr/>
-          <p:nvPr/>
-        </p:nvSpPr>
-        <p:spPr>
-          <a:xfrm>
-            <a:off x="868680" y="1417320"/>
-            <a:ext cx="6903720" cy="4480560"/>
+            <a:endParaRPr lang="en-US" sz="3400" dirty="0"/>
+          </a:p>
+        </p:txBody>
+      </p:sp>
+      <p:sp>
+        <p:nvSpPr>
+          <p:cNvPr id="9" name="Text 7"/>
+          <p:cNvSpPr/>
+          <p:nvPr/>
+        </p:nvSpPr>
+        <p:spPr>
+          <a:xfrm>
+            <a:off x="868680" y="1508760"/>
+            <a:ext cx="6812280" cy="3977640"/>
           </a:xfrm>
           <a:prstGeom prst="rect">
             <a:avLst/>
@@ -11014,7 +11757,7 @@
           <a:lstStyle/>
           <a:p>
             <a:r>
-              <a:rPr lang="en-US" sz="1540" dirty="0">
+              <a:rPr lang="en-US" sz="1900" dirty="0">
                 <a:solidFill>
                   <a:srgbClr val="17364A"/>
                 </a:solidFill>
@@ -11022,13 +11765,13 @@
                 <a:ea typeface="Aptos" pitchFamily="34" charset="-122"/>
                 <a:cs typeface="Aptos" pitchFamily="34" charset="-120"/>
               </a:rPr>
-              <a:t>Play 11: Build and Deploy AI Solutions - This lesson informs Play 11 by helping learners connect the lesson topic to build and deploy.</a:t>
-            </a:r>
-            <a:endParaRPr lang="en-US" sz="1540" dirty="0"/>
-          </a:p>
-          <a:p>
-            <a:r>
-              <a:rPr lang="en-US" sz="1540" dirty="0">
+              <a:t>Play 11: Build and Deploy AI Solutions - This lesson informs Play 11 by helping learners connect the lesson.</a:t>
+            </a:r>
+            <a:endParaRPr lang="en-US" sz="1900" dirty="0"/>
+          </a:p>
+          <a:p>
+            <a:r>
+              <a:rPr lang="en-US" sz="1900" dirty="0">
                 <a:solidFill>
                   <a:srgbClr val="17364A"/>
                 </a:solidFill>
@@ -11036,13 +11779,13 @@
                 <a:ea typeface="Aptos" pitchFamily="34" charset="-122"/>
                 <a:cs typeface="Aptos" pitchFamily="34" charset="-120"/>
               </a:rPr>
-              <a:t>Play 2: Readiness Assessment - This lesson informs Play 2 by helping learners connect the lesson topic to readiness assessment work.</a:t>
-            </a:r>
-            <a:endParaRPr lang="en-US" sz="1540" dirty="0"/>
-          </a:p>
-          <a:p>
-            <a:r>
-              <a:rPr lang="en-US" sz="1540" dirty="0">
+              <a:t>Play 2: Readiness Assessment - This lesson informs Play 2 by helping learners connect the lesson topic to.</a:t>
+            </a:r>
+            <a:endParaRPr lang="en-US" sz="1900" dirty="0"/>
+          </a:p>
+          <a:p>
+            <a:r>
+              <a:rPr lang="en-US" sz="1900" dirty="0">
                 <a:solidFill>
                   <a:srgbClr val="17364A"/>
                 </a:solidFill>
@@ -11050,13 +11793,13 @@
                 <a:ea typeface="Aptos" pitchFamily="34" charset="-122"/>
                 <a:cs typeface="Aptos" pitchFamily="34" charset="-120"/>
               </a:rPr>
-              <a:t>Play 1: Vision &amp; Guardrails - This lesson informs Play 1 by helping learners connect the lesson topic to vision &amp; guardrails work in.</a:t>
-            </a:r>
-            <a:endParaRPr lang="en-US" sz="1540" dirty="0"/>
-          </a:p>
-          <a:p>
-            <a:r>
-              <a:rPr lang="en-US" sz="1540" dirty="0">
+              <a:t>Play 1: Vision &amp; Guardrails - This lesson informs Play 1 by helping learners connect the lesson topic to.</a:t>
+            </a:r>
+            <a:endParaRPr lang="en-US" sz="1900" dirty="0"/>
+          </a:p>
+          <a:p>
+            <a:r>
+              <a:rPr lang="en-US" sz="1900" dirty="0">
                 <a:solidFill>
                   <a:srgbClr val="17364A"/>
                 </a:solidFill>
@@ -11064,15 +11807,15 @@
                 <a:ea typeface="Aptos" pitchFamily="34" charset="-122"/>
                 <a:cs typeface="Aptos" pitchFamily="34" charset="-120"/>
               </a:rPr>
-              <a:t>Play 7: Prioritize Use Cases - This lesson informs Play 7 by helping learners connect the lesson topic to prioritize use cases work.</a:t>
-            </a:r>
-            <a:endParaRPr lang="en-US" sz="1540" dirty="0"/>
-          </a:p>
-        </p:txBody>
-      </p:sp>
-      <p:sp>
-        <p:nvSpPr>
-          <p:cNvPr id="9" name="Shape 7"/>
+              <a:t>Play 7: Prioritize Use Cases - This lesson informs Play 7 by helping learners connect the lesson topic to.</a:t>
+            </a:r>
+            <a:endParaRPr lang="en-US" sz="1900" dirty="0"/>
+          </a:p>
+        </p:txBody>
+      </p:sp>
+      <p:sp>
+        <p:nvSpPr>
+          <p:cNvPr id="10" name="Shape 8"/>
           <p:cNvSpPr/>
           <p:nvPr/>
         </p:nvSpPr>
@@ -11099,14 +11842,14 @@
       </p:sp>
       <p:sp>
         <p:nvSpPr>
-          <p:cNvPr id="10" name="Text 8"/>
+          <p:cNvPr id="11" name="Text 9"/>
           <p:cNvSpPr/>
           <p:nvPr/>
         </p:nvSpPr>
         <p:spPr>
           <a:xfrm>
             <a:off x="8211312" y="1563624"/>
-            <a:ext cx="2734056" cy="201168"/>
+            <a:ext cx="2734056" cy="256032"/>
           </a:xfrm>
           <a:prstGeom prst="rect">
             <a:avLst/>
@@ -11122,7 +11865,7 @@
               <a:buNone/>
             </a:pPr>
             <a:r>
-              <a:rPr lang="en-US" sz="950" b="1" dirty="0">
+              <a:rPr lang="en-US" sz="1300" b="1" dirty="0">
                 <a:solidFill>
                   <a:srgbClr val="0068B7"/>
                 </a:solidFill>
@@ -11132,20 +11875,20 @@
               </a:rPr>
               <a:t>Apply the lesson</a:t>
             </a:r>
-            <a:endParaRPr lang="en-US" sz="950" dirty="0"/>
-          </a:p>
-        </p:txBody>
-      </p:sp>
-      <p:sp>
-        <p:nvSpPr>
-          <p:cNvPr id="11" name="Text 9"/>
-          <p:cNvSpPr/>
-          <p:nvPr/>
-        </p:nvSpPr>
-        <p:spPr>
-          <a:xfrm>
-            <a:off x="8211312" y="1856232"/>
-            <a:ext cx="2734056" cy="1536192"/>
+            <a:endParaRPr lang="en-US" sz="1300" dirty="0"/>
+          </a:p>
+        </p:txBody>
+      </p:sp>
+      <p:sp>
+        <p:nvSpPr>
+          <p:cNvPr id="12" name="Text 10"/>
+          <p:cNvSpPr/>
+          <p:nvPr/>
+        </p:nvSpPr>
+        <p:spPr>
+          <a:xfrm>
+            <a:off x="8211312" y="1920240"/>
+            <a:ext cx="2734056" cy="1463040"/>
           </a:xfrm>
           <a:prstGeom prst="rect">
             <a:avLst/>
@@ -11163,7 +11906,7 @@
               <a:buNone/>
             </a:pPr>
             <a:r>
-              <a:rPr lang="en-US" sz="1250" dirty="0">
+              <a:rPr lang="en-US" sz="1550" dirty="0">
                 <a:solidFill>
                   <a:srgbClr val="17364A"/>
                 </a:solidFill>
@@ -11173,32 +11916,32 @@
               </a:rPr>
               <a:t>Use the related plays to identify decisions, participants, timing, approvals, and documentation needed for responsible implementation.</a:t>
             </a:r>
-            <a:endParaRPr lang="en-US" sz="1250" dirty="0"/>
-          </a:p>
-        </p:txBody>
-      </p:sp>
-      <p:sp>
-        <p:nvSpPr>
-          <p:cNvPr id="12" name="Shape 10"/>
-          <p:cNvSpPr/>
-          <p:nvPr/>
-        </p:nvSpPr>
-        <p:spPr>
-          <a:xfrm>
-            <a:off x="8046720" y="3794760"/>
-            <a:ext cx="3063240" cy="1508760"/>
+            <a:endParaRPr lang="en-US" sz="1550" dirty="0"/>
+          </a:p>
+        </p:txBody>
+      </p:sp>
+      <p:sp>
+        <p:nvSpPr>
+          <p:cNvPr id="13" name="Shape 11"/>
+          <p:cNvSpPr/>
+          <p:nvPr/>
+        </p:nvSpPr>
+        <p:spPr>
+          <a:xfrm>
+            <a:off x="7818120" y="3977640"/>
+            <a:ext cx="972312" cy="749808"/>
           </a:xfrm>
           <a:prstGeom prst="roundRect">
             <a:avLst>
-              <a:gd name="adj" fmla="val 7273"/>
+              <a:gd name="adj" fmla="val 14634"/>
             </a:avLst>
           </a:prstGeom>
           <a:solidFill>
-            <a:srgbClr val="FFF4D9"/>
+            <a:srgbClr val="0068B7"/>
           </a:solidFill>
           <a:ln w="12700">
             <a:solidFill>
-              <a:srgbClr val="B9D7E6"/>
+              <a:srgbClr val="0068B7"/>
             </a:solidFill>
             <a:prstDash val="solid"/>
           </a:ln>
@@ -11206,81 +11949,256 @@
       </p:sp>
       <p:sp>
         <p:nvSpPr>
-          <p:cNvPr id="13" name="Text 11"/>
-          <p:cNvSpPr/>
-          <p:nvPr/>
-        </p:nvSpPr>
-        <p:spPr>
-          <a:xfrm>
-            <a:off x="8211312" y="3941064"/>
-            <a:ext cx="2734056" cy="201168"/>
-          </a:xfrm>
-          <a:prstGeom prst="rect">
-            <a:avLst/>
-          </a:prstGeom>
-          <a:noFill/>
-          <a:ln/>
-        </p:spPr>
-        <p:txBody>
-          <a:bodyPr wrap="square" lIns="0" tIns="0" rIns="0" bIns="0" rtlCol="0" anchor="ctr"/>
-          <a:lstStyle/>
-          <a:p>
-            <a:pPr indent="0" marL="0">
-              <a:buNone/>
-            </a:pPr>
-            <a:r>
-              <a:rPr lang="en-US" sz="950" b="1" dirty="0">
-                <a:solidFill>
-                  <a:srgbClr val="0068B7"/>
-                </a:solidFill>
-                <a:latin typeface="Aptos" pitchFamily="34" charset="0"/>
-                <a:ea typeface="Aptos" pitchFamily="34" charset="-122"/>
-                <a:cs typeface="Aptos" pitchFamily="34" charset="-120"/>
-              </a:rPr>
-              <a:t>Keep in mind</a:t>
-            </a:r>
-            <a:endParaRPr lang="en-US" sz="950" dirty="0"/>
-          </a:p>
-        </p:txBody>
-      </p:sp>
-      <p:sp>
-        <p:nvSpPr>
           <p:cNvPr id="14" name="Text 12"/>
           <p:cNvSpPr/>
           <p:nvPr/>
         </p:nvSpPr>
         <p:spPr>
           <a:xfrm>
-            <a:off x="8211312" y="4233672"/>
-            <a:ext cx="2734056" cy="941832"/>
-          </a:xfrm>
-          <a:prstGeom prst="rect">
-            <a:avLst/>
-          </a:prstGeom>
-          <a:noFill/>
-          <a:ln/>
-        </p:spPr>
-        <p:txBody>
-          <a:bodyPr wrap="square" lIns="0" tIns="0" rIns="0" bIns="0" rtlCol="0" anchor="t">
+            <a:off x="7891272" y="4169664"/>
+            <a:ext cx="826008" cy="310896"/>
+          </a:xfrm>
+          <a:prstGeom prst="rect">
+            <a:avLst/>
+          </a:prstGeom>
+          <a:noFill/>
+          <a:ln/>
+        </p:spPr>
+        <p:txBody>
+          <a:bodyPr wrap="square" lIns="0" tIns="0" rIns="0" bIns="0" rtlCol="0" anchor="ctr">
             <a:normAutofit/>
           </a:bodyPr>
           <a:lstStyle/>
           <a:p>
-            <a:pPr indent="0" marL="0">
-              <a:buNone/>
-            </a:pPr>
-            <a:r>
-              <a:rPr lang="en-US" sz="1250" dirty="0">
-                <a:solidFill>
-                  <a:srgbClr val="17364A"/>
-                </a:solidFill>
-                <a:latin typeface="Aptos" pitchFamily="34" charset="0"/>
-                <a:ea typeface="Aptos" pitchFamily="34" charset="-122"/>
-                <a:cs typeface="Aptos" pitchFamily="34" charset="-120"/>
-              </a:rPr>
-              <a:t>The playbook connection helps turn training into agency work, not just individual knowledge.</a:t>
-            </a:r>
-            <a:endParaRPr lang="en-US" sz="1250" dirty="0"/>
+            <a:pPr algn="ctr" indent="0" marL="0">
+              <a:buNone/>
+            </a:pPr>
+            <a:r>
+              <a:rPr lang="en-US" sz="1500" b="1" dirty="0">
+                <a:solidFill>
+                  <a:srgbClr val="FFFFFF"/>
+                </a:solidFill>
+                <a:latin typeface="Aptos" pitchFamily="34" charset="0"/>
+                <a:ea typeface="Aptos" pitchFamily="34" charset="-122"/>
+                <a:cs typeface="Aptos" pitchFamily="34" charset="-120"/>
+              </a:rPr>
+              <a:t>Lesson</a:t>
+            </a:r>
+            <a:endParaRPr lang="en-US" sz="1500" dirty="0"/>
+          </a:p>
+        </p:txBody>
+      </p:sp>
+      <p:sp>
+        <p:nvSpPr>
+          <p:cNvPr id="15" name="Text 13"/>
+          <p:cNvSpPr/>
+          <p:nvPr/>
+        </p:nvSpPr>
+        <p:spPr>
+          <a:xfrm>
+            <a:off x="8817864" y="4187952"/>
+            <a:ext cx="201168" cy="256032"/>
+          </a:xfrm>
+          <a:prstGeom prst="rect">
+            <a:avLst/>
+          </a:prstGeom>
+          <a:noFill/>
+          <a:ln/>
+        </p:spPr>
+        <p:txBody>
+          <a:bodyPr wrap="square" lIns="0" tIns="0" rIns="0" bIns="0" rtlCol="0" anchor="ctr"/>
+          <a:lstStyle/>
+          <a:p>
+            <a:pPr algn="ctr" indent="0" marL="0">
+              <a:buNone/>
+            </a:pPr>
+            <a:r>
+              <a:rPr lang="en-US" sz="1800" b="1" dirty="0">
+                <a:solidFill>
+                  <a:srgbClr val="0068B7"/>
+                </a:solidFill>
+                <a:latin typeface="Aptos" pitchFamily="34" charset="0"/>
+                <a:ea typeface="Aptos" pitchFamily="34" charset="-122"/>
+                <a:cs typeface="Aptos" pitchFamily="34" charset="-120"/>
+              </a:rPr>
+              <a:t>â†’</a:t>
+            </a:r>
+            <a:endParaRPr lang="en-US" sz="1800" dirty="0"/>
+          </a:p>
+        </p:txBody>
+      </p:sp>
+      <p:sp>
+        <p:nvSpPr>
+          <p:cNvPr id="16" name="Shape 14"/>
+          <p:cNvSpPr/>
+          <p:nvPr/>
+        </p:nvSpPr>
+        <p:spPr>
+          <a:xfrm>
+            <a:off x="9046464" y="3977640"/>
+            <a:ext cx="972312" cy="749808"/>
+          </a:xfrm>
+          <a:prstGeom prst="roundRect">
+            <a:avLst>
+              <a:gd name="adj" fmla="val 14634"/>
+            </a:avLst>
+          </a:prstGeom>
+          <a:solidFill>
+            <a:srgbClr val="2F8A28"/>
+          </a:solidFill>
+          <a:ln w="12700">
+            <a:solidFill>
+              <a:srgbClr val="2F8A28"/>
+            </a:solidFill>
+            <a:prstDash val="solid"/>
+          </a:ln>
+        </p:spPr>
+      </p:sp>
+      <p:sp>
+        <p:nvSpPr>
+          <p:cNvPr id="17" name="Text 15"/>
+          <p:cNvSpPr/>
+          <p:nvPr/>
+        </p:nvSpPr>
+        <p:spPr>
+          <a:xfrm>
+            <a:off x="9119616" y="4169664"/>
+            <a:ext cx="826008" cy="310896"/>
+          </a:xfrm>
+          <a:prstGeom prst="rect">
+            <a:avLst/>
+          </a:prstGeom>
+          <a:noFill/>
+          <a:ln/>
+        </p:spPr>
+        <p:txBody>
+          <a:bodyPr wrap="square" lIns="0" tIns="0" rIns="0" bIns="0" rtlCol="0" anchor="ctr">
+            <a:normAutofit/>
+          </a:bodyPr>
+          <a:lstStyle/>
+          <a:p>
+            <a:pPr algn="ctr" indent="0" marL="0">
+              <a:buNone/>
+            </a:pPr>
+            <a:r>
+              <a:rPr lang="en-US" sz="1500" b="1" dirty="0">
+                <a:solidFill>
+                  <a:srgbClr val="FFFFFF"/>
+                </a:solidFill>
+                <a:latin typeface="Aptos" pitchFamily="34" charset="0"/>
+                <a:ea typeface="Aptos" pitchFamily="34" charset="-122"/>
+                <a:cs typeface="Aptos" pitchFamily="34" charset="-120"/>
+              </a:rPr>
+              <a:t>Plays</a:t>
+            </a:r>
+            <a:endParaRPr lang="en-US" sz="1500" dirty="0"/>
+          </a:p>
+        </p:txBody>
+      </p:sp>
+      <p:sp>
+        <p:nvSpPr>
+          <p:cNvPr id="18" name="Text 16"/>
+          <p:cNvSpPr/>
+          <p:nvPr/>
+        </p:nvSpPr>
+        <p:spPr>
+          <a:xfrm>
+            <a:off x="10046208" y="4187952"/>
+            <a:ext cx="201168" cy="256032"/>
+          </a:xfrm>
+          <a:prstGeom prst="rect">
+            <a:avLst/>
+          </a:prstGeom>
+          <a:noFill/>
+          <a:ln/>
+        </p:spPr>
+        <p:txBody>
+          <a:bodyPr wrap="square" lIns="0" tIns="0" rIns="0" bIns="0" rtlCol="0" anchor="ctr"/>
+          <a:lstStyle/>
+          <a:p>
+            <a:pPr algn="ctr" indent="0" marL="0">
+              <a:buNone/>
+            </a:pPr>
+            <a:r>
+              <a:rPr lang="en-US" sz="1800" b="1" dirty="0">
+                <a:solidFill>
+                  <a:srgbClr val="0068B7"/>
+                </a:solidFill>
+                <a:latin typeface="Aptos" pitchFamily="34" charset="0"/>
+                <a:ea typeface="Aptos" pitchFamily="34" charset="-122"/>
+                <a:cs typeface="Aptos" pitchFamily="34" charset="-120"/>
+              </a:rPr>
+              <a:t>â†’</a:t>
+            </a:r>
+            <a:endParaRPr lang="en-US" sz="1800" dirty="0"/>
+          </a:p>
+        </p:txBody>
+      </p:sp>
+      <p:sp>
+        <p:nvSpPr>
+          <p:cNvPr id="19" name="Shape 17"/>
+          <p:cNvSpPr/>
+          <p:nvPr/>
+        </p:nvSpPr>
+        <p:spPr>
+          <a:xfrm>
+            <a:off x="10274808" y="3977640"/>
+            <a:ext cx="972312" cy="749808"/>
+          </a:xfrm>
+          <a:prstGeom prst="roundRect">
+            <a:avLst>
+              <a:gd name="adj" fmla="val 14634"/>
+            </a:avLst>
+          </a:prstGeom>
+          <a:solidFill>
+            <a:srgbClr val="6A4CA3"/>
+          </a:solidFill>
+          <a:ln w="12700">
+            <a:solidFill>
+              <a:srgbClr val="6A4CA3"/>
+            </a:solidFill>
+            <a:prstDash val="solid"/>
+          </a:ln>
+        </p:spPr>
+      </p:sp>
+      <p:sp>
+        <p:nvSpPr>
+          <p:cNvPr id="20" name="Text 18"/>
+          <p:cNvSpPr/>
+          <p:nvPr/>
+        </p:nvSpPr>
+        <p:spPr>
+          <a:xfrm>
+            <a:off x="10347960" y="4169664"/>
+            <a:ext cx="826008" cy="310896"/>
+          </a:xfrm>
+          <a:prstGeom prst="rect">
+            <a:avLst/>
+          </a:prstGeom>
+          <a:noFill/>
+          <a:ln/>
+        </p:spPr>
+        <p:txBody>
+          <a:bodyPr wrap="square" lIns="0" tIns="0" rIns="0" bIns="0" rtlCol="0" anchor="ctr">
+            <a:normAutofit/>
+          </a:bodyPr>
+          <a:lstStyle/>
+          <a:p>
+            <a:pPr algn="ctr" indent="0" marL="0">
+              <a:buNone/>
+            </a:pPr>
+            <a:r>
+              <a:rPr lang="en-US" sz="1500" b="1" dirty="0">
+                <a:solidFill>
+                  <a:srgbClr val="FFFFFF"/>
+                </a:solidFill>
+                <a:latin typeface="Aptos" pitchFamily="34" charset="0"/>
+                <a:ea typeface="Aptos" pitchFamily="34" charset="-122"/>
+                <a:cs typeface="Aptos" pitchFamily="34" charset="-120"/>
+              </a:rPr>
+              <a:t>Action</a:t>
+            </a:r>
+            <a:endParaRPr lang="en-US" sz="1500" dirty="0"/>
           </a:p>
         </p:txBody>
       </p:sp>
@@ -11477,7 +12395,7 @@
                 <a:ea typeface="Aptos" pitchFamily="34" charset="-122"/>
                 <a:cs typeface="Aptos" pitchFamily="34" charset="-120"/>
               </a:rPr>
-              <a:t>© Paula Soper</a:t>
+              <a:t>Â© Paula Soper</a:t>
             </a:r>
             <a:endParaRPr lang="en-US" sz="800" dirty="0"/>
           </a:p>
@@ -11491,8 +12409,47 @@
         </p:nvSpPr>
         <p:spPr>
           <a:xfrm>
+            <a:off x="11137392" y="6510528"/>
+            <a:ext cx="411480" cy="201168"/>
+          </a:xfrm>
+          <a:prstGeom prst="rect">
+            <a:avLst/>
+          </a:prstGeom>
+          <a:noFill/>
+          <a:ln/>
+        </p:spPr>
+        <p:txBody>
+          <a:bodyPr wrap="square" lIns="0" tIns="0" rIns="0" bIns="0" rtlCol="0" anchor="ctr"/>
+          <a:lstStyle/>
+          <a:p>
+            <a:pPr algn="r" indent="0" marL="0">
+              <a:buNone/>
+            </a:pPr>
+            <a:r>
+              <a:rPr lang="en-US" sz="900" dirty="0">
+                <a:solidFill>
+                  <a:srgbClr val="5F7181"/>
+                </a:solidFill>
+                <a:latin typeface="Aptos" pitchFamily="34" charset="0"/>
+                <a:ea typeface="Aptos" pitchFamily="34" charset="-122"/>
+                <a:cs typeface="Aptos" pitchFamily="34" charset="-120"/>
+              </a:rPr>
+              <a:t>4</a:t>
+            </a:r>
+            <a:endParaRPr lang="en-US" sz="900" dirty="0"/>
+          </a:p>
+        </p:txBody>
+      </p:sp>
+      <p:sp>
+        <p:nvSpPr>
+          <p:cNvPr id="8" name="Text 6"/>
+          <p:cNvSpPr/>
+          <p:nvPr/>
+        </p:nvSpPr>
+        <p:spPr>
+          <a:xfrm>
             <a:off x="640080" y="658368"/>
-            <a:ext cx="10881360" cy="566928"/>
+            <a:ext cx="10881360" cy="713232"/>
           </a:xfrm>
           <a:prstGeom prst="rect">
             <a:avLst/>
@@ -11510,7 +12467,7 @@
               <a:buNone/>
             </a:pPr>
             <a:r>
-              <a:rPr lang="en-US" sz="2700" b="1" dirty="0">
+              <a:rPr lang="en-US" sz="3400" b="1" dirty="0">
                 <a:solidFill>
                   <a:srgbClr val="003A63"/>
                 </a:solidFill>
@@ -11520,20 +12477,20 @@
               </a:rPr>
               <a:t>Related toolkit resources</a:t>
             </a:r>
-            <a:endParaRPr lang="en-US" sz="2700" dirty="0"/>
-          </a:p>
-        </p:txBody>
-      </p:sp>
-      <p:sp>
-        <p:nvSpPr>
-          <p:cNvPr id="8" name="Text 6"/>
-          <p:cNvSpPr/>
-          <p:nvPr/>
-        </p:nvSpPr>
-        <p:spPr>
-          <a:xfrm>
-            <a:off x="868680" y="1417320"/>
-            <a:ext cx="6903720" cy="4480560"/>
+            <a:endParaRPr lang="en-US" sz="3400" dirty="0"/>
+          </a:p>
+        </p:txBody>
+      </p:sp>
+      <p:sp>
+        <p:nvSpPr>
+          <p:cNvPr id="9" name="Text 7"/>
+          <p:cNvSpPr/>
+          <p:nvPr/>
+        </p:nvSpPr>
+        <p:spPr>
+          <a:xfrm>
+            <a:off x="868680" y="1508760"/>
+            <a:ext cx="6812280" cy="3977640"/>
           </a:xfrm>
           <a:prstGeom prst="rect">
             <a:avLst/>
@@ -11548,7 +12505,7 @@
           <a:lstStyle/>
           <a:p>
             <a:r>
-              <a:rPr lang="en-US" sz="1460" dirty="0">
+              <a:rPr lang="en-US" sz="1850" dirty="0">
                 <a:solidFill>
                   <a:srgbClr val="17364A"/>
                 </a:solidFill>
@@ -11556,13 +12513,13 @@
                 <a:ea typeface="Aptos" pitchFamily="34" charset="-122"/>
                 <a:cs typeface="Aptos" pitchFamily="34" charset="-120"/>
               </a:rPr>
-              <a:t>Tool 4: AI Policy Landscape Scan (Worksheet) - Use AI Policy Landscape Scan to translate this lesson into a documented public health.</a:t>
-            </a:r>
-            <a:endParaRPr lang="en-US" sz="1460" dirty="0"/>
-          </a:p>
-          <a:p>
-            <a:r>
-              <a:rPr lang="en-US" sz="1460" dirty="0">
+              <a:t>Tool 4: AI Policy Landscape Scan (Worksheet) - Use AI Policy Landscape Scan to translate this lesson into a.</a:t>
+            </a:r>
+            <a:endParaRPr lang="en-US" sz="1850" dirty="0"/>
+          </a:p>
+          <a:p>
+            <a:r>
+              <a:rPr lang="en-US" sz="1850" dirty="0">
                 <a:solidFill>
                   <a:srgbClr val="17364A"/>
                 </a:solidFill>
@@ -11570,13 +12527,13 @@
                 <a:ea typeface="Aptos" pitchFamily="34" charset="-122"/>
                 <a:cs typeface="Aptos" pitchFamily="34" charset="-120"/>
               </a:rPr>
-              <a:t>Tool 5: AI Environmental and Resource Impact Review (Checklist) - Use this tool to complete or strengthen the practical exercise for.</a:t>
-            </a:r>
-            <a:endParaRPr lang="en-US" sz="1460" dirty="0"/>
-          </a:p>
-          <a:p>
-            <a:r>
-              <a:rPr lang="en-US" sz="1460" dirty="0">
+              <a:t>Tool 5: AI Environmental and Resource Impact Review (Checklist) - Use this tool to complete or strengthen.</a:t>
+            </a:r>
+            <a:endParaRPr lang="en-US" sz="1850" dirty="0"/>
+          </a:p>
+          <a:p>
+            <a:r>
+              <a:rPr lang="en-US" sz="1850" dirty="0">
                 <a:solidFill>
                   <a:srgbClr val="17364A"/>
                 </a:solidFill>
@@ -11584,13 +12541,13 @@
                 <a:ea typeface="Aptos" pitchFamily="34" charset="-122"/>
                 <a:cs typeface="Aptos" pitchFamily="34" charset="-120"/>
               </a:rPr>
-              <a:t>Tool 6: Human-Centered AI Decision Rule Checklist (Checklist) - Use Human-Centered AI Decision Rule Checklist to translate this.</a:t>
-            </a:r>
-            <a:endParaRPr lang="en-US" sz="1460" dirty="0"/>
-          </a:p>
-          <a:p>
-            <a:r>
-              <a:rPr lang="en-US" sz="1460" dirty="0">
+              <a:t>Tool 6: Human-Centered AI Decision Rule Checklist (Checklist) - Use Human-Centered AI Decision Rule.</a:t>
+            </a:r>
+            <a:endParaRPr lang="en-US" sz="1850" dirty="0"/>
+          </a:p>
+          <a:p>
+            <a:r>
+              <a:rPr lang="en-US" sz="1850" dirty="0">
                 <a:solidFill>
                   <a:srgbClr val="17364A"/>
                 </a:solidFill>
@@ -11598,29 +12555,15 @@
                 <a:ea typeface="Aptos" pitchFamily="34" charset="-122"/>
                 <a:cs typeface="Aptos" pitchFamily="34" charset="-120"/>
               </a:rPr>
-              <a:t>Tool 8: AI Project Charter (Planning) - Use this tool to complete or strengthen the practical exercise for the module using.</a:t>
-            </a:r>
-            <a:endParaRPr lang="en-US" sz="1460" dirty="0"/>
-          </a:p>
-          <a:p>
-            <a:r>
-              <a:rPr lang="en-US" sz="1460" dirty="0">
-                <a:solidFill>
-                  <a:srgbClr val="17364A"/>
-                </a:solidFill>
-                <a:latin typeface="Aptos" pitchFamily="34" charset="0"/>
-                <a:ea typeface="Aptos" pitchFamily="34" charset="-122"/>
-                <a:cs typeface="Aptos" pitchFamily="34" charset="-120"/>
-              </a:rPr>
-              <a:t>Tool 9: Data Quality Assessment Checklist (Checklist) - Use this tool to complete or strengthen the practical exercise for the module.</a:t>
-            </a:r>
-            <a:endParaRPr lang="en-US" sz="1460" dirty="0"/>
-          </a:p>
-        </p:txBody>
-      </p:sp>
-      <p:sp>
-        <p:nvSpPr>
-          <p:cNvPr id="9" name="Shape 7"/>
+              <a:t>Tool 8: AI Project Charter (Planning) - Use this tool to complete or strengthen the practical exercise for.</a:t>
+            </a:r>
+            <a:endParaRPr lang="en-US" sz="1850" dirty="0"/>
+          </a:p>
+        </p:txBody>
+      </p:sp>
+      <p:sp>
+        <p:nvSpPr>
+          <p:cNvPr id="10" name="Shape 8"/>
           <p:cNvSpPr/>
           <p:nvPr/>
         </p:nvSpPr>
@@ -11647,14 +12590,14 @@
       </p:sp>
       <p:sp>
         <p:nvSpPr>
-          <p:cNvPr id="10" name="Text 8"/>
+          <p:cNvPr id="11" name="Text 9"/>
           <p:cNvSpPr/>
           <p:nvPr/>
         </p:nvSpPr>
         <p:spPr>
           <a:xfrm>
             <a:off x="8211312" y="1563624"/>
-            <a:ext cx="2734056" cy="201168"/>
+            <a:ext cx="2734056" cy="256032"/>
           </a:xfrm>
           <a:prstGeom prst="rect">
             <a:avLst/>
@@ -11670,7 +12613,7 @@
               <a:buNone/>
             </a:pPr>
             <a:r>
-              <a:rPr lang="en-US" sz="950" b="1" dirty="0">
+              <a:rPr lang="en-US" sz="1300" b="1" dirty="0">
                 <a:solidFill>
                   <a:srgbClr val="0068B7"/>
                 </a:solidFill>
@@ -11680,20 +12623,20 @@
               </a:rPr>
               <a:t>Use the tools</a:t>
             </a:r>
-            <a:endParaRPr lang="en-US" sz="950" dirty="0"/>
-          </a:p>
-        </p:txBody>
-      </p:sp>
-      <p:sp>
-        <p:nvSpPr>
-          <p:cNvPr id="11" name="Text 9"/>
-          <p:cNvSpPr/>
-          <p:nvPr/>
-        </p:nvSpPr>
-        <p:spPr>
-          <a:xfrm>
-            <a:off x="8211312" y="1856232"/>
-            <a:ext cx="2734056" cy="1536192"/>
+            <a:endParaRPr lang="en-US" sz="1300" dirty="0"/>
+          </a:p>
+        </p:txBody>
+      </p:sp>
+      <p:sp>
+        <p:nvSpPr>
+          <p:cNvPr id="12" name="Text 10"/>
+          <p:cNvSpPr/>
+          <p:nvPr/>
+        </p:nvSpPr>
+        <p:spPr>
+          <a:xfrm>
+            <a:off x="8211312" y="1920240"/>
+            <a:ext cx="2734056" cy="1463040"/>
           </a:xfrm>
           <a:prstGeom prst="rect">
             <a:avLst/>
@@ -11711,7 +12654,7 @@
               <a:buNone/>
             </a:pPr>
             <a:r>
-              <a:rPr lang="en-US" sz="1250" dirty="0">
+              <a:rPr lang="en-US" sz="1550" dirty="0">
                 <a:solidFill>
                   <a:srgbClr val="17364A"/>
                 </a:solidFill>
@@ -11721,32 +12664,32 @@
               </a:rPr>
               <a:t>Use linked tools when your department needs a structured worksheet, template, checklist, review process, or documentation artifact.</a:t>
             </a:r>
-            <a:endParaRPr lang="en-US" sz="1250" dirty="0"/>
-          </a:p>
-        </p:txBody>
-      </p:sp>
-      <p:sp>
-        <p:nvSpPr>
-          <p:cNvPr id="12" name="Shape 10"/>
-          <p:cNvSpPr/>
-          <p:nvPr/>
-        </p:nvSpPr>
-        <p:spPr>
-          <a:xfrm>
-            <a:off x="8046720" y="3794760"/>
-            <a:ext cx="3063240" cy="1508760"/>
+            <a:endParaRPr lang="en-US" sz="1550" dirty="0"/>
+          </a:p>
+        </p:txBody>
+      </p:sp>
+      <p:sp>
+        <p:nvSpPr>
+          <p:cNvPr id="13" name="Shape 11"/>
+          <p:cNvSpPr/>
+          <p:nvPr/>
+        </p:nvSpPr>
+        <p:spPr>
+          <a:xfrm>
+            <a:off x="7818120" y="3977640"/>
+            <a:ext cx="972312" cy="749808"/>
           </a:xfrm>
           <a:prstGeom prst="roundRect">
             <a:avLst>
-              <a:gd name="adj" fmla="val 7273"/>
+              <a:gd name="adj" fmla="val 14634"/>
             </a:avLst>
           </a:prstGeom>
           <a:solidFill>
-            <a:srgbClr val="EEF8ED"/>
+            <a:srgbClr val="0068B7"/>
           </a:solidFill>
           <a:ln w="12700">
             <a:solidFill>
-              <a:srgbClr val="B9D7E6"/>
+              <a:srgbClr val="0068B7"/>
             </a:solidFill>
             <a:prstDash val="solid"/>
           </a:ln>
@@ -11754,81 +12697,256 @@
       </p:sp>
       <p:sp>
         <p:nvSpPr>
-          <p:cNvPr id="13" name="Text 11"/>
-          <p:cNvSpPr/>
-          <p:nvPr/>
-        </p:nvSpPr>
-        <p:spPr>
-          <a:xfrm>
-            <a:off x="8211312" y="3941064"/>
-            <a:ext cx="2734056" cy="201168"/>
-          </a:xfrm>
-          <a:prstGeom prst="rect">
-            <a:avLst/>
-          </a:prstGeom>
-          <a:noFill/>
-          <a:ln/>
-        </p:spPr>
-        <p:txBody>
-          <a:bodyPr wrap="square" lIns="0" tIns="0" rIns="0" bIns="0" rtlCol="0" anchor="ctr"/>
-          <a:lstStyle/>
-          <a:p>
-            <a:pPr indent="0" marL="0">
-              <a:buNone/>
-            </a:pPr>
-            <a:r>
-              <a:rPr lang="en-US" sz="950" b="1" dirty="0">
-                <a:solidFill>
-                  <a:srgbClr val="0068B7"/>
-                </a:solidFill>
-                <a:latin typeface="Aptos" pitchFamily="34" charset="0"/>
-                <a:ea typeface="Aptos" pitchFamily="34" charset="-122"/>
-                <a:cs typeface="Aptos" pitchFamily="34" charset="-120"/>
-              </a:rPr>
-              <a:t>Avoid duplication</a:t>
-            </a:r>
-            <a:endParaRPr lang="en-US" sz="950" dirty="0"/>
-          </a:p>
-        </p:txBody>
-      </p:sp>
-      <p:sp>
-        <p:nvSpPr>
           <p:cNvPr id="14" name="Text 12"/>
           <p:cNvSpPr/>
           <p:nvPr/>
         </p:nvSpPr>
         <p:spPr>
           <a:xfrm>
-            <a:off x="8211312" y="4233672"/>
-            <a:ext cx="2734056" cy="941832"/>
-          </a:xfrm>
-          <a:prstGeom prst="rect">
-            <a:avLst/>
-          </a:prstGeom>
-          <a:noFill/>
-          <a:ln/>
-        </p:spPr>
-        <p:txBody>
-          <a:bodyPr wrap="square" lIns="0" tIns="0" rIns="0" bIns="0" rtlCol="0" anchor="t">
+            <a:off x="7891272" y="4169664"/>
+            <a:ext cx="826008" cy="310896"/>
+          </a:xfrm>
+          <a:prstGeom prst="rect">
+            <a:avLst/>
+          </a:prstGeom>
+          <a:noFill/>
+          <a:ln/>
+        </p:spPr>
+        <p:txBody>
+          <a:bodyPr wrap="square" lIns="0" tIns="0" rIns="0" bIns="0" rtlCol="0" anchor="ctr">
             <a:normAutofit/>
           </a:bodyPr>
           <a:lstStyle/>
           <a:p>
-            <a:pPr indent="0" marL="0">
-              <a:buNone/>
-            </a:pPr>
-            <a:r>
-              <a:rPr lang="en-US" sz="1250" dirty="0">
-                <a:solidFill>
-                  <a:srgbClr val="17364A"/>
-                </a:solidFill>
-                <a:latin typeface="Aptos" pitchFamily="34" charset="0"/>
-                <a:ea typeface="Aptos" pitchFamily="34" charset="-122"/>
-                <a:cs typeface="Aptos" pitchFamily="34" charset="-120"/>
-              </a:rPr>
-              <a:t>If your department already has a strong equivalent tool, adapt or use the existing process instead of recreating it.</a:t>
-            </a:r>
-            <a:endParaRPr lang="en-US" sz="1250" dirty="0"/>
+            <a:pPr algn="ctr" indent="0" marL="0">
+              <a:buNone/>
+            </a:pPr>
+            <a:r>
+              <a:rPr lang="en-US" sz="1500" b="1" dirty="0">
+                <a:solidFill>
+                  <a:srgbClr val="FFFFFF"/>
+                </a:solidFill>
+                <a:latin typeface="Aptos" pitchFamily="34" charset="0"/>
+                <a:ea typeface="Aptos" pitchFamily="34" charset="-122"/>
+                <a:cs typeface="Aptos" pitchFamily="34" charset="-120"/>
+              </a:rPr>
+              <a:t>Concept</a:t>
+            </a:r>
+            <a:endParaRPr lang="en-US" sz="1500" dirty="0"/>
+          </a:p>
+        </p:txBody>
+      </p:sp>
+      <p:sp>
+        <p:nvSpPr>
+          <p:cNvPr id="15" name="Text 13"/>
+          <p:cNvSpPr/>
+          <p:nvPr/>
+        </p:nvSpPr>
+        <p:spPr>
+          <a:xfrm>
+            <a:off x="8817864" y="4187952"/>
+            <a:ext cx="201168" cy="256032"/>
+          </a:xfrm>
+          <a:prstGeom prst="rect">
+            <a:avLst/>
+          </a:prstGeom>
+          <a:noFill/>
+          <a:ln/>
+        </p:spPr>
+        <p:txBody>
+          <a:bodyPr wrap="square" lIns="0" tIns="0" rIns="0" bIns="0" rtlCol="0" anchor="ctr"/>
+          <a:lstStyle/>
+          <a:p>
+            <a:pPr algn="ctr" indent="0" marL="0">
+              <a:buNone/>
+            </a:pPr>
+            <a:r>
+              <a:rPr lang="en-US" sz="1800" b="1" dirty="0">
+                <a:solidFill>
+                  <a:srgbClr val="0068B7"/>
+                </a:solidFill>
+                <a:latin typeface="Aptos" pitchFamily="34" charset="0"/>
+                <a:ea typeface="Aptos" pitchFamily="34" charset="-122"/>
+                <a:cs typeface="Aptos" pitchFamily="34" charset="-120"/>
+              </a:rPr>
+              <a:t>â†’</a:t>
+            </a:r>
+            <a:endParaRPr lang="en-US" sz="1800" dirty="0"/>
+          </a:p>
+        </p:txBody>
+      </p:sp>
+      <p:sp>
+        <p:nvSpPr>
+          <p:cNvPr id="16" name="Shape 14"/>
+          <p:cNvSpPr/>
+          <p:nvPr/>
+        </p:nvSpPr>
+        <p:spPr>
+          <a:xfrm>
+            <a:off x="9046464" y="3977640"/>
+            <a:ext cx="972312" cy="749808"/>
+          </a:xfrm>
+          <a:prstGeom prst="roundRect">
+            <a:avLst>
+              <a:gd name="adj" fmla="val 14634"/>
+            </a:avLst>
+          </a:prstGeom>
+          <a:solidFill>
+            <a:srgbClr val="2F8A28"/>
+          </a:solidFill>
+          <a:ln w="12700">
+            <a:solidFill>
+              <a:srgbClr val="2F8A28"/>
+            </a:solidFill>
+            <a:prstDash val="solid"/>
+          </a:ln>
+        </p:spPr>
+      </p:sp>
+      <p:sp>
+        <p:nvSpPr>
+          <p:cNvPr id="17" name="Text 15"/>
+          <p:cNvSpPr/>
+          <p:nvPr/>
+        </p:nvSpPr>
+        <p:spPr>
+          <a:xfrm>
+            <a:off x="9119616" y="4169664"/>
+            <a:ext cx="826008" cy="310896"/>
+          </a:xfrm>
+          <a:prstGeom prst="rect">
+            <a:avLst/>
+          </a:prstGeom>
+          <a:noFill/>
+          <a:ln/>
+        </p:spPr>
+        <p:txBody>
+          <a:bodyPr wrap="square" lIns="0" tIns="0" rIns="0" bIns="0" rtlCol="0" anchor="ctr">
+            <a:normAutofit/>
+          </a:bodyPr>
+          <a:lstStyle/>
+          <a:p>
+            <a:pPr algn="ctr" indent="0" marL="0">
+              <a:buNone/>
+            </a:pPr>
+            <a:r>
+              <a:rPr lang="en-US" sz="1500" b="1" dirty="0">
+                <a:solidFill>
+                  <a:srgbClr val="FFFFFF"/>
+                </a:solidFill>
+                <a:latin typeface="Aptos" pitchFamily="34" charset="0"/>
+                <a:ea typeface="Aptos" pitchFamily="34" charset="-122"/>
+                <a:cs typeface="Aptos" pitchFamily="34" charset="-120"/>
+              </a:rPr>
+              <a:t>Tool</a:t>
+            </a:r>
+            <a:endParaRPr lang="en-US" sz="1500" dirty="0"/>
+          </a:p>
+        </p:txBody>
+      </p:sp>
+      <p:sp>
+        <p:nvSpPr>
+          <p:cNvPr id="18" name="Text 16"/>
+          <p:cNvSpPr/>
+          <p:nvPr/>
+        </p:nvSpPr>
+        <p:spPr>
+          <a:xfrm>
+            <a:off x="10046208" y="4187952"/>
+            <a:ext cx="201168" cy="256032"/>
+          </a:xfrm>
+          <a:prstGeom prst="rect">
+            <a:avLst/>
+          </a:prstGeom>
+          <a:noFill/>
+          <a:ln/>
+        </p:spPr>
+        <p:txBody>
+          <a:bodyPr wrap="square" lIns="0" tIns="0" rIns="0" bIns="0" rtlCol="0" anchor="ctr"/>
+          <a:lstStyle/>
+          <a:p>
+            <a:pPr algn="ctr" indent="0" marL="0">
+              <a:buNone/>
+            </a:pPr>
+            <a:r>
+              <a:rPr lang="en-US" sz="1800" b="1" dirty="0">
+                <a:solidFill>
+                  <a:srgbClr val="0068B7"/>
+                </a:solidFill>
+                <a:latin typeface="Aptos" pitchFamily="34" charset="0"/>
+                <a:ea typeface="Aptos" pitchFamily="34" charset="-122"/>
+                <a:cs typeface="Aptos" pitchFamily="34" charset="-120"/>
+              </a:rPr>
+              <a:t>â†’</a:t>
+            </a:r>
+            <a:endParaRPr lang="en-US" sz="1800" dirty="0"/>
+          </a:p>
+        </p:txBody>
+      </p:sp>
+      <p:sp>
+        <p:nvSpPr>
+          <p:cNvPr id="19" name="Shape 17"/>
+          <p:cNvSpPr/>
+          <p:nvPr/>
+        </p:nvSpPr>
+        <p:spPr>
+          <a:xfrm>
+            <a:off x="10274808" y="3977640"/>
+            <a:ext cx="972312" cy="749808"/>
+          </a:xfrm>
+          <a:prstGeom prst="roundRect">
+            <a:avLst>
+              <a:gd name="adj" fmla="val 14634"/>
+            </a:avLst>
+          </a:prstGeom>
+          <a:solidFill>
+            <a:srgbClr val="D69A2D"/>
+          </a:solidFill>
+          <a:ln w="12700">
+            <a:solidFill>
+              <a:srgbClr val="D69A2D"/>
+            </a:solidFill>
+            <a:prstDash val="solid"/>
+          </a:ln>
+        </p:spPr>
+      </p:sp>
+      <p:sp>
+        <p:nvSpPr>
+          <p:cNvPr id="20" name="Text 18"/>
+          <p:cNvSpPr/>
+          <p:nvPr/>
+        </p:nvSpPr>
+        <p:spPr>
+          <a:xfrm>
+            <a:off x="10347960" y="4169664"/>
+            <a:ext cx="826008" cy="310896"/>
+          </a:xfrm>
+          <a:prstGeom prst="rect">
+            <a:avLst/>
+          </a:prstGeom>
+          <a:noFill/>
+          <a:ln/>
+        </p:spPr>
+        <p:txBody>
+          <a:bodyPr wrap="square" lIns="0" tIns="0" rIns="0" bIns="0" rtlCol="0" anchor="ctr">
+            <a:normAutofit/>
+          </a:bodyPr>
+          <a:lstStyle/>
+          <a:p>
+            <a:pPr algn="ctr" indent="0" marL="0">
+              <a:buNone/>
+            </a:pPr>
+            <a:r>
+              <a:rPr lang="en-US" sz="1500" b="1" dirty="0">
+                <a:solidFill>
+                  <a:srgbClr val="FFFFFF"/>
+                </a:solidFill>
+                <a:latin typeface="Aptos" pitchFamily="34" charset="0"/>
+                <a:ea typeface="Aptos" pitchFamily="34" charset="-122"/>
+                <a:cs typeface="Aptos" pitchFamily="34" charset="-120"/>
+              </a:rPr>
+              <a:t>Artifact</a:t>
+            </a:r>
+            <a:endParaRPr lang="en-US" sz="1500" dirty="0"/>
           </a:p>
         </p:txBody>
       </p:sp>
@@ -12025,7 +13143,7 @@
                 <a:ea typeface="Aptos" pitchFamily="34" charset="-122"/>
                 <a:cs typeface="Aptos" pitchFamily="34" charset="-120"/>
               </a:rPr>
-              <a:t>© Paula Soper</a:t>
+              <a:t>Â© Paula Soper</a:t>
             </a:r>
             <a:endParaRPr lang="en-US" sz="800" dirty="0"/>
           </a:p>
@@ -12033,7 +13151,46 @@
       </p:sp>
       <p:sp>
         <p:nvSpPr>
-          <p:cNvPr id="7" name="Shape 5"/>
+          <p:cNvPr id="7" name="Text 5"/>
+          <p:cNvSpPr/>
+          <p:nvPr/>
+        </p:nvSpPr>
+        <p:spPr>
+          <a:xfrm>
+            <a:off x="11137392" y="6510528"/>
+            <a:ext cx="411480" cy="201168"/>
+          </a:xfrm>
+          <a:prstGeom prst="rect">
+            <a:avLst/>
+          </a:prstGeom>
+          <a:noFill/>
+          <a:ln/>
+        </p:spPr>
+        <p:txBody>
+          <a:bodyPr wrap="square" lIns="0" tIns="0" rIns="0" bIns="0" rtlCol="0" anchor="ctr"/>
+          <a:lstStyle/>
+          <a:p>
+            <a:pPr algn="r" indent="0" marL="0">
+              <a:buNone/>
+            </a:pPr>
+            <a:r>
+              <a:rPr lang="en-US" sz="900" dirty="0">
+                <a:solidFill>
+                  <a:srgbClr val="5F7181"/>
+                </a:solidFill>
+                <a:latin typeface="Aptos" pitchFamily="34" charset="0"/>
+                <a:ea typeface="Aptos" pitchFamily="34" charset="-122"/>
+                <a:cs typeface="Aptos" pitchFamily="34" charset="-120"/>
+              </a:rPr>
+              <a:t>5</a:t>
+            </a:r>
+            <a:endParaRPr lang="en-US" sz="900" dirty="0"/>
+          </a:p>
+        </p:txBody>
+      </p:sp>
+      <p:sp>
+        <p:nvSpPr>
+          <p:cNvPr id="8" name="Shape 6"/>
           <p:cNvSpPr/>
           <p:nvPr/>
         </p:nvSpPr>
@@ -12058,7 +13215,7 @@
       </p:sp>
       <p:sp>
         <p:nvSpPr>
-          <p:cNvPr id="8" name="Text 6"/>
+          <p:cNvPr id="9" name="Text 7"/>
           <p:cNvSpPr/>
           <p:nvPr/>
         </p:nvSpPr>
@@ -12097,14 +13254,14 @@
       </p:sp>
       <p:sp>
         <p:nvSpPr>
-          <p:cNvPr id="9" name="Text 7"/>
+          <p:cNvPr id="10" name="Text 8"/>
           <p:cNvSpPr/>
           <p:nvPr/>
         </p:nvSpPr>
         <p:spPr>
           <a:xfrm>
             <a:off x="640080" y="621792"/>
-            <a:ext cx="10881360" cy="566928"/>
+            <a:ext cx="10881360" cy="713232"/>
           </a:xfrm>
           <a:prstGeom prst="rect">
             <a:avLst/>
@@ -12122,7 +13279,7 @@
               <a:buNone/>
             </a:pPr>
             <a:r>
-              <a:rPr lang="en-US" sz="2700" b="1" dirty="0">
+              <a:rPr lang="en-US" sz="3400" b="1" dirty="0">
                 <a:solidFill>
                   <a:srgbClr val="003A63"/>
                 </a:solidFill>
@@ -12132,20 +13289,20 @@
               </a:rPr>
               <a:t>Learning Objectives</a:t>
             </a:r>
-            <a:endParaRPr lang="en-US" sz="2700" dirty="0"/>
-          </a:p>
-        </p:txBody>
-      </p:sp>
-      <p:sp>
-        <p:nvSpPr>
-          <p:cNvPr id="10" name="Text 8"/>
-          <p:cNvSpPr/>
-          <p:nvPr/>
-        </p:nvSpPr>
-        <p:spPr>
-          <a:xfrm>
-            <a:off x="868680" y="1417320"/>
-            <a:ext cx="6675120" cy="4434840"/>
+            <a:endParaRPr lang="en-US" sz="3400" dirty="0"/>
+          </a:p>
+        </p:txBody>
+      </p:sp>
+      <p:sp>
+        <p:nvSpPr>
+          <p:cNvPr id="11" name="Text 9"/>
+          <p:cNvSpPr/>
+          <p:nvPr/>
+        </p:nvSpPr>
+        <p:spPr>
+          <a:xfrm>
+            <a:off x="868680" y="1508760"/>
+            <a:ext cx="6537960" cy="4160520"/>
           </a:xfrm>
           <a:prstGeom prst="rect">
             <a:avLst/>
@@ -12160,7 +13317,7 @@
           <a:lstStyle/>
           <a:p>
             <a:r>
-              <a:rPr lang="en-US" sz="1700" dirty="0">
+              <a:rPr lang="en-US" sz="2100" dirty="0">
                 <a:solidFill>
                   <a:srgbClr val="17364A"/>
                 </a:solidFill>
@@ -12170,11 +13327,11 @@
               </a:rPr>
               <a:t>Define the major phases of an AI implementation project.</a:t>
             </a:r>
-            <a:endParaRPr lang="en-US" sz="1700" dirty="0"/>
-          </a:p>
-          <a:p>
-            <a:r>
-              <a:rPr lang="en-US" sz="1700" dirty="0">
+            <a:endParaRPr lang="en-US" sz="2100" dirty="0"/>
+          </a:p>
+          <a:p>
+            <a:r>
+              <a:rPr lang="en-US" sz="2100" dirty="0">
                 <a:solidFill>
                   <a:srgbClr val="17364A"/>
                 </a:solidFill>
@@ -12182,13 +13339,13 @@
                 <a:ea typeface="Aptos" pitchFamily="34" charset="-122"/>
                 <a:cs typeface="Aptos" pitchFamily="34" charset="-120"/>
               </a:rPr>
-              <a:t>Develop an AI project charter that includes scope, objectives, roles, risks, dependencies, and governance gates.</a:t>
-            </a:r>
-            <a:endParaRPr lang="en-US" sz="1700" dirty="0"/>
-          </a:p>
-          <a:p>
-            <a:r>
-              <a:rPr lang="en-US" sz="1700" dirty="0">
+              <a:t>Develop an AI project charter that includes scope, objectives, roles, risks, dependencies, and.</a:t>
+            </a:r>
+            <a:endParaRPr lang="en-US" sz="2100" dirty="0"/>
+          </a:p>
+          <a:p>
+            <a:r>
+              <a:rPr lang="en-US" sz="2100" dirty="0">
                 <a:solidFill>
                   <a:srgbClr val="17364A"/>
                 </a:solidFill>
@@ -12196,29 +13353,15 @@
                 <a:ea typeface="Aptos" pitchFamily="34" charset="-122"/>
                 <a:cs typeface="Aptos" pitchFamily="34" charset="-120"/>
               </a:rPr>
-              <a:t>Identify implementation dependencies across data, systems, privacy, security, procurement, workflow, training, and evaluation.</a:t>
-            </a:r>
-            <a:endParaRPr lang="en-US" sz="1700" dirty="0"/>
-          </a:p>
-          <a:p>
-            <a:r>
-              <a:rPr lang="en-US" sz="1700" dirty="0">
-                <a:solidFill>
-                  <a:srgbClr val="17364A"/>
-                </a:solidFill>
-                <a:latin typeface="Aptos" pitchFamily="34" charset="0"/>
-                <a:ea typeface="Aptos" pitchFamily="34" charset="-122"/>
-                <a:cs typeface="Aptos" pitchFamily="34" charset="-120"/>
-              </a:rPr>
-              <a:t>Create a launch readiness checklist for an AI-supported workflow.</a:t>
-            </a:r>
-            <a:endParaRPr lang="en-US" sz="1700" dirty="0"/>
-          </a:p>
-        </p:txBody>
-      </p:sp>
-      <p:sp>
-        <p:nvSpPr>
-          <p:cNvPr id="11" name="Shape 9"/>
+              <a:t>Identify implementation dependencies across data, systems, privacy, security, procurement, workflow,.</a:t>
+            </a:r>
+            <a:endParaRPr lang="en-US" sz="2100" dirty="0"/>
+          </a:p>
+        </p:txBody>
+      </p:sp>
+      <p:sp>
+        <p:nvSpPr>
+          <p:cNvPr id="12" name="Shape 10"/>
           <p:cNvSpPr/>
           <p:nvPr/>
         </p:nvSpPr>
@@ -12245,14 +13388,14 @@
       </p:sp>
       <p:sp>
         <p:nvSpPr>
-          <p:cNvPr id="12" name="Text 10"/>
+          <p:cNvPr id="13" name="Text 11"/>
           <p:cNvSpPr/>
           <p:nvPr/>
         </p:nvSpPr>
         <p:spPr>
           <a:xfrm>
             <a:off x="8074152" y="1563624"/>
-            <a:ext cx="2825496" cy="201168"/>
+            <a:ext cx="2825496" cy="256032"/>
           </a:xfrm>
           <a:prstGeom prst="rect">
             <a:avLst/>
@@ -12268,7 +13411,7 @@
               <a:buNone/>
             </a:pPr>
             <a:r>
-              <a:rPr lang="en-US" sz="950" b="1" dirty="0">
+              <a:rPr lang="en-US" sz="1300" b="1" dirty="0">
                 <a:solidFill>
                   <a:srgbClr val="0068B7"/>
                 </a:solidFill>
@@ -12278,20 +13421,20 @@
               </a:rPr>
               <a:t>Key idea</a:t>
             </a:r>
-            <a:endParaRPr lang="en-US" sz="950" dirty="0"/>
-          </a:p>
-        </p:txBody>
-      </p:sp>
-      <p:sp>
-        <p:nvSpPr>
-          <p:cNvPr id="13" name="Text 11"/>
-          <p:cNvSpPr/>
-          <p:nvPr/>
-        </p:nvSpPr>
-        <p:spPr>
-          <a:xfrm>
-            <a:off x="8074152" y="1856232"/>
-            <a:ext cx="2825496" cy="1261872"/>
+            <a:endParaRPr lang="en-US" sz="1300" dirty="0"/>
+          </a:p>
+        </p:txBody>
+      </p:sp>
+      <p:sp>
+        <p:nvSpPr>
+          <p:cNvPr id="14" name="Text 12"/>
+          <p:cNvSpPr/>
+          <p:nvPr/>
+        </p:nvSpPr>
+        <p:spPr>
+          <a:xfrm>
+            <a:off x="8074152" y="1920240"/>
+            <a:ext cx="2825496" cy="1188720"/>
           </a:xfrm>
           <a:prstGeom prst="rect">
             <a:avLst/>
@@ -12309,7 +13452,7 @@
               <a:buNone/>
             </a:pPr>
             <a:r>
-              <a:rPr lang="en-US" sz="1250" dirty="0">
+              <a:rPr lang="en-US" sz="1550" dirty="0">
                 <a:solidFill>
                   <a:srgbClr val="17364A"/>
                 </a:solidFill>
@@ -12319,13 +13462,13 @@
               </a:rPr>
               <a:t>Define the major phases of an AI implementation project.</a:t>
             </a:r>
-            <a:endParaRPr lang="en-US" sz="1250" dirty="0"/>
-          </a:p>
-        </p:txBody>
-      </p:sp>
-      <p:sp>
-        <p:nvSpPr>
-          <p:cNvPr id="14" name="Shape 12"/>
+            <a:endParaRPr lang="en-US" sz="1550" dirty="0"/>
+          </a:p>
+        </p:txBody>
+      </p:sp>
+      <p:sp>
+        <p:nvSpPr>
+          <p:cNvPr id="15" name="Shape 13"/>
           <p:cNvSpPr/>
           <p:nvPr/>
         </p:nvSpPr>
@@ -12352,14 +13495,14 @@
       </p:sp>
       <p:sp>
         <p:nvSpPr>
-          <p:cNvPr id="15" name="Text 13"/>
+          <p:cNvPr id="16" name="Text 14"/>
           <p:cNvSpPr/>
           <p:nvPr/>
         </p:nvSpPr>
         <p:spPr>
           <a:xfrm>
             <a:off x="8074152" y="3666744"/>
-            <a:ext cx="2825496" cy="201168"/>
+            <a:ext cx="2825496" cy="256032"/>
           </a:xfrm>
           <a:prstGeom prst="rect">
             <a:avLst/>
@@ -12375,7 +13518,7 @@
               <a:buNone/>
             </a:pPr>
             <a:r>
-              <a:rPr lang="en-US" sz="950" b="1" dirty="0">
+              <a:rPr lang="en-US" sz="1300" b="1" dirty="0">
                 <a:solidFill>
                   <a:srgbClr val="0068B7"/>
                 </a:solidFill>
@@ -12385,20 +13528,20 @@
               </a:rPr>
               <a:t>Use this for</a:t>
             </a:r>
-            <a:endParaRPr lang="en-US" sz="950" dirty="0"/>
-          </a:p>
-        </p:txBody>
-      </p:sp>
-      <p:sp>
-        <p:nvSpPr>
-          <p:cNvPr id="16" name="Text 14"/>
-          <p:cNvSpPr/>
-          <p:nvPr/>
-        </p:nvSpPr>
-        <p:spPr>
-          <a:xfrm>
-            <a:off x="8074152" y="3959352"/>
-            <a:ext cx="2825496" cy="1170432"/>
+            <a:endParaRPr lang="en-US" sz="1300" dirty="0"/>
+          </a:p>
+        </p:txBody>
+      </p:sp>
+      <p:sp>
+        <p:nvSpPr>
+          <p:cNvPr id="17" name="Text 15"/>
+          <p:cNvSpPr/>
+          <p:nvPr/>
+        </p:nvSpPr>
+        <p:spPr>
+          <a:xfrm>
+            <a:off x="8074152" y="4023360"/>
+            <a:ext cx="2825496" cy="1097280"/>
           </a:xfrm>
           <a:prstGeom prst="rect">
             <a:avLst/>
@@ -12416,7 +13559,7 @@
               <a:buNone/>
             </a:pPr>
             <a:r>
-              <a:rPr lang="en-US" sz="1250" dirty="0">
+              <a:rPr lang="en-US" sz="1550" dirty="0">
                 <a:solidFill>
                   <a:srgbClr val="17364A"/>
                 </a:solidFill>
@@ -12426,7 +13569,7 @@
               </a:rPr>
               <a:t>Connect the concept to public health decisions, safeguards, documentation, or implementation work.</a:t>
             </a:r>
-            <a:endParaRPr lang="en-US" sz="1250" dirty="0"/>
+            <a:endParaRPr lang="en-US" sz="1550" dirty="0"/>
           </a:p>
         </p:txBody>
       </p:sp>
@@ -12623,7 +13766,7 @@
                 <a:ea typeface="Aptos" pitchFamily="34" charset="-122"/>
                 <a:cs typeface="Aptos" pitchFamily="34" charset="-120"/>
               </a:rPr>
-              <a:t>© Paula Soper</a:t>
+              <a:t>Â© Paula Soper</a:t>
             </a:r>
             <a:endParaRPr lang="en-US" sz="800" dirty="0"/>
           </a:p>
@@ -12631,7 +13774,46 @@
       </p:sp>
       <p:sp>
         <p:nvSpPr>
-          <p:cNvPr id="7" name="Shape 5"/>
+          <p:cNvPr id="7" name="Text 5"/>
+          <p:cNvSpPr/>
+          <p:nvPr/>
+        </p:nvSpPr>
+        <p:spPr>
+          <a:xfrm>
+            <a:off x="11137392" y="6510528"/>
+            <a:ext cx="411480" cy="201168"/>
+          </a:xfrm>
+          <a:prstGeom prst="rect">
+            <a:avLst/>
+          </a:prstGeom>
+          <a:noFill/>
+          <a:ln/>
+        </p:spPr>
+        <p:txBody>
+          <a:bodyPr wrap="square" lIns="0" tIns="0" rIns="0" bIns="0" rtlCol="0" anchor="ctr"/>
+          <a:lstStyle/>
+          <a:p>
+            <a:pPr algn="r" indent="0" marL="0">
+              <a:buNone/>
+            </a:pPr>
+            <a:r>
+              <a:rPr lang="en-US" sz="900" dirty="0">
+                <a:solidFill>
+                  <a:srgbClr val="5F7181"/>
+                </a:solidFill>
+                <a:latin typeface="Aptos" pitchFamily="34" charset="0"/>
+                <a:ea typeface="Aptos" pitchFamily="34" charset="-122"/>
+                <a:cs typeface="Aptos" pitchFamily="34" charset="-120"/>
+              </a:rPr>
+              <a:t>6</a:t>
+            </a:r>
+            <a:endParaRPr lang="en-US" sz="900" dirty="0"/>
+          </a:p>
+        </p:txBody>
+      </p:sp>
+      <p:sp>
+        <p:nvSpPr>
+          <p:cNvPr id="8" name="Shape 6"/>
           <p:cNvSpPr/>
           <p:nvPr/>
         </p:nvSpPr>
@@ -12656,7 +13838,7 @@
       </p:sp>
       <p:sp>
         <p:nvSpPr>
-          <p:cNvPr id="8" name="Text 6"/>
+          <p:cNvPr id="9" name="Text 7"/>
           <p:cNvSpPr/>
           <p:nvPr/>
         </p:nvSpPr>
@@ -12695,14 +13877,14 @@
       </p:sp>
       <p:sp>
         <p:nvSpPr>
-          <p:cNvPr id="9" name="Text 7"/>
+          <p:cNvPr id="10" name="Text 8"/>
           <p:cNvSpPr/>
           <p:nvPr/>
         </p:nvSpPr>
         <p:spPr>
           <a:xfrm>
             <a:off x="640080" y="621792"/>
-            <a:ext cx="10881360" cy="566928"/>
+            <a:ext cx="10881360" cy="713232"/>
           </a:xfrm>
           <a:prstGeom prst="rect">
             <a:avLst/>
@@ -12720,7 +13902,7 @@
               <a:buNone/>
             </a:pPr>
             <a:r>
-              <a:rPr lang="en-US" sz="2700" b="1" dirty="0">
+              <a:rPr lang="en-US" sz="3400" b="1" dirty="0">
                 <a:solidFill>
                   <a:srgbClr val="003A63"/>
                 </a:solidFill>
@@ -12730,20 +13912,20 @@
               </a:rPr>
               <a:t>Module Overview</a:t>
             </a:r>
-            <a:endParaRPr lang="en-US" sz="2700" dirty="0"/>
-          </a:p>
-        </p:txBody>
-      </p:sp>
-      <p:sp>
-        <p:nvSpPr>
-          <p:cNvPr id="10" name="Text 8"/>
-          <p:cNvSpPr/>
-          <p:nvPr/>
-        </p:nvSpPr>
-        <p:spPr>
-          <a:xfrm>
-            <a:off x="868680" y="1417320"/>
-            <a:ext cx="6675120" cy="4434840"/>
+            <a:endParaRPr lang="en-US" sz="3400" dirty="0"/>
+          </a:p>
+        </p:txBody>
+      </p:sp>
+      <p:sp>
+        <p:nvSpPr>
+          <p:cNvPr id="11" name="Text 9"/>
+          <p:cNvSpPr/>
+          <p:nvPr/>
+        </p:nvSpPr>
+        <p:spPr>
+          <a:xfrm>
+            <a:off x="868680" y="1508760"/>
+            <a:ext cx="6537960" cy="4160520"/>
           </a:xfrm>
           <a:prstGeom prst="rect">
             <a:avLst/>
@@ -12758,7 +13940,7 @@
           <a:lstStyle/>
           <a:p>
             <a:r>
-              <a:rPr lang="en-US" sz="1700" dirty="0">
+              <a:rPr lang="en-US" sz="2100" dirty="0">
                 <a:solidFill>
                   <a:srgbClr val="17364A"/>
                 </a:solidFill>
@@ -12766,13 +13948,13 @@
                 <a:ea typeface="Aptos" pitchFamily="34" charset="-122"/>
                 <a:cs typeface="Aptos" pitchFamily="34" charset="-120"/>
               </a:rPr>
-              <a:t>AI projects require disciplined implementation planning because they combine technology, data, governance, workflow change,.</a:t>
-            </a:r>
-            <a:endParaRPr lang="en-US" sz="1700" dirty="0"/>
-          </a:p>
-          <a:p>
-            <a:r>
-              <a:rPr lang="en-US" sz="1700" dirty="0">
+              <a:t>AI projects require disciplined implementation planning because they combine technology, data,.</a:t>
+            </a:r>
+            <a:endParaRPr lang="en-US" sz="2100" dirty="0"/>
+          </a:p>
+          <a:p>
+            <a:r>
+              <a:rPr lang="en-US" sz="2100" dirty="0">
                 <a:solidFill>
                   <a:srgbClr val="17364A"/>
                 </a:solidFill>
@@ -12780,13 +13962,13 @@
                 <a:ea typeface="Aptos" pitchFamily="34" charset="-122"/>
                 <a:cs typeface="Aptos" pitchFamily="34" charset="-120"/>
               </a:rPr>
-              <a:t>A project that appears small, such as adding an AI summarization tool, may still require data access decisions, system.</a:t>
-            </a:r>
-            <a:endParaRPr lang="en-US" sz="1700" dirty="0"/>
-          </a:p>
-          <a:p>
-            <a:r>
-              <a:rPr lang="en-US" sz="1700" dirty="0">
+              <a:t>A project that appears small, such as adding an AI summarization tool, may still require data access.</a:t>
+            </a:r>
+            <a:endParaRPr lang="en-US" sz="2100" dirty="0"/>
+          </a:p>
+          <a:p>
+            <a:r>
+              <a:rPr lang="en-US" sz="2100" dirty="0">
                 <a:solidFill>
                   <a:srgbClr val="17364A"/>
                 </a:solidFill>
@@ -12794,29 +13976,15 @@
                 <a:ea typeface="Aptos" pitchFamily="34" charset="-122"/>
                 <a:cs typeface="Aptos" pitchFamily="34" charset="-120"/>
               </a:rPr>
-              <a:t>Public health agencies need project management methods that account for these dependencies before implementation begins.</a:t>
-            </a:r>
-            <a:endParaRPr lang="en-US" sz="1700" dirty="0"/>
-          </a:p>
-          <a:p>
-            <a:r>
-              <a:rPr lang="en-US" sz="1700" dirty="0">
-                <a:solidFill>
-                  <a:srgbClr val="17364A"/>
-                </a:solidFill>
-                <a:latin typeface="Aptos" pitchFamily="34" charset="0"/>
-                <a:ea typeface="Aptos" pitchFamily="34" charset="-122"/>
-                <a:cs typeface="Aptos" pitchFamily="34" charset="-120"/>
-              </a:rPr>
-              <a:t>This module teaches program managers, product owners, implementation leads, and technical staff how to structure AI.</a:t>
-            </a:r>
-            <a:endParaRPr lang="en-US" sz="1700" dirty="0"/>
-          </a:p>
-        </p:txBody>
-      </p:sp>
-      <p:sp>
-        <p:nvSpPr>
-          <p:cNvPr id="11" name="Shape 9"/>
+              <a:t>Public health agencies need project management methods that account for these dependencies before.</a:t>
+            </a:r>
+            <a:endParaRPr lang="en-US" sz="2100" dirty="0"/>
+          </a:p>
+        </p:txBody>
+      </p:sp>
+      <p:sp>
+        <p:nvSpPr>
+          <p:cNvPr id="12" name="Shape 10"/>
           <p:cNvSpPr/>
           <p:nvPr/>
         </p:nvSpPr>
@@ -12843,14 +14011,14 @@
       </p:sp>
       <p:sp>
         <p:nvSpPr>
-          <p:cNvPr id="12" name="Text 10"/>
+          <p:cNvPr id="13" name="Text 11"/>
           <p:cNvSpPr/>
           <p:nvPr/>
         </p:nvSpPr>
         <p:spPr>
           <a:xfrm>
             <a:off x="8074152" y="1563624"/>
-            <a:ext cx="2825496" cy="201168"/>
+            <a:ext cx="2825496" cy="256032"/>
           </a:xfrm>
           <a:prstGeom prst="rect">
             <a:avLst/>
@@ -12866,7 +14034,7 @@
               <a:buNone/>
             </a:pPr>
             <a:r>
-              <a:rPr lang="en-US" sz="950" b="1" dirty="0">
+              <a:rPr lang="en-US" sz="1300" b="1" dirty="0">
                 <a:solidFill>
                   <a:srgbClr val="0068B7"/>
                 </a:solidFill>
@@ -12876,20 +14044,20 @@
               </a:rPr>
               <a:t>Key idea</a:t>
             </a:r>
-            <a:endParaRPr lang="en-US" sz="950" dirty="0"/>
-          </a:p>
-        </p:txBody>
-      </p:sp>
-      <p:sp>
-        <p:nvSpPr>
-          <p:cNvPr id="13" name="Text 11"/>
-          <p:cNvSpPr/>
-          <p:nvPr/>
-        </p:nvSpPr>
-        <p:spPr>
-          <a:xfrm>
-            <a:off x="8074152" y="1856232"/>
-            <a:ext cx="2825496" cy="1261872"/>
+            <a:endParaRPr lang="en-US" sz="1300" dirty="0"/>
+          </a:p>
+        </p:txBody>
+      </p:sp>
+      <p:sp>
+        <p:nvSpPr>
+          <p:cNvPr id="14" name="Text 12"/>
+          <p:cNvSpPr/>
+          <p:nvPr/>
+        </p:nvSpPr>
+        <p:spPr>
+          <a:xfrm>
+            <a:off x="8074152" y="1920240"/>
+            <a:ext cx="2825496" cy="1188720"/>
           </a:xfrm>
           <a:prstGeom prst="rect">
             <a:avLst/>
@@ -12907,7 +14075,7 @@
               <a:buNone/>
             </a:pPr>
             <a:r>
-              <a:rPr lang="en-US" sz="1250" dirty="0">
+              <a:rPr lang="en-US" sz="1550" dirty="0">
                 <a:solidFill>
                   <a:srgbClr val="17364A"/>
                 </a:solidFill>
@@ -12915,15 +14083,15 @@
                 <a:ea typeface="Aptos" pitchFamily="34" charset="-122"/>
                 <a:cs typeface="Aptos" pitchFamily="34" charset="-120"/>
               </a:rPr>
-              <a:t>AI projects require disciplined implementation planning because they combine technology, data, governance, workflow change,.</a:t>
-            </a:r>
-            <a:endParaRPr lang="en-US" sz="1250" dirty="0"/>
-          </a:p>
-        </p:txBody>
-      </p:sp>
-      <p:sp>
-        <p:nvSpPr>
-          <p:cNvPr id="14" name="Shape 12"/>
+              <a:t>AI projects require disciplined implementation planning because they combine technology, data,.</a:t>
+            </a:r>
+            <a:endParaRPr lang="en-US" sz="1550" dirty="0"/>
+          </a:p>
+        </p:txBody>
+      </p:sp>
+      <p:sp>
+        <p:nvSpPr>
+          <p:cNvPr id="15" name="Shape 13"/>
           <p:cNvSpPr/>
           <p:nvPr/>
         </p:nvSpPr>
@@ -12950,14 +14118,14 @@
       </p:sp>
       <p:sp>
         <p:nvSpPr>
-          <p:cNvPr id="15" name="Text 13"/>
+          <p:cNvPr id="16" name="Text 14"/>
           <p:cNvSpPr/>
           <p:nvPr/>
         </p:nvSpPr>
         <p:spPr>
           <a:xfrm>
             <a:off x="8074152" y="3666744"/>
-            <a:ext cx="2825496" cy="201168"/>
+            <a:ext cx="2825496" cy="256032"/>
           </a:xfrm>
           <a:prstGeom prst="rect">
             <a:avLst/>
@@ -12973,7 +14141,7 @@
               <a:buNone/>
             </a:pPr>
             <a:r>
-              <a:rPr lang="en-US" sz="950" b="1" dirty="0">
+              <a:rPr lang="en-US" sz="1300" b="1" dirty="0">
                 <a:solidFill>
                   <a:srgbClr val="0068B7"/>
                 </a:solidFill>
@@ -12983,20 +14151,20 @@
               </a:rPr>
               <a:t>Use this for</a:t>
             </a:r>
-            <a:endParaRPr lang="en-US" sz="950" dirty="0"/>
-          </a:p>
-        </p:txBody>
-      </p:sp>
-      <p:sp>
-        <p:nvSpPr>
-          <p:cNvPr id="16" name="Text 14"/>
-          <p:cNvSpPr/>
-          <p:nvPr/>
-        </p:nvSpPr>
-        <p:spPr>
-          <a:xfrm>
-            <a:off x="8074152" y="3959352"/>
-            <a:ext cx="2825496" cy="1170432"/>
+            <a:endParaRPr lang="en-US" sz="1300" dirty="0"/>
+          </a:p>
+        </p:txBody>
+      </p:sp>
+      <p:sp>
+        <p:nvSpPr>
+          <p:cNvPr id="17" name="Text 15"/>
+          <p:cNvSpPr/>
+          <p:nvPr/>
+        </p:nvSpPr>
+        <p:spPr>
+          <a:xfrm>
+            <a:off x="8074152" y="4023360"/>
+            <a:ext cx="2825496" cy="1097280"/>
           </a:xfrm>
           <a:prstGeom prst="rect">
             <a:avLst/>
@@ -13014,7 +14182,7 @@
               <a:buNone/>
             </a:pPr>
             <a:r>
-              <a:rPr lang="en-US" sz="1250" dirty="0">
+              <a:rPr lang="en-US" sz="1550" dirty="0">
                 <a:solidFill>
                   <a:srgbClr val="17364A"/>
                 </a:solidFill>
@@ -13024,7 +14192,7 @@
               </a:rPr>
               <a:t>Connect the concept to public health decisions, safeguards, documentation, or implementation work.</a:t>
             </a:r>
-            <a:endParaRPr lang="en-US" sz="1250" dirty="0"/>
+            <a:endParaRPr lang="en-US" sz="1550" dirty="0"/>
           </a:p>
         </p:txBody>
       </p:sp>
@@ -13221,7 +14389,7 @@
                 <a:ea typeface="Aptos" pitchFamily="34" charset="-122"/>
                 <a:cs typeface="Aptos" pitchFamily="34" charset="-120"/>
               </a:rPr>
-              <a:t>© Paula Soper</a:t>
+              <a:t>Â© Paula Soper</a:t>
             </a:r>
             <a:endParaRPr lang="en-US" sz="800" dirty="0"/>
           </a:p>
@@ -13229,7 +14397,46 @@
       </p:sp>
       <p:sp>
         <p:nvSpPr>
-          <p:cNvPr id="7" name="Shape 5"/>
+          <p:cNvPr id="7" name="Text 5"/>
+          <p:cNvSpPr/>
+          <p:nvPr/>
+        </p:nvSpPr>
+        <p:spPr>
+          <a:xfrm>
+            <a:off x="11137392" y="6510528"/>
+            <a:ext cx="411480" cy="201168"/>
+          </a:xfrm>
+          <a:prstGeom prst="rect">
+            <a:avLst/>
+          </a:prstGeom>
+          <a:noFill/>
+          <a:ln/>
+        </p:spPr>
+        <p:txBody>
+          <a:bodyPr wrap="square" lIns="0" tIns="0" rIns="0" bIns="0" rtlCol="0" anchor="ctr"/>
+          <a:lstStyle/>
+          <a:p>
+            <a:pPr algn="r" indent="0" marL="0">
+              <a:buNone/>
+            </a:pPr>
+            <a:r>
+              <a:rPr lang="en-US" sz="900" dirty="0">
+                <a:solidFill>
+                  <a:srgbClr val="5F7181"/>
+                </a:solidFill>
+                <a:latin typeface="Aptos" pitchFamily="34" charset="0"/>
+                <a:ea typeface="Aptos" pitchFamily="34" charset="-122"/>
+                <a:cs typeface="Aptos" pitchFamily="34" charset="-120"/>
+              </a:rPr>
+              <a:t>7</a:t>
+            </a:r>
+            <a:endParaRPr lang="en-US" sz="900" dirty="0"/>
+          </a:p>
+        </p:txBody>
+      </p:sp>
+      <p:sp>
+        <p:nvSpPr>
+          <p:cNvPr id="8" name="Shape 6"/>
           <p:cNvSpPr/>
           <p:nvPr/>
         </p:nvSpPr>
@@ -13254,7 +14461,7 @@
       </p:sp>
       <p:sp>
         <p:nvSpPr>
-          <p:cNvPr id="8" name="Text 6"/>
+          <p:cNvPr id="9" name="Text 7"/>
           <p:cNvSpPr/>
           <p:nvPr/>
         </p:nvSpPr>
@@ -13293,14 +14500,14 @@
       </p:sp>
       <p:sp>
         <p:nvSpPr>
-          <p:cNvPr id="9" name="Text 7"/>
+          <p:cNvPr id="10" name="Text 8"/>
           <p:cNvSpPr/>
           <p:nvPr/>
         </p:nvSpPr>
         <p:spPr>
           <a:xfrm>
             <a:off x="640080" y="621792"/>
-            <a:ext cx="10881360" cy="566928"/>
+            <a:ext cx="10881360" cy="713232"/>
           </a:xfrm>
           <a:prstGeom prst="rect">
             <a:avLst/>
@@ -13318,7 +14525,7 @@
               <a:buNone/>
             </a:pPr>
             <a:r>
-              <a:rPr lang="en-US" sz="2700" b="1" dirty="0">
+              <a:rPr lang="en-US" sz="3400" b="1" dirty="0">
                 <a:solidFill>
                   <a:srgbClr val="003A63"/>
                 </a:solidFill>
@@ -13328,20 +14535,20 @@
               </a:rPr>
               <a:t>Public Health Example</a:t>
             </a:r>
-            <a:endParaRPr lang="en-US" sz="2700" dirty="0"/>
-          </a:p>
-        </p:txBody>
-      </p:sp>
-      <p:sp>
-        <p:nvSpPr>
-          <p:cNvPr id="10" name="Text 8"/>
-          <p:cNvSpPr/>
-          <p:nvPr/>
-        </p:nvSpPr>
-        <p:spPr>
-          <a:xfrm>
-            <a:off x="868680" y="1417320"/>
-            <a:ext cx="6675120" cy="4434840"/>
+            <a:endParaRPr lang="en-US" sz="3400" dirty="0"/>
+          </a:p>
+        </p:txBody>
+      </p:sp>
+      <p:sp>
+        <p:nvSpPr>
+          <p:cNvPr id="11" name="Text 9"/>
+          <p:cNvSpPr/>
+          <p:nvPr/>
+        </p:nvSpPr>
+        <p:spPr>
+          <a:xfrm>
+            <a:off x="868680" y="1508760"/>
+            <a:ext cx="6537960" cy="4160520"/>
           </a:xfrm>
           <a:prstGeom prst="rect">
             <a:avLst/>
@@ -13356,7 +14563,7 @@
           <a:lstStyle/>
           <a:p>
             <a:r>
-              <a:rPr lang="en-US" sz="1700" dirty="0">
+              <a:rPr lang="en-US" sz="2100" dirty="0">
                 <a:solidFill>
                   <a:srgbClr val="17364A"/>
                 </a:solidFill>
@@ -13366,11 +14573,11 @@
               </a:rPr>
               <a:t>A public health agency plans to pilot an AI tool that drafts summaries of incoming case reports.</a:t>
             </a:r>
-            <a:endParaRPr lang="en-US" sz="1700" dirty="0"/>
-          </a:p>
-          <a:p>
-            <a:r>
-              <a:rPr lang="en-US" sz="1700" dirty="0">
+            <a:endParaRPr lang="en-US" sz="2100" dirty="0"/>
+          </a:p>
+          <a:p>
+            <a:r>
+              <a:rPr lang="en-US" sz="2100" dirty="0">
                 <a:solidFill>
                   <a:srgbClr val="17364A"/>
                 </a:solidFill>
@@ -13378,13 +14585,13 @@
                 <a:ea typeface="Aptos" pitchFamily="34" charset="-122"/>
                 <a:cs typeface="Aptos" pitchFamily="34" charset="-120"/>
               </a:rPr>
-              <a:t>The project plan identifies governance approval, data access, system integration, validation, user training, SOP.</a:t>
-            </a:r>
-            <a:endParaRPr lang="en-US" sz="1700" dirty="0"/>
-          </a:p>
-          <a:p>
-            <a:r>
-              <a:rPr lang="en-US" sz="1700" dirty="0">
+              <a:t>The project plan identifies governance approval, data access, system integration, validation, user.</a:t>
+            </a:r>
+            <a:endParaRPr lang="en-US" sz="2100" dirty="0"/>
+          </a:p>
+          <a:p>
+            <a:r>
+              <a:rPr lang="en-US" sz="2100" dirty="0">
                 <a:solidFill>
                   <a:srgbClr val="17364A"/>
                 </a:solidFill>
@@ -13394,27 +14601,13 @@
               </a:rPr>
               <a:t>The project cannot launch simply because the tool works in a demonstration.</a:t>
             </a:r>
-            <a:endParaRPr lang="en-US" sz="1700" dirty="0"/>
-          </a:p>
-          <a:p>
-            <a:r>
-              <a:rPr lang="en-US" sz="1700" dirty="0">
-                <a:solidFill>
-                  <a:srgbClr val="17364A"/>
-                </a:solidFill>
-                <a:latin typeface="Aptos" pitchFamily="34" charset="0"/>
-                <a:ea typeface="Aptos" pitchFamily="34" charset="-122"/>
-                <a:cs typeface="Aptos" pitchFamily="34" charset="-120"/>
-              </a:rPr>
-              <a:t>It must pass readiness checks showing that staff know how to review the output, errors can be reported, and the tool is.</a:t>
-            </a:r>
-            <a:endParaRPr lang="en-US" sz="1700" dirty="0"/>
-          </a:p>
-        </p:txBody>
-      </p:sp>
-      <p:sp>
-        <p:nvSpPr>
-          <p:cNvPr id="11" name="Shape 9"/>
+            <a:endParaRPr lang="en-US" sz="2100" dirty="0"/>
+          </a:p>
+        </p:txBody>
+      </p:sp>
+      <p:sp>
+        <p:nvSpPr>
+          <p:cNvPr id="12" name="Shape 10"/>
           <p:cNvSpPr/>
           <p:nvPr/>
         </p:nvSpPr>
@@ -13441,14 +14634,14 @@
       </p:sp>
       <p:sp>
         <p:nvSpPr>
-          <p:cNvPr id="12" name="Text 10"/>
+          <p:cNvPr id="13" name="Text 11"/>
           <p:cNvSpPr/>
           <p:nvPr/>
         </p:nvSpPr>
         <p:spPr>
           <a:xfrm>
             <a:off x="8074152" y="1563624"/>
-            <a:ext cx="2825496" cy="201168"/>
+            <a:ext cx="2825496" cy="256032"/>
           </a:xfrm>
           <a:prstGeom prst="rect">
             <a:avLst/>
@@ -13464,7 +14657,7 @@
               <a:buNone/>
             </a:pPr>
             <a:r>
-              <a:rPr lang="en-US" sz="950" b="1" dirty="0">
+              <a:rPr lang="en-US" sz="1300" b="1" dirty="0">
                 <a:solidFill>
                   <a:srgbClr val="0068B7"/>
                 </a:solidFill>
@@ -13474,20 +14667,20 @@
               </a:rPr>
               <a:t>Key idea</a:t>
             </a:r>
-            <a:endParaRPr lang="en-US" sz="950" dirty="0"/>
-          </a:p>
-        </p:txBody>
-      </p:sp>
-      <p:sp>
-        <p:nvSpPr>
-          <p:cNvPr id="13" name="Text 11"/>
-          <p:cNvSpPr/>
-          <p:nvPr/>
-        </p:nvSpPr>
-        <p:spPr>
-          <a:xfrm>
-            <a:off x="8074152" y="1856232"/>
-            <a:ext cx="2825496" cy="1261872"/>
+            <a:endParaRPr lang="en-US" sz="1300" dirty="0"/>
+          </a:p>
+        </p:txBody>
+      </p:sp>
+      <p:sp>
+        <p:nvSpPr>
+          <p:cNvPr id="14" name="Text 12"/>
+          <p:cNvSpPr/>
+          <p:nvPr/>
+        </p:nvSpPr>
+        <p:spPr>
+          <a:xfrm>
+            <a:off x="8074152" y="1920240"/>
+            <a:ext cx="2825496" cy="1188720"/>
           </a:xfrm>
           <a:prstGeom prst="rect">
             <a:avLst/>
@@ -13505,7 +14698,7 @@
               <a:buNone/>
             </a:pPr>
             <a:r>
-              <a:rPr lang="en-US" sz="1250" dirty="0">
+              <a:rPr lang="en-US" sz="1550" dirty="0">
                 <a:solidFill>
                   <a:srgbClr val="17364A"/>
                 </a:solidFill>
@@ -13515,13 +14708,13 @@
               </a:rPr>
               <a:t>A public health agency plans to pilot an AI tool that drafts summaries of incoming case reports.</a:t>
             </a:r>
-            <a:endParaRPr lang="en-US" sz="1250" dirty="0"/>
-          </a:p>
-        </p:txBody>
-      </p:sp>
-      <p:sp>
-        <p:nvSpPr>
-          <p:cNvPr id="14" name="Shape 12"/>
+            <a:endParaRPr lang="en-US" sz="1550" dirty="0"/>
+          </a:p>
+        </p:txBody>
+      </p:sp>
+      <p:sp>
+        <p:nvSpPr>
+          <p:cNvPr id="15" name="Shape 13"/>
           <p:cNvSpPr/>
           <p:nvPr/>
         </p:nvSpPr>
@@ -13548,14 +14741,14 @@
       </p:sp>
       <p:sp>
         <p:nvSpPr>
-          <p:cNvPr id="15" name="Text 13"/>
+          <p:cNvPr id="16" name="Text 14"/>
           <p:cNvSpPr/>
           <p:nvPr/>
         </p:nvSpPr>
         <p:spPr>
           <a:xfrm>
             <a:off x="8074152" y="3666744"/>
-            <a:ext cx="2825496" cy="201168"/>
+            <a:ext cx="2825496" cy="256032"/>
           </a:xfrm>
           <a:prstGeom prst="rect">
             <a:avLst/>
@@ -13571,7 +14764,7 @@
               <a:buNone/>
             </a:pPr>
             <a:r>
-              <a:rPr lang="en-US" sz="950" b="1" dirty="0">
+              <a:rPr lang="en-US" sz="1300" b="1" dirty="0">
                 <a:solidFill>
                   <a:srgbClr val="0068B7"/>
                 </a:solidFill>
@@ -13581,20 +14774,20 @@
               </a:rPr>
               <a:t>Use this for</a:t>
             </a:r>
-            <a:endParaRPr lang="en-US" sz="950" dirty="0"/>
-          </a:p>
-        </p:txBody>
-      </p:sp>
-      <p:sp>
-        <p:nvSpPr>
-          <p:cNvPr id="16" name="Text 14"/>
-          <p:cNvSpPr/>
-          <p:nvPr/>
-        </p:nvSpPr>
-        <p:spPr>
-          <a:xfrm>
-            <a:off x="8074152" y="3959352"/>
-            <a:ext cx="2825496" cy="1170432"/>
+            <a:endParaRPr lang="en-US" sz="1300" dirty="0"/>
+          </a:p>
+        </p:txBody>
+      </p:sp>
+      <p:sp>
+        <p:nvSpPr>
+          <p:cNvPr id="17" name="Text 15"/>
+          <p:cNvSpPr/>
+          <p:nvPr/>
+        </p:nvSpPr>
+        <p:spPr>
+          <a:xfrm>
+            <a:off x="8074152" y="4023360"/>
+            <a:ext cx="2825496" cy="1097280"/>
           </a:xfrm>
           <a:prstGeom prst="rect">
             <a:avLst/>
@@ -13612,7 +14805,7 @@
               <a:buNone/>
             </a:pPr>
             <a:r>
-              <a:rPr lang="en-US" sz="1250" dirty="0">
+              <a:rPr lang="en-US" sz="1550" dirty="0">
                 <a:solidFill>
                   <a:srgbClr val="17364A"/>
                 </a:solidFill>
@@ -13622,7 +14815,7 @@
               </a:rPr>
               <a:t>Connect the concept to public health decisions, safeguards, documentation, or implementation work.</a:t>
             </a:r>
-            <a:endParaRPr lang="en-US" sz="1250" dirty="0"/>
+            <a:endParaRPr lang="en-US" sz="1550" dirty="0"/>
           </a:p>
         </p:txBody>
       </p:sp>
@@ -13819,7 +15012,7 @@
                 <a:ea typeface="Aptos" pitchFamily="34" charset="-122"/>
                 <a:cs typeface="Aptos" pitchFamily="34" charset="-120"/>
               </a:rPr>
-              <a:t>© Paula Soper</a:t>
+              <a:t>Â© Paula Soper</a:t>
             </a:r>
             <a:endParaRPr lang="en-US" sz="800" dirty="0"/>
           </a:p>
@@ -13827,7 +15020,46 @@
       </p:sp>
       <p:sp>
         <p:nvSpPr>
-          <p:cNvPr id="7" name="Shape 5"/>
+          <p:cNvPr id="7" name="Text 5"/>
+          <p:cNvSpPr/>
+          <p:nvPr/>
+        </p:nvSpPr>
+        <p:spPr>
+          <a:xfrm>
+            <a:off x="11137392" y="6510528"/>
+            <a:ext cx="411480" cy="201168"/>
+          </a:xfrm>
+          <a:prstGeom prst="rect">
+            <a:avLst/>
+          </a:prstGeom>
+          <a:noFill/>
+          <a:ln/>
+        </p:spPr>
+        <p:txBody>
+          <a:bodyPr wrap="square" lIns="0" tIns="0" rIns="0" bIns="0" rtlCol="0" anchor="ctr"/>
+          <a:lstStyle/>
+          <a:p>
+            <a:pPr algn="r" indent="0" marL="0">
+              <a:buNone/>
+            </a:pPr>
+            <a:r>
+              <a:rPr lang="en-US" sz="900" dirty="0">
+                <a:solidFill>
+                  <a:srgbClr val="5F7181"/>
+                </a:solidFill>
+                <a:latin typeface="Aptos" pitchFamily="34" charset="0"/>
+                <a:ea typeface="Aptos" pitchFamily="34" charset="-122"/>
+                <a:cs typeface="Aptos" pitchFamily="34" charset="-120"/>
+              </a:rPr>
+              <a:t>8</a:t>
+            </a:r>
+            <a:endParaRPr lang="en-US" sz="900" dirty="0"/>
+          </a:p>
+        </p:txBody>
+      </p:sp>
+      <p:sp>
+        <p:nvSpPr>
+          <p:cNvPr id="8" name="Shape 6"/>
           <p:cNvSpPr/>
           <p:nvPr/>
         </p:nvSpPr>
@@ -13852,7 +15084,7 @@
       </p:sp>
       <p:sp>
         <p:nvSpPr>
-          <p:cNvPr id="8" name="Text 6"/>
+          <p:cNvPr id="9" name="Text 7"/>
           <p:cNvSpPr/>
           <p:nvPr/>
         </p:nvSpPr>
@@ -13891,14 +15123,14 @@
       </p:sp>
       <p:sp>
         <p:nvSpPr>
-          <p:cNvPr id="9" name="Text 7"/>
+          <p:cNvPr id="10" name="Text 8"/>
           <p:cNvSpPr/>
           <p:nvPr/>
         </p:nvSpPr>
         <p:spPr>
           <a:xfrm>
             <a:off x="640080" y="621792"/>
-            <a:ext cx="10881360" cy="566928"/>
+            <a:ext cx="10881360" cy="713232"/>
           </a:xfrm>
           <a:prstGeom prst="rect">
             <a:avLst/>
@@ -13916,7 +15148,7 @@
               <a:buNone/>
             </a:pPr>
             <a:r>
-              <a:rPr lang="en-US" sz="2700" b="1" dirty="0">
+              <a:rPr lang="en-US" sz="3400" b="1" dirty="0">
                 <a:solidFill>
                   <a:srgbClr val="003A63"/>
                 </a:solidFill>
@@ -13926,20 +15158,20 @@
               </a:rPr>
               <a:t>Topic Deep Dive</a:t>
             </a:r>
-            <a:endParaRPr lang="en-US" sz="2700" dirty="0"/>
-          </a:p>
-        </p:txBody>
-      </p:sp>
-      <p:sp>
-        <p:nvSpPr>
-          <p:cNvPr id="10" name="Text 8"/>
-          <p:cNvSpPr/>
-          <p:nvPr/>
-        </p:nvSpPr>
-        <p:spPr>
-          <a:xfrm>
-            <a:off x="868680" y="1417320"/>
-            <a:ext cx="6675120" cy="4434840"/>
+            <a:endParaRPr lang="en-US" sz="3400" dirty="0"/>
+          </a:p>
+        </p:txBody>
+      </p:sp>
+      <p:sp>
+        <p:nvSpPr>
+          <p:cNvPr id="11" name="Text 9"/>
+          <p:cNvSpPr/>
+          <p:nvPr/>
+        </p:nvSpPr>
+        <p:spPr>
+          <a:xfrm>
+            <a:off x="868680" y="1508760"/>
+            <a:ext cx="6537960" cy="4160520"/>
           </a:xfrm>
           <a:prstGeom prst="rect">
             <a:avLst/>
@@ -13954,7 +15186,7 @@
           <a:lstStyle/>
           <a:p>
             <a:r>
-              <a:rPr lang="en-US" sz="1700" dirty="0">
+              <a:rPr lang="en-US" sz="2100" dirty="0">
                 <a:solidFill>
                   <a:srgbClr val="17364A"/>
                 </a:solidFill>
@@ -13964,11 +15196,11 @@
               </a:rPr>
               <a:t>AI project planning should begin with a charter that defines the use case and sets boundaries.</a:t>
             </a:r>
-            <a:endParaRPr lang="en-US" sz="1700" dirty="0"/>
-          </a:p>
-          <a:p>
-            <a:r>
-              <a:rPr lang="en-US" sz="1700" dirty="0">
+            <a:endParaRPr lang="en-US" sz="2100" dirty="0"/>
+          </a:p>
+          <a:p>
+            <a:r>
+              <a:rPr lang="en-US" sz="2100" dirty="0">
                 <a:solidFill>
                   <a:srgbClr val="17364A"/>
                 </a:solidFill>
@@ -13976,13 +15208,13 @@
                 <a:ea typeface="Aptos" pitchFamily="34" charset="-122"/>
                 <a:cs typeface="Aptos" pitchFamily="34" charset="-120"/>
               </a:rPr>
-              <a:t>The charter should explain the public health problem, intended users, expected benefits, data involved, systems affected,.</a:t>
-            </a:r>
-            <a:endParaRPr lang="en-US" sz="1700" dirty="0"/>
-          </a:p>
-          <a:p>
-            <a:r>
-              <a:rPr lang="en-US" sz="1700" dirty="0">
+              <a:t>The charter should explain the public health problem, intended users, expected benefits, data involved,.</a:t>
+            </a:r>
+            <a:endParaRPr lang="en-US" sz="2100" dirty="0"/>
+          </a:p>
+          <a:p>
+            <a:r>
+              <a:rPr lang="en-US" sz="2100" dirty="0">
                 <a:solidFill>
                   <a:srgbClr val="17364A"/>
                 </a:solidFill>
@@ -13990,29 +15222,15 @@
                 <a:ea typeface="Aptos" pitchFamily="34" charset="-122"/>
                 <a:cs typeface="Aptos" pitchFamily="34" charset="-120"/>
               </a:rPr>
-              <a:t>It should also identify the sponsor, product owner, implementation lead, technical lead, privacy or legal contacts,.</a:t>
-            </a:r>
-            <a:endParaRPr lang="en-US" sz="1700" dirty="0"/>
-          </a:p>
-          <a:p>
-            <a:r>
-              <a:rPr lang="en-US" sz="1700" dirty="0">
-                <a:solidFill>
-                  <a:srgbClr val="17364A"/>
-                </a:solidFill>
-                <a:latin typeface="Aptos" pitchFamily="34" charset="0"/>
-                <a:ea typeface="Aptos" pitchFamily="34" charset="-122"/>
-                <a:cs typeface="Aptos" pitchFamily="34" charset="-120"/>
-              </a:rPr>
-              <a:t>Implementation should be organized into phases.</a:t>
-            </a:r>
-            <a:endParaRPr lang="en-US" sz="1700" dirty="0"/>
-          </a:p>
-        </p:txBody>
-      </p:sp>
-      <p:sp>
-        <p:nvSpPr>
-          <p:cNvPr id="11" name="Shape 9"/>
+              <a:t>It should also identify the sponsor, product owner, implementation lead, technical lead, privacy or.</a:t>
+            </a:r>
+            <a:endParaRPr lang="en-US" sz="2100" dirty="0"/>
+          </a:p>
+        </p:txBody>
+      </p:sp>
+      <p:sp>
+        <p:nvSpPr>
+          <p:cNvPr id="12" name="Shape 10"/>
           <p:cNvSpPr/>
           <p:nvPr/>
         </p:nvSpPr>
@@ -14039,14 +15257,14 @@
       </p:sp>
       <p:sp>
         <p:nvSpPr>
-          <p:cNvPr id="12" name="Text 10"/>
+          <p:cNvPr id="13" name="Text 11"/>
           <p:cNvSpPr/>
           <p:nvPr/>
         </p:nvSpPr>
         <p:spPr>
           <a:xfrm>
             <a:off x="8074152" y="1563624"/>
-            <a:ext cx="2825496" cy="201168"/>
+            <a:ext cx="2825496" cy="256032"/>
           </a:xfrm>
           <a:prstGeom prst="rect">
             <a:avLst/>
@@ -14062,7 +15280,7 @@
               <a:buNone/>
             </a:pPr>
             <a:r>
-              <a:rPr lang="en-US" sz="950" b="1" dirty="0">
+              <a:rPr lang="en-US" sz="1300" b="1" dirty="0">
                 <a:solidFill>
                   <a:srgbClr val="0068B7"/>
                 </a:solidFill>
@@ -14072,20 +15290,20 @@
               </a:rPr>
               <a:t>Key idea</a:t>
             </a:r>
-            <a:endParaRPr lang="en-US" sz="950" dirty="0"/>
-          </a:p>
-        </p:txBody>
-      </p:sp>
-      <p:sp>
-        <p:nvSpPr>
-          <p:cNvPr id="13" name="Text 11"/>
-          <p:cNvSpPr/>
-          <p:nvPr/>
-        </p:nvSpPr>
-        <p:spPr>
-          <a:xfrm>
-            <a:off x="8074152" y="1856232"/>
-            <a:ext cx="2825496" cy="1261872"/>
+            <a:endParaRPr lang="en-US" sz="1300" dirty="0"/>
+          </a:p>
+        </p:txBody>
+      </p:sp>
+      <p:sp>
+        <p:nvSpPr>
+          <p:cNvPr id="14" name="Text 12"/>
+          <p:cNvSpPr/>
+          <p:nvPr/>
+        </p:nvSpPr>
+        <p:spPr>
+          <a:xfrm>
+            <a:off x="8074152" y="1920240"/>
+            <a:ext cx="2825496" cy="1188720"/>
           </a:xfrm>
           <a:prstGeom prst="rect">
             <a:avLst/>
@@ -14103,7 +15321,7 @@
               <a:buNone/>
             </a:pPr>
             <a:r>
-              <a:rPr lang="en-US" sz="1250" dirty="0">
+              <a:rPr lang="en-US" sz="1550" dirty="0">
                 <a:solidFill>
                   <a:srgbClr val="17364A"/>
                 </a:solidFill>
@@ -14113,13 +15331,13 @@
               </a:rPr>
               <a:t>AI project planning should begin with a charter that defines the use case and sets boundaries.</a:t>
             </a:r>
-            <a:endParaRPr lang="en-US" sz="1250" dirty="0"/>
-          </a:p>
-        </p:txBody>
-      </p:sp>
-      <p:sp>
-        <p:nvSpPr>
-          <p:cNvPr id="14" name="Shape 12"/>
+            <a:endParaRPr lang="en-US" sz="1550" dirty="0"/>
+          </a:p>
+        </p:txBody>
+      </p:sp>
+      <p:sp>
+        <p:nvSpPr>
+          <p:cNvPr id="15" name="Shape 13"/>
           <p:cNvSpPr/>
           <p:nvPr/>
         </p:nvSpPr>
@@ -14146,14 +15364,14 @@
       </p:sp>
       <p:sp>
         <p:nvSpPr>
-          <p:cNvPr id="15" name="Text 13"/>
+          <p:cNvPr id="16" name="Text 14"/>
           <p:cNvSpPr/>
           <p:nvPr/>
         </p:nvSpPr>
         <p:spPr>
           <a:xfrm>
             <a:off x="8074152" y="3666744"/>
-            <a:ext cx="2825496" cy="201168"/>
+            <a:ext cx="2825496" cy="256032"/>
           </a:xfrm>
           <a:prstGeom prst="rect">
             <a:avLst/>
@@ -14169,7 +15387,7 @@
               <a:buNone/>
             </a:pPr>
             <a:r>
-              <a:rPr lang="en-US" sz="950" b="1" dirty="0">
+              <a:rPr lang="en-US" sz="1300" b="1" dirty="0">
                 <a:solidFill>
                   <a:srgbClr val="0068B7"/>
                 </a:solidFill>
@@ -14179,20 +15397,20 @@
               </a:rPr>
               <a:t>Use this for</a:t>
             </a:r>
-            <a:endParaRPr lang="en-US" sz="950" dirty="0"/>
-          </a:p>
-        </p:txBody>
-      </p:sp>
-      <p:sp>
-        <p:nvSpPr>
-          <p:cNvPr id="16" name="Text 14"/>
-          <p:cNvSpPr/>
-          <p:nvPr/>
-        </p:nvSpPr>
-        <p:spPr>
-          <a:xfrm>
-            <a:off x="8074152" y="3959352"/>
-            <a:ext cx="2825496" cy="1170432"/>
+            <a:endParaRPr lang="en-US" sz="1300" dirty="0"/>
+          </a:p>
+        </p:txBody>
+      </p:sp>
+      <p:sp>
+        <p:nvSpPr>
+          <p:cNvPr id="17" name="Text 15"/>
+          <p:cNvSpPr/>
+          <p:nvPr/>
+        </p:nvSpPr>
+        <p:spPr>
+          <a:xfrm>
+            <a:off x="8074152" y="4023360"/>
+            <a:ext cx="2825496" cy="1097280"/>
           </a:xfrm>
           <a:prstGeom prst="rect">
             <a:avLst/>
@@ -14210,7 +15428,7 @@
               <a:buNone/>
             </a:pPr>
             <a:r>
-              <a:rPr lang="en-US" sz="1250" dirty="0">
+              <a:rPr lang="en-US" sz="1550" dirty="0">
                 <a:solidFill>
                   <a:srgbClr val="17364A"/>
                 </a:solidFill>
@@ -14220,7 +15438,7 @@
               </a:rPr>
               <a:t>Connect the concept to public health decisions, safeguards, documentation, or implementation work.</a:t>
             </a:r>
-            <a:endParaRPr lang="en-US" sz="1250" dirty="0"/>
+            <a:endParaRPr lang="en-US" sz="1550" dirty="0"/>
           </a:p>
         </p:txBody>
       </p:sp>
@@ -14417,7 +15635,7 @@
                 <a:ea typeface="Aptos" pitchFamily="34" charset="-122"/>
                 <a:cs typeface="Aptos" pitchFamily="34" charset="-120"/>
               </a:rPr>
-              <a:t>© Paula Soper</a:t>
+              <a:t>Â© Paula Soper</a:t>
             </a:r>
             <a:endParaRPr lang="en-US" sz="800" dirty="0"/>
           </a:p>
@@ -14431,8 +15649,47 @@
         </p:nvSpPr>
         <p:spPr>
           <a:xfrm>
+            <a:off x="11137392" y="6510528"/>
+            <a:ext cx="411480" cy="201168"/>
+          </a:xfrm>
+          <a:prstGeom prst="rect">
+            <a:avLst/>
+          </a:prstGeom>
+          <a:noFill/>
+          <a:ln/>
+        </p:spPr>
+        <p:txBody>
+          <a:bodyPr wrap="square" lIns="0" tIns="0" rIns="0" bIns="0" rtlCol="0" anchor="ctr"/>
+          <a:lstStyle/>
+          <a:p>
+            <a:pPr algn="r" indent="0" marL="0">
+              <a:buNone/>
+            </a:pPr>
+            <a:r>
+              <a:rPr lang="en-US" sz="900" dirty="0">
+                <a:solidFill>
+                  <a:srgbClr val="5F7181"/>
+                </a:solidFill>
+                <a:latin typeface="Aptos" pitchFamily="34" charset="0"/>
+                <a:ea typeface="Aptos" pitchFamily="34" charset="-122"/>
+                <a:cs typeface="Aptos" pitchFamily="34" charset="-120"/>
+              </a:rPr>
+              <a:t>9</a:t>
+            </a:r>
+            <a:endParaRPr lang="en-US" sz="900" dirty="0"/>
+          </a:p>
+        </p:txBody>
+      </p:sp>
+      <p:sp>
+        <p:nvSpPr>
+          <p:cNvPr id="8" name="Text 6"/>
+          <p:cNvSpPr/>
+          <p:nvPr/>
+        </p:nvSpPr>
+        <p:spPr>
+          <a:xfrm>
             <a:off x="640080" y="658368"/>
-            <a:ext cx="10881360" cy="566928"/>
+            <a:ext cx="10881360" cy="713232"/>
           </a:xfrm>
           <a:prstGeom prst="rect">
             <a:avLst/>
@@ -14450,7 +15707,7 @@
               <a:buNone/>
             </a:pPr>
             <a:r>
-              <a:rPr lang="en-US" sz="2700" b="1" dirty="0">
+              <a:rPr lang="en-US" sz="3400" b="1" dirty="0">
                 <a:solidFill>
                   <a:srgbClr val="003A63"/>
                 </a:solidFill>
@@ -14460,20 +15717,20 @@
               </a:rPr>
               <a:t>Topic Deep Dive Continued</a:t>
             </a:r>
-            <a:endParaRPr lang="en-US" sz="2700" dirty="0"/>
-          </a:p>
-        </p:txBody>
-      </p:sp>
-      <p:sp>
-        <p:nvSpPr>
-          <p:cNvPr id="8" name="Text 6"/>
-          <p:cNvSpPr/>
-          <p:nvPr/>
-        </p:nvSpPr>
-        <p:spPr>
-          <a:xfrm>
-            <a:off x="868680" y="1417320"/>
-            <a:ext cx="6675120" cy="4434840"/>
+            <a:endParaRPr lang="en-US" sz="3400" dirty="0"/>
+          </a:p>
+        </p:txBody>
+      </p:sp>
+      <p:sp>
+        <p:nvSpPr>
+          <p:cNvPr id="9" name="Text 7"/>
+          <p:cNvSpPr/>
+          <p:nvPr/>
+        </p:nvSpPr>
+        <p:spPr>
+          <a:xfrm>
+            <a:off x="868680" y="1508760"/>
+            <a:ext cx="6537960" cy="4160520"/>
           </a:xfrm>
           <a:prstGeom prst="rect">
             <a:avLst/>
@@ -14488,7 +15745,7 @@
           <a:lstStyle/>
           <a:p>
             <a:r>
-              <a:rPr lang="en-US" sz="1700" dirty="0">
+              <a:rPr lang="en-US" sz="2100" dirty="0">
                 <a:solidFill>
                   <a:srgbClr val="17364A"/>
                 </a:solidFill>
@@ -14498,11 +15755,11 @@
               </a:rPr>
               <a:t>Transition to operations is often neglected.</a:t>
             </a:r>
-            <a:endParaRPr lang="en-US" sz="1700" dirty="0"/>
-          </a:p>
-          <a:p>
-            <a:r>
-              <a:rPr lang="en-US" sz="1700" dirty="0">
+            <a:endParaRPr lang="en-US" sz="2100" dirty="0"/>
+          </a:p>
+          <a:p>
+            <a:r>
+              <a:rPr lang="en-US" sz="2100" dirty="0">
                 <a:solidFill>
                   <a:srgbClr val="17364A"/>
                 </a:solidFill>
@@ -14510,13 +15767,13 @@
                 <a:ea typeface="Aptos" pitchFamily="34" charset="-122"/>
                 <a:cs typeface="Aptos" pitchFamily="34" charset="-120"/>
               </a:rPr>
-              <a:t>A pilot may show promise, but routine use requires support, monitoring, maintenance, budget, staff training, user feedback,.</a:t>
-            </a:r>
-            <a:endParaRPr lang="en-US" sz="1700" dirty="0"/>
-          </a:p>
-          <a:p>
-            <a:r>
-              <a:rPr lang="en-US" sz="1700" dirty="0">
+              <a:t>A pilot may show promise, but routine use requires support, monitoring, maintenance, budget, staff.</a:t>
+            </a:r>
+            <a:endParaRPr lang="en-US" sz="2100" dirty="0"/>
+          </a:p>
+          <a:p>
+            <a:r>
+              <a:rPr lang="en-US" sz="2100" dirty="0">
                 <a:solidFill>
                   <a:srgbClr val="17364A"/>
                 </a:solidFill>
@@ -14524,15 +15781,15 @@
                 <a:ea typeface="Aptos" pitchFamily="34" charset="-122"/>
                 <a:cs typeface="Aptos" pitchFamily="34" charset="-120"/>
               </a:rPr>
-              <a:t>The project plan should define when the implementation team ends and who becomes responsible for ongoing operations.</a:t>
-            </a:r>
-            <a:endParaRPr lang="en-US" sz="1700" dirty="0"/>
-          </a:p>
-        </p:txBody>
-      </p:sp>
-      <p:sp>
-        <p:nvSpPr>
-          <p:cNvPr id="9" name="Shape 7"/>
+              <a:t>The project plan should define when the implementation team ends and who becomes responsible for.</a:t>
+            </a:r>
+            <a:endParaRPr lang="en-US" sz="2100" dirty="0"/>
+          </a:p>
+        </p:txBody>
+      </p:sp>
+      <p:sp>
+        <p:nvSpPr>
+          <p:cNvPr id="10" name="Shape 8"/>
           <p:cNvSpPr/>
           <p:nvPr/>
         </p:nvSpPr>
@@ -14559,14 +15816,14 @@
       </p:sp>
       <p:sp>
         <p:nvSpPr>
-          <p:cNvPr id="10" name="Text 8"/>
+          <p:cNvPr id="11" name="Text 9"/>
           <p:cNvSpPr/>
           <p:nvPr/>
         </p:nvSpPr>
         <p:spPr>
           <a:xfrm>
             <a:off x="8074152" y="1563624"/>
-            <a:ext cx="2825496" cy="201168"/>
+            <a:ext cx="2825496" cy="256032"/>
           </a:xfrm>
           <a:prstGeom prst="rect">
             <a:avLst/>
@@ -14582,7 +15839,7 @@
               <a:buNone/>
             </a:pPr>
             <a:r>
-              <a:rPr lang="en-US" sz="950" b="1" dirty="0">
+              <a:rPr lang="en-US" sz="1300" b="1" dirty="0">
                 <a:solidFill>
                   <a:srgbClr val="0068B7"/>
                 </a:solidFill>
@@ -14592,20 +15849,20 @@
               </a:rPr>
               <a:t>Key idea</a:t>
             </a:r>
-            <a:endParaRPr lang="en-US" sz="950" dirty="0"/>
-          </a:p>
-        </p:txBody>
-      </p:sp>
-      <p:sp>
-        <p:nvSpPr>
-          <p:cNvPr id="11" name="Text 9"/>
-          <p:cNvSpPr/>
-          <p:nvPr/>
-        </p:nvSpPr>
-        <p:spPr>
-          <a:xfrm>
-            <a:off x="8074152" y="1856232"/>
-            <a:ext cx="2825496" cy="1261872"/>
+            <a:endParaRPr lang="en-US" sz="1300" dirty="0"/>
+          </a:p>
+        </p:txBody>
+      </p:sp>
+      <p:sp>
+        <p:nvSpPr>
+          <p:cNvPr id="12" name="Text 10"/>
+          <p:cNvSpPr/>
+          <p:nvPr/>
+        </p:nvSpPr>
+        <p:spPr>
+          <a:xfrm>
+            <a:off x="8074152" y="1920240"/>
+            <a:ext cx="2825496" cy="1188720"/>
           </a:xfrm>
           <a:prstGeom prst="rect">
             <a:avLst/>
@@ -14623,7 +15880,7 @@
               <a:buNone/>
             </a:pPr>
             <a:r>
-              <a:rPr lang="en-US" sz="1250" dirty="0">
+              <a:rPr lang="en-US" sz="1550" dirty="0">
                 <a:solidFill>
                   <a:srgbClr val="17364A"/>
                 </a:solidFill>
@@ -14633,13 +15890,13 @@
               </a:rPr>
               <a:t>Transition to operations is often neglected.</a:t>
             </a:r>
-            <a:endParaRPr lang="en-US" sz="1250" dirty="0"/>
-          </a:p>
-        </p:txBody>
-      </p:sp>
-      <p:sp>
-        <p:nvSpPr>
-          <p:cNvPr id="12" name="Shape 10"/>
+            <a:endParaRPr lang="en-US" sz="1550" dirty="0"/>
+          </a:p>
+        </p:txBody>
+      </p:sp>
+      <p:sp>
+        <p:nvSpPr>
+          <p:cNvPr id="13" name="Shape 11"/>
           <p:cNvSpPr/>
           <p:nvPr/>
         </p:nvSpPr>
@@ -14666,14 +15923,14 @@
       </p:sp>
       <p:sp>
         <p:nvSpPr>
-          <p:cNvPr id="13" name="Text 11"/>
+          <p:cNvPr id="14" name="Text 12"/>
           <p:cNvSpPr/>
           <p:nvPr/>
         </p:nvSpPr>
         <p:spPr>
           <a:xfrm>
             <a:off x="8074152" y="3666744"/>
-            <a:ext cx="2825496" cy="201168"/>
+            <a:ext cx="2825496" cy="256032"/>
           </a:xfrm>
           <a:prstGeom prst="rect">
             <a:avLst/>
@@ -14689,7 +15946,7 @@
               <a:buNone/>
             </a:pPr>
             <a:r>
-              <a:rPr lang="en-US" sz="950" b="1" dirty="0">
+              <a:rPr lang="en-US" sz="1300" b="1" dirty="0">
                 <a:solidFill>
                   <a:srgbClr val="0068B7"/>
                 </a:solidFill>
@@ -14699,20 +15956,20 @@
               </a:rPr>
               <a:t>Use this for</a:t>
             </a:r>
-            <a:endParaRPr lang="en-US" sz="950" dirty="0"/>
-          </a:p>
-        </p:txBody>
-      </p:sp>
-      <p:sp>
-        <p:nvSpPr>
-          <p:cNvPr id="14" name="Text 12"/>
-          <p:cNvSpPr/>
-          <p:nvPr/>
-        </p:nvSpPr>
-        <p:spPr>
-          <a:xfrm>
-            <a:off x="8074152" y="3959352"/>
-            <a:ext cx="2825496" cy="1170432"/>
+            <a:endParaRPr lang="en-US" sz="1300" dirty="0"/>
+          </a:p>
+        </p:txBody>
+      </p:sp>
+      <p:sp>
+        <p:nvSpPr>
+          <p:cNvPr id="15" name="Text 13"/>
+          <p:cNvSpPr/>
+          <p:nvPr/>
+        </p:nvSpPr>
+        <p:spPr>
+          <a:xfrm>
+            <a:off x="8074152" y="4023360"/>
+            <a:ext cx="2825496" cy="1097280"/>
           </a:xfrm>
           <a:prstGeom prst="rect">
             <a:avLst/>
@@ -14730,7 +15987,7 @@
               <a:buNone/>
             </a:pPr>
             <a:r>
-              <a:rPr lang="en-US" sz="1250" dirty="0">
+              <a:rPr lang="en-US" sz="1550" dirty="0">
                 <a:solidFill>
                   <a:srgbClr val="17364A"/>
                 </a:solidFill>
@@ -14740,7 +15997,7 @@
               </a:rPr>
               <a:t>Connect the concept to public health decisions, safeguards, documentation, or implementation work.</a:t>
             </a:r>
-            <a:endParaRPr lang="en-US" sz="1250" dirty="0"/>
+            <a:endParaRPr lang="en-US" sz="1550" dirty="0"/>
           </a:p>
         </p:txBody>
       </p:sp>
